--- a/live-sketchbook/Live_Sketchbook_Experience_Flow_v2.pptx
+++ b/live-sketchbook/Live_Sketchbook_Experience_Flow_v2.pptx
@@ -116,52 +116,52 @@
   <p:extLst>
     <p:ext uri="{521415D9-36F7-43E2-AB2F-B90AF26B5E84}">
       <p14:sectionLst xmlns:p14="http://schemas.microsoft.com/office/powerpoint/2010/main">
-        <p14:section name="표지" id="{01e800f4-501a-6d53-d5be-7ca192d230f8}">
+        <p14:section name="표지" id="{7e547541-a37b-c20d-5f74-c902a74868b9}">
           <p14:sldIdLst>
             <p14:sldId id="256"/>
           </p14:sldIdLst>
         </p14:section>
-        <p14:section name="요약" id="{2f09740e-4862-db1d-5010-ad0e97f44eeb}">
+        <p14:section name="요약" id="{26a0530c-a904-bf1d-eba8-2f3eae0d01f0}">
           <p14:sldIdLst>
             <p14:sldId id="257"/>
           </p14:sldIdLst>
         </p14:section>
-        <p14:section name="검토" id="{8cf807a2-6bd4-3c94-a7b0-4deb10f30a4d}">
+        <p14:section name="검토" id="{cfdc8497-4f98-08fd-fe2d-7ed90ab3c945}">
           <p14:sldIdLst>
             <p14:sldId id="258"/>
           </p14:sldIdLst>
         </p14:section>
-        <p14:section name="01 Drawing" id="{d58bef77-0a78-7e9e-5f09-cdcb3be36595}">
+        <p14:section name="01 Drawing" id="{97a6d495-6632-7c3a-c116-834f0a93b5be}">
           <p14:sldIdLst>
             <p14:sldId id="259"/>
           </p14:sldIdLst>
         </p14:section>
-        <p14:section name="02 Scan" id="{b27492fa-80dc-d8ef-dbd5-f88947bd746c}">
+        <p14:section name="02 Scan" id="{d4f38992-d195-a9fa-d9ec-ec79c5d4523c}">
           <p14:sldIdLst>
             <p14:sldId id="260"/>
           </p14:sldIdLst>
         </p14:section>
-        <p14:section name="03 Wall" id="{814844ea-c57c-0036-5de8-5bdb1674b8bd}">
+        <p14:section name="03 Wall" id="{07eb5e86-e202-bae4-8591-3beba775cf3f}">
           <p14:sldIdLst>
             <p14:sldId id="261"/>
           </p14:sldIdLst>
         </p14:section>
-        <p14:section name="04 Facade" id="{ea868a10-f850-bdb8-0574-d6c36d4c6881}">
+        <p14:section name="04 Facade" id="{8895220a-406d-f621-078d-45895cda1b3d}">
           <p14:sldIdLst>
             <p14:sldId id="262"/>
           </p14:sldIdLst>
         </p14:section>
-        <p14:section name="05 Archive" id="{51d44acc-2dee-7ff2-7a32-e3559f3bfb66}">
+        <p14:section name="05 Archive" id="{14d488d4-7994-9646-f4c5-542902296132}">
           <p14:sldIdLst>
             <p14:sldId id="263"/>
           </p14:sldIdLst>
         </p14:section>
-        <p14:section name="운영" id="{b6394147-4f6c-01cb-0b8a-59ac14483fca}">
+        <p14:section name="운영" id="{f895c41b-770a-097c-f945-0036cafa1622}">
           <p14:sldIdLst>
             <p14:sldId id="264"/>
           </p14:sldIdLst>
         </p14:section>
-        <p14:section name="다음 단계" id="{41597983-c31e-30e9-1765-23cb5365c690}">
+        <p14:section name="다음 단계" id="{8744fe38-25a4-2f70-d746-6aed07e01bcb}">
           <p14:sldIdLst>
             <p14:sldId id="265"/>
           </p14:sldIdLst>
@@ -5978,18 +5978,54 @@
       </p:sp>
       <p:sp>
         <p:nvSpPr>
-          <p:cNvPr id="5" name="original"/>
+          <p:cNvPr id="5" name="Text 3"/>
+          <p:cNvSpPr txBox="1"/>
+          <p:nvPr/>
+        </p:nvSpPr>
+        <p:spPr>
+          <a:xfrm>
+            <a:off x="548640" y="1965960"/>
+            <a:ext cx="1828800" cy="365760"/>
+          </a:xfrm>
+          <a:prstGeom prst="rect">
+            <a:avLst/>
+          </a:prstGeom>
+          <a:noFill/>
+          <a:ln/>
+        </p:spPr>
+        <p:txBody>
+          <a:bodyPr wrap="square" lIns="0" tIns="0" rIns="0" bIns="0" rtlCol="0" anchor="ctr"/>
+          <a:lstStyle/>
+          <a:p>
+            <a:pPr indent="0" marL="0">
+              <a:buNone/>
+            </a:pPr>
+            <a:r>
+              <a:rPr lang="en-US" sz="1700" b="1" dirty="0">
+                <a:solidFill>
+                  <a:srgbClr val="617287"/>
+                </a:solidFill>
+              </a:rPr>
+              <a:t>원안</a:t>
+            </a:r>
+            <a:endParaRPr lang="en-US" sz="1700" dirty="0"/>
+          </a:p>
+        </p:txBody>
+      </p:sp>
+      <p:sp>
+        <p:nvSpPr>
+          <p:cNvPr id="6" name="original"/>
           <p:cNvSpPr/>
           <p:nvPr/>
         </p:nvSpPr>
         <p:spPr>
           <a:xfrm>
-            <a:off x="548640" y="1965960"/>
-            <a:ext cx="4206240" cy="3794760"/>
+            <a:off x="548640" y="4645152"/>
+            <a:ext cx="4206240" cy="1115568"/>
           </a:xfrm>
           <a:prstGeom prst="roundRect">
             <a:avLst>
-              <a:gd name="adj" fmla="val 2892"/>
+              <a:gd name="adj" fmla="val 9836"/>
             </a:avLst>
           </a:prstGeom>
           <a:solidFill>
@@ -6005,50 +6041,14 @@
       </p:sp>
       <p:sp>
         <p:nvSpPr>
-          <p:cNvPr id="6" name="Text 4"/>
-          <p:cNvSpPr txBox="1"/>
-          <p:nvPr/>
-        </p:nvSpPr>
-        <p:spPr>
-          <a:xfrm>
-            <a:off x="822960" y="2121408"/>
-            <a:ext cx="1828800" cy="365760"/>
-          </a:xfrm>
-          <a:prstGeom prst="rect">
-            <a:avLst/>
-          </a:prstGeom>
-          <a:noFill/>
-          <a:ln/>
-        </p:spPr>
-        <p:txBody>
-          <a:bodyPr wrap="square" lIns="0" tIns="0" rIns="0" bIns="0" rtlCol="0" anchor="ctr"/>
-          <a:lstStyle/>
-          <a:p>
-            <a:pPr indent="0" marL="0">
-              <a:buNone/>
-            </a:pPr>
-            <a:r>
-              <a:rPr lang="en-US" sz="1700" b="1" dirty="0">
-                <a:solidFill>
-                  <a:srgbClr val="617287"/>
-                </a:solidFill>
-              </a:rPr>
-              <a:t>원안</a:t>
-            </a:r>
-            <a:endParaRPr lang="en-US" sz="1700" dirty="0"/>
-          </a:p>
-        </p:txBody>
-      </p:sp>
-      <p:sp>
-        <p:nvSpPr>
           <p:cNvPr id="7" name="chip-1-1"/>
           <p:cNvSpPr txBox="1"/>
           <p:nvPr/>
         </p:nvSpPr>
         <p:spPr>
           <a:xfrm>
-            <a:off x="822960" y="2651760"/>
-            <a:ext cx="566928" cy="292608"/>
+            <a:off x="685800" y="4773168"/>
+            <a:ext cx="502920" cy="292608"/>
           </a:xfrm>
           <a:prstGeom prst="roundRect">
             <a:avLst>
@@ -6087,8 +6087,8 @@
         </p:nvSpPr>
         <p:spPr>
           <a:xfrm>
-            <a:off x="1508760" y="2615184"/>
-            <a:ext cx="3108960" cy="365760"/>
+            <a:off x="1280160" y="4718304"/>
+            <a:ext cx="3383280" cy="457200"/>
           </a:xfrm>
           <a:prstGeom prst="rect">
             <a:avLst/>
@@ -6104,63 +6104,38 @@
               <a:buNone/>
             </a:pPr>
             <a:r>
-              <a:rPr lang="en-US" sz="1500" b="1" dirty="0">
+              <a:rPr lang="en-US" sz="1100" b="1" dirty="0">
                 <a:solidFill>
                   <a:srgbClr val="16243A"/>
                 </a:solidFill>
               </a:rPr>
-              <a:t>체험 방식</a:t>
-            </a:r>
-            <a:endParaRPr lang="en-US" sz="1500" dirty="0"/>
-          </a:p>
-        </p:txBody>
-      </p:sp>
-      <p:sp>
-        <p:nvSpPr>
-          <p:cNvPr id="9" name="Text 7"/>
-          <p:cNvSpPr txBox="1"/>
-          <p:nvPr/>
-        </p:nvSpPr>
-        <p:spPr>
-          <a:xfrm>
-            <a:off x="822960" y="3063240"/>
-            <a:ext cx="3703320" cy="960120"/>
-          </a:xfrm>
-          <a:prstGeom prst="rect">
-            <a:avLst/>
-          </a:prstGeom>
-          <a:noFill/>
-          <a:ln/>
-        </p:spPr>
-        <p:txBody>
-          <a:bodyPr wrap="square" lIns="0" tIns="0" rIns="0" bIns="0" rtlCol="0" anchor="t"/>
-          <a:lstStyle/>
-          <a:p>
+              <a:t>체험 방식  </a:t>
+            </a:r>
             <a:pPr indent="0" marL="0">
               <a:buNone/>
             </a:pPr>
             <a:r>
-              <a:rPr lang="en-US" sz="1300" dirty="0">
+              <a:rPr lang="en-US" sz="1100" dirty="0">
                 <a:solidFill>
                   <a:srgbClr val="617287"/>
                 </a:solidFill>
               </a:rPr>
-              <a:t>종이 + 크레용 드로잉 / 점토를 활용한 유료 체험 옵션</a:t>
-            </a:r>
-            <a:endParaRPr lang="en-US" sz="1300" dirty="0"/>
-          </a:p>
-        </p:txBody>
-      </p:sp>
-      <p:sp>
-        <p:nvSpPr>
-          <p:cNvPr id="10" name="chip-1-2"/>
-          <p:cNvSpPr txBox="1"/>
-          <p:nvPr/>
-        </p:nvSpPr>
-        <p:spPr>
-          <a:xfrm>
-            <a:off x="822960" y="4160520"/>
-            <a:ext cx="566928" cy="292608"/>
+              <a:t>종이 + 크레용 / 점토 유료 옵션</a:t>
+            </a:r>
+            <a:endParaRPr lang="en-US" sz="1100" dirty="0"/>
+          </a:p>
+        </p:txBody>
+      </p:sp>
+      <p:sp>
+        <p:nvSpPr>
+          <p:cNvPr id="9" name="chip-1-2"/>
+          <p:cNvSpPr txBox="1"/>
+          <p:nvPr/>
+        </p:nvSpPr>
+        <p:spPr>
+          <a:xfrm>
+            <a:off x="685800" y="5276088"/>
+            <a:ext cx="502920" cy="292608"/>
           </a:xfrm>
           <a:prstGeom prst="roundRect">
             <a:avLst>
@@ -6193,79 +6168,54 @@
       </p:sp>
       <p:sp>
         <p:nvSpPr>
+          <p:cNvPr id="10" name="Text 8"/>
+          <p:cNvSpPr txBox="1"/>
+          <p:nvPr/>
+        </p:nvSpPr>
+        <p:spPr>
+          <a:xfrm>
+            <a:off x="1280160" y="5221224"/>
+            <a:ext cx="3383280" cy="457200"/>
+          </a:xfrm>
+          <a:prstGeom prst="rect">
+            <a:avLst/>
+          </a:prstGeom>
+          <a:noFill/>
+          <a:ln/>
+        </p:spPr>
+        <p:txBody>
+          <a:bodyPr wrap="square" lIns="0" tIns="0" rIns="0" bIns="0" rtlCol="0" anchor="ctr"/>
+          <a:lstStyle/>
+          <a:p>
+            <a:pPr indent="0" marL="0">
+              <a:buNone/>
+            </a:pPr>
+            <a:r>
+              <a:rPr lang="en-US" sz="1100" b="1" dirty="0">
+                <a:solidFill>
+                  <a:srgbClr val="16243A"/>
+                </a:solidFill>
+              </a:rPr>
+              <a:t>Draw Me! 도안  </a:t>
+            </a:r>
+            <a:pPr indent="0" marL="0">
+              <a:buNone/>
+            </a:pPr>
+            <a:r>
+              <a:rPr lang="en-US" sz="1100" dirty="0">
+                <a:solidFill>
+                  <a:srgbClr val="617287"/>
+                </a:solidFill>
+              </a:rPr>
+              <a:t>A4 가이드 도안 · A안 얼굴 · 몸통 · 팔 · 다리 / B안 얼굴만</a:t>
+            </a:r>
+            <a:endParaRPr lang="en-US" sz="1100" dirty="0"/>
+          </a:p>
+        </p:txBody>
+      </p:sp>
+      <p:sp>
+        <p:nvSpPr>
           <p:cNvPr id="11" name="Text 9"/>
-          <p:cNvSpPr txBox="1"/>
-          <p:nvPr/>
-        </p:nvSpPr>
-        <p:spPr>
-          <a:xfrm>
-            <a:off x="1508760" y="4123944"/>
-            <a:ext cx="3108960" cy="365760"/>
-          </a:xfrm>
-          <a:prstGeom prst="rect">
-            <a:avLst/>
-          </a:prstGeom>
-          <a:noFill/>
-          <a:ln/>
-        </p:spPr>
-        <p:txBody>
-          <a:bodyPr wrap="square" lIns="0" tIns="0" rIns="0" bIns="0" rtlCol="0" anchor="ctr"/>
-          <a:lstStyle/>
-          <a:p>
-            <a:pPr indent="0" marL="0">
-              <a:buNone/>
-            </a:pPr>
-            <a:r>
-              <a:rPr lang="en-US" sz="1500" b="1" dirty="0">
-                <a:solidFill>
-                  <a:srgbClr val="16243A"/>
-                </a:solidFill>
-              </a:rPr>
-              <a:t>Draw Me! 도안</a:t>
-            </a:r>
-            <a:endParaRPr lang="en-US" sz="1500" dirty="0"/>
-          </a:p>
-        </p:txBody>
-      </p:sp>
-      <p:sp>
-        <p:nvSpPr>
-          <p:cNvPr id="12" name="Text 10"/>
-          <p:cNvSpPr txBox="1"/>
-          <p:nvPr/>
-        </p:nvSpPr>
-        <p:spPr>
-          <a:xfrm>
-            <a:off x="822960" y="4572000"/>
-            <a:ext cx="3703320" cy="960120"/>
-          </a:xfrm>
-          <a:prstGeom prst="rect">
-            <a:avLst/>
-          </a:prstGeom>
-          <a:noFill/>
-          <a:ln/>
-        </p:spPr>
-        <p:txBody>
-          <a:bodyPr wrap="square" lIns="0" tIns="0" rIns="0" bIns="0" rtlCol="0" anchor="t"/>
-          <a:lstStyle/>
-          <a:p>
-            <a:pPr indent="0" marL="0">
-              <a:buNone/>
-            </a:pPr>
-            <a:r>
-              <a:rPr lang="en-US" sz="1300" dirty="0">
-                <a:solidFill>
-                  <a:srgbClr val="617287"/>
-                </a:solidFill>
-              </a:rPr>
-              <a:t>A4 가이드 도안 · A안 얼굴 · 몸통 · 팔 · 다리 영역 가이드 · B안 얼굴만 그리는 심플 옵션</a:t>
-            </a:r>
-            <a:endParaRPr lang="en-US" sz="1300" dirty="0"/>
-          </a:p>
-        </p:txBody>
-      </p:sp>
-      <p:sp>
-        <p:nvSpPr>
-          <p:cNvPr id="13" name="Text 11"/>
           <p:cNvSpPr txBox="1"/>
           <p:nvPr/>
         </p:nvSpPr>
@@ -6301,7 +6251,7 @@
       </p:sp>
       <p:sp>
         <p:nvSpPr>
-          <p:cNvPr id="14" name="prop-0"/>
+          <p:cNvPr id="12" name="prop-0"/>
           <p:cNvSpPr/>
           <p:nvPr/>
         </p:nvSpPr>
@@ -6328,7 +6278,7 @@
       </p:sp>
       <p:sp>
         <p:nvSpPr>
-          <p:cNvPr id="15" name="chip-체험"/>
+          <p:cNvPr id="13" name="chip-체험"/>
           <p:cNvSpPr txBox="1"/>
           <p:nvPr/>
         </p:nvSpPr>
@@ -6368,7 +6318,7 @@
       </p:sp>
       <p:sp>
         <p:nvSpPr>
-          <p:cNvPr id="16" name="Text 14"/>
+          <p:cNvPr id="14" name="Text 12"/>
           <p:cNvSpPr txBox="1"/>
           <p:nvPr/>
         </p:nvSpPr>
@@ -6404,7 +6354,7 @@
       </p:sp>
       <p:sp>
         <p:nvSpPr>
-          <p:cNvPr id="17" name="Text 15"/>
+          <p:cNvPr id="15" name="Text 13"/>
           <p:cNvSpPr txBox="1"/>
           <p:nvPr/>
         </p:nvSpPr>
@@ -6440,7 +6390,7 @@
       </p:sp>
       <p:sp>
         <p:nvSpPr>
-          <p:cNvPr id="18" name="prop-1"/>
+          <p:cNvPr id="16" name="prop-1"/>
           <p:cNvSpPr/>
           <p:nvPr/>
         </p:nvSpPr>
@@ -6467,7 +6417,7 @@
       </p:sp>
       <p:sp>
         <p:nvSpPr>
-          <p:cNvPr id="19" name="chip-체험"/>
+          <p:cNvPr id="17" name="chip-체험"/>
           <p:cNvSpPr txBox="1"/>
           <p:nvPr/>
         </p:nvSpPr>
@@ -6507,7 +6457,7 @@
       </p:sp>
       <p:sp>
         <p:nvSpPr>
-          <p:cNvPr id="20" name="Text 18"/>
+          <p:cNvPr id="18" name="Text 16"/>
           <p:cNvSpPr txBox="1"/>
           <p:nvPr/>
         </p:nvSpPr>
@@ -6543,7 +6493,7 @@
       </p:sp>
       <p:sp>
         <p:nvSpPr>
-          <p:cNvPr id="21" name="Text 19"/>
+          <p:cNvPr id="19" name="Text 17"/>
           <p:cNvSpPr txBox="1"/>
           <p:nvPr/>
         </p:nvSpPr>
@@ -6579,7 +6529,7 @@
       </p:sp>
       <p:sp>
         <p:nvSpPr>
-          <p:cNvPr id="22" name="prop-2"/>
+          <p:cNvPr id="20" name="prop-2"/>
           <p:cNvSpPr/>
           <p:nvPr/>
         </p:nvSpPr>
@@ -6606,7 +6556,7 @@
       </p:sp>
       <p:sp>
         <p:nvSpPr>
-          <p:cNvPr id="23" name="chip-운영"/>
+          <p:cNvPr id="21" name="chip-운영"/>
           <p:cNvSpPr txBox="1"/>
           <p:nvPr/>
         </p:nvSpPr>
@@ -6646,7 +6596,7 @@
       </p:sp>
       <p:sp>
         <p:nvSpPr>
-          <p:cNvPr id="24" name="Text 22"/>
+          <p:cNvPr id="22" name="Text 20"/>
           <p:cNvSpPr txBox="1"/>
           <p:nvPr/>
         </p:nvSpPr>
@@ -6682,7 +6632,7 @@
       </p:sp>
       <p:sp>
         <p:nvSpPr>
-          <p:cNvPr id="25" name="Text 23"/>
+          <p:cNvPr id="23" name="Text 21"/>
           <p:cNvSpPr txBox="1"/>
           <p:nvPr/>
         </p:nvSpPr>
@@ -6718,7 +6668,7 @@
       </p:sp>
       <p:sp>
         <p:nvSpPr>
-          <p:cNvPr id="26" name="prop-3"/>
+          <p:cNvPr id="24" name="prop-3"/>
           <p:cNvSpPr/>
           <p:nvPr/>
         </p:nvSpPr>
@@ -6745,7 +6695,7 @@
       </p:sp>
       <p:sp>
         <p:nvSpPr>
-          <p:cNvPr id="27" name="chip-운영"/>
+          <p:cNvPr id="25" name="chip-운영"/>
           <p:cNvSpPr txBox="1"/>
           <p:nvPr/>
         </p:nvSpPr>
@@ -6785,7 +6735,7 @@
       </p:sp>
       <p:sp>
         <p:nvSpPr>
-          <p:cNvPr id="28" name="Text 26"/>
+          <p:cNvPr id="26" name="Text 24"/>
           <p:cNvSpPr txBox="1"/>
           <p:nvPr/>
         </p:nvSpPr>
@@ -6821,7 +6771,7 @@
       </p:sp>
       <p:sp>
         <p:nvSpPr>
-          <p:cNvPr id="29" name="Text 27"/>
+          <p:cNvPr id="27" name="Text 25"/>
           <p:cNvSpPr txBox="1"/>
           <p:nvPr/>
         </p:nvSpPr>
@@ -6857,7 +6807,7 @@
       </p:sp>
       <p:sp>
         <p:nvSpPr>
-          <p:cNvPr id="30" name="Text 28"/>
+          <p:cNvPr id="28" name="Text 26"/>
           <p:cNvSpPr txBox="1"/>
           <p:nvPr/>
         </p:nvSpPr>
@@ -6947,6 +6897,451 @@
           </a:p>
         </p:txBody>
       </p:sp>
+      <p:grpSp>
+        <p:nvGrpSpPr>
+          <p:cNvPr id="900" name="원안 그림"/>
+          <p:cNvGrpSpPr/>
+          <p:nvPr/>
+        </p:nvGrpSpPr>
+        <p:grpSpPr>
+          <a:xfrm>
+            <a:off x="930029" y="2331720"/>
+            <a:ext cx="3443462" cy="2212848"/>
+            <a:chOff x="6108192" y="2313432"/>
+            <a:chExt cx="5577840" cy="3584448"/>
+          </a:xfrm>
+        </p:grpSpPr>
+        <p:sp>
+          <p:nvSpPr>
+            <p:cNvPr id="901" name="Shape 18"/>
+            <p:cNvSpPr/>
+            <p:nvPr/>
+          </p:nvSpPr>
+          <p:spPr>
+            <a:xfrm>
+              <a:off x="6108192" y="2313432"/>
+              <a:ext cx="5577840" cy="3584448"/>
+            </a:xfrm>
+            <a:prstGeom prst="roundRect">
+              <a:avLst>
+                <a:gd name="adj" fmla="val 2551"/>
+              </a:avLst>
+            </a:prstGeom>
+            <a:solidFill>
+              <a:srgbClr val="EAF5F1"/>
+            </a:solidFill>
+            <a:ln w="12700">
+              <a:solidFill>
+                <a:srgbClr val="EAF5F1">
+                  <a:alpha val="0"/>
+                </a:srgbClr>
+              </a:solidFill>
+              <a:prstDash val="solid"/>
+            </a:ln>
+          </p:spPr>
+        </p:sp>
+        <p:sp>
+          <p:nvSpPr>
+            <p:cNvPr id="902" name="Shape 19"/>
+            <p:cNvSpPr/>
+            <p:nvPr/>
+          </p:nvSpPr>
+          <p:spPr>
+            <a:xfrm rot="-300000">
+              <a:off x="6839712" y="2615184"/>
+              <a:ext cx="2176272" cy="3008376"/>
+            </a:xfrm>
+            <a:prstGeom prst="roundRect">
+              <a:avLst>
+                <a:gd name="adj" fmla="val 4202"/>
+              </a:avLst>
+            </a:prstGeom>
+            <a:solidFill>
+              <a:srgbClr val="FFFFFF"/>
+            </a:solidFill>
+            <a:ln w="12700">
+              <a:solidFill>
+                <a:srgbClr val="D3E1DC"/>
+              </a:solidFill>
+              <a:prstDash val="solid"/>
+            </a:ln>
+          </p:spPr>
+        </p:sp>
+        <p:sp>
+          <p:nvSpPr>
+            <p:cNvPr id="903" name="Text 20"/>
+            <p:cNvSpPr/>
+            <p:nvPr/>
+          </p:nvSpPr>
+          <p:spPr>
+            <a:xfrm>
+              <a:off x="7123176" y="2862072"/>
+              <a:ext cx="1645920" cy="320040"/>
+            </a:xfrm>
+            <a:prstGeom prst="rect">
+              <a:avLst/>
+            </a:prstGeom>
+            <a:noFill/>
+            <a:ln/>
+          </p:spPr>
+          <p:txBody>
+            <a:bodyPr wrap="square" lIns="0" tIns="0" rIns="0" bIns="0" rtlCol="0" anchor="ctr">
+              <a:normAutofit/>
+            </a:bodyPr>
+            <a:lstStyle/>
+            <a:p>
+              <a:pPr indent="0" marL="0">
+                <a:buNone/>
+              </a:pPr>
+              <a:r>
+                <a:rPr lang="en-US" sz="1100" b="1" dirty="0">
+                  <a:solidFill>
+                    <a:srgbClr val="16243A"/>
+                  </a:solidFill>
+                  <a:latin typeface="Malgun Gothic" pitchFamily="34" charset="0"/>
+                  <a:ea typeface="Malgun Gothic" pitchFamily="34" charset="-122"/>
+                  <a:cs typeface="Malgun Gothic" pitchFamily="34" charset="-120"/>
+                </a:rPr>
+                <a:t>Draw Me!</a:t>
+              </a:r>
+              <a:endParaRPr lang="en-US" sz="1100" dirty="0"/>
+            </a:p>
+          </p:txBody>
+        </p:sp>
+        <p:sp>
+          <p:nvSpPr>
+            <p:cNvPr id="904" name="Shape 21"/>
+            <p:cNvSpPr/>
+            <p:nvPr/>
+          </p:nvSpPr>
+          <p:spPr>
+            <a:xfrm>
+              <a:off x="7770571" y="3392424"/>
+              <a:ext cx="594360" cy="594360"/>
+            </a:xfrm>
+            <a:prstGeom prst="ellipse">
+              <a:avLst>
+                <a:gd name="adj" fmla="val 15385"/>
+              </a:avLst>
+            </a:prstGeom>
+            <a:solidFill>
+              <a:srgbClr val="FDE6A5"/>
+            </a:solidFill>
+            <a:ln w="12700">
+              <a:solidFill>
+                <a:srgbClr val="FDE6A5">
+                  <a:alpha val="0"/>
+                </a:srgbClr>
+              </a:solidFill>
+              <a:prstDash val="solid"/>
+            </a:ln>
+          </p:spPr>
+        </p:sp>
+        <p:sp>
+          <p:nvSpPr>
+            <p:cNvPr id="905" name="Shape 22"/>
+            <p:cNvSpPr/>
+            <p:nvPr/>
+          </p:nvSpPr>
+          <p:spPr>
+            <a:xfrm rot="10800000">
+              <a:off x="7675474" y="3915461"/>
+              <a:ext cx="808330" cy="903427"/>
+            </a:xfrm>
+            <a:prstGeom prst="arc">
+              <a:avLst>
+                <a:gd name="adj" fmla="val 11312"/>
+              </a:avLst>
+            </a:prstGeom>
+            <a:solidFill>
+              <a:srgbClr val="F7DDE5"/>
+            </a:solidFill>
+            <a:ln w="12700">
+              <a:solidFill>
+                <a:srgbClr val="F7DDE5"/>
+              </a:solidFill>
+              <a:prstDash val="solid"/>
+            </a:ln>
+          </p:spPr>
+        </p:sp>
+        <p:sp>
+          <p:nvSpPr>
+            <p:cNvPr id="906" name="Shape 23"/>
+            <p:cNvSpPr/>
+            <p:nvPr/>
+          </p:nvSpPr>
+          <p:spPr>
+            <a:xfrm>
+              <a:off x="7711135" y="4176979"/>
+              <a:ext cx="653796" cy="118872"/>
+            </a:xfrm>
+            <a:prstGeom prst="line">
+              <a:avLst>
+                <a:gd name="adj" fmla="val 76923"/>
+              </a:avLst>
+            </a:prstGeom>
+            <a:solidFill>
+              <a:srgbClr val="16243A"/>
+            </a:solidFill>
+            <a:ln w="38100">
+              <a:solidFill>
+                <a:srgbClr val="16243A"/>
+              </a:solidFill>
+              <a:prstDash val="solid"/>
+            </a:ln>
+          </p:spPr>
+        </p:sp>
+        <p:sp>
+          <p:nvSpPr>
+            <p:cNvPr id="907" name="Shape 24"/>
+            <p:cNvSpPr/>
+            <p:nvPr/>
+          </p:nvSpPr>
+          <p:spPr>
+            <a:xfrm>
+              <a:off x="7782458" y="4676242"/>
+              <a:ext cx="-166421" cy="427939"/>
+            </a:xfrm>
+            <a:prstGeom prst="line">
+              <a:avLst>
+                <a:gd name="adj" fmla="val -54945"/>
+              </a:avLst>
+            </a:prstGeom>
+            <a:solidFill>
+              <a:srgbClr val="16243A"/>
+            </a:solidFill>
+            <a:ln w="38100">
+              <a:solidFill>
+                <a:srgbClr val="16243A"/>
+              </a:solidFill>
+              <a:prstDash val="solid"/>
+            </a:ln>
+          </p:spPr>
+        </p:sp>
+        <p:sp>
+          <p:nvSpPr>
+            <p:cNvPr id="908" name="Shape 25"/>
+            <p:cNvSpPr/>
+            <p:nvPr/>
+          </p:nvSpPr>
+          <p:spPr>
+            <a:xfrm>
+              <a:off x="8234172" y="4676242"/>
+              <a:ext cx="166421" cy="427939"/>
+            </a:xfrm>
+            <a:prstGeom prst="line">
+              <a:avLst>
+                <a:gd name="adj" fmla="val 54945"/>
+              </a:avLst>
+            </a:prstGeom>
+            <a:solidFill>
+              <a:srgbClr val="16243A"/>
+            </a:solidFill>
+            <a:ln w="38100">
+              <a:solidFill>
+                <a:srgbClr val="16243A"/>
+              </a:solidFill>
+              <a:prstDash val="solid"/>
+            </a:ln>
+          </p:spPr>
+        </p:sp>
+        <p:sp>
+          <p:nvSpPr>
+            <p:cNvPr id="909" name="Shape 26"/>
+            <p:cNvSpPr/>
+            <p:nvPr/>
+          </p:nvSpPr>
+          <p:spPr>
+            <a:xfrm>
+              <a:off x="7925105" y="3653942"/>
+              <a:ext cx="41605" cy="41605"/>
+            </a:xfrm>
+            <a:prstGeom prst="ellipse">
+              <a:avLst>
+                <a:gd name="adj" fmla="val 219781"/>
+              </a:avLst>
+            </a:prstGeom>
+            <a:solidFill>
+              <a:srgbClr val="16243A"/>
+            </a:solidFill>
+            <a:ln w="12700">
+              <a:solidFill>
+                <a:srgbClr val="16243A">
+                  <a:alpha val="0"/>
+                </a:srgbClr>
+              </a:solidFill>
+              <a:prstDash val="solid"/>
+            </a:ln>
+          </p:spPr>
+        </p:sp>
+        <p:sp>
+          <p:nvSpPr>
+            <p:cNvPr id="910" name="Shape 27"/>
+            <p:cNvSpPr/>
+            <p:nvPr/>
+          </p:nvSpPr>
+          <p:spPr>
+            <a:xfrm>
+              <a:off x="8127187" y="3653942"/>
+              <a:ext cx="41605" cy="41605"/>
+            </a:xfrm>
+            <a:prstGeom prst="ellipse">
+              <a:avLst>
+                <a:gd name="adj" fmla="val 219781"/>
+              </a:avLst>
+            </a:prstGeom>
+            <a:solidFill>
+              <a:srgbClr val="16243A"/>
+            </a:solidFill>
+            <a:ln w="12700">
+              <a:solidFill>
+                <a:srgbClr val="16243A">
+                  <a:alpha val="0"/>
+                </a:srgbClr>
+              </a:solidFill>
+              <a:prstDash val="solid"/>
+            </a:ln>
+          </p:spPr>
+        </p:sp>
+        <p:sp>
+          <p:nvSpPr>
+            <p:cNvPr id="911" name="Shape 28"/>
+            <p:cNvSpPr/>
+            <p:nvPr/>
+          </p:nvSpPr>
+          <p:spPr>
+            <a:xfrm rot="360000">
+              <a:off x="9262872" y="2898648"/>
+              <a:ext cx="1755648" cy="2377440"/>
+            </a:xfrm>
+            <a:prstGeom prst="roundRect">
+              <a:avLst>
+                <a:gd name="adj" fmla="val 5208"/>
+              </a:avLst>
+            </a:prstGeom>
+            <a:solidFill>
+              <a:srgbClr val="FFFFFF"/>
+            </a:solidFill>
+            <a:ln w="12700">
+              <a:solidFill>
+                <a:srgbClr val="DFE6EB"/>
+              </a:solidFill>
+              <a:prstDash val="solid"/>
+            </a:ln>
+          </p:spPr>
+        </p:sp>
+        <p:sp>
+          <p:nvSpPr>
+            <p:cNvPr id="912" name="Text 29"/>
+            <p:cNvSpPr/>
+            <p:nvPr/>
+          </p:nvSpPr>
+          <p:spPr>
+            <a:xfrm>
+              <a:off x="9619488" y="3136392"/>
+              <a:ext cx="1005840" cy="274320"/>
+            </a:xfrm>
+            <a:prstGeom prst="rect">
+              <a:avLst/>
+            </a:prstGeom>
+            <a:noFill/>
+            <a:ln/>
+          </p:spPr>
+          <p:txBody>
+            <a:bodyPr wrap="square" lIns="0" tIns="0" rIns="0" bIns="0" rtlCol="0" anchor="ctr">
+              <a:normAutofit/>
+            </a:bodyPr>
+            <a:lstStyle/>
+            <a:p>
+              <a:pPr algn="ctr" indent="0" marL="0">
+                <a:buNone/>
+              </a:pPr>
+              <a:r>
+                <a:rPr lang="en-US" sz="900" b="1" dirty="0">
+                  <a:solidFill>
+                    <a:srgbClr val="617287"/>
+                  </a:solidFill>
+                  <a:latin typeface="Malgun Gothic" pitchFamily="34" charset="0"/>
+                  <a:ea typeface="Malgun Gothic" pitchFamily="34" charset="-122"/>
+                  <a:cs typeface="Malgun Gothic" pitchFamily="34" charset="-120"/>
+                </a:rPr>
+                <a:t>FACE</a:t>
+              </a:r>
+              <a:endParaRPr lang="en-US" sz="900" dirty="0"/>
+            </a:p>
+          </p:txBody>
+        </p:sp>
+        <p:sp>
+          <p:nvSpPr>
+            <p:cNvPr id="913" name="Shape 30"/>
+            <p:cNvSpPr/>
+            <p:nvPr/>
+          </p:nvSpPr>
+          <p:spPr>
+            <a:xfrm>
+              <a:off x="9637776" y="3675888"/>
+              <a:ext cx="996696" cy="1042416"/>
+            </a:xfrm>
+            <a:prstGeom prst="ellipse">
+              <a:avLst>
+                <a:gd name="adj" fmla="val 9174"/>
+              </a:avLst>
+            </a:prstGeom>
+            <a:solidFill>
+              <a:srgbClr val="FDE6A5"/>
+            </a:solidFill>
+            <a:ln w="12700">
+              <a:solidFill>
+                <a:srgbClr val="FDE6A5">
+                  <a:alpha val="0"/>
+                </a:srgbClr>
+              </a:solidFill>
+              <a:prstDash val="solid"/>
+            </a:ln>
+          </p:spPr>
+        </p:sp>
+        <p:sp>
+          <p:nvSpPr>
+            <p:cNvPr id="914" name="Text 31"/>
+            <p:cNvSpPr/>
+            <p:nvPr/>
+          </p:nvSpPr>
+          <p:spPr>
+            <a:xfrm>
+              <a:off x="7479792" y="5550408"/>
+              <a:ext cx="2871216" cy="265176"/>
+            </a:xfrm>
+            <a:prstGeom prst="rect">
+              <a:avLst/>
+            </a:prstGeom>
+            <a:noFill/>
+            <a:ln/>
+          </p:spPr>
+          <p:txBody>
+            <a:bodyPr wrap="square" lIns="0" tIns="0" rIns="0" bIns="0" rtlCol="0" anchor="ctr">
+              <a:normAutofit/>
+            </a:bodyPr>
+            <a:lstStyle/>
+            <a:p>
+              <a:pPr algn="ctr" indent="0" marL="0">
+                <a:buNone/>
+              </a:pPr>
+              <a:r>
+                <a:rPr lang="en-US" sz="700" dirty="0">
+                  <a:solidFill>
+                    <a:srgbClr val="617287"/>
+                  </a:solidFill>
+                  <a:latin typeface="Malgun Gothic" pitchFamily="34" charset="0"/>
+                  <a:ea typeface="Malgun Gothic" pitchFamily="34" charset="-122"/>
+                  <a:cs typeface="Malgun Gothic" pitchFamily="34" charset="-120"/>
+                </a:rPr>
+                <a:t>A / B 도안 옵션</a:t>
+              </a:r>
+              <a:endParaRPr lang="en-US" sz="700" dirty="0"/>
+            </a:p>
+          </p:txBody>
+        </p:sp>
+      </p:grpSp>
     </p:spTree>
   </p:cSld>
   <p:clrMapOvr>
@@ -7086,18 +7481,54 @@
       </p:sp>
       <p:sp>
         <p:nvSpPr>
-          <p:cNvPr id="5" name="original"/>
+          <p:cNvPr id="5" name="Text 3"/>
+          <p:cNvSpPr txBox="1"/>
+          <p:nvPr/>
+        </p:nvSpPr>
+        <p:spPr>
+          <a:xfrm>
+            <a:off x="548640" y="1965960"/>
+            <a:ext cx="1828800" cy="365760"/>
+          </a:xfrm>
+          <a:prstGeom prst="rect">
+            <a:avLst/>
+          </a:prstGeom>
+          <a:noFill/>
+          <a:ln/>
+        </p:spPr>
+        <p:txBody>
+          <a:bodyPr wrap="square" lIns="0" tIns="0" rIns="0" bIns="0" rtlCol="0" anchor="ctr"/>
+          <a:lstStyle/>
+          <a:p>
+            <a:pPr indent="0" marL="0">
+              <a:buNone/>
+            </a:pPr>
+            <a:r>
+              <a:rPr lang="en-US" sz="1700" b="1" dirty="0">
+                <a:solidFill>
+                  <a:srgbClr val="617287"/>
+                </a:solidFill>
+              </a:rPr>
+              <a:t>원안</a:t>
+            </a:r>
+            <a:endParaRPr lang="en-US" sz="1700" dirty="0"/>
+          </a:p>
+        </p:txBody>
+      </p:sp>
+      <p:sp>
+        <p:nvSpPr>
+          <p:cNvPr id="6" name="original"/>
           <p:cNvSpPr/>
           <p:nvPr/>
         </p:nvSpPr>
         <p:spPr>
           <a:xfrm>
-            <a:off x="548640" y="1965960"/>
-            <a:ext cx="4206240" cy="3794760"/>
+            <a:off x="548640" y="4645152"/>
+            <a:ext cx="4206240" cy="1115568"/>
           </a:xfrm>
           <a:prstGeom prst="roundRect">
             <a:avLst>
-              <a:gd name="adj" fmla="val 2892"/>
+              <a:gd name="adj" fmla="val 9836"/>
             </a:avLst>
           </a:prstGeom>
           <a:solidFill>
@@ -7113,50 +7544,14 @@
       </p:sp>
       <p:sp>
         <p:nvSpPr>
-          <p:cNvPr id="6" name="Text 4"/>
-          <p:cNvSpPr txBox="1"/>
-          <p:nvPr/>
-        </p:nvSpPr>
-        <p:spPr>
-          <a:xfrm>
-            <a:off x="822960" y="2121408"/>
-            <a:ext cx="1828800" cy="365760"/>
-          </a:xfrm>
-          <a:prstGeom prst="rect">
-            <a:avLst/>
-          </a:prstGeom>
-          <a:noFill/>
-          <a:ln/>
-        </p:spPr>
-        <p:txBody>
-          <a:bodyPr wrap="square" lIns="0" tIns="0" rIns="0" bIns="0" rtlCol="0" anchor="ctr"/>
-          <a:lstStyle/>
-          <a:p>
-            <a:pPr indent="0" marL="0">
-              <a:buNone/>
-            </a:pPr>
-            <a:r>
-              <a:rPr lang="en-US" sz="1700" b="1" dirty="0">
-                <a:solidFill>
-                  <a:srgbClr val="617287"/>
-                </a:solidFill>
-              </a:rPr>
-              <a:t>원안</a:t>
-            </a:r>
-            <a:endParaRPr lang="en-US" sz="1700" dirty="0"/>
-          </a:p>
-        </p:txBody>
-      </p:sp>
-      <p:sp>
-        <p:nvSpPr>
           <p:cNvPr id="7" name="chip-2-1"/>
           <p:cNvSpPr txBox="1"/>
           <p:nvPr/>
         </p:nvSpPr>
         <p:spPr>
           <a:xfrm>
-            <a:off x="822960" y="2651760"/>
-            <a:ext cx="566928" cy="292608"/>
+            <a:off x="685800" y="4773168"/>
+            <a:ext cx="502920" cy="292608"/>
           </a:xfrm>
           <a:prstGeom prst="roundRect">
             <a:avLst>
@@ -7195,8 +7590,8 @@
         </p:nvSpPr>
         <p:spPr>
           <a:xfrm>
-            <a:off x="1508760" y="2615184"/>
-            <a:ext cx="3108960" cy="365760"/>
+            <a:off x="1280160" y="4718304"/>
+            <a:ext cx="3383280" cy="457200"/>
           </a:xfrm>
           <a:prstGeom prst="rect">
             <a:avLst/>
@@ -7212,63 +7607,38 @@
               <a:buNone/>
             </a:pPr>
             <a:r>
-              <a:rPr lang="en-US" sz="1500" b="1" dirty="0">
+              <a:rPr lang="en-US" sz="1100" b="1" dirty="0">
                 <a:solidFill>
                   <a:srgbClr val="16243A"/>
                 </a:solidFill>
               </a:rPr>
-              <a:t>스캔 · 캐릭터 변환</a:t>
-            </a:r>
-            <a:endParaRPr lang="en-US" sz="1500" dirty="0"/>
-          </a:p>
-        </p:txBody>
-      </p:sp>
-      <p:sp>
-        <p:nvSpPr>
-          <p:cNvPr id="9" name="Text 7"/>
-          <p:cNvSpPr txBox="1"/>
-          <p:nvPr/>
-        </p:nvSpPr>
-        <p:spPr>
-          <a:xfrm>
-            <a:off x="822960" y="3063240"/>
-            <a:ext cx="3703320" cy="960120"/>
-          </a:xfrm>
-          <a:prstGeom prst="rect">
-            <a:avLst/>
-          </a:prstGeom>
-          <a:noFill/>
-          <a:ln/>
-        </p:spPr>
-        <p:txBody>
-          <a:bodyPr wrap="square" lIns="0" tIns="0" rIns="0" bIns="0" rtlCol="0" anchor="t"/>
-          <a:lstStyle/>
-          <a:p>
+              <a:t>스캔 · 캐릭터 변환  </a:t>
+            </a:r>
             <a:pPr indent="0" marL="0">
               <a:buNone/>
             </a:pPr>
             <a:r>
-              <a:rPr lang="en-US" sz="1300" dirty="0">
+              <a:rPr lang="en-US" sz="1100" dirty="0">
                 <a:solidFill>
                   <a:srgbClr val="617287"/>
                 </a:solidFill>
               </a:rPr>
-              <a:t>완성된 그림을 스캔하여 2D 또는 3D 캐릭터로 변환</a:t>
-            </a:r>
-            <a:endParaRPr lang="en-US" sz="1300" dirty="0"/>
-          </a:p>
-        </p:txBody>
-      </p:sp>
-      <p:sp>
-        <p:nvSpPr>
-          <p:cNvPr id="10" name="chip-2-2"/>
-          <p:cNvSpPr txBox="1"/>
-          <p:nvPr/>
-        </p:nvSpPr>
-        <p:spPr>
-          <a:xfrm>
-            <a:off x="822960" y="4160520"/>
-            <a:ext cx="566928" cy="292608"/>
+              <a:t>그림을 스캔해 2D 또는 3D 캐릭터로 변환</a:t>
+            </a:r>
+            <a:endParaRPr lang="en-US" sz="1100" dirty="0"/>
+          </a:p>
+        </p:txBody>
+      </p:sp>
+      <p:sp>
+        <p:nvSpPr>
+          <p:cNvPr id="9" name="chip-2-2"/>
+          <p:cNvSpPr txBox="1"/>
+          <p:nvPr/>
+        </p:nvSpPr>
+        <p:spPr>
+          <a:xfrm>
+            <a:off x="685800" y="5276088"/>
+            <a:ext cx="502920" cy="292608"/>
           </a:xfrm>
           <a:prstGeom prst="roundRect">
             <a:avLst>
@@ -7301,79 +7671,54 @@
       </p:sp>
       <p:sp>
         <p:nvSpPr>
+          <p:cNvPr id="10" name="Text 8"/>
+          <p:cNvSpPr txBox="1"/>
+          <p:nvPr/>
+        </p:nvSpPr>
+        <p:spPr>
+          <a:xfrm>
+            <a:off x="1280160" y="5221224"/>
+            <a:ext cx="3383280" cy="457200"/>
+          </a:xfrm>
+          <a:prstGeom prst="rect">
+            <a:avLst/>
+          </a:prstGeom>
+          <a:noFill/>
+          <a:ln/>
+        </p:spPr>
+        <p:txBody>
+          <a:bodyPr wrap="square" lIns="0" tIns="0" rIns="0" bIns="0" rtlCol="0" anchor="ctr"/>
+          <a:lstStyle/>
+          <a:p>
+            <a:pPr indent="0" marL="0">
+              <a:buNone/>
+            </a:pPr>
+            <a:r>
+              <a:rPr lang="en-US" sz="1100" b="1" dirty="0">
+                <a:solidFill>
+                  <a:srgbClr val="16243A"/>
+                </a:solidFill>
+              </a:rPr>
+              <a:t>+ α 표정 커스터마이징  </a:t>
+            </a:r>
+            <a:pPr indent="0" marL="0">
+              <a:buNone/>
+            </a:pPr>
+            <a:r>
+              <a:rPr lang="en-US" sz="1100" dirty="0">
+                <a:solidFill>
+                  <a:srgbClr val="617287"/>
+                </a:solidFill>
+              </a:rPr>
+              <a:t>터치 모니터에서 눈 · 코 · 입 선택 · 보정 검토</a:t>
+            </a:r>
+            <a:endParaRPr lang="en-US" sz="1100" dirty="0"/>
+          </a:p>
+        </p:txBody>
+      </p:sp>
+      <p:sp>
+        <p:nvSpPr>
           <p:cNvPr id="11" name="Text 9"/>
-          <p:cNvSpPr txBox="1"/>
-          <p:nvPr/>
-        </p:nvSpPr>
-        <p:spPr>
-          <a:xfrm>
-            <a:off x="1508760" y="4123944"/>
-            <a:ext cx="3108960" cy="365760"/>
-          </a:xfrm>
-          <a:prstGeom prst="rect">
-            <a:avLst/>
-          </a:prstGeom>
-          <a:noFill/>
-          <a:ln/>
-        </p:spPr>
-        <p:txBody>
-          <a:bodyPr wrap="square" lIns="0" tIns="0" rIns="0" bIns="0" rtlCol="0" anchor="ctr"/>
-          <a:lstStyle/>
-          <a:p>
-            <a:pPr indent="0" marL="0">
-              <a:buNone/>
-            </a:pPr>
-            <a:r>
-              <a:rPr lang="en-US" sz="1500" b="1" dirty="0">
-                <a:solidFill>
-                  <a:srgbClr val="16243A"/>
-                </a:solidFill>
-              </a:rPr>
-              <a:t>+ α 표정 커스터마이징</a:t>
-            </a:r>
-            <a:endParaRPr lang="en-US" sz="1500" dirty="0"/>
-          </a:p>
-        </p:txBody>
-      </p:sp>
-      <p:sp>
-        <p:nvSpPr>
-          <p:cNvPr id="12" name="Text 10"/>
-          <p:cNvSpPr txBox="1"/>
-          <p:nvPr/>
-        </p:nvSpPr>
-        <p:spPr>
-          <a:xfrm>
-            <a:off x="822960" y="4572000"/>
-            <a:ext cx="3703320" cy="960120"/>
-          </a:xfrm>
-          <a:prstGeom prst="rect">
-            <a:avLst/>
-          </a:prstGeom>
-          <a:noFill/>
-          <a:ln/>
-        </p:spPr>
-        <p:txBody>
-          <a:bodyPr wrap="square" lIns="0" tIns="0" rIns="0" bIns="0" rtlCol="0" anchor="t"/>
-          <a:lstStyle/>
-          <a:p>
-            <a:pPr indent="0" marL="0">
-              <a:buNone/>
-            </a:pPr>
-            <a:r>
-              <a:rPr lang="en-US" sz="1300" dirty="0">
-                <a:solidFill>
-                  <a:srgbClr val="617287"/>
-                </a:solidFill>
-              </a:rPr>
-              <a:t>터치 모니터에서 눈 · 코 · 입 등 표정 요소를 선택하거나 보정하는 방식 검토</a:t>
-            </a:r>
-            <a:endParaRPr lang="en-US" sz="1300" dirty="0"/>
-          </a:p>
-        </p:txBody>
-      </p:sp>
-      <p:sp>
-        <p:nvSpPr>
-          <p:cNvPr id="13" name="Text 11"/>
           <p:cNvSpPr txBox="1"/>
           <p:nvPr/>
         </p:nvSpPr>
@@ -7409,7 +7754,7 @@
       </p:sp>
       <p:sp>
         <p:nvSpPr>
-          <p:cNvPr id="14" name="prop-0"/>
+          <p:cNvPr id="12" name="prop-0"/>
           <p:cNvSpPr/>
           <p:nvPr/>
         </p:nvSpPr>
@@ -7436,7 +7781,7 @@
       </p:sp>
       <p:sp>
         <p:nvSpPr>
-          <p:cNvPr id="15" name="chip-연출"/>
+          <p:cNvPr id="13" name="chip-연출"/>
           <p:cNvSpPr txBox="1"/>
           <p:nvPr/>
         </p:nvSpPr>
@@ -7476,7 +7821,7 @@
       </p:sp>
       <p:sp>
         <p:nvSpPr>
-          <p:cNvPr id="16" name="Text 14"/>
+          <p:cNvPr id="14" name="Text 12"/>
           <p:cNvSpPr txBox="1"/>
           <p:nvPr/>
         </p:nvSpPr>
@@ -7512,7 +7857,7 @@
       </p:sp>
       <p:sp>
         <p:nvSpPr>
-          <p:cNvPr id="17" name="Text 15"/>
+          <p:cNvPr id="15" name="Text 13"/>
           <p:cNvSpPr txBox="1"/>
           <p:nvPr/>
         </p:nvSpPr>
@@ -7548,7 +7893,7 @@
       </p:sp>
       <p:sp>
         <p:nvSpPr>
-          <p:cNvPr id="18" name="prop-1"/>
+          <p:cNvPr id="16" name="prop-1"/>
           <p:cNvSpPr/>
           <p:nvPr/>
         </p:nvSpPr>
@@ -7575,7 +7920,7 @@
       </p:sp>
       <p:sp>
         <p:nvSpPr>
-          <p:cNvPr id="19" name="chip-체험"/>
+          <p:cNvPr id="17" name="chip-체험"/>
           <p:cNvSpPr txBox="1"/>
           <p:nvPr/>
         </p:nvSpPr>
@@ -7615,7 +7960,7 @@
       </p:sp>
       <p:sp>
         <p:nvSpPr>
-          <p:cNvPr id="20" name="Text 18"/>
+          <p:cNvPr id="18" name="Text 16"/>
           <p:cNvSpPr txBox="1"/>
           <p:nvPr/>
         </p:nvSpPr>
@@ -7651,7 +7996,7 @@
       </p:sp>
       <p:sp>
         <p:nvSpPr>
-          <p:cNvPr id="21" name="Text 19"/>
+          <p:cNvPr id="19" name="Text 17"/>
           <p:cNvSpPr txBox="1"/>
           <p:nvPr/>
         </p:nvSpPr>
@@ -7687,7 +8032,7 @@
       </p:sp>
       <p:sp>
         <p:nvSpPr>
-          <p:cNvPr id="22" name="prop-2"/>
+          <p:cNvPr id="20" name="prop-2"/>
           <p:cNvSpPr/>
           <p:nvPr/>
         </p:nvSpPr>
@@ -7714,7 +8059,7 @@
       </p:sp>
       <p:sp>
         <p:nvSpPr>
-          <p:cNvPr id="23" name="chip-운영"/>
+          <p:cNvPr id="21" name="chip-운영"/>
           <p:cNvSpPr txBox="1"/>
           <p:nvPr/>
         </p:nvSpPr>
@@ -7754,7 +8099,7 @@
       </p:sp>
       <p:sp>
         <p:nvSpPr>
-          <p:cNvPr id="24" name="Text 22"/>
+          <p:cNvPr id="22" name="Text 20"/>
           <p:cNvSpPr txBox="1"/>
           <p:nvPr/>
         </p:nvSpPr>
@@ -7790,7 +8135,7 @@
       </p:sp>
       <p:sp>
         <p:nvSpPr>
-          <p:cNvPr id="25" name="Text 23"/>
+          <p:cNvPr id="23" name="Text 21"/>
           <p:cNvSpPr txBox="1"/>
           <p:nvPr/>
         </p:nvSpPr>
@@ -7826,7 +8171,7 @@
       </p:sp>
       <p:sp>
         <p:nvSpPr>
-          <p:cNvPr id="26" name="prop-3"/>
+          <p:cNvPr id="24" name="prop-3"/>
           <p:cNvSpPr/>
           <p:nvPr/>
         </p:nvSpPr>
@@ -7853,7 +8198,7 @@
       </p:sp>
       <p:sp>
         <p:nvSpPr>
-          <p:cNvPr id="27" name="chip-연출"/>
+          <p:cNvPr id="25" name="chip-연출"/>
           <p:cNvSpPr txBox="1"/>
           <p:nvPr/>
         </p:nvSpPr>
@@ -7893,7 +8238,7 @@
       </p:sp>
       <p:sp>
         <p:nvSpPr>
-          <p:cNvPr id="28" name="Text 26"/>
+          <p:cNvPr id="26" name="Text 24"/>
           <p:cNvSpPr txBox="1"/>
           <p:nvPr/>
         </p:nvSpPr>
@@ -7929,7 +8274,7 @@
       </p:sp>
       <p:sp>
         <p:nvSpPr>
-          <p:cNvPr id="29" name="Text 27"/>
+          <p:cNvPr id="27" name="Text 25"/>
           <p:cNvSpPr txBox="1"/>
           <p:nvPr/>
         </p:nvSpPr>
@@ -7965,7 +8310,7 @@
       </p:sp>
       <p:sp>
         <p:nvSpPr>
-          <p:cNvPr id="30" name="Text 28"/>
+          <p:cNvPr id="28" name="Text 26"/>
           <p:cNvSpPr txBox="1"/>
           <p:nvPr/>
         </p:nvSpPr>
@@ -8055,6 +8400,636 @@
           </a:p>
         </p:txBody>
       </p:sp>
+      <p:grpSp>
+        <p:nvGrpSpPr>
+          <p:cNvPr id="900" name="원안 그림"/>
+          <p:cNvGrpSpPr/>
+          <p:nvPr/>
+        </p:nvGrpSpPr>
+        <p:grpSpPr>
+          <a:xfrm>
+            <a:off x="876199" y="2331720"/>
+            <a:ext cx="3551122" cy="2212848"/>
+            <a:chOff x="6144768" y="2331720"/>
+            <a:chExt cx="5532120" cy="3447288"/>
+          </a:xfrm>
+        </p:grpSpPr>
+        <p:sp>
+          <p:nvSpPr>
+            <p:cNvPr id="901" name="Shape 18"/>
+            <p:cNvSpPr/>
+            <p:nvPr/>
+          </p:nvSpPr>
+          <p:spPr>
+            <a:xfrm>
+              <a:off x="6144768" y="2331720"/>
+              <a:ext cx="5532120" cy="3447288"/>
+            </a:xfrm>
+            <a:prstGeom prst="roundRect">
+              <a:avLst>
+                <a:gd name="adj" fmla="val 2653"/>
+              </a:avLst>
+            </a:prstGeom>
+            <a:solidFill>
+              <a:srgbClr val="EAF1F8"/>
+            </a:solidFill>
+            <a:ln w="12700">
+              <a:solidFill>
+                <a:srgbClr val="EAF1F8">
+                  <a:alpha val="0"/>
+                </a:srgbClr>
+              </a:solidFill>
+              <a:prstDash val="solid"/>
+            </a:ln>
+          </p:spPr>
+        </p:sp>
+        <p:sp>
+          <p:nvSpPr>
+            <p:cNvPr id="902" name="Shape 19"/>
+            <p:cNvSpPr/>
+            <p:nvPr/>
+          </p:nvSpPr>
+          <p:spPr>
+            <a:xfrm>
+              <a:off x="6455664" y="2926080"/>
+              <a:ext cx="1554480" cy="2139696"/>
+            </a:xfrm>
+            <a:prstGeom prst="roundRect">
+              <a:avLst>
+                <a:gd name="adj" fmla="val 5882"/>
+              </a:avLst>
+            </a:prstGeom>
+            <a:solidFill>
+              <a:srgbClr val="FFFFFF"/>
+            </a:solidFill>
+            <a:ln w="12700">
+              <a:solidFill>
+                <a:srgbClr val="DFE6EB"/>
+              </a:solidFill>
+              <a:prstDash val="solid"/>
+            </a:ln>
+          </p:spPr>
+        </p:sp>
+        <p:sp>
+          <p:nvSpPr>
+            <p:cNvPr id="903" name="Shape 20"/>
+            <p:cNvSpPr/>
+            <p:nvPr/>
+          </p:nvSpPr>
+          <p:spPr>
+            <a:xfrm>
+              <a:off x="6926031" y="3337560"/>
+              <a:ext cx="361188" cy="361188"/>
+            </a:xfrm>
+            <a:prstGeom prst="ellipse">
+              <a:avLst>
+                <a:gd name="adj" fmla="val 25316"/>
+              </a:avLst>
+            </a:prstGeom>
+            <a:solidFill>
+              <a:srgbClr val="FDE6A5"/>
+            </a:solidFill>
+            <a:ln w="12700">
+              <a:solidFill>
+                <a:srgbClr val="FDE6A5">
+                  <a:alpha val="0"/>
+                </a:srgbClr>
+              </a:solidFill>
+              <a:prstDash val="solid"/>
+            </a:ln>
+          </p:spPr>
+        </p:sp>
+        <p:sp>
+          <p:nvSpPr>
+            <p:cNvPr id="904" name="Shape 21"/>
+            <p:cNvSpPr/>
+            <p:nvPr/>
+          </p:nvSpPr>
+          <p:spPr>
+            <a:xfrm rot="10800000">
+              <a:off x="6868241" y="3655405"/>
+              <a:ext cx="491216" cy="549006"/>
+            </a:xfrm>
+            <a:prstGeom prst="arc">
+              <a:avLst>
+                <a:gd name="adj" fmla="val 18615"/>
+              </a:avLst>
+            </a:prstGeom>
+            <a:solidFill>
+              <a:srgbClr val="F7DDE5"/>
+            </a:solidFill>
+            <a:ln w="12700">
+              <a:solidFill>
+                <a:srgbClr val="F7DDE5"/>
+              </a:solidFill>
+              <a:prstDash val="solid"/>
+            </a:ln>
+          </p:spPr>
+        </p:sp>
+        <p:sp>
+          <p:nvSpPr>
+            <p:cNvPr id="905" name="Shape 22"/>
+            <p:cNvSpPr/>
+            <p:nvPr/>
+          </p:nvSpPr>
+          <p:spPr>
+            <a:xfrm>
+              <a:off x="6889913" y="3814328"/>
+              <a:ext cx="397307" cy="72238"/>
+            </a:xfrm>
+            <a:prstGeom prst="line">
+              <a:avLst>
+                <a:gd name="adj" fmla="val 126582"/>
+              </a:avLst>
+            </a:prstGeom>
+            <a:solidFill>
+              <a:srgbClr val="16243A"/>
+            </a:solidFill>
+            <a:ln w="38100">
+              <a:solidFill>
+                <a:srgbClr val="16243A"/>
+              </a:solidFill>
+              <a:prstDash val="solid"/>
+            </a:ln>
+          </p:spPr>
+        </p:sp>
+        <p:sp>
+          <p:nvSpPr>
+            <p:cNvPr id="906" name="Shape 23"/>
+            <p:cNvSpPr/>
+            <p:nvPr/>
+          </p:nvSpPr>
+          <p:spPr>
+            <a:xfrm>
+              <a:off x="6933255" y="4117726"/>
+              <a:ext cx="-101133" cy="260055"/>
+            </a:xfrm>
+            <a:prstGeom prst="line">
+              <a:avLst>
+                <a:gd name="adj" fmla="val -90416"/>
+              </a:avLst>
+            </a:prstGeom>
+            <a:solidFill>
+              <a:srgbClr val="16243A"/>
+            </a:solidFill>
+            <a:ln w="38100">
+              <a:solidFill>
+                <a:srgbClr val="16243A"/>
+              </a:solidFill>
+              <a:prstDash val="solid"/>
+            </a:ln>
+          </p:spPr>
+        </p:sp>
+        <p:sp>
+          <p:nvSpPr>
+            <p:cNvPr id="907" name="Shape 24"/>
+            <p:cNvSpPr/>
+            <p:nvPr/>
+          </p:nvSpPr>
+          <p:spPr>
+            <a:xfrm>
+              <a:off x="7207758" y="4117726"/>
+              <a:ext cx="101133" cy="260055"/>
+            </a:xfrm>
+            <a:prstGeom prst="line">
+              <a:avLst>
+                <a:gd name="adj" fmla="val 90416"/>
+              </a:avLst>
+            </a:prstGeom>
+            <a:solidFill>
+              <a:srgbClr val="16243A"/>
+            </a:solidFill>
+            <a:ln w="38100">
+              <a:solidFill>
+                <a:srgbClr val="16243A"/>
+              </a:solidFill>
+              <a:prstDash val="solid"/>
+            </a:ln>
+          </p:spPr>
+        </p:sp>
+        <p:sp>
+          <p:nvSpPr>
+            <p:cNvPr id="908" name="Shape 25"/>
+            <p:cNvSpPr/>
+            <p:nvPr/>
+          </p:nvSpPr>
+          <p:spPr>
+            <a:xfrm>
+              <a:off x="7019940" y="3496483"/>
+              <a:ext cx="25283" cy="25283"/>
+            </a:xfrm>
+            <a:prstGeom prst="ellipse">
+              <a:avLst>
+                <a:gd name="adj" fmla="val 361666"/>
+              </a:avLst>
+            </a:prstGeom>
+            <a:solidFill>
+              <a:srgbClr val="16243A"/>
+            </a:solidFill>
+            <a:ln w="12700">
+              <a:solidFill>
+                <a:srgbClr val="16243A">
+                  <a:alpha val="0"/>
+                </a:srgbClr>
+              </a:solidFill>
+              <a:prstDash val="solid"/>
+            </a:ln>
+          </p:spPr>
+        </p:sp>
+        <p:sp>
+          <p:nvSpPr>
+            <p:cNvPr id="909" name="Shape 26"/>
+            <p:cNvSpPr/>
+            <p:nvPr/>
+          </p:nvSpPr>
+          <p:spPr>
+            <a:xfrm>
+              <a:off x="7142744" y="3496483"/>
+              <a:ext cx="25283" cy="25283"/>
+            </a:xfrm>
+            <a:prstGeom prst="ellipse">
+              <a:avLst>
+                <a:gd name="adj" fmla="val 361666"/>
+              </a:avLst>
+            </a:prstGeom>
+            <a:solidFill>
+              <a:srgbClr val="16243A"/>
+            </a:solidFill>
+            <a:ln w="12700">
+              <a:solidFill>
+                <a:srgbClr val="16243A">
+                  <a:alpha val="0"/>
+                </a:srgbClr>
+              </a:solidFill>
+              <a:prstDash val="solid"/>
+            </a:ln>
+          </p:spPr>
+        </p:sp>
+        <p:sp>
+          <p:nvSpPr>
+            <p:cNvPr id="910" name="Shape 27"/>
+            <p:cNvSpPr/>
+            <p:nvPr/>
+          </p:nvSpPr>
+          <p:spPr>
+            <a:xfrm>
+              <a:off x="8183880" y="3813048"/>
+              <a:ext cx="548640" cy="685800"/>
+            </a:xfrm>
+            <a:prstGeom prst="chevron">
+              <a:avLst>
+                <a:gd name="adj" fmla="val 16667"/>
+              </a:avLst>
+            </a:prstGeom>
+            <a:solidFill>
+              <a:srgbClr val="5DCDC1"/>
+            </a:solidFill>
+            <a:ln w="12700">
+              <a:solidFill>
+                <a:srgbClr val="5DCDC1">
+                  <a:alpha val="0"/>
+                </a:srgbClr>
+              </a:solidFill>
+              <a:prstDash val="solid"/>
+            </a:ln>
+          </p:spPr>
+        </p:sp>
+        <p:sp>
+          <p:nvSpPr>
+            <p:cNvPr id="911" name="Shape 28"/>
+            <p:cNvSpPr/>
+            <p:nvPr/>
+          </p:nvSpPr>
+          <p:spPr>
+            <a:xfrm>
+              <a:off x="8942832" y="2843784"/>
+              <a:ext cx="2249424" cy="2340864"/>
+            </a:xfrm>
+            <a:prstGeom prst="roundRect">
+              <a:avLst>
+                <a:gd name="adj" fmla="val 4065"/>
+              </a:avLst>
+            </a:prstGeom>
+            <a:solidFill>
+              <a:srgbClr val="16243A"/>
+            </a:solidFill>
+            <a:ln w="12700">
+              <a:solidFill>
+                <a:srgbClr val="16243A">
+                  <a:alpha val="0"/>
+                </a:srgbClr>
+              </a:solidFill>
+              <a:prstDash val="solid"/>
+            </a:ln>
+          </p:spPr>
+        </p:sp>
+        <p:sp>
+          <p:nvSpPr>
+            <p:cNvPr id="912" name="Shape 29"/>
+            <p:cNvSpPr/>
+            <p:nvPr/>
+          </p:nvSpPr>
+          <p:spPr>
+            <a:xfrm>
+              <a:off x="9089136" y="2999232"/>
+              <a:ext cx="1947672" cy="1874520"/>
+            </a:xfrm>
+            <a:prstGeom prst="roundRect">
+              <a:avLst>
+                <a:gd name="adj" fmla="val 4878"/>
+              </a:avLst>
+            </a:prstGeom>
+            <a:solidFill>
+              <a:srgbClr val="D8EFF0"/>
+            </a:solidFill>
+            <a:ln w="12700">
+              <a:solidFill>
+                <a:srgbClr val="D8EFF0">
+                  <a:alpha val="0"/>
+                </a:srgbClr>
+              </a:solidFill>
+              <a:prstDash val="solid"/>
+            </a:ln>
+          </p:spPr>
+        </p:sp>
+        <p:sp>
+          <p:nvSpPr>
+            <p:cNvPr id="913" name="Shape 30"/>
+            <p:cNvSpPr/>
+            <p:nvPr/>
+          </p:nvSpPr>
+          <p:spPr>
+            <a:xfrm>
+              <a:off x="9792858" y="3182112"/>
+              <a:ext cx="393192" cy="393192"/>
+            </a:xfrm>
+            <a:prstGeom prst="ellipse">
+              <a:avLst>
+                <a:gd name="adj" fmla="val 23256"/>
+              </a:avLst>
+            </a:prstGeom>
+            <a:solidFill>
+              <a:srgbClr val="FDE6A5"/>
+            </a:solidFill>
+            <a:ln w="12700">
+              <a:solidFill>
+                <a:srgbClr val="FDE6A5">
+                  <a:alpha val="0"/>
+                </a:srgbClr>
+              </a:solidFill>
+              <a:prstDash val="solid"/>
+            </a:ln>
+          </p:spPr>
+        </p:sp>
+        <p:sp>
+          <p:nvSpPr>
+            <p:cNvPr id="914" name="Shape 31"/>
+            <p:cNvSpPr/>
+            <p:nvPr/>
+          </p:nvSpPr>
+          <p:spPr>
+            <a:xfrm rot="10800000">
+              <a:off x="9729948" y="3528121"/>
+              <a:ext cx="534741" cy="597652"/>
+            </a:xfrm>
+            <a:prstGeom prst="arc">
+              <a:avLst>
+                <a:gd name="adj" fmla="val 17100"/>
+              </a:avLst>
+            </a:prstGeom>
+            <a:solidFill>
+              <a:srgbClr val="F7DDE5"/>
+            </a:solidFill>
+            <a:ln w="12700">
+              <a:solidFill>
+                <a:srgbClr val="F7DDE5"/>
+              </a:solidFill>
+              <a:prstDash val="solid"/>
+            </a:ln>
+          </p:spPr>
+        </p:sp>
+        <p:sp>
+          <p:nvSpPr>
+            <p:cNvPr id="915" name="Shape 32"/>
+            <p:cNvSpPr/>
+            <p:nvPr/>
+          </p:nvSpPr>
+          <p:spPr>
+            <a:xfrm>
+              <a:off x="9753539" y="3701125"/>
+              <a:ext cx="432511" cy="78638"/>
+            </a:xfrm>
+            <a:prstGeom prst="line">
+              <a:avLst>
+                <a:gd name="adj" fmla="val 116280"/>
+              </a:avLst>
+            </a:prstGeom>
+            <a:solidFill>
+              <a:srgbClr val="16243A"/>
+            </a:solidFill>
+            <a:ln w="38100">
+              <a:solidFill>
+                <a:srgbClr val="16243A"/>
+              </a:solidFill>
+              <a:prstDash val="solid"/>
+            </a:ln>
+          </p:spPr>
+        </p:sp>
+        <p:sp>
+          <p:nvSpPr>
+            <p:cNvPr id="916" name="Shape 33"/>
+            <p:cNvSpPr/>
+            <p:nvPr/>
+          </p:nvSpPr>
+          <p:spPr>
+            <a:xfrm>
+              <a:off x="9800722" y="4031407"/>
+              <a:ext cx="-110094" cy="283098"/>
+            </a:xfrm>
+            <a:prstGeom prst="line">
+              <a:avLst>
+                <a:gd name="adj" fmla="val -83056"/>
+              </a:avLst>
+            </a:prstGeom>
+            <a:solidFill>
+              <a:srgbClr val="16243A"/>
+            </a:solidFill>
+            <a:ln w="38100">
+              <a:solidFill>
+                <a:srgbClr val="16243A"/>
+              </a:solidFill>
+              <a:prstDash val="solid"/>
+            </a:ln>
+          </p:spPr>
+        </p:sp>
+        <p:sp>
+          <p:nvSpPr>
+            <p:cNvPr id="917" name="Shape 34"/>
+            <p:cNvSpPr/>
+            <p:nvPr/>
+          </p:nvSpPr>
+          <p:spPr>
+            <a:xfrm>
+              <a:off x="10099548" y="4031407"/>
+              <a:ext cx="110094" cy="283098"/>
+            </a:xfrm>
+            <a:prstGeom prst="line">
+              <a:avLst>
+                <a:gd name="adj" fmla="val 83056"/>
+              </a:avLst>
+            </a:prstGeom>
+            <a:solidFill>
+              <a:srgbClr val="16243A"/>
+            </a:solidFill>
+            <a:ln w="38100">
+              <a:solidFill>
+                <a:srgbClr val="16243A"/>
+              </a:solidFill>
+              <a:prstDash val="solid"/>
+            </a:ln>
+          </p:spPr>
+        </p:sp>
+        <p:sp>
+          <p:nvSpPr>
+            <p:cNvPr id="918" name="Shape 35"/>
+            <p:cNvSpPr/>
+            <p:nvPr/>
+          </p:nvSpPr>
+          <p:spPr>
+            <a:xfrm>
+              <a:off x="9895088" y="3355116"/>
+              <a:ext cx="27523" cy="27523"/>
+            </a:xfrm>
+            <a:prstGeom prst="ellipse">
+              <a:avLst>
+                <a:gd name="adj" fmla="val 332231"/>
+              </a:avLst>
+            </a:prstGeom>
+            <a:solidFill>
+              <a:srgbClr val="16243A"/>
+            </a:solidFill>
+            <a:ln w="12700">
+              <a:solidFill>
+                <a:srgbClr val="16243A">
+                  <a:alpha val="0"/>
+                </a:srgbClr>
+              </a:solidFill>
+              <a:prstDash val="solid"/>
+            </a:ln>
+          </p:spPr>
+        </p:sp>
+        <p:sp>
+          <p:nvSpPr>
+            <p:cNvPr id="919" name="Shape 36"/>
+            <p:cNvSpPr/>
+            <p:nvPr/>
+          </p:nvSpPr>
+          <p:spPr>
+            <a:xfrm>
+              <a:off x="10028773" y="3355116"/>
+              <a:ext cx="27523" cy="27523"/>
+            </a:xfrm>
+            <a:prstGeom prst="ellipse">
+              <a:avLst>
+                <a:gd name="adj" fmla="val 332231"/>
+              </a:avLst>
+            </a:prstGeom>
+            <a:solidFill>
+              <a:srgbClr val="16243A"/>
+            </a:solidFill>
+            <a:ln w="12700">
+              <a:solidFill>
+                <a:srgbClr val="16243A">
+                  <a:alpha val="0"/>
+                </a:srgbClr>
+              </a:solidFill>
+              <a:prstDash val="solid"/>
+            </a:ln>
+          </p:spPr>
+        </p:sp>
+        <p:sp>
+          <p:nvSpPr>
+            <p:cNvPr id="920" name="Text 37"/>
+            <p:cNvSpPr/>
+            <p:nvPr/>
+          </p:nvSpPr>
+          <p:spPr>
+            <a:xfrm>
+              <a:off x="6784848" y="5276088"/>
+              <a:ext cx="1097280" cy="274320"/>
+            </a:xfrm>
+            <a:prstGeom prst="rect">
+              <a:avLst/>
+            </a:prstGeom>
+            <a:noFill/>
+            <a:ln/>
+          </p:spPr>
+          <p:txBody>
+            <a:bodyPr wrap="square" lIns="0" tIns="0" rIns="0" bIns="0" rtlCol="0" anchor="ctr">
+              <a:normAutofit/>
+            </a:bodyPr>
+            <a:lstStyle/>
+            <a:p>
+              <a:pPr algn="ctr" indent="0" marL="0">
+                <a:buNone/>
+              </a:pPr>
+              <a:r>
+                <a:rPr lang="en-US" sz="700" b="1" dirty="0">
+                  <a:solidFill>
+                    <a:srgbClr val="617287"/>
+                  </a:solidFill>
+                  <a:latin typeface="Malgun Gothic" pitchFamily="34" charset="0"/>
+                  <a:ea typeface="Malgun Gothic" pitchFamily="34" charset="-122"/>
+                  <a:cs typeface="Malgun Gothic" pitchFamily="34" charset="-120"/>
+                </a:rPr>
+                <a:t>SCAN</a:t>
+              </a:r>
+              <a:endParaRPr lang="en-US" sz="700" dirty="0"/>
+            </a:p>
+          </p:txBody>
+        </p:sp>
+        <p:sp>
+          <p:nvSpPr>
+            <p:cNvPr id="921" name="Text 38"/>
+            <p:cNvSpPr/>
+            <p:nvPr/>
+          </p:nvSpPr>
+          <p:spPr>
+            <a:xfrm>
+              <a:off x="8997696" y="5276088"/>
+              <a:ext cx="2103120" cy="274320"/>
+            </a:xfrm>
+            <a:prstGeom prst="rect">
+              <a:avLst/>
+            </a:prstGeom>
+            <a:noFill/>
+            <a:ln/>
+          </p:spPr>
+          <p:txBody>
+            <a:bodyPr wrap="square" lIns="0" tIns="0" rIns="0" bIns="0" rtlCol="0" anchor="ctr">
+              <a:normAutofit/>
+            </a:bodyPr>
+            <a:lstStyle/>
+            <a:p>
+              <a:pPr algn="ctr" indent="0" marL="0">
+                <a:buNone/>
+              </a:pPr>
+              <a:r>
+                <a:rPr lang="en-US" sz="700" b="1" dirty="0">
+                  <a:solidFill>
+                    <a:srgbClr val="617287"/>
+                  </a:solidFill>
+                  <a:latin typeface="Malgun Gothic" pitchFamily="34" charset="0"/>
+                  <a:ea typeface="Malgun Gothic" pitchFamily="34" charset="-122"/>
+                  <a:cs typeface="Malgun Gothic" pitchFamily="34" charset="-120"/>
+                </a:rPr>
+                <a:t>2D / 3D + α</a:t>
+              </a:r>
+              <a:endParaRPr lang="en-US" sz="700" dirty="0"/>
+            </a:p>
+          </p:txBody>
+        </p:sp>
+      </p:grpSp>
     </p:spTree>
   </p:cSld>
   <p:clrMapOvr>
@@ -8194,18 +9169,54 @@
       </p:sp>
       <p:sp>
         <p:nvSpPr>
-          <p:cNvPr id="5" name="original"/>
+          <p:cNvPr id="5" name="Text 3"/>
+          <p:cNvSpPr txBox="1"/>
+          <p:nvPr/>
+        </p:nvSpPr>
+        <p:spPr>
+          <a:xfrm>
+            <a:off x="548640" y="1965960"/>
+            <a:ext cx="1828800" cy="365760"/>
+          </a:xfrm>
+          <a:prstGeom prst="rect">
+            <a:avLst/>
+          </a:prstGeom>
+          <a:noFill/>
+          <a:ln/>
+        </p:spPr>
+        <p:txBody>
+          <a:bodyPr wrap="square" lIns="0" tIns="0" rIns="0" bIns="0" rtlCol="0" anchor="ctr"/>
+          <a:lstStyle/>
+          <a:p>
+            <a:pPr indent="0" marL="0">
+              <a:buNone/>
+            </a:pPr>
+            <a:r>
+              <a:rPr lang="en-US" sz="1700" b="1" dirty="0">
+                <a:solidFill>
+                  <a:srgbClr val="617287"/>
+                </a:solidFill>
+              </a:rPr>
+              <a:t>원안</a:t>
+            </a:r>
+            <a:endParaRPr lang="en-US" sz="1700" dirty="0"/>
+          </a:p>
+        </p:txBody>
+      </p:sp>
+      <p:sp>
+        <p:nvSpPr>
+          <p:cNvPr id="6" name="original"/>
           <p:cNvSpPr/>
           <p:nvPr/>
         </p:nvSpPr>
         <p:spPr>
           <a:xfrm>
-            <a:off x="548640" y="1965960"/>
-            <a:ext cx="4206240" cy="3794760"/>
+            <a:off x="548640" y="4645152"/>
+            <a:ext cx="4206240" cy="1115568"/>
           </a:xfrm>
           <a:prstGeom prst="roundRect">
             <a:avLst>
-              <a:gd name="adj" fmla="val 2892"/>
+              <a:gd name="adj" fmla="val 9836"/>
             </a:avLst>
           </a:prstGeom>
           <a:solidFill>
@@ -8221,50 +9232,14 @@
       </p:sp>
       <p:sp>
         <p:nvSpPr>
-          <p:cNvPr id="6" name="Text 4"/>
-          <p:cNvSpPr txBox="1"/>
-          <p:nvPr/>
-        </p:nvSpPr>
-        <p:spPr>
-          <a:xfrm>
-            <a:off x="822960" y="2121408"/>
-            <a:ext cx="1828800" cy="365760"/>
-          </a:xfrm>
-          <a:prstGeom prst="rect">
-            <a:avLst/>
-          </a:prstGeom>
-          <a:noFill/>
-          <a:ln/>
-        </p:spPr>
-        <p:txBody>
-          <a:bodyPr wrap="square" lIns="0" tIns="0" rIns="0" bIns="0" rtlCol="0" anchor="ctr"/>
-          <a:lstStyle/>
-          <a:p>
-            <a:pPr indent="0" marL="0">
-              <a:buNone/>
-            </a:pPr>
-            <a:r>
-              <a:rPr lang="en-US" sz="1700" b="1" dirty="0">
-                <a:solidFill>
-                  <a:srgbClr val="617287"/>
-                </a:solidFill>
-              </a:rPr>
-              <a:t>원안</a:t>
-            </a:r>
-            <a:endParaRPr lang="en-US" sz="1700" dirty="0"/>
-          </a:p>
-        </p:txBody>
-      </p:sp>
-      <p:sp>
-        <p:nvSpPr>
           <p:cNvPr id="7" name="chip-3-1"/>
           <p:cNvSpPr txBox="1"/>
           <p:nvPr/>
         </p:nvSpPr>
         <p:spPr>
           <a:xfrm>
-            <a:off x="822960" y="2651760"/>
-            <a:ext cx="566928" cy="292608"/>
+            <a:off x="685800" y="4773168"/>
+            <a:ext cx="502920" cy="292608"/>
           </a:xfrm>
           <a:prstGeom prst="roundRect">
             <a:avLst>
@@ -8303,8 +9278,8 @@
         </p:nvSpPr>
         <p:spPr>
           <a:xfrm>
-            <a:off x="1508760" y="2615184"/>
-            <a:ext cx="3108960" cy="365760"/>
+            <a:off x="1280160" y="4718304"/>
+            <a:ext cx="3383280" cy="457200"/>
           </a:xfrm>
           <a:prstGeom prst="rect">
             <a:avLst/>
@@ -8320,63 +9295,38 @@
               <a:buNone/>
             </a:pPr>
             <a:r>
-              <a:rPr lang="en-US" sz="1500" b="1" dirty="0">
+              <a:rPr lang="en-US" sz="1100" b="1" dirty="0">
                 <a:solidFill>
                   <a:srgbClr val="16243A"/>
                 </a:solidFill>
               </a:rPr>
-              <a:t>등장 이벤트</a:t>
-            </a:r>
-            <a:endParaRPr lang="en-US" sz="1500" dirty="0"/>
-          </a:p>
-        </p:txBody>
-      </p:sp>
-      <p:sp>
-        <p:nvSpPr>
-          <p:cNvPr id="9" name="Text 7"/>
-          <p:cNvSpPr txBox="1"/>
-          <p:nvPr/>
-        </p:nvSpPr>
-        <p:spPr>
-          <a:xfrm>
-            <a:off x="822960" y="3063240"/>
-            <a:ext cx="3703320" cy="960120"/>
-          </a:xfrm>
-          <a:prstGeom prst="rect">
-            <a:avLst/>
-          </a:prstGeom>
-          <a:noFill/>
-          <a:ln/>
-        </p:spPr>
-        <p:txBody>
-          <a:bodyPr wrap="square" lIns="0" tIns="0" rIns="0" bIns="0" rtlCol="0" anchor="t"/>
-          <a:lstStyle/>
-          <a:p>
+              <a:t>등장 이벤트  </a:t>
+            </a:r>
             <a:pPr indent="0" marL="0">
               <a:buNone/>
             </a:pPr>
             <a:r>
-              <a:rPr lang="en-US" sz="1300" dirty="0">
+              <a:rPr lang="en-US" sz="1100" dirty="0">
                 <a:solidFill>
                   <a:srgbClr val="617287"/>
                 </a:solidFill>
               </a:rPr>
-              <a:t>WELCOME! 스캔 완료 시 메인 월에 캐릭터가 크게 등장하여 춤추거나 인사</a:t>
-            </a:r>
-            <a:endParaRPr lang="en-US" sz="1300" dirty="0"/>
-          </a:p>
-        </p:txBody>
-      </p:sp>
-      <p:sp>
-        <p:nvSpPr>
-          <p:cNvPr id="10" name="chip-3-2"/>
-          <p:cNvSpPr txBox="1"/>
-          <p:nvPr/>
-        </p:nvSpPr>
-        <p:spPr>
-          <a:xfrm>
-            <a:off x="822960" y="4160520"/>
-            <a:ext cx="566928" cy="292608"/>
+              <a:t>스캔 완료 시 메인 월에 크게 등장해 춤 · 인사</a:t>
+            </a:r>
+            <a:endParaRPr lang="en-US" sz="1100" dirty="0"/>
+          </a:p>
+        </p:txBody>
+      </p:sp>
+      <p:sp>
+        <p:nvSpPr>
+          <p:cNvPr id="9" name="chip-3-2"/>
+          <p:cNvSpPr txBox="1"/>
+          <p:nvPr/>
+        </p:nvSpPr>
+        <p:spPr>
+          <a:xfrm>
+            <a:off x="685800" y="5276088"/>
+            <a:ext cx="502920" cy="292608"/>
           </a:xfrm>
           <a:prstGeom prst="roundRect">
             <a:avLst>
@@ -8409,79 +9359,54 @@
       </p:sp>
       <p:sp>
         <p:nvSpPr>
+          <p:cNvPr id="10" name="Text 8"/>
+          <p:cNvSpPr txBox="1"/>
+          <p:nvPr/>
+        </p:nvSpPr>
+        <p:spPr>
+          <a:xfrm>
+            <a:off x="1280160" y="5221224"/>
+            <a:ext cx="3383280" cy="457200"/>
+          </a:xfrm>
+          <a:prstGeom prst="rect">
+            <a:avLst/>
+          </a:prstGeom>
+          <a:noFill/>
+          <a:ln/>
+        </p:spPr>
+        <p:txBody>
+          <a:bodyPr wrap="square" lIns="0" tIns="0" rIns="0" bIns="0" rtlCol="0" anchor="ctr"/>
+          <a:lstStyle/>
+          <a:p>
+            <a:pPr indent="0" marL="0">
+              <a:buNone/>
+            </a:pPr>
+            <a:r>
+              <a:rPr lang="en-US" sz="1100" b="1" dirty="0">
+                <a:solidFill>
+                  <a:srgbClr val="16243A"/>
+                </a:solidFill>
+              </a:rPr>
+              <a:t>연못 / 가든 인터랙션  </a:t>
+            </a:r>
+            <a:pPr indent="0" marL="0">
+              <a:buNone/>
+            </a:pPr>
+            <a:r>
+              <a:rPr lang="en-US" sz="1100" dirty="0">
+                <a:solidFill>
+                  <a:srgbClr val="617287"/>
+                </a:solidFill>
+              </a:rPr>
+              <a:t>다른 캐릭터와 자유롭게 이동 · 터치 반응 검토</a:t>
+            </a:r>
+            <a:endParaRPr lang="en-US" sz="1100" dirty="0"/>
+          </a:p>
+        </p:txBody>
+      </p:sp>
+      <p:sp>
+        <p:nvSpPr>
           <p:cNvPr id="11" name="Text 9"/>
-          <p:cNvSpPr txBox="1"/>
-          <p:nvPr/>
-        </p:nvSpPr>
-        <p:spPr>
-          <a:xfrm>
-            <a:off x="1508760" y="4123944"/>
-            <a:ext cx="3108960" cy="365760"/>
-          </a:xfrm>
-          <a:prstGeom prst="rect">
-            <a:avLst/>
-          </a:prstGeom>
-          <a:noFill/>
-          <a:ln/>
-        </p:spPr>
-        <p:txBody>
-          <a:bodyPr wrap="square" lIns="0" tIns="0" rIns="0" bIns="0" rtlCol="0" anchor="ctr"/>
-          <a:lstStyle/>
-          <a:p>
-            <a:pPr indent="0" marL="0">
-              <a:buNone/>
-            </a:pPr>
-            <a:r>
-              <a:rPr lang="en-US" sz="1500" b="1" dirty="0">
-                <a:solidFill>
-                  <a:srgbClr val="16243A"/>
-                </a:solidFill>
-              </a:rPr>
-              <a:t>연못 / 가든 인터랙션</a:t>
-            </a:r>
-            <a:endParaRPr lang="en-US" sz="1500" dirty="0"/>
-          </a:p>
-        </p:txBody>
-      </p:sp>
-      <p:sp>
-        <p:nvSpPr>
-          <p:cNvPr id="12" name="Text 10"/>
-          <p:cNvSpPr txBox="1"/>
-          <p:nvPr/>
-        </p:nvSpPr>
-        <p:spPr>
-          <a:xfrm>
-            <a:off x="822960" y="4572000"/>
-            <a:ext cx="3703320" cy="960120"/>
-          </a:xfrm>
-          <a:prstGeom prst="rect">
-            <a:avLst/>
-          </a:prstGeom>
-          <a:noFill/>
-          <a:ln/>
-        </p:spPr>
-        <p:txBody>
-          <a:bodyPr wrap="square" lIns="0" tIns="0" rIns="0" bIns="0" rtlCol="0" anchor="t"/>
-          <a:lstStyle/>
-          <a:p>
-            <a:pPr indent="0" marL="0">
-              <a:buNone/>
-            </a:pPr>
-            <a:r>
-              <a:rPr lang="en-US" sz="1300" dirty="0">
-                <a:solidFill>
-                  <a:srgbClr val="617287"/>
-                </a:solidFill>
-              </a:rPr>
-              <a:t>다른 아이들의 캐릭터와 함께 자유롭게 이동 · 터치에 반응하는 방식 검토</a:t>
-            </a:r>
-            <a:endParaRPr lang="en-US" sz="1300" dirty="0"/>
-          </a:p>
-        </p:txBody>
-      </p:sp>
-      <p:sp>
-        <p:nvSpPr>
-          <p:cNvPr id="13" name="Text 11"/>
           <p:cNvSpPr txBox="1"/>
           <p:nvPr/>
         </p:nvSpPr>
@@ -8517,7 +9442,7 @@
       </p:sp>
       <p:sp>
         <p:nvSpPr>
-          <p:cNvPr id="14" name="prop-0"/>
+          <p:cNvPr id="12" name="prop-0"/>
           <p:cNvSpPr/>
           <p:nvPr/>
         </p:nvSpPr>
@@ -8544,7 +9469,7 @@
       </p:sp>
       <p:sp>
         <p:nvSpPr>
-          <p:cNvPr id="15" name="chip-연출"/>
+          <p:cNvPr id="13" name="chip-연출"/>
           <p:cNvSpPr txBox="1"/>
           <p:nvPr/>
         </p:nvSpPr>
@@ -8584,7 +9509,7 @@
       </p:sp>
       <p:sp>
         <p:nvSpPr>
-          <p:cNvPr id="16" name="Text 14"/>
+          <p:cNvPr id="14" name="Text 12"/>
           <p:cNvSpPr txBox="1"/>
           <p:nvPr/>
         </p:nvSpPr>
@@ -8620,7 +9545,7 @@
       </p:sp>
       <p:sp>
         <p:nvSpPr>
-          <p:cNvPr id="17" name="Text 15"/>
+          <p:cNvPr id="15" name="Text 13"/>
           <p:cNvSpPr txBox="1"/>
           <p:nvPr/>
         </p:nvSpPr>
@@ -8656,7 +9581,7 @@
       </p:sp>
       <p:sp>
         <p:nvSpPr>
-          <p:cNvPr id="18" name="prop-1"/>
+          <p:cNvPr id="16" name="prop-1"/>
           <p:cNvSpPr/>
           <p:nvPr/>
         </p:nvSpPr>
@@ -8683,7 +9608,7 @@
       </p:sp>
       <p:sp>
         <p:nvSpPr>
-          <p:cNvPr id="19" name="chip-체험"/>
+          <p:cNvPr id="17" name="chip-체험"/>
           <p:cNvSpPr txBox="1"/>
           <p:nvPr/>
         </p:nvSpPr>
@@ -8723,7 +9648,7 @@
       </p:sp>
       <p:sp>
         <p:nvSpPr>
-          <p:cNvPr id="20" name="Text 18"/>
+          <p:cNvPr id="18" name="Text 16"/>
           <p:cNvSpPr txBox="1"/>
           <p:nvPr/>
         </p:nvSpPr>
@@ -8759,7 +9684,7 @@
       </p:sp>
       <p:sp>
         <p:nvSpPr>
-          <p:cNvPr id="21" name="Text 19"/>
+          <p:cNvPr id="19" name="Text 17"/>
           <p:cNvSpPr txBox="1"/>
           <p:nvPr/>
         </p:nvSpPr>
@@ -8795,7 +9720,7 @@
       </p:sp>
       <p:sp>
         <p:nvSpPr>
-          <p:cNvPr id="22" name="prop-2"/>
+          <p:cNvPr id="20" name="prop-2"/>
           <p:cNvSpPr/>
           <p:nvPr/>
         </p:nvSpPr>
@@ -8822,7 +9747,7 @@
       </p:sp>
       <p:sp>
         <p:nvSpPr>
-          <p:cNvPr id="23" name="chip-체험"/>
+          <p:cNvPr id="21" name="chip-체험"/>
           <p:cNvSpPr txBox="1"/>
           <p:nvPr/>
         </p:nvSpPr>
@@ -8862,7 +9787,7 @@
       </p:sp>
       <p:sp>
         <p:nvSpPr>
-          <p:cNvPr id="24" name="Text 22"/>
+          <p:cNvPr id="22" name="Text 20"/>
           <p:cNvSpPr txBox="1"/>
           <p:nvPr/>
         </p:nvSpPr>
@@ -8898,7 +9823,7 @@
       </p:sp>
       <p:sp>
         <p:nvSpPr>
-          <p:cNvPr id="25" name="Text 23"/>
+          <p:cNvPr id="23" name="Text 21"/>
           <p:cNvSpPr txBox="1"/>
           <p:nvPr/>
         </p:nvSpPr>
@@ -8934,7 +9859,7 @@
       </p:sp>
       <p:sp>
         <p:nvSpPr>
-          <p:cNvPr id="26" name="prop-3"/>
+          <p:cNvPr id="24" name="prop-3"/>
           <p:cNvSpPr/>
           <p:nvPr/>
         </p:nvSpPr>
@@ -8961,7 +9886,7 @@
       </p:sp>
       <p:sp>
         <p:nvSpPr>
-          <p:cNvPr id="27" name="chip-운영"/>
+          <p:cNvPr id="25" name="chip-운영"/>
           <p:cNvSpPr txBox="1"/>
           <p:nvPr/>
         </p:nvSpPr>
@@ -9001,7 +9926,7 @@
       </p:sp>
       <p:sp>
         <p:nvSpPr>
-          <p:cNvPr id="28" name="Text 26"/>
+          <p:cNvPr id="26" name="Text 24"/>
           <p:cNvSpPr txBox="1"/>
           <p:nvPr/>
         </p:nvSpPr>
@@ -9037,7 +9962,7 @@
       </p:sp>
       <p:sp>
         <p:nvSpPr>
-          <p:cNvPr id="29" name="Text 27"/>
+          <p:cNvPr id="27" name="Text 25"/>
           <p:cNvSpPr txBox="1"/>
           <p:nvPr/>
         </p:nvSpPr>
@@ -9073,7 +9998,7 @@
       </p:sp>
       <p:sp>
         <p:nvSpPr>
-          <p:cNvPr id="30" name="Text 28"/>
+          <p:cNvPr id="28" name="Text 26"/>
           <p:cNvSpPr txBox="1"/>
           <p:nvPr/>
         </p:nvSpPr>
@@ -9163,6 +10088,626 @@
           </a:p>
         </p:txBody>
       </p:sp>
+      <p:grpSp>
+        <p:nvGrpSpPr>
+          <p:cNvPr id="900" name="원안 그림"/>
+          <p:cNvGrpSpPr/>
+          <p:nvPr/>
+        </p:nvGrpSpPr>
+        <p:grpSpPr>
+          <a:xfrm>
+            <a:off x="856040" y="2331720"/>
+            <a:ext cx="3591440" cy="2212848"/>
+            <a:chOff x="6135624" y="2331720"/>
+            <a:chExt cx="5550408" cy="3419856"/>
+          </a:xfrm>
+        </p:grpSpPr>
+        <p:sp>
+          <p:nvSpPr>
+            <p:cNvPr id="901" name="Shape 18"/>
+            <p:cNvSpPr/>
+            <p:nvPr/>
+          </p:nvSpPr>
+          <p:spPr>
+            <a:xfrm>
+              <a:off x="6135624" y="2331720"/>
+              <a:ext cx="5550408" cy="3419856"/>
+            </a:xfrm>
+            <a:prstGeom prst="roundRect">
+              <a:avLst>
+                <a:gd name="adj" fmla="val 2674"/>
+              </a:avLst>
+            </a:prstGeom>
+            <a:solidFill>
+              <a:srgbClr val="DBEEF0"/>
+            </a:solidFill>
+            <a:ln w="12700">
+              <a:solidFill>
+                <a:srgbClr val="DBEEF0">
+                  <a:alpha val="0"/>
+                </a:srgbClr>
+              </a:solidFill>
+              <a:prstDash val="solid"/>
+            </a:ln>
+          </p:spPr>
+        </p:sp>
+        <p:sp>
+          <p:nvSpPr>
+            <p:cNvPr id="902" name="Shape 19"/>
+            <p:cNvSpPr/>
+            <p:nvPr/>
+          </p:nvSpPr>
+          <p:spPr>
+            <a:xfrm>
+              <a:off x="6483096" y="3977640"/>
+              <a:ext cx="4846320" cy="1353312"/>
+            </a:xfrm>
+            <a:prstGeom prst="ellipse">
+              <a:avLst>
+                <a:gd name="adj" fmla="val 6757"/>
+              </a:avLst>
+            </a:prstGeom>
+            <a:solidFill>
+              <a:srgbClr val="9BCFDA"/>
+            </a:solidFill>
+            <a:ln w="12700">
+              <a:solidFill>
+                <a:srgbClr val="9BCFDA">
+                  <a:alpha val="0"/>
+                </a:srgbClr>
+              </a:solidFill>
+              <a:prstDash val="solid"/>
+            </a:ln>
+          </p:spPr>
+        </p:sp>
+        <p:sp>
+          <p:nvSpPr>
+            <p:cNvPr id="903" name="Shape 20"/>
+            <p:cNvSpPr/>
+            <p:nvPr/>
+          </p:nvSpPr>
+          <p:spPr>
+            <a:xfrm>
+              <a:off x="7589520" y="4178808"/>
+              <a:ext cx="1069848" cy="438912"/>
+            </a:xfrm>
+            <a:prstGeom prst="ellipse">
+              <a:avLst>
+                <a:gd name="adj" fmla="val 20833"/>
+              </a:avLst>
+            </a:prstGeom>
+            <a:solidFill>
+              <a:srgbClr val="7ABBA0"/>
+            </a:solidFill>
+            <a:ln w="12700">
+              <a:solidFill>
+                <a:srgbClr val="7ABBA0">
+                  <a:alpha val="0"/>
+                </a:srgbClr>
+              </a:solidFill>
+              <a:prstDash val="solid"/>
+            </a:ln>
+          </p:spPr>
+        </p:sp>
+        <p:sp>
+          <p:nvSpPr>
+            <p:cNvPr id="904" name="Shape 21"/>
+            <p:cNvSpPr/>
+            <p:nvPr/>
+          </p:nvSpPr>
+          <p:spPr>
+            <a:xfrm>
+              <a:off x="9729216" y="4462272"/>
+              <a:ext cx="1051560" cy="374904"/>
+            </a:xfrm>
+            <a:prstGeom prst="ellipse">
+              <a:avLst>
+                <a:gd name="adj" fmla="val 24390"/>
+              </a:avLst>
+            </a:prstGeom>
+            <a:solidFill>
+              <a:srgbClr val="7ABBA0"/>
+            </a:solidFill>
+            <a:ln w="12700">
+              <a:solidFill>
+                <a:srgbClr val="7ABBA0">
+                  <a:alpha val="0"/>
+                </a:srgbClr>
+              </a:solidFill>
+              <a:prstDash val="solid"/>
+            </a:ln>
+          </p:spPr>
+        </p:sp>
+        <p:sp>
+          <p:nvSpPr>
+            <p:cNvPr id="905" name="Shape 22"/>
+            <p:cNvSpPr/>
+            <p:nvPr/>
+          </p:nvSpPr>
+          <p:spPr>
+            <a:xfrm>
+              <a:off x="7777886" y="2971800"/>
+              <a:ext cx="502920" cy="502920"/>
+            </a:xfrm>
+            <a:prstGeom prst="ellipse">
+              <a:avLst>
+                <a:gd name="adj" fmla="val 18182"/>
+              </a:avLst>
+            </a:prstGeom>
+            <a:solidFill>
+              <a:srgbClr val="FDE6A5"/>
+            </a:solidFill>
+            <a:ln w="12700">
+              <a:solidFill>
+                <a:srgbClr val="FDE6A5">
+                  <a:alpha val="0"/>
+                </a:srgbClr>
+              </a:solidFill>
+              <a:prstDash val="solid"/>
+            </a:ln>
+          </p:spPr>
+        </p:sp>
+        <p:sp>
+          <p:nvSpPr>
+            <p:cNvPr id="906" name="Shape 23"/>
+            <p:cNvSpPr/>
+            <p:nvPr/>
+          </p:nvSpPr>
+          <p:spPr>
+            <a:xfrm rot="10800000">
+              <a:off x="7697419" y="3414370"/>
+              <a:ext cx="683971" cy="764438"/>
+            </a:xfrm>
+            <a:prstGeom prst="arc">
+              <a:avLst>
+                <a:gd name="adj" fmla="val 13369"/>
+              </a:avLst>
+            </a:prstGeom>
+            <a:solidFill>
+              <a:srgbClr val="F7DDE5"/>
+            </a:solidFill>
+            <a:ln w="12700">
+              <a:solidFill>
+                <a:srgbClr val="F7DDE5"/>
+              </a:solidFill>
+              <a:prstDash val="solid"/>
+            </a:ln>
+          </p:spPr>
+        </p:sp>
+        <p:sp>
+          <p:nvSpPr>
+            <p:cNvPr id="907" name="Shape 24"/>
+            <p:cNvSpPr/>
+            <p:nvPr/>
+          </p:nvSpPr>
+          <p:spPr>
+            <a:xfrm>
+              <a:off x="7727594" y="3635654"/>
+              <a:ext cx="553212" cy="100584"/>
+            </a:xfrm>
+            <a:prstGeom prst="line">
+              <a:avLst>
+                <a:gd name="adj" fmla="val 90909"/>
+              </a:avLst>
+            </a:prstGeom>
+            <a:solidFill>
+              <a:srgbClr val="16243A"/>
+            </a:solidFill>
+            <a:ln w="38100">
+              <a:solidFill>
+                <a:srgbClr val="16243A"/>
+              </a:solidFill>
+              <a:prstDash val="solid"/>
+            </a:ln>
+          </p:spPr>
+        </p:sp>
+        <p:sp>
+          <p:nvSpPr>
+            <p:cNvPr id="908" name="Shape 25"/>
+            <p:cNvSpPr/>
+            <p:nvPr/>
+          </p:nvSpPr>
+          <p:spPr>
+            <a:xfrm>
+              <a:off x="7787945" y="4058107"/>
+              <a:ext cx="-140818" cy="362102"/>
+            </a:xfrm>
+            <a:prstGeom prst="line">
+              <a:avLst>
+                <a:gd name="adj" fmla="val -64935"/>
+              </a:avLst>
+            </a:prstGeom>
+            <a:solidFill>
+              <a:srgbClr val="16243A"/>
+            </a:solidFill>
+            <a:ln w="38100">
+              <a:solidFill>
+                <a:srgbClr val="16243A"/>
+              </a:solidFill>
+              <a:prstDash val="solid"/>
+            </a:ln>
+          </p:spPr>
+        </p:sp>
+        <p:sp>
+          <p:nvSpPr>
+            <p:cNvPr id="909" name="Shape 26"/>
+            <p:cNvSpPr/>
+            <p:nvPr/>
+          </p:nvSpPr>
+          <p:spPr>
+            <a:xfrm>
+              <a:off x="8170164" y="4058107"/>
+              <a:ext cx="140818" cy="362102"/>
+            </a:xfrm>
+            <a:prstGeom prst="line">
+              <a:avLst>
+                <a:gd name="adj" fmla="val 64935"/>
+              </a:avLst>
+            </a:prstGeom>
+            <a:solidFill>
+              <a:srgbClr val="16243A"/>
+            </a:solidFill>
+            <a:ln w="38100">
+              <a:solidFill>
+                <a:srgbClr val="16243A"/>
+              </a:solidFill>
+              <a:prstDash val="solid"/>
+            </a:ln>
+          </p:spPr>
+        </p:sp>
+        <p:sp>
+          <p:nvSpPr>
+            <p:cNvPr id="910" name="Shape 27"/>
+            <p:cNvSpPr/>
+            <p:nvPr/>
+          </p:nvSpPr>
+          <p:spPr>
+            <a:xfrm>
+              <a:off x="7908646" y="3193085"/>
+              <a:ext cx="35204" cy="35204"/>
+            </a:xfrm>
+            <a:prstGeom prst="ellipse">
+              <a:avLst>
+                <a:gd name="adj" fmla="val 259743"/>
+              </a:avLst>
+            </a:prstGeom>
+            <a:solidFill>
+              <a:srgbClr val="16243A"/>
+            </a:solidFill>
+            <a:ln w="12700">
+              <a:solidFill>
+                <a:srgbClr val="16243A">
+                  <a:alpha val="0"/>
+                </a:srgbClr>
+              </a:solidFill>
+              <a:prstDash val="solid"/>
+            </a:ln>
+          </p:spPr>
+        </p:sp>
+        <p:sp>
+          <p:nvSpPr>
+            <p:cNvPr id="911" name="Shape 28"/>
+            <p:cNvSpPr/>
+            <p:nvPr/>
+          </p:nvSpPr>
+          <p:spPr>
+            <a:xfrm>
+              <a:off x="8079638" y="3193085"/>
+              <a:ext cx="35204" cy="35204"/>
+            </a:xfrm>
+            <a:prstGeom prst="ellipse">
+              <a:avLst>
+                <a:gd name="adj" fmla="val 259743"/>
+              </a:avLst>
+            </a:prstGeom>
+            <a:solidFill>
+              <a:srgbClr val="16243A"/>
+            </a:solidFill>
+            <a:ln w="12700">
+              <a:solidFill>
+                <a:srgbClr val="16243A">
+                  <a:alpha val="0"/>
+                </a:srgbClr>
+              </a:solidFill>
+              <a:prstDash val="solid"/>
+            </a:ln>
+          </p:spPr>
+        </p:sp>
+        <p:sp>
+          <p:nvSpPr>
+            <p:cNvPr id="912" name="Shape 29"/>
+            <p:cNvSpPr/>
+            <p:nvPr/>
+          </p:nvSpPr>
+          <p:spPr>
+            <a:xfrm>
+              <a:off x="9522927" y="3182112"/>
+              <a:ext cx="361188" cy="361188"/>
+            </a:xfrm>
+            <a:prstGeom prst="ellipse">
+              <a:avLst>
+                <a:gd name="adj" fmla="val 25316"/>
+              </a:avLst>
+            </a:prstGeom>
+            <a:solidFill>
+              <a:srgbClr val="FDE6A5"/>
+            </a:solidFill>
+            <a:ln w="12700">
+              <a:solidFill>
+                <a:srgbClr val="FDE6A5">
+                  <a:alpha val="0"/>
+                </a:srgbClr>
+              </a:solidFill>
+              <a:prstDash val="solid"/>
+            </a:ln>
+          </p:spPr>
+        </p:sp>
+        <p:sp>
+          <p:nvSpPr>
+            <p:cNvPr id="913" name="Shape 30"/>
+            <p:cNvSpPr/>
+            <p:nvPr/>
+          </p:nvSpPr>
+          <p:spPr>
+            <a:xfrm rot="10800000">
+              <a:off x="9465137" y="3499957"/>
+              <a:ext cx="491216" cy="549006"/>
+            </a:xfrm>
+            <a:prstGeom prst="arc">
+              <a:avLst>
+                <a:gd name="adj" fmla="val 18615"/>
+              </a:avLst>
+            </a:prstGeom>
+            <a:solidFill>
+              <a:srgbClr val="F7DDE5"/>
+            </a:solidFill>
+            <a:ln w="12700">
+              <a:solidFill>
+                <a:srgbClr val="F7DDE5"/>
+              </a:solidFill>
+              <a:prstDash val="solid"/>
+            </a:ln>
+          </p:spPr>
+        </p:sp>
+        <p:sp>
+          <p:nvSpPr>
+            <p:cNvPr id="914" name="Shape 31"/>
+            <p:cNvSpPr/>
+            <p:nvPr/>
+          </p:nvSpPr>
+          <p:spPr>
+            <a:xfrm>
+              <a:off x="9486809" y="3658880"/>
+              <a:ext cx="397307" cy="72238"/>
+            </a:xfrm>
+            <a:prstGeom prst="line">
+              <a:avLst>
+                <a:gd name="adj" fmla="val 126582"/>
+              </a:avLst>
+            </a:prstGeom>
+            <a:solidFill>
+              <a:srgbClr val="16243A"/>
+            </a:solidFill>
+            <a:ln w="38100">
+              <a:solidFill>
+                <a:srgbClr val="16243A"/>
+              </a:solidFill>
+              <a:prstDash val="solid"/>
+            </a:ln>
+          </p:spPr>
+        </p:sp>
+        <p:sp>
+          <p:nvSpPr>
+            <p:cNvPr id="915" name="Shape 32"/>
+            <p:cNvSpPr/>
+            <p:nvPr/>
+          </p:nvSpPr>
+          <p:spPr>
+            <a:xfrm>
+              <a:off x="9530151" y="3962278"/>
+              <a:ext cx="-101133" cy="260055"/>
+            </a:xfrm>
+            <a:prstGeom prst="line">
+              <a:avLst>
+                <a:gd name="adj" fmla="val -90416"/>
+              </a:avLst>
+            </a:prstGeom>
+            <a:solidFill>
+              <a:srgbClr val="16243A"/>
+            </a:solidFill>
+            <a:ln w="38100">
+              <a:solidFill>
+                <a:srgbClr val="16243A"/>
+              </a:solidFill>
+              <a:prstDash val="solid"/>
+            </a:ln>
+          </p:spPr>
+        </p:sp>
+        <p:sp>
+          <p:nvSpPr>
+            <p:cNvPr id="916" name="Shape 33"/>
+            <p:cNvSpPr/>
+            <p:nvPr/>
+          </p:nvSpPr>
+          <p:spPr>
+            <a:xfrm>
+              <a:off x="9804654" y="3962278"/>
+              <a:ext cx="101133" cy="260055"/>
+            </a:xfrm>
+            <a:prstGeom prst="line">
+              <a:avLst>
+                <a:gd name="adj" fmla="val 90416"/>
+              </a:avLst>
+            </a:prstGeom>
+            <a:solidFill>
+              <a:srgbClr val="16243A"/>
+            </a:solidFill>
+            <a:ln w="38100">
+              <a:solidFill>
+                <a:srgbClr val="16243A"/>
+              </a:solidFill>
+              <a:prstDash val="solid"/>
+            </a:ln>
+          </p:spPr>
+        </p:sp>
+        <p:sp>
+          <p:nvSpPr>
+            <p:cNvPr id="917" name="Shape 34"/>
+            <p:cNvSpPr/>
+            <p:nvPr/>
+          </p:nvSpPr>
+          <p:spPr>
+            <a:xfrm>
+              <a:off x="9616836" y="3341035"/>
+              <a:ext cx="25283" cy="25283"/>
+            </a:xfrm>
+            <a:prstGeom prst="ellipse">
+              <a:avLst>
+                <a:gd name="adj" fmla="val 361666"/>
+              </a:avLst>
+            </a:prstGeom>
+            <a:solidFill>
+              <a:srgbClr val="16243A"/>
+            </a:solidFill>
+            <a:ln w="12700">
+              <a:solidFill>
+                <a:srgbClr val="16243A">
+                  <a:alpha val="0"/>
+                </a:srgbClr>
+              </a:solidFill>
+              <a:prstDash val="solid"/>
+            </a:ln>
+          </p:spPr>
+        </p:sp>
+        <p:sp>
+          <p:nvSpPr>
+            <p:cNvPr id="918" name="Shape 35"/>
+            <p:cNvSpPr/>
+            <p:nvPr/>
+          </p:nvSpPr>
+          <p:spPr>
+            <a:xfrm>
+              <a:off x="9739640" y="3341035"/>
+              <a:ext cx="25283" cy="25283"/>
+            </a:xfrm>
+            <a:prstGeom prst="ellipse">
+              <a:avLst>
+                <a:gd name="adj" fmla="val 361666"/>
+              </a:avLst>
+            </a:prstGeom>
+            <a:solidFill>
+              <a:srgbClr val="16243A"/>
+            </a:solidFill>
+            <a:ln w="12700">
+              <a:solidFill>
+                <a:srgbClr val="16243A">
+                  <a:alpha val="0"/>
+                </a:srgbClr>
+              </a:solidFill>
+              <a:prstDash val="solid"/>
+            </a:ln>
+          </p:spPr>
+        </p:sp>
+        <p:sp>
+          <p:nvSpPr>
+            <p:cNvPr id="919" name="Shape 36"/>
+            <p:cNvSpPr/>
+            <p:nvPr/>
+          </p:nvSpPr>
+          <p:spPr>
+            <a:xfrm>
+              <a:off x="6720840" y="3136392"/>
+              <a:ext cx="411480" cy="420624"/>
+            </a:xfrm>
+            <a:prstGeom prst="ellipse">
+              <a:avLst>
+                <a:gd name="adj" fmla="val 22222"/>
+              </a:avLst>
+            </a:prstGeom>
+            <a:solidFill>
+              <a:srgbClr val="F3C9D8"/>
+            </a:solidFill>
+            <a:ln w="12700">
+              <a:solidFill>
+                <a:srgbClr val="F3C9D8">
+                  <a:alpha val="0"/>
+                </a:srgbClr>
+              </a:solidFill>
+              <a:prstDash val="solid"/>
+            </a:ln>
+          </p:spPr>
+        </p:sp>
+        <p:sp>
+          <p:nvSpPr>
+            <p:cNvPr id="920" name="Shape 37"/>
+            <p:cNvSpPr/>
+            <p:nvPr/>
+          </p:nvSpPr>
+          <p:spPr>
+            <a:xfrm>
+              <a:off x="10561320" y="2916936"/>
+              <a:ext cx="420624" cy="411480"/>
+            </a:xfrm>
+            <a:prstGeom prst="ellipse">
+              <a:avLst>
+                <a:gd name="adj" fmla="val 22222"/>
+              </a:avLst>
+            </a:prstGeom>
+            <a:solidFill>
+              <a:srgbClr val="F2DF9A"/>
+            </a:solidFill>
+            <a:ln w="12700">
+              <a:solidFill>
+                <a:srgbClr val="F2DF9A">
+                  <a:alpha val="0"/>
+                </a:srgbClr>
+              </a:solidFill>
+              <a:prstDash val="solid"/>
+            </a:ln>
+          </p:spPr>
+        </p:sp>
+        <p:sp>
+          <p:nvSpPr>
+            <p:cNvPr id="921" name="Text 38"/>
+            <p:cNvSpPr/>
+            <p:nvPr/>
+          </p:nvSpPr>
+          <p:spPr>
+            <a:xfrm>
+              <a:off x="8357616" y="2660904"/>
+              <a:ext cx="2240280" cy="292608"/>
+            </a:xfrm>
+            <a:prstGeom prst="rect">
+              <a:avLst/>
+            </a:prstGeom>
+            <a:noFill/>
+            <a:ln/>
+          </p:spPr>
+          <p:txBody>
+            <a:bodyPr wrap="square" lIns="0" tIns="0" rIns="0" bIns="0" rtlCol="0" anchor="ctr">
+              <a:normAutofit/>
+            </a:bodyPr>
+            <a:lstStyle/>
+            <a:p>
+              <a:pPr algn="ctr" indent="0" marL="0">
+                <a:buNone/>
+              </a:pPr>
+              <a:r>
+                <a:rPr lang="en-US" sz="900" b="1" dirty="0">
+                  <a:solidFill>
+                    <a:srgbClr val="16243A"/>
+                  </a:solidFill>
+                  <a:latin typeface="Malgun Gothic" pitchFamily="34" charset="0"/>
+                  <a:ea typeface="Malgun Gothic" pitchFamily="34" charset="-122"/>
+                  <a:cs typeface="Malgun Gothic" pitchFamily="34" charset="-120"/>
+                </a:rPr>
+                <a:t>WELCOME!</a:t>
+              </a:r>
+              <a:endParaRPr lang="en-US" sz="900" dirty="0"/>
+            </a:p>
+          </p:txBody>
+        </p:sp>
+      </p:grpSp>
     </p:spTree>
   </p:cSld>
   <p:clrMapOvr>
@@ -9302,18 +10847,54 @@
       </p:sp>
       <p:sp>
         <p:nvSpPr>
-          <p:cNvPr id="5" name="original"/>
+          <p:cNvPr id="5" name="Text 3"/>
+          <p:cNvSpPr txBox="1"/>
+          <p:nvPr/>
+        </p:nvSpPr>
+        <p:spPr>
+          <a:xfrm>
+            <a:off x="548640" y="1965960"/>
+            <a:ext cx="1828800" cy="365760"/>
+          </a:xfrm>
+          <a:prstGeom prst="rect">
+            <a:avLst/>
+          </a:prstGeom>
+          <a:noFill/>
+          <a:ln/>
+        </p:spPr>
+        <p:txBody>
+          <a:bodyPr wrap="square" lIns="0" tIns="0" rIns="0" bIns="0" rtlCol="0" anchor="ctr"/>
+          <a:lstStyle/>
+          <a:p>
+            <a:pPr indent="0" marL="0">
+              <a:buNone/>
+            </a:pPr>
+            <a:r>
+              <a:rPr lang="en-US" sz="1700" b="1" dirty="0">
+                <a:solidFill>
+                  <a:srgbClr val="617287"/>
+                </a:solidFill>
+              </a:rPr>
+              <a:t>원안</a:t>
+            </a:r>
+            <a:endParaRPr lang="en-US" sz="1700" dirty="0"/>
+          </a:p>
+        </p:txBody>
+      </p:sp>
+      <p:sp>
+        <p:nvSpPr>
+          <p:cNvPr id="6" name="original"/>
           <p:cNvSpPr/>
           <p:nvPr/>
         </p:nvSpPr>
         <p:spPr>
           <a:xfrm>
-            <a:off x="548640" y="1965960"/>
-            <a:ext cx="4206240" cy="3794760"/>
+            <a:off x="548640" y="4645152"/>
+            <a:ext cx="4206240" cy="1115568"/>
           </a:xfrm>
           <a:prstGeom prst="roundRect">
             <a:avLst>
-              <a:gd name="adj" fmla="val 2892"/>
+              <a:gd name="adj" fmla="val 9836"/>
             </a:avLst>
           </a:prstGeom>
           <a:solidFill>
@@ -9329,50 +10910,14 @@
       </p:sp>
       <p:sp>
         <p:nvSpPr>
-          <p:cNvPr id="6" name="Text 4"/>
-          <p:cNvSpPr txBox="1"/>
-          <p:nvPr/>
-        </p:nvSpPr>
-        <p:spPr>
-          <a:xfrm>
-            <a:off x="822960" y="2121408"/>
-            <a:ext cx="1828800" cy="365760"/>
-          </a:xfrm>
-          <a:prstGeom prst="rect">
-            <a:avLst/>
-          </a:prstGeom>
-          <a:noFill/>
-          <a:ln/>
-        </p:spPr>
-        <p:txBody>
-          <a:bodyPr wrap="square" lIns="0" tIns="0" rIns="0" bIns="0" rtlCol="0" anchor="ctr"/>
-          <a:lstStyle/>
-          <a:p>
-            <a:pPr indent="0" marL="0">
-              <a:buNone/>
-            </a:pPr>
-            <a:r>
-              <a:rPr lang="en-US" sz="1700" b="1" dirty="0">
-                <a:solidFill>
-                  <a:srgbClr val="617287"/>
-                </a:solidFill>
-              </a:rPr>
-              <a:t>원안</a:t>
-            </a:r>
-            <a:endParaRPr lang="en-US" sz="1700" dirty="0"/>
-          </a:p>
-        </p:txBody>
-      </p:sp>
-      <p:sp>
-        <p:nvSpPr>
           <p:cNvPr id="7" name="chip-4-1"/>
           <p:cNvSpPr txBox="1"/>
           <p:nvPr/>
         </p:nvSpPr>
         <p:spPr>
           <a:xfrm>
-            <a:off x="822960" y="2651760"/>
-            <a:ext cx="566928" cy="292608"/>
+            <a:off x="685800" y="4773168"/>
+            <a:ext cx="502920" cy="292608"/>
           </a:xfrm>
           <a:prstGeom prst="roundRect">
             <a:avLst>
@@ -9411,8 +10956,8 @@
         </p:nvSpPr>
         <p:spPr>
           <a:xfrm>
-            <a:off x="1508760" y="2615184"/>
-            <a:ext cx="3108960" cy="365760"/>
+            <a:off x="1280160" y="4718304"/>
+            <a:ext cx="3383280" cy="457200"/>
           </a:xfrm>
           <a:prstGeom prst="rect">
             <a:avLst/>
@@ -9428,63 +10973,38 @@
               <a:buNone/>
             </a:pPr>
             <a:r>
-              <a:rPr lang="en-US" sz="1500" b="1" dirty="0">
+              <a:rPr lang="en-US" sz="1100" b="1" dirty="0">
                 <a:solidFill>
                   <a:srgbClr val="16243A"/>
                 </a:solidFill>
               </a:rPr>
-              <a:t>퍼레이드 이벤트</a:t>
-            </a:r>
-            <a:endParaRPr lang="en-US" sz="1500" dirty="0"/>
-          </a:p>
-        </p:txBody>
-      </p:sp>
-      <p:sp>
-        <p:nvSpPr>
-          <p:cNvPr id="9" name="Text 7"/>
-          <p:cNvSpPr txBox="1"/>
-          <p:nvPr/>
-        </p:nvSpPr>
-        <p:spPr>
-          <a:xfrm>
-            <a:off x="822960" y="3063240"/>
-            <a:ext cx="3703320" cy="960120"/>
-          </a:xfrm>
-          <a:prstGeom prst="rect">
-            <a:avLst/>
-          </a:prstGeom>
-          <a:noFill/>
-          <a:ln/>
-        </p:spPr>
-        <p:txBody>
-          <a:bodyPr wrap="square" lIns="0" tIns="0" rIns="0" bIns="0" rtlCol="0" anchor="t"/>
-          <a:lstStyle/>
-          <a:p>
+              <a:t>퍼레이드 이벤트  </a:t>
+            </a:r>
             <a:pPr indent="0" marL="0">
               <a:buNone/>
             </a:pPr>
             <a:r>
-              <a:rPr lang="en-US" sz="1300" dirty="0">
+              <a:rPr lang="en-US" sz="1100" dirty="0">
                 <a:solidFill>
                   <a:srgbClr val="617287"/>
                 </a:solidFill>
               </a:rPr>
               <a:t>아이들이 만든 캐릭터들이 광장을 둘러 행진</a:t>
             </a:r>
-            <a:endParaRPr lang="en-US" sz="1300" dirty="0"/>
-          </a:p>
-        </p:txBody>
-      </p:sp>
-      <p:sp>
-        <p:nvSpPr>
-          <p:cNvPr id="10" name="chip-4-2"/>
-          <p:cNvSpPr txBox="1"/>
-          <p:nvPr/>
-        </p:nvSpPr>
-        <p:spPr>
-          <a:xfrm>
-            <a:off x="822960" y="4160520"/>
-            <a:ext cx="566928" cy="292608"/>
+            <a:endParaRPr lang="en-US" sz="1100" dirty="0"/>
+          </a:p>
+        </p:txBody>
+      </p:sp>
+      <p:sp>
+        <p:nvSpPr>
+          <p:cNvPr id="9" name="chip-4-2"/>
+          <p:cNvSpPr txBox="1"/>
+          <p:nvPr/>
+        </p:nvSpPr>
+        <p:spPr>
+          <a:xfrm>
+            <a:off x="685800" y="5276088"/>
+            <a:ext cx="502920" cy="292608"/>
           </a:xfrm>
           <a:prstGeom prst="roundRect">
             <a:avLst>
@@ -9517,79 +11037,54 @@
       </p:sp>
       <p:sp>
         <p:nvSpPr>
+          <p:cNvPr id="10" name="Text 8"/>
+          <p:cNvSpPr txBox="1"/>
+          <p:nvPr/>
+        </p:nvSpPr>
+        <p:spPr>
+          <a:xfrm>
+            <a:off x="1280160" y="5221224"/>
+            <a:ext cx="3383280" cy="457200"/>
+          </a:xfrm>
+          <a:prstGeom prst="rect">
+            <a:avLst/>
+          </a:prstGeom>
+          <a:noFill/>
+          <a:ln/>
+        </p:spPr>
+        <p:txBody>
+          <a:bodyPr wrap="square" lIns="0" tIns="0" rIns="0" bIns="0" rtlCol="0" anchor="ctr"/>
+          <a:lstStyle/>
+          <a:p>
+            <a:pPr indent="0" marL="0">
+              <a:buNone/>
+            </a:pPr>
+            <a:r>
+              <a:rPr lang="en-US" sz="1100" b="1" dirty="0">
+                <a:solidFill>
+                  <a:srgbClr val="16243A"/>
+                </a:solidFill>
+              </a:rPr>
+              <a:t>기존 콘텐츠 연계  </a:t>
+            </a:r>
+            <a:pPr indent="0" marL="0">
+              <a:buNone/>
+            </a:pPr>
+            <a:r>
+              <a:rPr lang="en-US" sz="1100" dirty="0">
+                <a:solidFill>
+                  <a:srgbClr val="617287"/>
+                </a:solidFill>
+              </a:rPr>
+              <a:t>Art: 배경 앞을 지나며 합류 / Logo: 도형 위 · 사이 이동</a:t>
+            </a:r>
+            <a:endParaRPr lang="en-US" sz="1100" dirty="0"/>
+          </a:p>
+        </p:txBody>
+      </p:sp>
+      <p:sp>
+        <p:nvSpPr>
           <p:cNvPr id="11" name="Text 9"/>
-          <p:cNvSpPr txBox="1"/>
-          <p:nvPr/>
-        </p:nvSpPr>
-        <p:spPr>
-          <a:xfrm>
-            <a:off x="1508760" y="4123944"/>
-            <a:ext cx="3108960" cy="365760"/>
-          </a:xfrm>
-          <a:prstGeom prst="rect">
-            <a:avLst/>
-          </a:prstGeom>
-          <a:noFill/>
-          <a:ln/>
-        </p:spPr>
-        <p:txBody>
-          <a:bodyPr wrap="square" lIns="0" tIns="0" rIns="0" bIns="0" rtlCol="0" anchor="ctr"/>
-          <a:lstStyle/>
-          <a:p>
-            <a:pPr indent="0" marL="0">
-              <a:buNone/>
-            </a:pPr>
-            <a:r>
-              <a:rPr lang="en-US" sz="1500" b="1" dirty="0">
-                <a:solidFill>
-                  <a:srgbClr val="16243A"/>
-                </a:solidFill>
-              </a:rPr>
-              <a:t>기존 콘텐츠 연계</a:t>
-            </a:r>
-            <a:endParaRPr lang="en-US" sz="1500" dirty="0"/>
-          </a:p>
-        </p:txBody>
-      </p:sp>
-      <p:sp>
-        <p:nvSpPr>
-          <p:cNvPr id="12" name="Text 10"/>
-          <p:cNvSpPr txBox="1"/>
-          <p:nvPr/>
-        </p:nvSpPr>
-        <p:spPr>
-          <a:xfrm>
-            <a:off x="822960" y="4572000"/>
-            <a:ext cx="3703320" cy="960120"/>
-          </a:xfrm>
-          <a:prstGeom prst="rect">
-            <a:avLst/>
-          </a:prstGeom>
-          <a:noFill/>
-          <a:ln/>
-        </p:spPr>
-        <p:txBody>
-          <a:bodyPr wrap="square" lIns="0" tIns="0" rIns="0" bIns="0" rtlCol="0" anchor="t"/>
-          <a:lstStyle/>
-          <a:p>
-            <a:pPr indent="0" marL="0">
-              <a:buNone/>
-            </a:pPr>
-            <a:r>
-              <a:rPr lang="en-US" sz="1300" dirty="0">
-                <a:solidFill>
-                  <a:srgbClr val="617287"/>
-                </a:solidFill>
-              </a:rPr>
-              <a:t>Art Mode: 미디어아트 배경 앞을 지나가며 합류 · Logo Mode: 도형 위에 올라타거나 도형 사이를 이동</a:t>
-            </a:r>
-            <a:endParaRPr lang="en-US" sz="1300" dirty="0"/>
-          </a:p>
-        </p:txBody>
-      </p:sp>
-      <p:sp>
-        <p:nvSpPr>
-          <p:cNvPr id="13" name="Text 11"/>
           <p:cNvSpPr txBox="1"/>
           <p:nvPr/>
         </p:nvSpPr>
@@ -9625,7 +11120,7 @@
       </p:sp>
       <p:sp>
         <p:nvSpPr>
-          <p:cNvPr id="14" name="prop-0"/>
+          <p:cNvPr id="12" name="prop-0"/>
           <p:cNvSpPr/>
           <p:nvPr/>
         </p:nvSpPr>
@@ -9652,7 +11147,7 @@
       </p:sp>
       <p:sp>
         <p:nvSpPr>
-          <p:cNvPr id="15" name="chip-연출"/>
+          <p:cNvPr id="13" name="chip-연출"/>
           <p:cNvSpPr txBox="1"/>
           <p:nvPr/>
         </p:nvSpPr>
@@ -9692,7 +11187,7 @@
       </p:sp>
       <p:sp>
         <p:nvSpPr>
-          <p:cNvPr id="16" name="Text 14"/>
+          <p:cNvPr id="14" name="Text 12"/>
           <p:cNvSpPr txBox="1"/>
           <p:nvPr/>
         </p:nvSpPr>
@@ -9728,7 +11223,7 @@
       </p:sp>
       <p:sp>
         <p:nvSpPr>
-          <p:cNvPr id="17" name="Text 15"/>
+          <p:cNvPr id="15" name="Text 13"/>
           <p:cNvSpPr txBox="1"/>
           <p:nvPr/>
         </p:nvSpPr>
@@ -9764,7 +11259,7 @@
       </p:sp>
       <p:sp>
         <p:nvSpPr>
-          <p:cNvPr id="18" name="prop-1"/>
+          <p:cNvPr id="16" name="prop-1"/>
           <p:cNvSpPr/>
           <p:nvPr/>
         </p:nvSpPr>
@@ -9791,7 +11286,7 @@
       </p:sp>
       <p:sp>
         <p:nvSpPr>
-          <p:cNvPr id="19" name="chip-연출"/>
+          <p:cNvPr id="17" name="chip-연출"/>
           <p:cNvSpPr txBox="1"/>
           <p:nvPr/>
         </p:nvSpPr>
@@ -9831,7 +11326,7 @@
       </p:sp>
       <p:sp>
         <p:nvSpPr>
-          <p:cNvPr id="20" name="Text 18"/>
+          <p:cNvPr id="18" name="Text 16"/>
           <p:cNvSpPr txBox="1"/>
           <p:nvPr/>
         </p:nvSpPr>
@@ -9867,7 +11362,7 @@
       </p:sp>
       <p:sp>
         <p:nvSpPr>
-          <p:cNvPr id="21" name="Text 19"/>
+          <p:cNvPr id="19" name="Text 17"/>
           <p:cNvSpPr txBox="1"/>
           <p:nvPr/>
         </p:nvSpPr>
@@ -9903,7 +11398,7 @@
       </p:sp>
       <p:sp>
         <p:nvSpPr>
-          <p:cNvPr id="22" name="prop-2"/>
+          <p:cNvPr id="20" name="prop-2"/>
           <p:cNvSpPr/>
           <p:nvPr/>
         </p:nvSpPr>
@@ -9930,7 +11425,7 @@
       </p:sp>
       <p:sp>
         <p:nvSpPr>
-          <p:cNvPr id="23" name="chip-연출"/>
+          <p:cNvPr id="21" name="chip-연출"/>
           <p:cNvSpPr txBox="1"/>
           <p:nvPr/>
         </p:nvSpPr>
@@ -9970,7 +11465,7 @@
       </p:sp>
       <p:sp>
         <p:nvSpPr>
-          <p:cNvPr id="24" name="Text 22"/>
+          <p:cNvPr id="22" name="Text 20"/>
           <p:cNvSpPr txBox="1"/>
           <p:nvPr/>
         </p:nvSpPr>
@@ -10006,7 +11501,7 @@
       </p:sp>
       <p:sp>
         <p:nvSpPr>
-          <p:cNvPr id="25" name="Text 23"/>
+          <p:cNvPr id="23" name="Text 21"/>
           <p:cNvSpPr txBox="1"/>
           <p:nvPr/>
         </p:nvSpPr>
@@ -10042,7 +11537,7 @@
       </p:sp>
       <p:sp>
         <p:nvSpPr>
-          <p:cNvPr id="26" name="prop-3"/>
+          <p:cNvPr id="24" name="prop-3"/>
           <p:cNvSpPr/>
           <p:nvPr/>
         </p:nvSpPr>
@@ -10069,7 +11564,7 @@
       </p:sp>
       <p:sp>
         <p:nvSpPr>
-          <p:cNvPr id="27" name="chip-운영"/>
+          <p:cNvPr id="25" name="chip-운영"/>
           <p:cNvSpPr txBox="1"/>
           <p:nvPr/>
         </p:nvSpPr>
@@ -10109,7 +11604,7 @@
       </p:sp>
       <p:sp>
         <p:nvSpPr>
-          <p:cNvPr id="28" name="Text 26"/>
+          <p:cNvPr id="26" name="Text 24"/>
           <p:cNvSpPr txBox="1"/>
           <p:nvPr/>
         </p:nvSpPr>
@@ -10145,7 +11640,7 @@
       </p:sp>
       <p:sp>
         <p:nvSpPr>
-          <p:cNvPr id="29" name="Text 27"/>
+          <p:cNvPr id="27" name="Text 25"/>
           <p:cNvSpPr txBox="1"/>
           <p:nvPr/>
         </p:nvSpPr>
@@ -10181,7 +11676,7 @@
       </p:sp>
       <p:sp>
         <p:nvSpPr>
-          <p:cNvPr id="30" name="Text 28"/>
+          <p:cNvPr id="28" name="Text 26"/>
           <p:cNvSpPr txBox="1"/>
           <p:nvPr/>
         </p:nvSpPr>
@@ -10271,6 +11766,920 @@
           </a:p>
         </p:txBody>
       </p:sp>
+      <p:grpSp>
+        <p:nvGrpSpPr>
+          <p:cNvPr id="900" name="원안 그림"/>
+          <p:cNvGrpSpPr/>
+          <p:nvPr/>
+        </p:nvGrpSpPr>
+        <p:grpSpPr>
+          <a:xfrm>
+            <a:off x="867395" y="2331720"/>
+            <a:ext cx="3568730" cy="2212848"/>
+            <a:chOff x="6135624" y="2304288"/>
+            <a:chExt cx="5559552" cy="3447288"/>
+          </a:xfrm>
+        </p:grpSpPr>
+        <p:sp>
+          <p:nvSpPr>
+            <p:cNvPr id="901" name="Shape 18"/>
+            <p:cNvSpPr/>
+            <p:nvPr/>
+          </p:nvSpPr>
+          <p:spPr>
+            <a:xfrm>
+              <a:off x="6135624" y="2304288"/>
+              <a:ext cx="5559552" cy="3447288"/>
+            </a:xfrm>
+            <a:prstGeom prst="roundRect">
+              <a:avLst>
+                <a:gd name="adj" fmla="val 2653"/>
+              </a:avLst>
+            </a:prstGeom>
+            <a:solidFill>
+              <a:srgbClr val="16243A"/>
+            </a:solidFill>
+            <a:ln w="12700">
+              <a:solidFill>
+                <a:srgbClr val="16243A">
+                  <a:alpha val="0"/>
+                </a:srgbClr>
+              </a:solidFill>
+              <a:prstDash val="solid"/>
+            </a:ln>
+          </p:spPr>
+        </p:sp>
+        <p:sp>
+          <p:nvSpPr>
+            <p:cNvPr id="902" name="Shape 19"/>
+            <p:cNvSpPr/>
+            <p:nvPr/>
+          </p:nvSpPr>
+          <p:spPr>
+            <a:xfrm>
+              <a:off x="6355080" y="2624328"/>
+              <a:ext cx="621792" cy="2258568"/>
+            </a:xfrm>
+            <a:prstGeom prst="rect">
+              <a:avLst>
+                <a:gd name="adj" fmla="val 14706"/>
+              </a:avLst>
+            </a:prstGeom>
+            <a:solidFill>
+              <a:srgbClr val="2A455B"/>
+            </a:solidFill>
+            <a:ln w="12700">
+              <a:solidFill>
+                <a:srgbClr val="2A455B">
+                  <a:alpha val="0"/>
+                </a:srgbClr>
+              </a:solidFill>
+              <a:prstDash val="solid"/>
+            </a:ln>
+          </p:spPr>
+        </p:sp>
+        <p:sp>
+          <p:nvSpPr>
+            <p:cNvPr id="903" name="Shape 20"/>
+            <p:cNvSpPr/>
+            <p:nvPr/>
+          </p:nvSpPr>
+          <p:spPr>
+            <a:xfrm>
+              <a:off x="7196328" y="2624328"/>
+              <a:ext cx="621792" cy="2258568"/>
+            </a:xfrm>
+            <a:prstGeom prst="rect">
+              <a:avLst>
+                <a:gd name="adj" fmla="val 14706"/>
+              </a:avLst>
+            </a:prstGeom>
+            <a:solidFill>
+              <a:srgbClr val="38526B"/>
+            </a:solidFill>
+            <a:ln w="12700">
+              <a:solidFill>
+                <a:srgbClr val="38526B">
+                  <a:alpha val="0"/>
+                </a:srgbClr>
+              </a:solidFill>
+              <a:prstDash val="solid"/>
+            </a:ln>
+          </p:spPr>
+        </p:sp>
+        <p:sp>
+          <p:nvSpPr>
+            <p:cNvPr id="904" name="Shape 21"/>
+            <p:cNvSpPr/>
+            <p:nvPr/>
+          </p:nvSpPr>
+          <p:spPr>
+            <a:xfrm>
+              <a:off x="8037576" y="2624328"/>
+              <a:ext cx="621792" cy="2258568"/>
+            </a:xfrm>
+            <a:prstGeom prst="rect">
+              <a:avLst>
+                <a:gd name="adj" fmla="val 14706"/>
+              </a:avLst>
+            </a:prstGeom>
+            <a:solidFill>
+              <a:srgbClr val="2A455B"/>
+            </a:solidFill>
+            <a:ln w="12700">
+              <a:solidFill>
+                <a:srgbClr val="2A455B">
+                  <a:alpha val="0"/>
+                </a:srgbClr>
+              </a:solidFill>
+              <a:prstDash val="solid"/>
+            </a:ln>
+          </p:spPr>
+        </p:sp>
+        <p:sp>
+          <p:nvSpPr>
+            <p:cNvPr id="905" name="Shape 22"/>
+            <p:cNvSpPr/>
+            <p:nvPr/>
+          </p:nvSpPr>
+          <p:spPr>
+            <a:xfrm>
+              <a:off x="8878824" y="2624328"/>
+              <a:ext cx="621792" cy="2258568"/>
+            </a:xfrm>
+            <a:prstGeom prst="rect">
+              <a:avLst>
+                <a:gd name="adj" fmla="val 14706"/>
+              </a:avLst>
+            </a:prstGeom>
+            <a:solidFill>
+              <a:srgbClr val="38526B"/>
+            </a:solidFill>
+            <a:ln w="12700">
+              <a:solidFill>
+                <a:srgbClr val="38526B">
+                  <a:alpha val="0"/>
+                </a:srgbClr>
+              </a:solidFill>
+              <a:prstDash val="solid"/>
+            </a:ln>
+          </p:spPr>
+        </p:sp>
+        <p:sp>
+          <p:nvSpPr>
+            <p:cNvPr id="906" name="Shape 23"/>
+            <p:cNvSpPr/>
+            <p:nvPr/>
+          </p:nvSpPr>
+          <p:spPr>
+            <a:xfrm>
+              <a:off x="9720072" y="2624328"/>
+              <a:ext cx="621792" cy="2258568"/>
+            </a:xfrm>
+            <a:prstGeom prst="rect">
+              <a:avLst>
+                <a:gd name="adj" fmla="val 14706"/>
+              </a:avLst>
+            </a:prstGeom>
+            <a:solidFill>
+              <a:srgbClr val="2A455B"/>
+            </a:solidFill>
+            <a:ln w="12700">
+              <a:solidFill>
+                <a:srgbClr val="2A455B">
+                  <a:alpha val="0"/>
+                </a:srgbClr>
+              </a:solidFill>
+              <a:prstDash val="solid"/>
+            </a:ln>
+          </p:spPr>
+        </p:sp>
+        <p:sp>
+          <p:nvSpPr>
+            <p:cNvPr id="907" name="Shape 24"/>
+            <p:cNvSpPr/>
+            <p:nvPr/>
+          </p:nvSpPr>
+          <p:spPr>
+            <a:xfrm>
+              <a:off x="10561320" y="2624328"/>
+              <a:ext cx="621792" cy="2258568"/>
+            </a:xfrm>
+            <a:prstGeom prst="rect">
+              <a:avLst>
+                <a:gd name="adj" fmla="val 14706"/>
+              </a:avLst>
+            </a:prstGeom>
+            <a:solidFill>
+              <a:srgbClr val="38526B"/>
+            </a:solidFill>
+            <a:ln w="12700">
+              <a:solidFill>
+                <a:srgbClr val="38526B">
+                  <a:alpha val="0"/>
+                </a:srgbClr>
+              </a:solidFill>
+              <a:prstDash val="solid"/>
+            </a:ln>
+          </p:spPr>
+        </p:sp>
+        <p:sp>
+          <p:nvSpPr>
+            <p:cNvPr id="908" name="Shape 25"/>
+            <p:cNvSpPr/>
+            <p:nvPr/>
+          </p:nvSpPr>
+          <p:spPr>
+            <a:xfrm>
+              <a:off x="6565392" y="4690872"/>
+              <a:ext cx="4709160" cy="512064"/>
+            </a:xfrm>
+            <a:prstGeom prst="ellipse">
+              <a:avLst>
+                <a:gd name="adj" fmla="val 17857"/>
+              </a:avLst>
+            </a:prstGeom>
+            <a:solidFill>
+              <a:srgbClr val="60778A"/>
+            </a:solidFill>
+            <a:ln w="12700">
+              <a:solidFill>
+                <a:srgbClr val="60778A">
+                  <a:alpha val="0"/>
+                </a:srgbClr>
+              </a:solidFill>
+              <a:prstDash val="solid"/>
+            </a:ln>
+          </p:spPr>
+        </p:sp>
+        <p:sp>
+          <p:nvSpPr>
+            <p:cNvPr id="909" name="Shape 26"/>
+            <p:cNvSpPr/>
+            <p:nvPr/>
+          </p:nvSpPr>
+          <p:spPr>
+            <a:xfrm>
+              <a:off x="7037588" y="3858768"/>
+              <a:ext cx="338328" cy="338328"/>
+            </a:xfrm>
+            <a:prstGeom prst="ellipse">
+              <a:avLst>
+                <a:gd name="adj" fmla="val 27027"/>
+              </a:avLst>
+            </a:prstGeom>
+            <a:solidFill>
+              <a:srgbClr val="FDE6A5"/>
+            </a:solidFill>
+            <a:ln w="12700">
+              <a:solidFill>
+                <a:srgbClr val="FDE6A5">
+                  <a:alpha val="0"/>
+                </a:srgbClr>
+              </a:solidFill>
+              <a:prstDash val="solid"/>
+            </a:ln>
+          </p:spPr>
+        </p:sp>
+        <p:sp>
+          <p:nvSpPr>
+            <p:cNvPr id="910" name="Shape 27"/>
+            <p:cNvSpPr/>
+            <p:nvPr/>
+          </p:nvSpPr>
+          <p:spPr>
+            <a:xfrm rot="10800000">
+              <a:off x="6983456" y="4156497"/>
+              <a:ext cx="460126" cy="514259"/>
+            </a:xfrm>
+            <a:prstGeom prst="arc">
+              <a:avLst>
+                <a:gd name="adj" fmla="val 19873"/>
+              </a:avLst>
+            </a:prstGeom>
+            <a:solidFill>
+              <a:srgbClr val="F7DDE5"/>
+            </a:solidFill>
+            <a:ln w="12700">
+              <a:solidFill>
+                <a:srgbClr val="F7DDE5"/>
+              </a:solidFill>
+              <a:prstDash val="solid"/>
+            </a:ln>
+          </p:spPr>
+        </p:sp>
+        <p:sp>
+          <p:nvSpPr>
+            <p:cNvPr id="911" name="Shape 28"/>
+            <p:cNvSpPr/>
+            <p:nvPr/>
+          </p:nvSpPr>
+          <p:spPr>
+            <a:xfrm>
+              <a:off x="7003755" y="4305361"/>
+              <a:ext cx="372161" cy="67666"/>
+            </a:xfrm>
+            <a:prstGeom prst="line">
+              <a:avLst>
+                <a:gd name="adj" fmla="val 135134"/>
+              </a:avLst>
+            </a:prstGeom>
+            <a:solidFill>
+              <a:srgbClr val="16243A"/>
+            </a:solidFill>
+            <a:ln w="38100">
+              <a:solidFill>
+                <a:srgbClr val="16243A"/>
+              </a:solidFill>
+              <a:prstDash val="solid"/>
+            </a:ln>
+          </p:spPr>
+        </p:sp>
+        <p:sp>
+          <p:nvSpPr>
+            <p:cNvPr id="912" name="Shape 29"/>
+            <p:cNvSpPr/>
+            <p:nvPr/>
+          </p:nvSpPr>
+          <p:spPr>
+            <a:xfrm>
+              <a:off x="7044355" y="4589556"/>
+              <a:ext cx="-94732" cy="243596"/>
+            </a:xfrm>
+            <a:prstGeom prst="line">
+              <a:avLst>
+                <a:gd name="adj" fmla="val -96525"/>
+              </a:avLst>
+            </a:prstGeom>
+            <a:solidFill>
+              <a:srgbClr val="16243A"/>
+            </a:solidFill>
+            <a:ln w="38100">
+              <a:solidFill>
+                <a:srgbClr val="16243A"/>
+              </a:solidFill>
+              <a:prstDash val="solid"/>
+            </a:ln>
+          </p:spPr>
+        </p:sp>
+        <p:sp>
+          <p:nvSpPr>
+            <p:cNvPr id="913" name="Shape 30"/>
+            <p:cNvSpPr/>
+            <p:nvPr/>
+          </p:nvSpPr>
+          <p:spPr>
+            <a:xfrm>
+              <a:off x="7301484" y="4589556"/>
+              <a:ext cx="94732" cy="243596"/>
+            </a:xfrm>
+            <a:prstGeom prst="line">
+              <a:avLst>
+                <a:gd name="adj" fmla="val 96525"/>
+              </a:avLst>
+            </a:prstGeom>
+            <a:solidFill>
+              <a:srgbClr val="16243A"/>
+            </a:solidFill>
+            <a:ln w="38100">
+              <a:solidFill>
+                <a:srgbClr val="16243A"/>
+              </a:solidFill>
+              <a:prstDash val="solid"/>
+            </a:ln>
+          </p:spPr>
+        </p:sp>
+        <p:sp>
+          <p:nvSpPr>
+            <p:cNvPr id="914" name="Shape 31"/>
+            <p:cNvSpPr/>
+            <p:nvPr/>
+          </p:nvSpPr>
+          <p:spPr>
+            <a:xfrm>
+              <a:off x="7125553" y="4007632"/>
+              <a:ext cx="23683" cy="23683"/>
+            </a:xfrm>
+            <a:prstGeom prst="ellipse">
+              <a:avLst>
+                <a:gd name="adj" fmla="val 386100"/>
+              </a:avLst>
+            </a:prstGeom>
+            <a:solidFill>
+              <a:srgbClr val="16243A"/>
+            </a:solidFill>
+            <a:ln w="12700">
+              <a:solidFill>
+                <a:srgbClr val="16243A">
+                  <a:alpha val="0"/>
+                </a:srgbClr>
+              </a:solidFill>
+              <a:prstDash val="solid"/>
+            </a:ln>
+          </p:spPr>
+        </p:sp>
+        <p:sp>
+          <p:nvSpPr>
+            <p:cNvPr id="915" name="Shape 32"/>
+            <p:cNvSpPr/>
+            <p:nvPr/>
+          </p:nvSpPr>
+          <p:spPr>
+            <a:xfrm>
+              <a:off x="7240585" y="4007632"/>
+              <a:ext cx="23683" cy="23683"/>
+            </a:xfrm>
+            <a:prstGeom prst="ellipse">
+              <a:avLst>
+                <a:gd name="adj" fmla="val 386100"/>
+              </a:avLst>
+            </a:prstGeom>
+            <a:solidFill>
+              <a:srgbClr val="16243A"/>
+            </a:solidFill>
+            <a:ln w="12700">
+              <a:solidFill>
+                <a:srgbClr val="16243A">
+                  <a:alpha val="0"/>
+                </a:srgbClr>
+              </a:solidFill>
+              <a:prstDash val="solid"/>
+            </a:ln>
+          </p:spPr>
+        </p:sp>
+        <p:sp>
+          <p:nvSpPr>
+            <p:cNvPr id="916" name="Shape 33"/>
+            <p:cNvSpPr/>
+            <p:nvPr/>
+          </p:nvSpPr>
+          <p:spPr>
+            <a:xfrm>
+              <a:off x="8524403" y="3685032"/>
+              <a:ext cx="384048" cy="384048"/>
+            </a:xfrm>
+            <a:prstGeom prst="ellipse">
+              <a:avLst>
+                <a:gd name="adj" fmla="val 23810"/>
+              </a:avLst>
+            </a:prstGeom>
+            <a:solidFill>
+              <a:srgbClr val="FDE6A5"/>
+            </a:solidFill>
+            <a:ln w="12700">
+              <a:solidFill>
+                <a:srgbClr val="FDE6A5">
+                  <a:alpha val="0"/>
+                </a:srgbClr>
+              </a:solidFill>
+              <a:prstDash val="solid"/>
+            </a:ln>
+          </p:spPr>
+        </p:sp>
+        <p:sp>
+          <p:nvSpPr>
+            <p:cNvPr id="917" name="Shape 34"/>
+            <p:cNvSpPr/>
+            <p:nvPr/>
+          </p:nvSpPr>
+          <p:spPr>
+            <a:xfrm rot="10800000">
+              <a:off x="8462955" y="4022994"/>
+              <a:ext cx="522305" cy="583753"/>
+            </a:xfrm>
+            <a:prstGeom prst="arc">
+              <a:avLst>
+                <a:gd name="adj" fmla="val 17507"/>
+              </a:avLst>
+            </a:prstGeom>
+            <a:solidFill>
+              <a:srgbClr val="F7DDE5"/>
+            </a:solidFill>
+            <a:ln w="12700">
+              <a:solidFill>
+                <a:srgbClr val="F7DDE5"/>
+              </a:solidFill>
+              <a:prstDash val="solid"/>
+            </a:ln>
+          </p:spPr>
+        </p:sp>
+        <p:sp>
+          <p:nvSpPr>
+            <p:cNvPr id="918" name="Shape 35"/>
+            <p:cNvSpPr/>
+            <p:nvPr/>
+          </p:nvSpPr>
+          <p:spPr>
+            <a:xfrm>
+              <a:off x="8485998" y="4191975"/>
+              <a:ext cx="422453" cy="76810"/>
+            </a:xfrm>
+            <a:prstGeom prst="line">
+              <a:avLst>
+                <a:gd name="adj" fmla="val 119047"/>
+              </a:avLst>
+            </a:prstGeom>
+            <a:solidFill>
+              <a:srgbClr val="16243A"/>
+            </a:solidFill>
+            <a:ln w="38100">
+              <a:solidFill>
+                <a:srgbClr val="16243A"/>
+              </a:solidFill>
+              <a:prstDash val="solid"/>
+            </a:ln>
+          </p:spPr>
+        </p:sp>
+        <p:sp>
+          <p:nvSpPr>
+            <p:cNvPr id="919" name="Shape 36"/>
+            <p:cNvSpPr/>
+            <p:nvPr/>
+          </p:nvSpPr>
+          <p:spPr>
+            <a:xfrm>
+              <a:off x="8532084" y="4514576"/>
+              <a:ext cx="-107533" cy="276515"/>
+            </a:xfrm>
+            <a:prstGeom prst="line">
+              <a:avLst>
+                <a:gd name="adj" fmla="val -85034"/>
+              </a:avLst>
+            </a:prstGeom>
+            <a:solidFill>
+              <a:srgbClr val="16243A"/>
+            </a:solidFill>
+            <a:ln w="38100">
+              <a:solidFill>
+                <a:srgbClr val="16243A"/>
+              </a:solidFill>
+              <a:prstDash val="solid"/>
+            </a:ln>
+          </p:spPr>
+        </p:sp>
+        <p:sp>
+          <p:nvSpPr>
+            <p:cNvPr id="920" name="Shape 37"/>
+            <p:cNvSpPr/>
+            <p:nvPr/>
+          </p:nvSpPr>
+          <p:spPr>
+            <a:xfrm>
+              <a:off x="8823960" y="4514576"/>
+              <a:ext cx="107533" cy="276515"/>
+            </a:xfrm>
+            <a:prstGeom prst="line">
+              <a:avLst>
+                <a:gd name="adj" fmla="val 85034"/>
+              </a:avLst>
+            </a:prstGeom>
+            <a:solidFill>
+              <a:srgbClr val="16243A"/>
+            </a:solidFill>
+            <a:ln w="38100">
+              <a:solidFill>
+                <a:srgbClr val="16243A"/>
+              </a:solidFill>
+              <a:prstDash val="solid"/>
+            </a:ln>
+          </p:spPr>
+        </p:sp>
+        <p:sp>
+          <p:nvSpPr>
+            <p:cNvPr id="921" name="Shape 38"/>
+            <p:cNvSpPr/>
+            <p:nvPr/>
+          </p:nvSpPr>
+          <p:spPr>
+            <a:xfrm>
+              <a:off x="8624255" y="3854013"/>
+              <a:ext cx="26883" cy="26883"/>
+            </a:xfrm>
+            <a:prstGeom prst="ellipse">
+              <a:avLst>
+                <a:gd name="adj" fmla="val 340141"/>
+              </a:avLst>
+            </a:prstGeom>
+            <a:solidFill>
+              <a:srgbClr val="16243A"/>
+            </a:solidFill>
+            <a:ln w="12700">
+              <a:solidFill>
+                <a:srgbClr val="16243A">
+                  <a:alpha val="0"/>
+                </a:srgbClr>
+              </a:solidFill>
+              <a:prstDash val="solid"/>
+            </a:ln>
+          </p:spPr>
+        </p:sp>
+        <p:sp>
+          <p:nvSpPr>
+            <p:cNvPr id="922" name="Shape 39"/>
+            <p:cNvSpPr/>
+            <p:nvPr/>
+          </p:nvSpPr>
+          <p:spPr>
+            <a:xfrm>
+              <a:off x="8754831" y="3854013"/>
+              <a:ext cx="26883" cy="26883"/>
+            </a:xfrm>
+            <a:prstGeom prst="ellipse">
+              <a:avLst>
+                <a:gd name="adj" fmla="val 340141"/>
+              </a:avLst>
+            </a:prstGeom>
+            <a:solidFill>
+              <a:srgbClr val="16243A"/>
+            </a:solidFill>
+            <a:ln w="12700">
+              <a:solidFill>
+                <a:srgbClr val="16243A">
+                  <a:alpha val="0"/>
+                </a:srgbClr>
+              </a:solidFill>
+              <a:prstDash val="solid"/>
+            </a:ln>
+          </p:spPr>
+        </p:sp>
+        <p:sp>
+          <p:nvSpPr>
+            <p:cNvPr id="923" name="Shape 40"/>
+            <p:cNvSpPr/>
+            <p:nvPr/>
+          </p:nvSpPr>
+          <p:spPr>
+            <a:xfrm>
+              <a:off x="10134112" y="3840480"/>
+              <a:ext cx="333756" cy="333756"/>
+            </a:xfrm>
+            <a:prstGeom prst="ellipse">
+              <a:avLst>
+                <a:gd name="adj" fmla="val 27397"/>
+              </a:avLst>
+            </a:prstGeom>
+            <a:solidFill>
+              <a:srgbClr val="FDE6A5"/>
+            </a:solidFill>
+            <a:ln w="12700">
+              <a:solidFill>
+                <a:srgbClr val="FDE6A5">
+                  <a:alpha val="0"/>
+                </a:srgbClr>
+              </a:solidFill>
+              <a:prstDash val="solid"/>
+            </a:ln>
+          </p:spPr>
+        </p:sp>
+        <p:sp>
+          <p:nvSpPr>
+            <p:cNvPr id="924" name="Shape 41"/>
+            <p:cNvSpPr/>
+            <p:nvPr/>
+          </p:nvSpPr>
+          <p:spPr>
+            <a:xfrm rot="10800000">
+              <a:off x="10080711" y="4134185"/>
+              <a:ext cx="453908" cy="507309"/>
+            </a:xfrm>
+            <a:prstGeom prst="arc">
+              <a:avLst>
+                <a:gd name="adj" fmla="val 20145"/>
+              </a:avLst>
+            </a:prstGeom>
+            <a:solidFill>
+              <a:srgbClr val="F7DDE5"/>
+            </a:solidFill>
+            <a:ln w="12700">
+              <a:solidFill>
+                <a:srgbClr val="F7DDE5"/>
+              </a:solidFill>
+              <a:prstDash val="solid"/>
+            </a:ln>
+          </p:spPr>
+        </p:sp>
+        <p:sp>
+          <p:nvSpPr>
+            <p:cNvPr id="925" name="Shape 42"/>
+            <p:cNvSpPr/>
+            <p:nvPr/>
+          </p:nvSpPr>
+          <p:spPr>
+            <a:xfrm>
+              <a:off x="10100737" y="4281038"/>
+              <a:ext cx="367132" cy="66751"/>
+            </a:xfrm>
+            <a:prstGeom prst="line">
+              <a:avLst>
+                <a:gd name="adj" fmla="val 136987"/>
+              </a:avLst>
+            </a:prstGeom>
+            <a:solidFill>
+              <a:srgbClr val="16243A"/>
+            </a:solidFill>
+            <a:ln w="38100">
+              <a:solidFill>
+                <a:srgbClr val="16243A"/>
+              </a:solidFill>
+              <a:prstDash val="solid"/>
+            </a:ln>
+          </p:spPr>
+        </p:sp>
+        <p:sp>
+          <p:nvSpPr>
+            <p:cNvPr id="926" name="Shape 43"/>
+            <p:cNvSpPr/>
+            <p:nvPr/>
+          </p:nvSpPr>
+          <p:spPr>
+            <a:xfrm>
+              <a:off x="10140787" y="4561393"/>
+              <a:ext cx="-93452" cy="240304"/>
+            </a:xfrm>
+            <a:prstGeom prst="line">
+              <a:avLst>
+                <a:gd name="adj" fmla="val -97847"/>
+              </a:avLst>
+            </a:prstGeom>
+            <a:solidFill>
+              <a:srgbClr val="16243A"/>
+            </a:solidFill>
+            <a:ln w="38100">
+              <a:solidFill>
+                <a:srgbClr val="16243A"/>
+              </a:solidFill>
+              <a:prstDash val="solid"/>
+            </a:ln>
+          </p:spPr>
+        </p:sp>
+        <p:sp>
+          <p:nvSpPr>
+            <p:cNvPr id="927" name="Shape 44"/>
+            <p:cNvSpPr/>
+            <p:nvPr/>
+          </p:nvSpPr>
+          <p:spPr>
+            <a:xfrm>
+              <a:off x="10394442" y="4561393"/>
+              <a:ext cx="93452" cy="240304"/>
+            </a:xfrm>
+            <a:prstGeom prst="line">
+              <a:avLst>
+                <a:gd name="adj" fmla="val 97847"/>
+              </a:avLst>
+            </a:prstGeom>
+            <a:solidFill>
+              <a:srgbClr val="16243A"/>
+            </a:solidFill>
+            <a:ln w="38100">
+              <a:solidFill>
+                <a:srgbClr val="16243A"/>
+              </a:solidFill>
+              <a:prstDash val="solid"/>
+            </a:ln>
+          </p:spPr>
+        </p:sp>
+        <p:sp>
+          <p:nvSpPr>
+            <p:cNvPr id="928" name="Shape 45"/>
+            <p:cNvSpPr/>
+            <p:nvPr/>
+          </p:nvSpPr>
+          <p:spPr>
+            <a:xfrm>
+              <a:off x="10220889" y="3987333"/>
+              <a:ext cx="23363" cy="23363"/>
+            </a:xfrm>
+            <a:prstGeom prst="ellipse">
+              <a:avLst>
+                <a:gd name="adj" fmla="val 391388"/>
+              </a:avLst>
+            </a:prstGeom>
+            <a:solidFill>
+              <a:srgbClr val="16243A"/>
+            </a:solidFill>
+            <a:ln w="12700">
+              <a:solidFill>
+                <a:srgbClr val="16243A">
+                  <a:alpha val="0"/>
+                </a:srgbClr>
+              </a:solidFill>
+              <a:prstDash val="solid"/>
+            </a:ln>
+          </p:spPr>
+        </p:sp>
+        <p:sp>
+          <p:nvSpPr>
+            <p:cNvPr id="929" name="Shape 46"/>
+            <p:cNvSpPr/>
+            <p:nvPr/>
+          </p:nvSpPr>
+          <p:spPr>
+            <a:xfrm>
+              <a:off x="10334366" y="3987333"/>
+              <a:ext cx="23363" cy="23363"/>
+            </a:xfrm>
+            <a:prstGeom prst="ellipse">
+              <a:avLst>
+                <a:gd name="adj" fmla="val 391388"/>
+              </a:avLst>
+            </a:prstGeom>
+            <a:solidFill>
+              <a:srgbClr val="16243A"/>
+            </a:solidFill>
+            <a:ln w="12700">
+              <a:solidFill>
+                <a:srgbClr val="16243A">
+                  <a:alpha val="0"/>
+                </a:srgbClr>
+              </a:solidFill>
+              <a:prstDash val="solid"/>
+            </a:ln>
+          </p:spPr>
+        </p:sp>
+        <p:sp>
+          <p:nvSpPr>
+            <p:cNvPr id="930" name="Text 47"/>
+            <p:cNvSpPr/>
+            <p:nvPr/>
+          </p:nvSpPr>
+          <p:spPr>
+            <a:xfrm>
+              <a:off x="6885432" y="2779776"/>
+              <a:ext cx="4078224" cy="310896"/>
+            </a:xfrm>
+            <a:prstGeom prst="rect">
+              <a:avLst/>
+            </a:prstGeom>
+            <a:noFill/>
+            <a:ln/>
+          </p:spPr>
+          <p:txBody>
+            <a:bodyPr wrap="square" lIns="0" tIns="0" rIns="0" bIns="0" rtlCol="0" anchor="ctr">
+              <a:normAutofit/>
+            </a:bodyPr>
+            <a:lstStyle/>
+            <a:p>
+              <a:pPr algn="ctr" indent="0" marL="0">
+                <a:buNone/>
+              </a:pPr>
+              <a:r>
+                <a:rPr lang="en-US" sz="800" b="1" dirty="0">
+                  <a:solidFill>
+                    <a:srgbClr val="FFFFFF"/>
+                  </a:solidFill>
+                  <a:latin typeface="Malgun Gothic" pitchFamily="34" charset="0"/>
+                  <a:ea typeface="Malgun Gothic" pitchFamily="34" charset="-122"/>
+                  <a:cs typeface="Malgun Gothic" pitchFamily="34" charset="-120"/>
+                </a:rPr>
+                <a:t>ART MODE  /  LOGO MODE</a:t>
+              </a:r>
+              <a:endParaRPr lang="en-US" sz="800" dirty="0"/>
+            </a:p>
+          </p:txBody>
+        </p:sp>
+        <p:sp>
+          <p:nvSpPr>
+            <p:cNvPr id="931" name="Text 48"/>
+            <p:cNvSpPr/>
+            <p:nvPr/>
+          </p:nvSpPr>
+          <p:spPr>
+            <a:xfrm>
+              <a:off x="7333488" y="5394960"/>
+              <a:ext cx="3108960" cy="228600"/>
+            </a:xfrm>
+            <a:prstGeom prst="rect">
+              <a:avLst/>
+            </a:prstGeom>
+            <a:noFill/>
+            <a:ln/>
+          </p:spPr>
+          <p:txBody>
+            <a:bodyPr wrap="square" lIns="0" tIns="0" rIns="0" bIns="0" rtlCol="0" anchor="ctr">
+              <a:normAutofit/>
+            </a:bodyPr>
+            <a:lstStyle/>
+            <a:p>
+              <a:pPr algn="ctr" indent="0" marL="0">
+                <a:buNone/>
+              </a:pPr>
+              <a:r>
+                <a:rPr lang="en-US" sz="700" dirty="0">
+                  <a:solidFill>
+                    <a:srgbClr val="617287"/>
+                  </a:solidFill>
+                  <a:latin typeface="Malgun Gothic" pitchFamily="34" charset="0"/>
+                  <a:ea typeface="Malgun Gothic" pitchFamily="34" charset="-122"/>
+                  <a:cs typeface="Malgun Gothic" pitchFamily="34" charset="-120"/>
+                </a:rPr>
+                <a:t>CHARACTER PARADE</a:t>
+              </a:r>
+              <a:endParaRPr lang="en-US" sz="700" dirty="0"/>
+            </a:p>
+          </p:txBody>
+        </p:sp>
+      </p:grpSp>
     </p:spTree>
   </p:cSld>
   <p:clrMapOvr>

--- a/live-sketchbook/Live_Sketchbook_Experience_Flow_v2.pptx
+++ b/live-sketchbook/Live_Sketchbook_Experience_Flow_v2.pptx
@@ -116,52 +116,52 @@
   <p:extLst>
     <p:ext uri="{521415D9-36F7-43E2-AB2F-B90AF26B5E84}">
       <p14:sectionLst xmlns:p14="http://schemas.microsoft.com/office/powerpoint/2010/main">
-        <p14:section name="표지" id="{7e547541-a37b-c20d-5f74-c902a74868b9}">
+        <p14:section name="표지" id="{a446278a-8485-0b06-32d7-12ce4bdce0cf}">
           <p14:sldIdLst>
             <p14:sldId id="256"/>
           </p14:sldIdLst>
         </p14:section>
-        <p14:section name="요약" id="{26a0530c-a904-bf1d-eba8-2f3eae0d01f0}">
+        <p14:section name="요약" id="{f1d5b4ff-21f7-fcef-ebd6-d698f4ab79fd}">
           <p14:sldIdLst>
             <p14:sldId id="257"/>
           </p14:sldIdLst>
         </p14:section>
-        <p14:section name="검토" id="{cfdc8497-4f98-08fd-fe2d-7ed90ab3c945}">
+        <p14:section name="검토" id="{dea93831-f194-9b7f-7994-2a39f242a98b}">
           <p14:sldIdLst>
             <p14:sldId id="258"/>
           </p14:sldIdLst>
         </p14:section>
-        <p14:section name="01 Drawing" id="{97a6d495-6632-7c3a-c116-834f0a93b5be}">
+        <p14:section name="01 Drawing" id="{510cf7c5-949b-eabe-0845-16408d3bc569}">
           <p14:sldIdLst>
             <p14:sldId id="259"/>
           </p14:sldIdLst>
         </p14:section>
-        <p14:section name="02 Scan" id="{d4f38992-d195-a9fa-d9ec-ec79c5d4523c}">
+        <p14:section name="02 Scan" id="{4b07b914-19f4-2e9e-c34f-4a62a11db927}">
           <p14:sldIdLst>
             <p14:sldId id="260"/>
           </p14:sldIdLst>
         </p14:section>
-        <p14:section name="03 Wall" id="{07eb5e86-e202-bae4-8591-3beba775cf3f}">
+        <p14:section name="03 Wall" id="{e6b20892-cff1-c2f6-6a82-33019b78b3a7}">
           <p14:sldIdLst>
             <p14:sldId id="261"/>
           </p14:sldIdLst>
         </p14:section>
-        <p14:section name="04 Facade" id="{8895220a-406d-f621-078d-45895cda1b3d}">
+        <p14:section name="04 Facade" id="{502f27c5-58c0-2737-201b-3941d4457fe3}">
           <p14:sldIdLst>
             <p14:sldId id="262"/>
           </p14:sldIdLst>
         </p14:section>
-        <p14:section name="05 Archive" id="{14d488d4-7994-9646-f4c5-542902296132}">
+        <p14:section name="05 Archive" id="{7164ae49-243f-3290-4f2c-60c38b3e4556}">
           <p14:sldIdLst>
             <p14:sldId id="263"/>
           </p14:sldIdLst>
         </p14:section>
-        <p14:section name="운영" id="{f895c41b-770a-097c-f945-0036cafa1622}">
+        <p14:section name="운영" id="{0a07e603-bbc1-dd85-78a9-f630f5977a34}">
           <p14:sldIdLst>
             <p14:sldId id="264"/>
           </p14:sldIdLst>
         </p14:section>
-        <p14:section name="다음 단계" id="{8744fe38-25a4-2f70-d746-6aed07e01bcb}">
+        <p14:section name="다음 단계" id="{12a61eed-f4fb-76ab-c4a5-0b0f880f7878}">
           <p14:sldIdLst>
             <p14:sldId id="265"/>
           </p14:sldIdLst>
@@ -658,7 +658,7 @@
           <a:p>
             <a:r>
               <a:rPr lang="en-US" dirty="0"/>
-              <a:t/>
+              <a:t>제안안 근거: ① 처음 요청(도안 없이 자유롭게) ② 처리 시간과 제작 범위 ③ 배경 아이데이션 추천 조합 ④ 광장 이동 동기 + 평소 볼거리 ⑤ 하루 기록이 파사드 마감 쇼와 연결됨. 참고: 배경 아이데이션 https://claude.ai/artifact/D1egd98wfpfk7UxL8675ko · 기존 콘텐츠 연계 https://claude.ai/artifact/8Ly23dXVmzK4ApvdEsQWh9 · 쌓이는 그림 아카이브 https://claude.ai/artifact/V1VBgNDnCrYZTeZJq4ga5x</a:t>
             </a:r>
             <a:endParaRPr lang="en-US" dirty="0"/>
           </a:p>
@@ -2322,7 +2322,7 @@
                   <a:srgbClr val="16243A"/>
                 </a:solidFill>
               </a:rPr>
-              <a:t>결정이 필요한 것 5가지</a:t>
+              <a:t>결정이 필요한 것 | 5가지 중 하나씩 선택</a:t>
             </a:r>
             <a:endParaRPr lang="en-US" sz="3000" dirty="0"/>
           </a:p>
@@ -2360,7 +2360,7 @@
                   <a:srgbClr val="617287"/>
                 </a:solidFill>
               </a:rPr>
-              <a:t>결정 순서대로 정리. 앞의 결정이 뒤의 하드웨어 · 콘텐츠 범위를 정함</a:t>
+              <a:t>초록 테두리는 이 문서의 제안안 · 회의에서 □에 체크해 결정</a:t>
             </a:r>
             <a:endParaRPr lang="en-US" sz="1500" dirty="0"/>
           </a:p>
@@ -2368,18 +2368,92 @@
       </p:sp>
       <p:sp>
         <p:nvSpPr>
-          <p:cNvPr id="4" name="decision-0"/>
+          <p:cNvPr id="4" name="decision-no"/>
+          <p:cNvSpPr txBox="1"/>
+          <p:nvPr/>
+        </p:nvSpPr>
+        <p:spPr>
+          <a:xfrm>
+            <a:off x="548640" y="2029968"/>
+            <a:ext cx="457200" cy="457200"/>
+          </a:xfrm>
+          <a:prstGeom prst="ellipse">
+            <a:avLst/>
+          </a:prstGeom>
+          <a:solidFill>
+            <a:srgbClr val="E8614D"/>
+          </a:solidFill>
+          <a:ln/>
+        </p:spPr>
+        <p:txBody>
+          <a:bodyPr wrap="square" lIns="0" tIns="0" rIns="0" bIns="0" rtlCol="0" anchor="ctr"/>
+          <a:lstStyle/>
+          <a:p>
+            <a:pPr algn="ctr" indent="0" marL="0">
+              <a:buNone/>
+            </a:pPr>
+            <a:r>
+              <a:rPr lang="en-US" sz="1800" b="1" dirty="0">
+                <a:solidFill>
+                  <a:srgbClr val="FFFFFF"/>
+                </a:solidFill>
+              </a:rPr>
+              <a:t>①</a:t>
+            </a:r>
+            <a:endParaRPr lang="en-US" sz="1800" dirty="0"/>
+          </a:p>
+        </p:txBody>
+      </p:sp>
+      <p:sp>
+        <p:nvSpPr>
+          <p:cNvPr id="5" name="Text 3"/>
+          <p:cNvSpPr txBox="1"/>
+          <p:nvPr/>
+        </p:nvSpPr>
+        <p:spPr>
+          <a:xfrm>
+            <a:off x="1143000" y="1984248"/>
+            <a:ext cx="1737360" cy="548640"/>
+          </a:xfrm>
+          <a:prstGeom prst="rect">
+            <a:avLst/>
+          </a:prstGeom>
+          <a:noFill/>
+          <a:ln/>
+        </p:spPr>
+        <p:txBody>
+          <a:bodyPr wrap="square" lIns="0" tIns="0" rIns="0" bIns="0" rtlCol="0" anchor="ctr"/>
+          <a:lstStyle/>
+          <a:p>
+            <a:pPr indent="0" marL="0">
+              <a:buNone/>
+            </a:pPr>
+            <a:r>
+              <a:rPr lang="en-US" sz="1700" b="1" dirty="0">
+                <a:solidFill>
+                  <a:srgbClr val="16243A"/>
+                </a:solidFill>
+              </a:rPr>
+              <a:t>기본 도안</a:t>
+            </a:r>
+            <a:endParaRPr lang="en-US" sz="1700" dirty="0"/>
+          </a:p>
+        </p:txBody>
+      </p:sp>
+      <p:sp>
+        <p:nvSpPr>
+          <p:cNvPr id="6" name="option-0-0"/>
           <p:cNvSpPr/>
           <p:nvPr/>
         </p:nvSpPr>
         <p:spPr>
           <a:xfrm>
-            <a:off x="548640" y="1965960"/>
-            <a:ext cx="3520440" cy="1828800"/>
+            <a:off x="2971800" y="1874520"/>
+            <a:ext cx="2788920" cy="768096"/>
           </a:xfrm>
           <a:prstGeom prst="roundRect">
             <a:avLst>
-              <a:gd name="adj" fmla="val 6000"/>
+              <a:gd name="adj" fmla="val 11905"/>
             </a:avLst>
           </a:prstGeom>
           <a:solidFill>
@@ -2395,52 +2469,75 @@
       </p:sp>
       <p:sp>
         <p:nvSpPr>
-          <p:cNvPr id="5" name="Text 3"/>
-          <p:cNvSpPr txBox="1"/>
-          <p:nvPr/>
-        </p:nvSpPr>
-        <p:spPr>
-          <a:xfrm>
-            <a:off x="777240" y="2194560"/>
-            <a:ext cx="457200" cy="457200"/>
-          </a:xfrm>
-          <a:prstGeom prst="ellipse">
+          <p:cNvPr id="7" name="checkbox"/>
+          <p:cNvSpPr/>
+          <p:nvPr/>
+        </p:nvSpPr>
+        <p:spPr>
+          <a:xfrm>
+            <a:off x="3108960" y="2121408"/>
+            <a:ext cx="237744" cy="237744"/>
+          </a:xfrm>
+          <a:prstGeom prst="rect">
             <a:avLst/>
           </a:prstGeom>
           <a:solidFill>
-            <a:srgbClr val="5DCDC1"/>
+            <a:srgbClr val="FFFFFF"/>
           </a:solidFill>
-          <a:ln/>
-        </p:spPr>
-        <p:txBody>
-          <a:bodyPr wrap="square" lIns="0" tIns="0" rIns="0" bIns="0" rtlCol="0" anchor="ctr"/>
-          <a:lstStyle/>
-          <a:p>
-            <a:pPr algn="ctr" indent="0" marL="0">
-              <a:buNone/>
-            </a:pPr>
-            <a:r>
-              <a:rPr lang="en-US" sz="1700" b="1" dirty="0">
+          <a:ln w="15875">
+            <a:solidFill>
+              <a:srgbClr val="617287"/>
+            </a:solidFill>
+            <a:prstDash val="solid"/>
+          </a:ln>
+        </p:spPr>
+      </p:sp>
+      <p:sp>
+        <p:nvSpPr>
+          <p:cNvPr id="8" name="Text 6"/>
+          <p:cNvSpPr txBox="1"/>
+          <p:nvPr/>
+        </p:nvSpPr>
+        <p:spPr>
+          <a:xfrm>
+            <a:off x="3447288" y="1947672"/>
+            <a:ext cx="2194560" cy="347472"/>
+          </a:xfrm>
+          <a:prstGeom prst="rect">
+            <a:avLst/>
+          </a:prstGeom>
+          <a:noFill/>
+          <a:ln/>
+        </p:spPr>
+        <p:txBody>
+          <a:bodyPr wrap="square" lIns="0" tIns="0" rIns="0" bIns="0" rtlCol="0" anchor="ctr"/>
+          <a:lstStyle/>
+          <a:p>
+            <a:pPr indent="0" marL="0">
+              <a:buNone/>
+            </a:pPr>
+            <a:r>
+              <a:rPr lang="en-US" sz="1300" b="1" dirty="0">
                 <a:solidFill>
                   <a:srgbClr val="16243A"/>
                 </a:solidFill>
               </a:rPr>
-              <a:t>1</a:t>
-            </a:r>
-            <a:endParaRPr lang="en-US" sz="1700" dirty="0"/>
-          </a:p>
-        </p:txBody>
-      </p:sp>
-      <p:sp>
-        <p:nvSpPr>
-          <p:cNvPr id="6" name="Text 4"/>
-          <p:cNvSpPr txBox="1"/>
-          <p:nvPr/>
-        </p:nvSpPr>
-        <p:spPr>
-          <a:xfrm>
-            <a:off x="1417320" y="2194560"/>
-            <a:ext cx="2468880" cy="457200"/>
+              <a:t>A안 전신 가이드</a:t>
+            </a:r>
+            <a:endParaRPr lang="en-US" sz="1300" dirty="0"/>
+          </a:p>
+        </p:txBody>
+      </p:sp>
+      <p:sp>
+        <p:nvSpPr>
+          <p:cNvPr id="9" name="Text 7"/>
+          <p:cNvSpPr txBox="1"/>
+          <p:nvPr/>
+        </p:nvSpPr>
+        <p:spPr>
+          <a:xfrm>
+            <a:off x="3447288" y="2276856"/>
+            <a:ext cx="2194560" cy="292608"/>
           </a:xfrm>
           <a:prstGeom prst="rect">
             <a:avLst/>
@@ -2456,67 +2553,31 @@
               <a:buNone/>
             </a:pPr>
             <a:r>
-              <a:rPr lang="en-US" sz="1700" b="1" dirty="0">
-                <a:solidFill>
-                  <a:srgbClr val="16243A"/>
-                </a:solidFill>
-              </a:rPr>
-              <a:t>기본 도안</a:t>
-            </a:r>
-            <a:endParaRPr lang="en-US" sz="1700" dirty="0"/>
-          </a:p>
-        </p:txBody>
-      </p:sp>
-      <p:sp>
-        <p:nvSpPr>
-          <p:cNvPr id="7" name="Text 5"/>
-          <p:cNvSpPr txBox="1"/>
-          <p:nvPr/>
-        </p:nvSpPr>
-        <p:spPr>
-          <a:xfrm>
-            <a:off x="777240" y="2834640"/>
-            <a:ext cx="3063240" cy="822960"/>
-          </a:xfrm>
-          <a:prstGeom prst="rect">
-            <a:avLst/>
-          </a:prstGeom>
-          <a:noFill/>
-          <a:ln/>
-        </p:spPr>
-        <p:txBody>
-          <a:bodyPr wrap="square" lIns="0" tIns="0" rIns="0" bIns="0" rtlCol="0" anchor="t"/>
-          <a:lstStyle/>
-          <a:p>
-            <a:pPr indent="0" marL="0">
-              <a:buNone/>
-            </a:pPr>
-            <a:r>
-              <a:rPr lang="en-US" sz="1400" dirty="0">
+              <a:rPr lang="en-US" sz="1100" dirty="0">
                 <a:solidFill>
                   <a:srgbClr val="617287"/>
                 </a:solidFill>
               </a:rPr>
-              <a:t>A · B · 자유 그리기 C 중 무엇을 기본으로</a:t>
-            </a:r>
-            <a:endParaRPr lang="en-US" sz="1400" dirty="0"/>
-          </a:p>
-        </p:txBody>
-      </p:sp>
-      <p:sp>
-        <p:nvSpPr>
-          <p:cNvPr id="8" name="decision-1"/>
+              <a:t>얼굴 · 몸통 · 팔 · 다리</a:t>
+            </a:r>
+            <a:endParaRPr lang="en-US" sz="1100" dirty="0"/>
+          </a:p>
+        </p:txBody>
+      </p:sp>
+      <p:sp>
+        <p:nvSpPr>
+          <p:cNvPr id="10" name="option-0-1"/>
           <p:cNvSpPr/>
           <p:nvPr/>
         </p:nvSpPr>
         <p:spPr>
           <a:xfrm>
-            <a:off x="4297680" y="1965960"/>
-            <a:ext cx="3520440" cy="1828800"/>
+            <a:off x="5897880" y="1874520"/>
+            <a:ext cx="2788920" cy="768096"/>
           </a:xfrm>
           <a:prstGeom prst="roundRect">
             <a:avLst>
-              <a:gd name="adj" fmla="val 6000"/>
+              <a:gd name="adj" fmla="val 11905"/>
             </a:avLst>
           </a:prstGeom>
           <a:solidFill>
@@ -2532,17 +2593,240 @@
       </p:sp>
       <p:sp>
         <p:nvSpPr>
-          <p:cNvPr id="9" name="Text 7"/>
-          <p:cNvSpPr txBox="1"/>
-          <p:nvPr/>
-        </p:nvSpPr>
-        <p:spPr>
-          <a:xfrm>
-            <a:off x="4526280" y="2194560"/>
-            <a:ext cx="457200" cy="457200"/>
-          </a:xfrm>
-          <a:prstGeom prst="ellipse">
-            <a:avLst/>
+          <p:cNvPr id="11" name="checkbox"/>
+          <p:cNvSpPr/>
+          <p:nvPr/>
+        </p:nvSpPr>
+        <p:spPr>
+          <a:xfrm>
+            <a:off x="6035040" y="2121408"/>
+            <a:ext cx="237744" cy="237744"/>
+          </a:xfrm>
+          <a:prstGeom prst="rect">
+            <a:avLst/>
+          </a:prstGeom>
+          <a:solidFill>
+            <a:srgbClr val="FFFFFF"/>
+          </a:solidFill>
+          <a:ln w="15875">
+            <a:solidFill>
+              <a:srgbClr val="617287"/>
+            </a:solidFill>
+            <a:prstDash val="solid"/>
+          </a:ln>
+        </p:spPr>
+      </p:sp>
+      <p:sp>
+        <p:nvSpPr>
+          <p:cNvPr id="12" name="Text 10"/>
+          <p:cNvSpPr txBox="1"/>
+          <p:nvPr/>
+        </p:nvSpPr>
+        <p:spPr>
+          <a:xfrm>
+            <a:off x="6373368" y="1947672"/>
+            <a:ext cx="2194560" cy="347472"/>
+          </a:xfrm>
+          <a:prstGeom prst="rect">
+            <a:avLst/>
+          </a:prstGeom>
+          <a:noFill/>
+          <a:ln/>
+        </p:spPr>
+        <p:txBody>
+          <a:bodyPr wrap="square" lIns="0" tIns="0" rIns="0" bIns="0" rtlCol="0" anchor="ctr"/>
+          <a:lstStyle/>
+          <a:p>
+            <a:pPr indent="0" marL="0">
+              <a:buNone/>
+            </a:pPr>
+            <a:r>
+              <a:rPr lang="en-US" sz="1300" b="1" dirty="0">
+                <a:solidFill>
+                  <a:srgbClr val="16243A"/>
+                </a:solidFill>
+              </a:rPr>
+              <a:t>B안 얼굴만</a:t>
+            </a:r>
+            <a:endParaRPr lang="en-US" sz="1300" dirty="0"/>
+          </a:p>
+        </p:txBody>
+      </p:sp>
+      <p:sp>
+        <p:nvSpPr>
+          <p:cNvPr id="13" name="Text 11"/>
+          <p:cNvSpPr txBox="1"/>
+          <p:nvPr/>
+        </p:nvSpPr>
+        <p:spPr>
+          <a:xfrm>
+            <a:off x="6373368" y="2276856"/>
+            <a:ext cx="2194560" cy="292608"/>
+          </a:xfrm>
+          <a:prstGeom prst="rect">
+            <a:avLst/>
+          </a:prstGeom>
+          <a:noFill/>
+          <a:ln/>
+        </p:spPr>
+        <p:txBody>
+          <a:bodyPr wrap="square" lIns="0" tIns="0" rIns="0" bIns="0" rtlCol="0" anchor="ctr"/>
+          <a:lstStyle/>
+          <a:p>
+            <a:pPr indent="0" marL="0">
+              <a:buNone/>
+            </a:pPr>
+            <a:r>
+              <a:rPr lang="en-US" sz="1100" dirty="0">
+                <a:solidFill>
+                  <a:srgbClr val="617287"/>
+                </a:solidFill>
+              </a:rPr>
+              <a:t>심플 가이드</a:t>
+            </a:r>
+            <a:endParaRPr lang="en-US" sz="1100" dirty="0"/>
+          </a:p>
+        </p:txBody>
+      </p:sp>
+      <p:sp>
+        <p:nvSpPr>
+          <p:cNvPr id="14" name="option-0-2"/>
+          <p:cNvSpPr/>
+          <p:nvPr/>
+        </p:nvSpPr>
+        <p:spPr>
+          <a:xfrm>
+            <a:off x="8823960" y="1874520"/>
+            <a:ext cx="2788920" cy="768096"/>
+          </a:xfrm>
+          <a:prstGeom prst="roundRect">
+            <a:avLst>
+              <a:gd name="adj" fmla="val 11905"/>
+            </a:avLst>
+          </a:prstGeom>
+          <a:solidFill>
+            <a:srgbClr val="EAF5F1"/>
+          </a:solidFill>
+          <a:ln w="25400">
+            <a:solidFill>
+              <a:srgbClr val="2B8C83"/>
+            </a:solidFill>
+            <a:prstDash val="solid"/>
+          </a:ln>
+        </p:spPr>
+      </p:sp>
+      <p:sp>
+        <p:nvSpPr>
+          <p:cNvPr id="15" name="checkbox"/>
+          <p:cNvSpPr/>
+          <p:nvPr/>
+        </p:nvSpPr>
+        <p:spPr>
+          <a:xfrm>
+            <a:off x="8961120" y="2121408"/>
+            <a:ext cx="237744" cy="237744"/>
+          </a:xfrm>
+          <a:prstGeom prst="rect">
+            <a:avLst/>
+          </a:prstGeom>
+          <a:solidFill>
+            <a:srgbClr val="FFFFFF"/>
+          </a:solidFill>
+          <a:ln w="15875">
+            <a:solidFill>
+              <a:srgbClr val="2B8C83"/>
+            </a:solidFill>
+            <a:prstDash val="solid"/>
+          </a:ln>
+        </p:spPr>
+      </p:sp>
+      <p:sp>
+        <p:nvSpPr>
+          <p:cNvPr id="16" name="Text 14"/>
+          <p:cNvSpPr txBox="1"/>
+          <p:nvPr/>
+        </p:nvSpPr>
+        <p:spPr>
+          <a:xfrm>
+            <a:off x="9299448" y="1947672"/>
+            <a:ext cx="1600200" cy="347472"/>
+          </a:xfrm>
+          <a:prstGeom prst="rect">
+            <a:avLst/>
+          </a:prstGeom>
+          <a:noFill/>
+          <a:ln/>
+        </p:spPr>
+        <p:txBody>
+          <a:bodyPr wrap="square" lIns="0" tIns="0" rIns="0" bIns="0" rtlCol="0" anchor="ctr"/>
+          <a:lstStyle/>
+          <a:p>
+            <a:pPr indent="0" marL="0">
+              <a:buNone/>
+            </a:pPr>
+            <a:r>
+              <a:rPr lang="en-US" sz="1300" b="1" dirty="0">
+                <a:solidFill>
+                  <a:srgbClr val="16243A"/>
+                </a:solidFill>
+              </a:rPr>
+              <a:t>C안 자유 그리기</a:t>
+            </a:r>
+            <a:endParaRPr lang="en-US" sz="1300" dirty="0"/>
+          </a:p>
+        </p:txBody>
+      </p:sp>
+      <p:sp>
+        <p:nvSpPr>
+          <p:cNvPr id="17" name="Text 15"/>
+          <p:cNvSpPr txBox="1"/>
+          <p:nvPr/>
+        </p:nvSpPr>
+        <p:spPr>
+          <a:xfrm>
+            <a:off x="9299448" y="2276856"/>
+            <a:ext cx="2194560" cy="292608"/>
+          </a:xfrm>
+          <a:prstGeom prst="rect">
+            <a:avLst/>
+          </a:prstGeom>
+          <a:noFill/>
+          <a:ln/>
+        </p:spPr>
+        <p:txBody>
+          <a:bodyPr wrap="square" lIns="0" tIns="0" rIns="0" bIns="0" rtlCol="0" anchor="ctr"/>
+          <a:lstStyle/>
+          <a:p>
+            <a:pPr indent="0" marL="0">
+              <a:buNone/>
+            </a:pPr>
+            <a:r>
+              <a:rPr lang="en-US" sz="1100" dirty="0">
+                <a:solidFill>
+                  <a:srgbClr val="617287"/>
+                </a:solidFill>
+              </a:rPr>
+              <a:t>“도안 없이” 처음 방향</a:t>
+            </a:r>
+            <a:endParaRPr lang="en-US" sz="1100" dirty="0"/>
+          </a:p>
+        </p:txBody>
+      </p:sp>
+      <p:sp>
+        <p:nvSpPr>
+          <p:cNvPr id="18" name="chip-제안"/>
+          <p:cNvSpPr txBox="1"/>
+          <p:nvPr/>
+        </p:nvSpPr>
+        <p:spPr>
+          <a:xfrm>
+            <a:off x="10954512" y="1965960"/>
+            <a:ext cx="548640" cy="292608"/>
+          </a:xfrm>
+          <a:prstGeom prst="roundRect">
+            <a:avLst>
+              <a:gd name="adj" fmla="val 25000"/>
+            </a:avLst>
           </a:prstGeom>
           <a:solidFill>
             <a:srgbClr val="5DCDC1"/>
@@ -2557,12 +2841,86 @@
               <a:buNone/>
             </a:pPr>
             <a:r>
+              <a:rPr lang="en-US" sz="1100" b="1" dirty="0">
+                <a:solidFill>
+                  <a:srgbClr val="16243A"/>
+                </a:solidFill>
+              </a:rPr>
+              <a:t>제안</a:t>
+            </a:r>
+            <a:endParaRPr lang="en-US" sz="1100" dirty="0"/>
+          </a:p>
+        </p:txBody>
+      </p:sp>
+      <p:sp>
+        <p:nvSpPr>
+          <p:cNvPr id="19" name="decision-no"/>
+          <p:cNvSpPr txBox="1"/>
+          <p:nvPr/>
+        </p:nvSpPr>
+        <p:spPr>
+          <a:xfrm>
+            <a:off x="548640" y="2898648"/>
+            <a:ext cx="457200" cy="457200"/>
+          </a:xfrm>
+          <a:prstGeom prst="ellipse">
+            <a:avLst/>
+          </a:prstGeom>
+          <a:solidFill>
+            <a:srgbClr val="E8614D"/>
+          </a:solidFill>
+          <a:ln/>
+        </p:spPr>
+        <p:txBody>
+          <a:bodyPr wrap="square" lIns="0" tIns="0" rIns="0" bIns="0" rtlCol="0" anchor="ctr"/>
+          <a:lstStyle/>
+          <a:p>
+            <a:pPr algn="ctr" indent="0" marL="0">
+              <a:buNone/>
+            </a:pPr>
+            <a:r>
+              <a:rPr lang="en-US" sz="1800" b="1" dirty="0">
+                <a:solidFill>
+                  <a:srgbClr val="FFFFFF"/>
+                </a:solidFill>
+              </a:rPr>
+              <a:t>②</a:t>
+            </a:r>
+            <a:endParaRPr lang="en-US" sz="1800" dirty="0"/>
+          </a:p>
+        </p:txBody>
+      </p:sp>
+      <p:sp>
+        <p:nvSpPr>
+          <p:cNvPr id="20" name="Text 18"/>
+          <p:cNvSpPr txBox="1"/>
+          <p:nvPr/>
+        </p:nvSpPr>
+        <p:spPr>
+          <a:xfrm>
+            <a:off x="1143000" y="2852928"/>
+            <a:ext cx="1737360" cy="548640"/>
+          </a:xfrm>
+          <a:prstGeom prst="rect">
+            <a:avLst/>
+          </a:prstGeom>
+          <a:noFill/>
+          <a:ln/>
+        </p:spPr>
+        <p:txBody>
+          <a:bodyPr wrap="square" lIns="0" tIns="0" rIns="0" bIns="0" rtlCol="0" anchor="ctr"/>
+          <a:lstStyle/>
+          <a:p>
+            <a:pPr indent="0" marL="0">
+              <a:buNone/>
+            </a:pPr>
+            <a:r>
               <a:rPr lang="en-US" sz="1700" b="1" dirty="0">
                 <a:solidFill>
                   <a:srgbClr val="16243A"/>
                 </a:solidFill>
               </a:rPr>
-              <a:t>2</a:t>
+              <a:t>캐릭터 방식</a:t>
             </a:r>
             <a:endParaRPr lang="en-US" sz="1700" dirty="0"/>
           </a:p>
@@ -2570,90 +2928,182 @@
       </p:sp>
       <p:sp>
         <p:nvSpPr>
-          <p:cNvPr id="10" name="Text 8"/>
-          <p:cNvSpPr txBox="1"/>
-          <p:nvPr/>
-        </p:nvSpPr>
-        <p:spPr>
-          <a:xfrm>
-            <a:off x="5166360" y="2194560"/>
-            <a:ext cx="2468880" cy="457200"/>
-          </a:xfrm>
-          <a:prstGeom prst="rect">
-            <a:avLst/>
-          </a:prstGeom>
-          <a:noFill/>
-          <a:ln/>
-        </p:spPr>
-        <p:txBody>
-          <a:bodyPr wrap="square" lIns="0" tIns="0" rIns="0" bIns="0" rtlCol="0" anchor="ctr"/>
-          <a:lstStyle/>
-          <a:p>
-            <a:pPr indent="0" marL="0">
-              <a:buNone/>
-            </a:pPr>
-            <a:r>
-              <a:rPr lang="en-US" sz="1700" b="1" dirty="0">
-                <a:solidFill>
-                  <a:srgbClr val="16243A"/>
-                </a:solidFill>
-              </a:rPr>
-              <a:t>캐릭터 방식</a:t>
-            </a:r>
-            <a:endParaRPr lang="en-US" sz="1700" dirty="0"/>
-          </a:p>
-        </p:txBody>
-      </p:sp>
-      <p:sp>
-        <p:nvSpPr>
-          <p:cNvPr id="11" name="Text 9"/>
-          <p:cNvSpPr txBox="1"/>
-          <p:nvPr/>
-        </p:nvSpPr>
-        <p:spPr>
-          <a:xfrm>
-            <a:off x="4526280" y="2834640"/>
-            <a:ext cx="3063240" cy="822960"/>
-          </a:xfrm>
-          <a:prstGeom prst="rect">
-            <a:avLst/>
-          </a:prstGeom>
-          <a:noFill/>
-          <a:ln/>
-        </p:spPr>
-        <p:txBody>
-          <a:bodyPr wrap="square" lIns="0" tIns="0" rIns="0" bIns="0" rtlCol="0" anchor="t"/>
-          <a:lstStyle/>
-          <a:p>
-            <a:pPr indent="0" marL="0">
-              <a:buNone/>
-            </a:pPr>
-            <a:r>
-              <a:rPr lang="en-US" sz="1400" dirty="0">
-                <a:solidFill>
-                  <a:srgbClr val="617287"/>
-                </a:solidFill>
-              </a:rPr>
-              <a:t>2D 휘기 vs 3D 변환</a:t>
-            </a:r>
-            <a:endParaRPr lang="en-US" sz="1400" dirty="0"/>
-          </a:p>
-        </p:txBody>
-      </p:sp>
-      <p:sp>
-        <p:nvSpPr>
-          <p:cNvPr id="12" name="decision-2"/>
+          <p:cNvPr id="21" name="option-1-0"/>
           <p:cNvSpPr/>
           <p:nvPr/>
         </p:nvSpPr>
         <p:spPr>
           <a:xfrm>
-            <a:off x="8046720" y="1965960"/>
-            <a:ext cx="3520440" cy="1828800"/>
+            <a:off x="2971800" y="2743200"/>
+            <a:ext cx="2788920" cy="768096"/>
           </a:xfrm>
           <a:prstGeom prst="roundRect">
             <a:avLst>
-              <a:gd name="adj" fmla="val 6000"/>
+              <a:gd name="adj" fmla="val 11905"/>
+            </a:avLst>
+          </a:prstGeom>
+          <a:solidFill>
+            <a:srgbClr val="EAF5F1"/>
+          </a:solidFill>
+          <a:ln w="25400">
+            <a:solidFill>
+              <a:srgbClr val="2B8C83"/>
+            </a:solidFill>
+            <a:prstDash val="solid"/>
+          </a:ln>
+        </p:spPr>
+      </p:sp>
+      <p:sp>
+        <p:nvSpPr>
+          <p:cNvPr id="22" name="checkbox"/>
+          <p:cNvSpPr/>
+          <p:nvPr/>
+        </p:nvSpPr>
+        <p:spPr>
+          <a:xfrm>
+            <a:off x="3108960" y="2990088"/>
+            <a:ext cx="237744" cy="237744"/>
+          </a:xfrm>
+          <a:prstGeom prst="rect">
+            <a:avLst/>
+          </a:prstGeom>
+          <a:solidFill>
+            <a:srgbClr val="FFFFFF"/>
+          </a:solidFill>
+          <a:ln w="15875">
+            <a:solidFill>
+              <a:srgbClr val="2B8C83"/>
+            </a:solidFill>
+            <a:prstDash val="solid"/>
+          </a:ln>
+        </p:spPr>
+      </p:sp>
+      <p:sp>
+        <p:nvSpPr>
+          <p:cNvPr id="23" name="Text 21"/>
+          <p:cNvSpPr txBox="1"/>
+          <p:nvPr/>
+        </p:nvSpPr>
+        <p:spPr>
+          <a:xfrm>
+            <a:off x="3447288" y="2816352"/>
+            <a:ext cx="1600200" cy="347472"/>
+          </a:xfrm>
+          <a:prstGeom prst="rect">
+            <a:avLst/>
+          </a:prstGeom>
+          <a:noFill/>
+          <a:ln/>
+        </p:spPr>
+        <p:txBody>
+          <a:bodyPr wrap="square" lIns="0" tIns="0" rIns="0" bIns="0" rtlCol="0" anchor="ctr"/>
+          <a:lstStyle/>
+          <a:p>
+            <a:pPr indent="0" marL="0">
+              <a:buNone/>
+            </a:pPr>
+            <a:r>
+              <a:rPr lang="en-US" sz="1300" b="1" dirty="0">
+                <a:solidFill>
+                  <a:srgbClr val="16243A"/>
+                </a:solidFill>
+              </a:rPr>
+              <a:t>2D 휘기</a:t>
+            </a:r>
+            <a:endParaRPr lang="en-US" sz="1300" dirty="0"/>
+          </a:p>
+        </p:txBody>
+      </p:sp>
+      <p:sp>
+        <p:nvSpPr>
+          <p:cNvPr id="24" name="Text 22"/>
+          <p:cNvSpPr txBox="1"/>
+          <p:nvPr/>
+        </p:nvSpPr>
+        <p:spPr>
+          <a:xfrm>
+            <a:off x="3447288" y="3145536"/>
+            <a:ext cx="2194560" cy="292608"/>
+          </a:xfrm>
+          <a:prstGeom prst="rect">
+            <a:avLst/>
+          </a:prstGeom>
+          <a:noFill/>
+          <a:ln/>
+        </p:spPr>
+        <p:txBody>
+          <a:bodyPr wrap="square" lIns="0" tIns="0" rIns="0" bIns="0" rtlCol="0" anchor="ctr"/>
+          <a:lstStyle/>
+          <a:p>
+            <a:pPr indent="0" marL="0">
+              <a:buNone/>
+            </a:pPr>
+            <a:r>
+              <a:rPr lang="en-US" sz="1100" dirty="0">
+                <a:solidFill>
+                  <a:srgbClr val="617287"/>
+                </a:solidFill>
+              </a:rPr>
+              <a:t>그림 모양 그대로 움직임</a:t>
+            </a:r>
+            <a:endParaRPr lang="en-US" sz="1100" dirty="0"/>
+          </a:p>
+        </p:txBody>
+      </p:sp>
+      <p:sp>
+        <p:nvSpPr>
+          <p:cNvPr id="25" name="chip-제안"/>
+          <p:cNvSpPr txBox="1"/>
+          <p:nvPr/>
+        </p:nvSpPr>
+        <p:spPr>
+          <a:xfrm>
+            <a:off x="5102352" y="2834640"/>
+            <a:ext cx="548640" cy="292608"/>
+          </a:xfrm>
+          <a:prstGeom prst="roundRect">
+            <a:avLst>
+              <a:gd name="adj" fmla="val 25000"/>
+            </a:avLst>
+          </a:prstGeom>
+          <a:solidFill>
+            <a:srgbClr val="5DCDC1"/>
+          </a:solidFill>
+          <a:ln/>
+        </p:spPr>
+        <p:txBody>
+          <a:bodyPr wrap="square" lIns="0" tIns="0" rIns="0" bIns="0" rtlCol="0" anchor="ctr"/>
+          <a:lstStyle/>
+          <a:p>
+            <a:pPr algn="ctr" indent="0" marL="0">
+              <a:buNone/>
+            </a:pPr>
+            <a:r>
+              <a:rPr lang="en-US" sz="1100" b="1" dirty="0">
+                <a:solidFill>
+                  <a:srgbClr val="16243A"/>
+                </a:solidFill>
+              </a:rPr>
+              <a:t>제안</a:t>
+            </a:r>
+            <a:endParaRPr lang="en-US" sz="1100" dirty="0"/>
+          </a:p>
+        </p:txBody>
+      </p:sp>
+      <p:sp>
+        <p:nvSpPr>
+          <p:cNvPr id="26" name="option-1-1"/>
+          <p:cNvSpPr/>
+          <p:nvPr/>
+        </p:nvSpPr>
+        <p:spPr>
+          <a:xfrm>
+            <a:off x="5897880" y="2743200"/>
+            <a:ext cx="2788920" cy="768096"/>
+          </a:xfrm>
+          <a:prstGeom prst="roundRect">
+            <a:avLst>
+              <a:gd name="adj" fmla="val 11905"/>
             </a:avLst>
           </a:prstGeom>
           <a:solidFill>
@@ -2669,52 +3119,75 @@
       </p:sp>
       <p:sp>
         <p:nvSpPr>
-          <p:cNvPr id="13" name="Text 11"/>
-          <p:cNvSpPr txBox="1"/>
-          <p:nvPr/>
-        </p:nvSpPr>
-        <p:spPr>
-          <a:xfrm>
-            <a:off x="8275320" y="2194560"/>
-            <a:ext cx="457200" cy="457200"/>
-          </a:xfrm>
-          <a:prstGeom prst="ellipse">
+          <p:cNvPr id="27" name="checkbox"/>
+          <p:cNvSpPr/>
+          <p:nvPr/>
+        </p:nvSpPr>
+        <p:spPr>
+          <a:xfrm>
+            <a:off x="6035040" y="2990088"/>
+            <a:ext cx="237744" cy="237744"/>
+          </a:xfrm>
+          <a:prstGeom prst="rect">
             <a:avLst/>
           </a:prstGeom>
           <a:solidFill>
-            <a:srgbClr val="5DCDC1"/>
+            <a:srgbClr val="FFFFFF"/>
           </a:solidFill>
-          <a:ln/>
-        </p:spPr>
-        <p:txBody>
-          <a:bodyPr wrap="square" lIns="0" tIns="0" rIns="0" bIns="0" rtlCol="0" anchor="ctr"/>
-          <a:lstStyle/>
-          <a:p>
-            <a:pPr algn="ctr" indent="0" marL="0">
-              <a:buNone/>
-            </a:pPr>
-            <a:r>
-              <a:rPr lang="en-US" sz="1700" b="1" dirty="0">
+          <a:ln w="15875">
+            <a:solidFill>
+              <a:srgbClr val="617287"/>
+            </a:solidFill>
+            <a:prstDash val="solid"/>
+          </a:ln>
+        </p:spPr>
+      </p:sp>
+      <p:sp>
+        <p:nvSpPr>
+          <p:cNvPr id="28" name="Text 26"/>
+          <p:cNvSpPr txBox="1"/>
+          <p:nvPr/>
+        </p:nvSpPr>
+        <p:spPr>
+          <a:xfrm>
+            <a:off x="6373368" y="2816352"/>
+            <a:ext cx="2194560" cy="347472"/>
+          </a:xfrm>
+          <a:prstGeom prst="rect">
+            <a:avLst/>
+          </a:prstGeom>
+          <a:noFill/>
+          <a:ln/>
+        </p:spPr>
+        <p:txBody>
+          <a:bodyPr wrap="square" lIns="0" tIns="0" rIns="0" bIns="0" rtlCol="0" anchor="ctr"/>
+          <a:lstStyle/>
+          <a:p>
+            <a:pPr indent="0" marL="0">
+              <a:buNone/>
+            </a:pPr>
+            <a:r>
+              <a:rPr lang="en-US" sz="1300" b="1" dirty="0">
                 <a:solidFill>
                   <a:srgbClr val="16243A"/>
                 </a:solidFill>
               </a:rPr>
-              <a:t>3</a:t>
-            </a:r>
-            <a:endParaRPr lang="en-US" sz="1700" dirty="0"/>
-          </a:p>
-        </p:txBody>
-      </p:sp>
-      <p:sp>
-        <p:nvSpPr>
-          <p:cNvPr id="14" name="Text 12"/>
-          <p:cNvSpPr txBox="1"/>
-          <p:nvPr/>
-        </p:nvSpPr>
-        <p:spPr>
-          <a:xfrm>
-            <a:off x="8915400" y="2194560"/>
-            <a:ext cx="2468880" cy="457200"/>
+              <a:t>3D 변환</a:t>
+            </a:r>
+            <a:endParaRPr lang="en-US" sz="1300" dirty="0"/>
+          </a:p>
+        </p:txBody>
+      </p:sp>
+      <p:sp>
+        <p:nvSpPr>
+          <p:cNvPr id="29" name="Text 27"/>
+          <p:cNvSpPr txBox="1"/>
+          <p:nvPr/>
+        </p:nvSpPr>
+        <p:spPr>
+          <a:xfrm>
+            <a:off x="6373368" y="3145536"/>
+            <a:ext cx="2194560" cy="292608"/>
           </a:xfrm>
           <a:prstGeom prst="rect">
             <a:avLst/>
@@ -2730,67 +3203,31 @@
               <a:buNone/>
             </a:pPr>
             <a:r>
-              <a:rPr lang="en-US" sz="1700" b="1" dirty="0">
-                <a:solidFill>
-                  <a:srgbClr val="16243A"/>
-                </a:solidFill>
-              </a:rPr>
-              <a:t>배경 방식</a:t>
-            </a:r>
-            <a:endParaRPr lang="en-US" sz="1700" dirty="0"/>
-          </a:p>
-        </p:txBody>
-      </p:sp>
-      <p:sp>
-        <p:nvSpPr>
-          <p:cNvPr id="15" name="Text 13"/>
-          <p:cNvSpPr txBox="1"/>
-          <p:nvPr/>
-        </p:nvSpPr>
-        <p:spPr>
-          <a:xfrm>
-            <a:off x="8275320" y="2834640"/>
-            <a:ext cx="3063240" cy="822960"/>
-          </a:xfrm>
-          <a:prstGeom prst="rect">
-            <a:avLst/>
-          </a:prstGeom>
-          <a:noFill/>
-          <a:ln/>
-        </p:spPr>
-        <p:txBody>
-          <a:bodyPr wrap="square" lIns="0" tIns="0" rIns="0" bIns="0" rtlCol="0" anchor="t"/>
-          <a:lstStyle/>
-          <a:p>
-            <a:pPr indent="0" marL="0">
-              <a:buNone/>
-            </a:pPr>
-            <a:r>
-              <a:rPr lang="en-US" sz="1400" dirty="0">
+              <a:rPr lang="en-US" sz="1100" dirty="0">
                 <a:solidFill>
                   <a:srgbClr val="617287"/>
                 </a:solidFill>
               </a:rPr>
-              <a:t>벽에서 그림이 배경에 붙는 방식(B1–B6 중)</a:t>
-            </a:r>
-            <a:endParaRPr lang="en-US" sz="1400" dirty="0"/>
-          </a:p>
-        </p:txBody>
-      </p:sp>
-      <p:sp>
-        <p:nvSpPr>
-          <p:cNvPr id="16" name="decision-3"/>
+              <a:t>품질 · 시간 검증 필요</a:t>
+            </a:r>
+            <a:endParaRPr lang="en-US" sz="1100" dirty="0"/>
+          </a:p>
+        </p:txBody>
+      </p:sp>
+      <p:sp>
+        <p:nvSpPr>
+          <p:cNvPr id="30" name="option-1-2"/>
           <p:cNvSpPr/>
           <p:nvPr/>
         </p:nvSpPr>
         <p:spPr>
           <a:xfrm>
-            <a:off x="548640" y="4023360"/>
-            <a:ext cx="3520440" cy="1828800"/>
+            <a:off x="8823960" y="2743200"/>
+            <a:ext cx="2788920" cy="768096"/>
           </a:xfrm>
           <a:prstGeom prst="roundRect">
             <a:avLst>
-              <a:gd name="adj" fmla="val 6000"/>
+              <a:gd name="adj" fmla="val 11905"/>
             </a:avLst>
           </a:prstGeom>
           <a:solidFill>
@@ -2806,17 +3243,314 @@
       </p:sp>
       <p:sp>
         <p:nvSpPr>
-          <p:cNvPr id="17" name="Text 15"/>
-          <p:cNvSpPr txBox="1"/>
-          <p:nvPr/>
-        </p:nvSpPr>
-        <p:spPr>
-          <a:xfrm>
-            <a:off x="777240" y="4251960"/>
+          <p:cNvPr id="31" name="checkbox"/>
+          <p:cNvSpPr/>
+          <p:nvPr/>
+        </p:nvSpPr>
+        <p:spPr>
+          <a:xfrm>
+            <a:off x="8961120" y="2990088"/>
+            <a:ext cx="237744" cy="237744"/>
+          </a:xfrm>
+          <a:prstGeom prst="rect">
+            <a:avLst/>
+          </a:prstGeom>
+          <a:solidFill>
+            <a:srgbClr val="FFFFFF"/>
+          </a:solidFill>
+          <a:ln w="15875">
+            <a:solidFill>
+              <a:srgbClr val="617287"/>
+            </a:solidFill>
+            <a:prstDash val="solid"/>
+          </a:ln>
+        </p:spPr>
+      </p:sp>
+      <p:sp>
+        <p:nvSpPr>
+          <p:cNvPr id="32" name="Text 30"/>
+          <p:cNvSpPr txBox="1"/>
+          <p:nvPr/>
+        </p:nvSpPr>
+        <p:spPr>
+          <a:xfrm>
+            <a:off x="9299448" y="2816352"/>
+            <a:ext cx="2194560" cy="347472"/>
+          </a:xfrm>
+          <a:prstGeom prst="rect">
+            <a:avLst/>
+          </a:prstGeom>
+          <a:noFill/>
+          <a:ln/>
+        </p:spPr>
+        <p:txBody>
+          <a:bodyPr wrap="square" lIns="0" tIns="0" rIns="0" bIns="0" rtlCol="0" anchor="ctr"/>
+          <a:lstStyle/>
+          <a:p>
+            <a:pPr indent="0" marL="0">
+              <a:buNone/>
+            </a:pPr>
+            <a:r>
+              <a:rPr lang="en-US" sz="1300" b="1" dirty="0">
+                <a:solidFill>
+                  <a:srgbClr val="16243A"/>
+                </a:solidFill>
+              </a:rPr>
+              <a:t>2D 시작 → 3D 추가</a:t>
+            </a:r>
+            <a:endParaRPr lang="en-US" sz="1300" dirty="0"/>
+          </a:p>
+        </p:txBody>
+      </p:sp>
+      <p:sp>
+        <p:nvSpPr>
+          <p:cNvPr id="33" name="Text 31"/>
+          <p:cNvSpPr txBox="1"/>
+          <p:nvPr/>
+        </p:nvSpPr>
+        <p:spPr>
+          <a:xfrm>
+            <a:off x="9299448" y="3145536"/>
+            <a:ext cx="2194560" cy="292608"/>
+          </a:xfrm>
+          <a:prstGeom prst="rect">
+            <a:avLst/>
+          </a:prstGeom>
+          <a:noFill/>
+          <a:ln/>
+        </p:spPr>
+        <p:txBody>
+          <a:bodyPr wrap="square" lIns="0" tIns="0" rIns="0" bIns="0" rtlCol="0" anchor="ctr"/>
+          <a:lstStyle/>
+          <a:p>
+            <a:pPr indent="0" marL="0">
+              <a:buNone/>
+            </a:pPr>
+            <a:r>
+              <a:rPr lang="en-US" sz="1100" dirty="0">
+                <a:solidFill>
+                  <a:srgbClr val="617287"/>
+                </a:solidFill>
+              </a:rPr>
+              <a:t>단계적 도입</a:t>
+            </a:r>
+            <a:endParaRPr lang="en-US" sz="1100" dirty="0"/>
+          </a:p>
+        </p:txBody>
+      </p:sp>
+      <p:sp>
+        <p:nvSpPr>
+          <p:cNvPr id="34" name="decision-no"/>
+          <p:cNvSpPr txBox="1"/>
+          <p:nvPr/>
+        </p:nvSpPr>
+        <p:spPr>
+          <a:xfrm>
+            <a:off x="548640" y="3767328"/>
             <a:ext cx="457200" cy="457200"/>
           </a:xfrm>
           <a:prstGeom prst="ellipse">
             <a:avLst/>
+          </a:prstGeom>
+          <a:solidFill>
+            <a:srgbClr val="E8614D"/>
+          </a:solidFill>
+          <a:ln/>
+        </p:spPr>
+        <p:txBody>
+          <a:bodyPr wrap="square" lIns="0" tIns="0" rIns="0" bIns="0" rtlCol="0" anchor="ctr"/>
+          <a:lstStyle/>
+          <a:p>
+            <a:pPr algn="ctr" indent="0" marL="0">
+              <a:buNone/>
+            </a:pPr>
+            <a:r>
+              <a:rPr lang="en-US" sz="1800" b="1" dirty="0">
+                <a:solidFill>
+                  <a:srgbClr val="FFFFFF"/>
+                </a:solidFill>
+              </a:rPr>
+              <a:t>③</a:t>
+            </a:r>
+            <a:endParaRPr lang="en-US" sz="1800" dirty="0"/>
+          </a:p>
+        </p:txBody>
+      </p:sp>
+      <p:sp>
+        <p:nvSpPr>
+          <p:cNvPr id="35" name="Text 33"/>
+          <p:cNvSpPr txBox="1"/>
+          <p:nvPr/>
+        </p:nvSpPr>
+        <p:spPr>
+          <a:xfrm>
+            <a:off x="1143000" y="3721608"/>
+            <a:ext cx="1737360" cy="548640"/>
+          </a:xfrm>
+          <a:prstGeom prst="rect">
+            <a:avLst/>
+          </a:prstGeom>
+          <a:noFill/>
+          <a:ln/>
+        </p:spPr>
+        <p:txBody>
+          <a:bodyPr wrap="square" lIns="0" tIns="0" rIns="0" bIns="0" rtlCol="0" anchor="ctr"/>
+          <a:lstStyle/>
+          <a:p>
+            <a:pPr indent="0" marL="0">
+              <a:buNone/>
+            </a:pPr>
+            <a:r>
+              <a:rPr lang="en-US" sz="1700" b="1" dirty="0">
+                <a:solidFill>
+                  <a:srgbClr val="16243A"/>
+                </a:solidFill>
+              </a:rPr>
+              <a:t>배경 방식</a:t>
+            </a:r>
+            <a:endParaRPr lang="en-US" sz="1700" dirty="0"/>
+          </a:p>
+        </p:txBody>
+      </p:sp>
+      <p:sp>
+        <p:nvSpPr>
+          <p:cNvPr id="36" name="option-2-0"/>
+          <p:cNvSpPr/>
+          <p:nvPr/>
+        </p:nvSpPr>
+        <p:spPr>
+          <a:xfrm>
+            <a:off x="2971800" y="3611880"/>
+            <a:ext cx="2788920" cy="768096"/>
+          </a:xfrm>
+          <a:prstGeom prst="roundRect">
+            <a:avLst>
+              <a:gd name="adj" fmla="val 11905"/>
+            </a:avLst>
+          </a:prstGeom>
+          <a:solidFill>
+            <a:srgbClr val="EAF5F1"/>
+          </a:solidFill>
+          <a:ln w="25400">
+            <a:solidFill>
+              <a:srgbClr val="2B8C83"/>
+            </a:solidFill>
+            <a:prstDash val="solid"/>
+          </a:ln>
+        </p:spPr>
+      </p:sp>
+      <p:sp>
+        <p:nvSpPr>
+          <p:cNvPr id="37" name="checkbox"/>
+          <p:cNvSpPr/>
+          <p:nvPr/>
+        </p:nvSpPr>
+        <p:spPr>
+          <a:xfrm>
+            <a:off x="3108960" y="3858768"/>
+            <a:ext cx="237744" cy="237744"/>
+          </a:xfrm>
+          <a:prstGeom prst="rect">
+            <a:avLst/>
+          </a:prstGeom>
+          <a:solidFill>
+            <a:srgbClr val="FFFFFF"/>
+          </a:solidFill>
+          <a:ln w="15875">
+            <a:solidFill>
+              <a:srgbClr val="2B8C83"/>
+            </a:solidFill>
+            <a:prstDash val="solid"/>
+          </a:ln>
+        </p:spPr>
+      </p:sp>
+      <p:sp>
+        <p:nvSpPr>
+          <p:cNvPr id="38" name="Text 36"/>
+          <p:cNvSpPr txBox="1"/>
+          <p:nvPr/>
+        </p:nvSpPr>
+        <p:spPr>
+          <a:xfrm>
+            <a:off x="3447288" y="3685032"/>
+            <a:ext cx="1600200" cy="347472"/>
+          </a:xfrm>
+          <a:prstGeom prst="rect">
+            <a:avLst/>
+          </a:prstGeom>
+          <a:noFill/>
+          <a:ln/>
+        </p:spPr>
+        <p:txBody>
+          <a:bodyPr wrap="square" lIns="0" tIns="0" rIns="0" bIns="0" rtlCol="0" anchor="ctr"/>
+          <a:lstStyle/>
+          <a:p>
+            <a:pPr indent="0" marL="0">
+              <a:buNone/>
+            </a:pPr>
+            <a:r>
+              <a:rPr lang="en-US" sz="1300" b="1" dirty="0">
+                <a:solidFill>
+                  <a:srgbClr val="16243A"/>
+                </a:solidFill>
+              </a:rPr>
+              <a:t>톤 통일 + 빈칸</a:t>
+            </a:r>
+            <a:endParaRPr lang="en-US" sz="1300" dirty="0"/>
+          </a:p>
+        </p:txBody>
+      </p:sp>
+      <p:sp>
+        <p:nvSpPr>
+          <p:cNvPr id="39" name="Text 37"/>
+          <p:cNvSpPr txBox="1"/>
+          <p:nvPr/>
+        </p:nvSpPr>
+        <p:spPr>
+          <a:xfrm>
+            <a:off x="3447288" y="4014216"/>
+            <a:ext cx="2194560" cy="292608"/>
+          </a:xfrm>
+          <a:prstGeom prst="rect">
+            <a:avLst/>
+          </a:prstGeom>
+          <a:noFill/>
+          <a:ln/>
+        </p:spPr>
+        <p:txBody>
+          <a:bodyPr wrap="square" lIns="0" tIns="0" rIns="0" bIns="0" rtlCol="0" anchor="ctr"/>
+          <a:lstStyle/>
+          <a:p>
+            <a:pPr indent="0" marL="0">
+              <a:buNone/>
+            </a:pPr>
+            <a:r>
+              <a:rPr lang="en-US" sz="1100" dirty="0">
+                <a:solidFill>
+                  <a:srgbClr val="617287"/>
+                </a:solidFill>
+              </a:rPr>
+              <a:t>B4 + B1 (배경 아이데이션)</a:t>
+            </a:r>
+            <a:endParaRPr lang="en-US" sz="1100" dirty="0"/>
+          </a:p>
+        </p:txBody>
+      </p:sp>
+      <p:sp>
+        <p:nvSpPr>
+          <p:cNvPr id="40" name="chip-제안"/>
+          <p:cNvSpPr txBox="1"/>
+          <p:nvPr/>
+        </p:nvSpPr>
+        <p:spPr>
+          <a:xfrm>
+            <a:off x="5102352" y="3703320"/>
+            <a:ext cx="548640" cy="292608"/>
+          </a:xfrm>
+          <a:prstGeom prst="roundRect">
+            <a:avLst>
+              <a:gd name="adj" fmla="val 25000"/>
+            </a:avLst>
           </a:prstGeom>
           <a:solidFill>
             <a:srgbClr val="5DCDC1"/>
@@ -2831,103 +3565,31 @@
               <a:buNone/>
             </a:pPr>
             <a:r>
-              <a:rPr lang="en-US" sz="1700" b="1" dirty="0">
+              <a:rPr lang="en-US" sz="1100" b="1" dirty="0">
                 <a:solidFill>
                   <a:srgbClr val="16243A"/>
                 </a:solidFill>
               </a:rPr>
-              <a:t>4</a:t>
-            </a:r>
-            <a:endParaRPr lang="en-US" sz="1700" dirty="0"/>
-          </a:p>
-        </p:txBody>
-      </p:sp>
-      <p:sp>
-        <p:nvSpPr>
-          <p:cNvPr id="18" name="Text 16"/>
-          <p:cNvSpPr txBox="1"/>
-          <p:nvPr/>
-        </p:nvSpPr>
-        <p:spPr>
-          <a:xfrm>
-            <a:off x="1417320" y="4251960"/>
-            <a:ext cx="2468880" cy="457200"/>
-          </a:xfrm>
-          <a:prstGeom prst="rect">
-            <a:avLst/>
-          </a:prstGeom>
-          <a:noFill/>
-          <a:ln/>
-        </p:spPr>
-        <p:txBody>
-          <a:bodyPr wrap="square" lIns="0" tIns="0" rIns="0" bIns="0" rtlCol="0" anchor="ctr"/>
-          <a:lstStyle/>
-          <a:p>
-            <a:pPr indent="0" marL="0">
-              <a:buNone/>
-            </a:pPr>
-            <a:r>
-              <a:rPr lang="en-US" sz="1700" b="1" dirty="0">
-                <a:solidFill>
-                  <a:srgbClr val="16243A"/>
-                </a:solidFill>
-              </a:rPr>
-              <a:t>퍼레이드 운영</a:t>
-            </a:r>
-            <a:endParaRPr lang="en-US" sz="1700" dirty="0"/>
-          </a:p>
-        </p:txBody>
-      </p:sp>
-      <p:sp>
-        <p:nvSpPr>
-          <p:cNvPr id="19" name="Text 17"/>
-          <p:cNvSpPr txBox="1"/>
-          <p:nvPr/>
-        </p:nvSpPr>
-        <p:spPr>
-          <a:xfrm>
-            <a:off x="777240" y="4892040"/>
-            <a:ext cx="3063240" cy="822960"/>
-          </a:xfrm>
-          <a:prstGeom prst="rect">
-            <a:avLst/>
-          </a:prstGeom>
-          <a:noFill/>
-          <a:ln/>
-        </p:spPr>
-        <p:txBody>
-          <a:bodyPr wrap="square" lIns="0" tIns="0" rIns="0" bIns="0" rtlCol="0" anchor="t"/>
-          <a:lstStyle/>
-          <a:p>
-            <a:pPr indent="0" marL="0">
-              <a:buNone/>
-            </a:pPr>
-            <a:r>
-              <a:rPr lang="en-US" sz="1400" dirty="0">
-                <a:solidFill>
-                  <a:srgbClr val="617287"/>
-                </a:solidFill>
-              </a:rPr>
-              <a:t>정시 주기와 길이, Art/Logo 모드 비율</a:t>
-            </a:r>
-            <a:endParaRPr lang="en-US" sz="1400" dirty="0"/>
-          </a:p>
-        </p:txBody>
-      </p:sp>
-      <p:sp>
-        <p:nvSpPr>
-          <p:cNvPr id="20" name="decision-4"/>
+              <a:t>제안</a:t>
+            </a:r>
+            <a:endParaRPr lang="en-US" sz="1100" dirty="0"/>
+          </a:p>
+        </p:txBody>
+      </p:sp>
+      <p:sp>
+        <p:nvSpPr>
+          <p:cNvPr id="41" name="option-2-1"/>
           <p:cNvSpPr/>
           <p:nvPr/>
         </p:nvSpPr>
         <p:spPr>
           <a:xfrm>
-            <a:off x="4297680" y="4023360"/>
-            <a:ext cx="3520440" cy="1828800"/>
+            <a:off x="5897880" y="3611880"/>
+            <a:ext cx="2788920" cy="768096"/>
           </a:xfrm>
           <a:prstGeom prst="roundRect">
             <a:avLst>
-              <a:gd name="adj" fmla="val 6000"/>
+              <a:gd name="adj" fmla="val 11905"/>
             </a:avLst>
           </a:prstGeom>
           <a:solidFill>
@@ -2943,52 +3605,75 @@
       </p:sp>
       <p:sp>
         <p:nvSpPr>
-          <p:cNvPr id="21" name="Text 19"/>
-          <p:cNvSpPr txBox="1"/>
-          <p:nvPr/>
-        </p:nvSpPr>
-        <p:spPr>
-          <a:xfrm>
-            <a:off x="4526280" y="4251960"/>
-            <a:ext cx="457200" cy="457200"/>
-          </a:xfrm>
-          <a:prstGeom prst="ellipse">
+          <p:cNvPr id="42" name="checkbox"/>
+          <p:cNvSpPr/>
+          <p:nvPr/>
+        </p:nvSpPr>
+        <p:spPr>
+          <a:xfrm>
+            <a:off x="6035040" y="3858768"/>
+            <a:ext cx="237744" cy="237744"/>
+          </a:xfrm>
+          <a:prstGeom prst="rect">
             <a:avLst/>
           </a:prstGeom>
           <a:solidFill>
-            <a:srgbClr val="5DCDC1"/>
+            <a:srgbClr val="FFFFFF"/>
           </a:solidFill>
-          <a:ln/>
-        </p:spPr>
-        <p:txBody>
-          <a:bodyPr wrap="square" lIns="0" tIns="0" rIns="0" bIns="0" rtlCol="0" anchor="ctr"/>
-          <a:lstStyle/>
-          <a:p>
-            <a:pPr algn="ctr" indent="0" marL="0">
-              <a:buNone/>
-            </a:pPr>
-            <a:r>
-              <a:rPr lang="en-US" sz="1700" b="1" dirty="0">
+          <a:ln w="15875">
+            <a:solidFill>
+              <a:srgbClr val="617287"/>
+            </a:solidFill>
+            <a:prstDash val="solid"/>
+          </a:ln>
+        </p:spPr>
+      </p:sp>
+      <p:sp>
+        <p:nvSpPr>
+          <p:cNvPr id="43" name="Text 41"/>
+          <p:cNvSpPr txBox="1"/>
+          <p:nvPr/>
+        </p:nvSpPr>
+        <p:spPr>
+          <a:xfrm>
+            <a:off x="6373368" y="3685032"/>
+            <a:ext cx="2194560" cy="347472"/>
+          </a:xfrm>
+          <a:prstGeom prst="rect">
+            <a:avLst/>
+          </a:prstGeom>
+          <a:noFill/>
+          <a:ln/>
+        </p:spPr>
+        <p:txBody>
+          <a:bodyPr wrap="square" lIns="0" tIns="0" rIns="0" bIns="0" rtlCol="0" anchor="ctr"/>
+          <a:lstStyle/>
+          <a:p>
+            <a:pPr indent="0" marL="0">
+              <a:buNone/>
+            </a:pPr>
+            <a:r>
+              <a:rPr lang="en-US" sz="1300" b="1" dirty="0">
                 <a:solidFill>
                   <a:srgbClr val="16243A"/>
                 </a:solidFill>
               </a:rPr>
-              <a:t>5</a:t>
-            </a:r>
-            <a:endParaRPr lang="en-US" sz="1700" dirty="0"/>
-          </a:p>
-        </p:txBody>
-      </p:sp>
-      <p:sp>
-        <p:nvSpPr>
-          <p:cNvPr id="22" name="Text 20"/>
-          <p:cNvSpPr txBox="1"/>
-          <p:nvPr/>
-        </p:nvSpPr>
-        <p:spPr>
-          <a:xfrm>
-            <a:off x="5166360" y="4251960"/>
-            <a:ext cx="2468880" cy="457200"/>
+              <a:t>Scribble + 자라는 배경</a:t>
+            </a:r>
+            <a:endParaRPr lang="en-US" sz="1300" dirty="0"/>
+          </a:p>
+        </p:txBody>
+      </p:sp>
+      <p:sp>
+        <p:nvSpPr>
+          <p:cNvPr id="44" name="Text 42"/>
+          <p:cNvSpPr txBox="1"/>
+          <p:nvPr/>
+        </p:nvSpPr>
+        <p:spPr>
+          <a:xfrm>
+            <a:off x="6373368" y="4014216"/>
+            <a:ext cx="2194560" cy="292608"/>
           </a:xfrm>
           <a:prstGeom prst="rect">
             <a:avLst/>
@@ -3004,71 +3689,35 @@
               <a:buNone/>
             </a:pPr>
             <a:r>
-              <a:rPr lang="en-US" sz="1700" b="1" dirty="0">
-                <a:solidFill>
-                  <a:srgbClr val="16243A"/>
-                </a:solidFill>
-              </a:rPr>
-              <a:t>보관 방식</a:t>
-            </a:r>
-            <a:endParaRPr lang="en-US" sz="1700" dirty="0"/>
-          </a:p>
-        </p:txBody>
-      </p:sp>
-      <p:sp>
-        <p:nvSpPr>
-          <p:cNvPr id="23" name="Text 21"/>
-          <p:cNvSpPr txBox="1"/>
-          <p:nvPr/>
-        </p:nvSpPr>
-        <p:spPr>
-          <a:xfrm>
-            <a:off x="4526280" y="4892040"/>
-            <a:ext cx="3063240" cy="822960"/>
-          </a:xfrm>
-          <a:prstGeom prst="rect">
-            <a:avLst/>
-          </a:prstGeom>
-          <a:noFill/>
-          <a:ln/>
-        </p:spPr>
-        <p:txBody>
-          <a:bodyPr wrap="square" lIns="0" tIns="0" rIns="0" bIns="0" rtlCol="0" anchor="t"/>
-          <a:lstStyle/>
-          <a:p>
-            <a:pPr indent="0" marL="0">
-              <a:buNone/>
-            </a:pPr>
-            <a:r>
-              <a:rPr lang="en-US" sz="1400" dirty="0">
+              <a:rPr lang="en-US" sz="1100" dirty="0">
                 <a:solidFill>
                   <a:srgbClr val="617287"/>
                 </a:solidFill>
               </a:rPr>
-              <a:t>QR 보관함 · 하루 한 장 · 굿즈 범위</a:t>
-            </a:r>
-            <a:endParaRPr lang="en-US" sz="1400" dirty="0"/>
-          </a:p>
-        </p:txBody>
-      </p:sp>
-      <p:sp>
-        <p:nvSpPr>
-          <p:cNvPr id="24" name="refs"/>
+              <a:t>A0 + B5</a:t>
+            </a:r>
+            <a:endParaRPr lang="en-US" sz="1100" dirty="0"/>
+          </a:p>
+        </p:txBody>
+      </p:sp>
+      <p:sp>
+        <p:nvSpPr>
+          <p:cNvPr id="45" name="option-2-2"/>
           <p:cNvSpPr/>
           <p:nvPr/>
         </p:nvSpPr>
         <p:spPr>
           <a:xfrm>
-            <a:off x="8046720" y="4023360"/>
-            <a:ext cx="3520440" cy="1828800"/>
+            <a:off x="8823960" y="3611880"/>
+            <a:ext cx="2788920" cy="768096"/>
           </a:xfrm>
           <a:prstGeom prst="roundRect">
             <a:avLst>
-              <a:gd name="adj" fmla="val 6000"/>
+              <a:gd name="adj" fmla="val 11905"/>
             </a:avLst>
           </a:prstGeom>
           <a:solidFill>
-            <a:srgbClr val="EAF5F1"/>
+            <a:srgbClr val="FFFFFF"/>
           </a:solidFill>
           <a:ln w="12700">
             <a:solidFill>
@@ -3080,14 +3729,39 @@
       </p:sp>
       <p:sp>
         <p:nvSpPr>
-          <p:cNvPr id="25" name="Text 23"/>
-          <p:cNvSpPr txBox="1"/>
-          <p:nvPr/>
-        </p:nvSpPr>
-        <p:spPr>
-          <a:xfrm>
-            <a:off x="8183880" y="4206240"/>
-            <a:ext cx="3108960" cy="365760"/>
+          <p:cNvPr id="46" name="checkbox"/>
+          <p:cNvSpPr/>
+          <p:nvPr/>
+        </p:nvSpPr>
+        <p:spPr>
+          <a:xfrm>
+            <a:off x="8961120" y="3858768"/>
+            <a:ext cx="237744" cy="237744"/>
+          </a:xfrm>
+          <a:prstGeom prst="rect">
+            <a:avLst/>
+          </a:prstGeom>
+          <a:solidFill>
+            <a:srgbClr val="FFFFFF"/>
+          </a:solidFill>
+          <a:ln w="15875">
+            <a:solidFill>
+              <a:srgbClr val="617287"/>
+            </a:solidFill>
+            <a:prstDash val="solid"/>
+          </a:ln>
+        </p:spPr>
+      </p:sp>
+      <p:sp>
+        <p:nvSpPr>
+          <p:cNvPr id="47" name="Text 45"/>
+          <p:cNvSpPr txBox="1"/>
+          <p:nvPr/>
+        </p:nvSpPr>
+        <p:spPr>
+          <a:xfrm>
+            <a:off x="9299448" y="3685032"/>
+            <a:ext cx="2194560" cy="347472"/>
           </a:xfrm>
           <a:prstGeom prst="rect">
             <a:avLst/>
@@ -3103,106 +3777,458 @@
               <a:buNone/>
             </a:pPr>
             <a:r>
-              <a:rPr lang="en-US" sz="1500" b="1" dirty="0">
+              <a:rPr lang="en-US" sz="1300" b="1" dirty="0">
                 <a:solidFill>
                   <a:srgbClr val="16243A"/>
                 </a:solidFill>
               </a:rPr>
-              <a:t>참고 프로토타입</a:t>
-            </a:r>
-            <a:endParaRPr lang="en-US" sz="1500" dirty="0"/>
-          </a:p>
-        </p:txBody>
-      </p:sp>
-      <p:sp>
-        <p:nvSpPr>
-          <p:cNvPr id="26" name="Text 24"/>
-          <p:cNvSpPr txBox="1"/>
-          <p:nvPr/>
-        </p:nvSpPr>
-        <p:spPr>
-          <a:xfrm>
-            <a:off x="8183880" y="4617720"/>
-            <a:ext cx="3108960" cy="1143000"/>
-          </a:xfrm>
-          <a:prstGeom prst="rect">
-            <a:avLst/>
-          </a:prstGeom>
-          <a:noFill/>
-          <a:ln/>
-        </p:spPr>
-        <p:txBody>
-          <a:bodyPr wrap="square" lIns="0" tIns="0" rIns="0" bIns="0" rtlCol="0" anchor="t"/>
+              <a:t>덩굴 + 모자이크</a:t>
+            </a:r>
+            <a:endParaRPr lang="en-US" sz="1300" dirty="0"/>
+          </a:p>
+        </p:txBody>
+      </p:sp>
+      <p:sp>
+        <p:nvSpPr>
+          <p:cNvPr id="48" name="Text 46"/>
+          <p:cNvSpPr txBox="1"/>
+          <p:nvPr/>
+        </p:nvSpPr>
+        <p:spPr>
+          <a:xfrm>
+            <a:off x="9299448" y="4014216"/>
+            <a:ext cx="2194560" cy="292608"/>
+          </a:xfrm>
+          <a:prstGeom prst="rect">
+            <a:avLst/>
+          </a:prstGeom>
+          <a:noFill/>
+          <a:ln/>
+        </p:spPr>
+        <p:txBody>
+          <a:bodyPr wrap="square" lIns="0" tIns="0" rIns="0" bIns="0" rtlCol="0" anchor="ctr"/>
           <a:lstStyle/>
           <a:p>
             <a:pPr indent="0" marL="0">
-              <a:spcAft>
-                <a:spcPts val="400"/>
-              </a:spcAft>
-              <a:buNone/>
-            </a:pPr>
-            <a:r>
-              <a:rPr lang="en-US" sz="1300" u="sng" dirty="0">
-                <a:solidFill>
-                  <a:srgbClr val="2B8C83"/>
-                </a:solidFill>
-                <a:hlinkClick r:id="rId1" invalidUrl="" action="" tgtFrame="" tooltip="" history="1" highlightClick="0" endSnd="0">
-                  <a:extLst>
-                    <a:ext uri="{A12FA001-AC4F-418D-AE19-62706E023703}">
-                      <ahyp:hlinkClr xmlns:ahyp="http://schemas.microsoft.com/office/drawing/2018/hyperlinkcolor" val="tx"/>
-                    </a:ext>
-                  </a:extLst>
-                </a:hlinkClick>
-              </a:rPr>
-              <a:t>배경 아이데이션 B1–B6</a:t>
+              <a:buNone/>
+            </a:pPr>
+            <a:r>
+              <a:rPr lang="en-US" sz="1100" dirty="0">
+                <a:solidFill>
+                  <a:srgbClr val="617287"/>
+                </a:solidFill>
+              </a:rPr>
+              <a:t>B2 + B6</a:t>
+            </a:r>
+            <a:endParaRPr lang="en-US" sz="1100" dirty="0"/>
+          </a:p>
+        </p:txBody>
+      </p:sp>
+      <p:sp>
+        <p:nvSpPr>
+          <p:cNvPr id="49" name="decision-no"/>
+          <p:cNvSpPr txBox="1"/>
+          <p:nvPr/>
+        </p:nvSpPr>
+        <p:spPr>
+          <a:xfrm>
+            <a:off x="548640" y="4636008"/>
+            <a:ext cx="457200" cy="457200"/>
+          </a:xfrm>
+          <a:prstGeom prst="ellipse">
+            <a:avLst/>
+          </a:prstGeom>
+          <a:solidFill>
+            <a:srgbClr val="E8614D"/>
+          </a:solidFill>
+          <a:ln/>
+        </p:spPr>
+        <p:txBody>
+          <a:bodyPr wrap="square" lIns="0" tIns="0" rIns="0" bIns="0" rtlCol="0" anchor="ctr"/>
+          <a:lstStyle/>
+          <a:p>
+            <a:pPr algn="ctr" indent="0" marL="0">
+              <a:buNone/>
+            </a:pPr>
+            <a:r>
+              <a:rPr lang="en-US" sz="1800" b="1" dirty="0">
+                <a:solidFill>
+                  <a:srgbClr val="FFFFFF"/>
+                </a:solidFill>
+              </a:rPr>
+              <a:t>④</a:t>
+            </a:r>
+            <a:endParaRPr lang="en-US" sz="1800" dirty="0"/>
+          </a:p>
+        </p:txBody>
+      </p:sp>
+      <p:sp>
+        <p:nvSpPr>
+          <p:cNvPr id="50" name="Text 48"/>
+          <p:cNvSpPr txBox="1"/>
+          <p:nvPr/>
+        </p:nvSpPr>
+        <p:spPr>
+          <a:xfrm>
+            <a:off x="1143000" y="4590288"/>
+            <a:ext cx="1737360" cy="548640"/>
+          </a:xfrm>
+          <a:prstGeom prst="rect">
+            <a:avLst/>
+          </a:prstGeom>
+          <a:noFill/>
+          <a:ln/>
+        </p:spPr>
+        <p:txBody>
+          <a:bodyPr wrap="square" lIns="0" tIns="0" rIns="0" bIns="0" rtlCol="0" anchor="ctr"/>
+          <a:lstStyle/>
+          <a:p>
+            <a:pPr indent="0" marL="0">
+              <a:buNone/>
+            </a:pPr>
+            <a:r>
+              <a:rPr lang="en-US" sz="1700" b="1" dirty="0">
+                <a:solidFill>
+                  <a:srgbClr val="16243A"/>
+                </a:solidFill>
+              </a:rPr>
+              <a:t>퍼레이드 운영</a:t>
+            </a:r>
+            <a:endParaRPr lang="en-US" sz="1700" dirty="0"/>
+          </a:p>
+        </p:txBody>
+      </p:sp>
+      <p:sp>
+        <p:nvSpPr>
+          <p:cNvPr id="51" name="option-3-0"/>
+          <p:cNvSpPr/>
+          <p:nvPr/>
+        </p:nvSpPr>
+        <p:spPr>
+          <a:xfrm>
+            <a:off x="2971800" y="4480560"/>
+            <a:ext cx="2788920" cy="768096"/>
+          </a:xfrm>
+          <a:prstGeom prst="roundRect">
+            <a:avLst>
+              <a:gd name="adj" fmla="val 11905"/>
+            </a:avLst>
+          </a:prstGeom>
+          <a:solidFill>
+            <a:srgbClr val="FFFFFF"/>
+          </a:solidFill>
+          <a:ln w="12700">
+            <a:solidFill>
+              <a:srgbClr val="DFE6EB"/>
+            </a:solidFill>
+            <a:prstDash val="solid"/>
+          </a:ln>
+        </p:spPr>
+      </p:sp>
+      <p:sp>
+        <p:nvSpPr>
+          <p:cNvPr id="52" name="checkbox"/>
+          <p:cNvSpPr/>
+          <p:nvPr/>
+        </p:nvSpPr>
+        <p:spPr>
+          <a:xfrm>
+            <a:off x="3108960" y="4727448"/>
+            <a:ext cx="237744" cy="237744"/>
+          </a:xfrm>
+          <a:prstGeom prst="rect">
+            <a:avLst/>
+          </a:prstGeom>
+          <a:solidFill>
+            <a:srgbClr val="FFFFFF"/>
+          </a:solidFill>
+          <a:ln w="15875">
+            <a:solidFill>
+              <a:srgbClr val="617287"/>
+            </a:solidFill>
+            <a:prstDash val="solid"/>
+          </a:ln>
+        </p:spPr>
+      </p:sp>
+      <p:sp>
+        <p:nvSpPr>
+          <p:cNvPr id="53" name="Text 51"/>
+          <p:cNvSpPr txBox="1"/>
+          <p:nvPr/>
+        </p:nvSpPr>
+        <p:spPr>
+          <a:xfrm>
+            <a:off x="3447288" y="4553712"/>
+            <a:ext cx="2194560" cy="347472"/>
+          </a:xfrm>
+          <a:prstGeom prst="rect">
+            <a:avLst/>
+          </a:prstGeom>
+          <a:noFill/>
+          <a:ln/>
+        </p:spPr>
+        <p:txBody>
+          <a:bodyPr wrap="square" lIns="0" tIns="0" rIns="0" bIns="0" rtlCol="0" anchor="ctr"/>
+          <a:lstStyle/>
+          <a:p>
+            <a:pPr indent="0" marL="0">
+              <a:buNone/>
+            </a:pPr>
+            <a:r>
+              <a:rPr lang="en-US" sz="1300" b="1" dirty="0">
+                <a:solidFill>
+                  <a:srgbClr val="16243A"/>
+                </a:solidFill>
+              </a:rPr>
+              <a:t>상시 합류만</a:t>
             </a:r>
             <a:endParaRPr lang="en-US" sz="1300" dirty="0"/>
           </a:p>
+        </p:txBody>
+      </p:sp>
+      <p:sp>
+        <p:nvSpPr>
+          <p:cNvPr id="54" name="Text 52"/>
+          <p:cNvSpPr txBox="1"/>
+          <p:nvPr/>
+        </p:nvSpPr>
+        <p:spPr>
+          <a:xfrm>
+            <a:off x="3447288" y="4882896"/>
+            <a:ext cx="2194560" cy="292608"/>
+          </a:xfrm>
+          <a:prstGeom prst="rect">
+            <a:avLst/>
+          </a:prstGeom>
+          <a:noFill/>
+          <a:ln/>
+        </p:spPr>
+        <p:txBody>
+          <a:bodyPr wrap="square" lIns="0" tIns="0" rIns="0" bIns="0" rtlCol="0" anchor="ctr"/>
+          <a:lstStyle/>
           <a:p>
             <a:pPr indent="0" marL="0">
-              <a:spcAft>
-                <a:spcPts val="400"/>
-              </a:spcAft>
-              <a:buNone/>
-            </a:pPr>
-            <a:r>
-              <a:rPr lang="en-US" sz="1300" u="sng" dirty="0">
-                <a:solidFill>
-                  <a:srgbClr val="2B8C83"/>
-                </a:solidFill>
-                <a:hlinkClick r:id="rId2" invalidUrl="" action="" tgtFrame="" tooltip="" history="1" highlightClick="0" endSnd="0">
-                  <a:extLst>
-                    <a:ext uri="{A12FA001-AC4F-418D-AE19-62706E023703}">
-                      <ahyp:hlinkClr xmlns:ahyp="http://schemas.microsoft.com/office/drawing/2018/hyperlinkcolor" val="tx"/>
-                    </a:ext>
-                  </a:extLst>
-                </a:hlinkClick>
-              </a:rPr>
-              <a:t>기존 콘텐츠 연계(Art · Logo)</a:t>
+              <a:buNone/>
+            </a:pPr>
+            <a:r>
+              <a:rPr lang="en-US" sz="1100" dirty="0">
+                <a:solidFill>
+                  <a:srgbClr val="617287"/>
+                </a:solidFill>
+              </a:rPr>
+              <a:t>늘 몇 명씩 등장</a:t>
+            </a:r>
+            <a:endParaRPr lang="en-US" sz="1100" dirty="0"/>
+          </a:p>
+        </p:txBody>
+      </p:sp>
+      <p:sp>
+        <p:nvSpPr>
+          <p:cNvPr id="55" name="option-3-1"/>
+          <p:cNvSpPr/>
+          <p:nvPr/>
+        </p:nvSpPr>
+        <p:spPr>
+          <a:xfrm>
+            <a:off x="5897880" y="4480560"/>
+            <a:ext cx="2788920" cy="768096"/>
+          </a:xfrm>
+          <a:prstGeom prst="roundRect">
+            <a:avLst>
+              <a:gd name="adj" fmla="val 11905"/>
+            </a:avLst>
+          </a:prstGeom>
+          <a:solidFill>
+            <a:srgbClr val="FFFFFF"/>
+          </a:solidFill>
+          <a:ln w="12700">
+            <a:solidFill>
+              <a:srgbClr val="DFE6EB"/>
+            </a:solidFill>
+            <a:prstDash val="solid"/>
+          </a:ln>
+        </p:spPr>
+      </p:sp>
+      <p:sp>
+        <p:nvSpPr>
+          <p:cNvPr id="56" name="checkbox"/>
+          <p:cNvSpPr/>
+          <p:nvPr/>
+        </p:nvSpPr>
+        <p:spPr>
+          <a:xfrm>
+            <a:off x="6035040" y="4727448"/>
+            <a:ext cx="237744" cy="237744"/>
+          </a:xfrm>
+          <a:prstGeom prst="rect">
+            <a:avLst/>
+          </a:prstGeom>
+          <a:solidFill>
+            <a:srgbClr val="FFFFFF"/>
+          </a:solidFill>
+          <a:ln w="15875">
+            <a:solidFill>
+              <a:srgbClr val="617287"/>
+            </a:solidFill>
+            <a:prstDash val="solid"/>
+          </a:ln>
+        </p:spPr>
+      </p:sp>
+      <p:sp>
+        <p:nvSpPr>
+          <p:cNvPr id="57" name="Text 55"/>
+          <p:cNvSpPr txBox="1"/>
+          <p:nvPr/>
+        </p:nvSpPr>
+        <p:spPr>
+          <a:xfrm>
+            <a:off x="6373368" y="4553712"/>
+            <a:ext cx="2194560" cy="347472"/>
+          </a:xfrm>
+          <a:prstGeom prst="rect">
+            <a:avLst/>
+          </a:prstGeom>
+          <a:noFill/>
+          <a:ln/>
+        </p:spPr>
+        <p:txBody>
+          <a:bodyPr wrap="square" lIns="0" tIns="0" rIns="0" bIns="0" rtlCol="0" anchor="ctr"/>
+          <a:lstStyle/>
+          <a:p>
+            <a:pPr indent="0" marL="0">
+              <a:buNone/>
+            </a:pPr>
+            <a:r>
+              <a:rPr lang="en-US" sz="1300" b="1" dirty="0">
+                <a:solidFill>
+                  <a:srgbClr val="16243A"/>
+                </a:solidFill>
+              </a:rPr>
+              <a:t>정시 퍼레이드만</a:t>
             </a:r>
             <a:endParaRPr lang="en-US" sz="1300" dirty="0"/>
           </a:p>
+        </p:txBody>
+      </p:sp>
+      <p:sp>
+        <p:nvSpPr>
+          <p:cNvPr id="58" name="Text 56"/>
+          <p:cNvSpPr txBox="1"/>
+          <p:nvPr/>
+        </p:nvSpPr>
+        <p:spPr>
+          <a:xfrm>
+            <a:off x="6373368" y="4882896"/>
+            <a:ext cx="2194560" cy="292608"/>
+          </a:xfrm>
+          <a:prstGeom prst="rect">
+            <a:avLst/>
+          </a:prstGeom>
+          <a:noFill/>
+          <a:ln/>
+        </p:spPr>
+        <p:txBody>
+          <a:bodyPr wrap="square" lIns="0" tIns="0" rIns="0" bIns="0" rtlCol="0" anchor="ctr"/>
+          <a:lstStyle/>
           <a:p>
             <a:pPr indent="0" marL="0">
-              <a:spcAft>
-                <a:spcPts val="400"/>
-              </a:spcAft>
-              <a:buNone/>
-            </a:pPr>
-            <a:r>
-              <a:rPr lang="en-US" sz="1300" u="sng" dirty="0">
-                <a:solidFill>
-                  <a:srgbClr val="2B8C83"/>
-                </a:solidFill>
-                <a:hlinkClick r:id="rId3" invalidUrl="" action="" tgtFrame="" tooltip="" history="1" highlightClick="0" endSnd="0">
-                  <a:extLst>
-                    <a:ext uri="{A12FA001-AC4F-418D-AE19-62706E023703}">
-                      <ahyp:hlinkClr xmlns:ahyp="http://schemas.microsoft.com/office/drawing/2018/hyperlinkcolor" val="tx"/>
-                    </a:ext>
-                  </a:extLst>
-                </a:hlinkClick>
-              </a:rPr>
-              <a:t>쌓이는 그림 아카이브</a:t>
+              <a:buNone/>
+            </a:pPr>
+            <a:r>
+              <a:rPr lang="en-US" sz="1100" dirty="0">
+                <a:solidFill>
+                  <a:srgbClr val="617287"/>
+                </a:solidFill>
+              </a:rPr>
+              <a:t>예: 30분마다 3–5분</a:t>
+            </a:r>
+            <a:endParaRPr lang="en-US" sz="1100" dirty="0"/>
+          </a:p>
+        </p:txBody>
+      </p:sp>
+      <p:sp>
+        <p:nvSpPr>
+          <p:cNvPr id="59" name="option-3-2"/>
+          <p:cNvSpPr/>
+          <p:nvPr/>
+        </p:nvSpPr>
+        <p:spPr>
+          <a:xfrm>
+            <a:off x="8823960" y="4480560"/>
+            <a:ext cx="2788920" cy="768096"/>
+          </a:xfrm>
+          <a:prstGeom prst="roundRect">
+            <a:avLst>
+              <a:gd name="adj" fmla="val 11905"/>
+            </a:avLst>
+          </a:prstGeom>
+          <a:solidFill>
+            <a:srgbClr val="EAF5F1"/>
+          </a:solidFill>
+          <a:ln w="25400">
+            <a:solidFill>
+              <a:srgbClr val="2B8C83"/>
+            </a:solidFill>
+            <a:prstDash val="solid"/>
+          </a:ln>
+        </p:spPr>
+      </p:sp>
+      <p:sp>
+        <p:nvSpPr>
+          <p:cNvPr id="60" name="checkbox"/>
+          <p:cNvSpPr/>
+          <p:nvPr/>
+        </p:nvSpPr>
+        <p:spPr>
+          <a:xfrm>
+            <a:off x="8961120" y="4727448"/>
+            <a:ext cx="237744" cy="237744"/>
+          </a:xfrm>
+          <a:prstGeom prst="rect">
+            <a:avLst/>
+          </a:prstGeom>
+          <a:solidFill>
+            <a:srgbClr val="FFFFFF"/>
+          </a:solidFill>
+          <a:ln w="15875">
+            <a:solidFill>
+              <a:srgbClr val="2B8C83"/>
+            </a:solidFill>
+            <a:prstDash val="solid"/>
+          </a:ln>
+        </p:spPr>
+      </p:sp>
+      <p:sp>
+        <p:nvSpPr>
+          <p:cNvPr id="61" name="Text 59"/>
+          <p:cNvSpPr txBox="1"/>
+          <p:nvPr/>
+        </p:nvSpPr>
+        <p:spPr>
+          <a:xfrm>
+            <a:off x="9299448" y="4553712"/>
+            <a:ext cx="1600200" cy="347472"/>
+          </a:xfrm>
+          <a:prstGeom prst="rect">
+            <a:avLst/>
+          </a:prstGeom>
+          <a:noFill/>
+          <a:ln/>
+        </p:spPr>
+        <p:txBody>
+          <a:bodyPr wrap="square" lIns="0" tIns="0" rIns="0" bIns="0" rtlCol="0" anchor="ctr"/>
+          <a:lstStyle/>
+          <a:p>
+            <a:pPr indent="0" marL="0">
+              <a:buNone/>
+            </a:pPr>
+            <a:r>
+              <a:rPr lang="en-US" sz="1300" b="1" dirty="0">
+                <a:solidFill>
+                  <a:srgbClr val="16243A"/>
+                </a:solidFill>
+              </a:rPr>
+              <a:t>정시 + 상시</a:t>
             </a:r>
             <a:endParaRPr lang="en-US" sz="1300" dirty="0"/>
           </a:p>
@@ -3210,7 +4236,569 @@
       </p:sp>
       <p:sp>
         <p:nvSpPr>
-          <p:cNvPr id="25" name="Slide Number Placeholder 0"/>
+          <p:cNvPr id="62" name="Text 60"/>
+          <p:cNvSpPr txBox="1"/>
+          <p:nvPr/>
+        </p:nvSpPr>
+        <p:spPr>
+          <a:xfrm>
+            <a:off x="9299448" y="4882896"/>
+            <a:ext cx="2194560" cy="292608"/>
+          </a:xfrm>
+          <a:prstGeom prst="rect">
+            <a:avLst/>
+          </a:prstGeom>
+          <a:noFill/>
+          <a:ln/>
+        </p:spPr>
+        <p:txBody>
+          <a:bodyPr wrap="square" lIns="0" tIns="0" rIns="0" bIns="0" rtlCol="0" anchor="ctr"/>
+          <a:lstStyle/>
+          <a:p>
+            <a:pPr indent="0" marL="0">
+              <a:buNone/>
+            </a:pPr>
+            <a:r>
+              <a:rPr lang="en-US" sz="1100" dirty="0">
+                <a:solidFill>
+                  <a:srgbClr val="617287"/>
+                </a:solidFill>
+              </a:rPr>
+              <a:t>평소 합류 + 정시 행진</a:t>
+            </a:r>
+            <a:endParaRPr lang="en-US" sz="1100" dirty="0"/>
+          </a:p>
+        </p:txBody>
+      </p:sp>
+      <p:sp>
+        <p:nvSpPr>
+          <p:cNvPr id="63" name="chip-제안"/>
+          <p:cNvSpPr txBox="1"/>
+          <p:nvPr/>
+        </p:nvSpPr>
+        <p:spPr>
+          <a:xfrm>
+            <a:off x="10954512" y="4572000"/>
+            <a:ext cx="548640" cy="292608"/>
+          </a:xfrm>
+          <a:prstGeom prst="roundRect">
+            <a:avLst>
+              <a:gd name="adj" fmla="val 25000"/>
+            </a:avLst>
+          </a:prstGeom>
+          <a:solidFill>
+            <a:srgbClr val="5DCDC1"/>
+          </a:solidFill>
+          <a:ln/>
+        </p:spPr>
+        <p:txBody>
+          <a:bodyPr wrap="square" lIns="0" tIns="0" rIns="0" bIns="0" rtlCol="0" anchor="ctr"/>
+          <a:lstStyle/>
+          <a:p>
+            <a:pPr algn="ctr" indent="0" marL="0">
+              <a:buNone/>
+            </a:pPr>
+            <a:r>
+              <a:rPr lang="en-US" sz="1100" b="1" dirty="0">
+                <a:solidFill>
+                  <a:srgbClr val="16243A"/>
+                </a:solidFill>
+              </a:rPr>
+              <a:t>제안</a:t>
+            </a:r>
+            <a:endParaRPr lang="en-US" sz="1100" dirty="0"/>
+          </a:p>
+        </p:txBody>
+      </p:sp>
+      <p:sp>
+        <p:nvSpPr>
+          <p:cNvPr id="64" name="decision-no"/>
+          <p:cNvSpPr txBox="1"/>
+          <p:nvPr/>
+        </p:nvSpPr>
+        <p:spPr>
+          <a:xfrm>
+            <a:off x="548640" y="5504688"/>
+            <a:ext cx="457200" cy="457200"/>
+          </a:xfrm>
+          <a:prstGeom prst="ellipse">
+            <a:avLst/>
+          </a:prstGeom>
+          <a:solidFill>
+            <a:srgbClr val="E8614D"/>
+          </a:solidFill>
+          <a:ln/>
+        </p:spPr>
+        <p:txBody>
+          <a:bodyPr wrap="square" lIns="0" tIns="0" rIns="0" bIns="0" rtlCol="0" anchor="ctr"/>
+          <a:lstStyle/>
+          <a:p>
+            <a:pPr algn="ctr" indent="0" marL="0">
+              <a:buNone/>
+            </a:pPr>
+            <a:r>
+              <a:rPr lang="en-US" sz="1800" b="1" dirty="0">
+                <a:solidFill>
+                  <a:srgbClr val="FFFFFF"/>
+                </a:solidFill>
+              </a:rPr>
+              <a:t>⑤</a:t>
+            </a:r>
+            <a:endParaRPr lang="en-US" sz="1800" dirty="0"/>
+          </a:p>
+        </p:txBody>
+      </p:sp>
+      <p:sp>
+        <p:nvSpPr>
+          <p:cNvPr id="65" name="Text 63"/>
+          <p:cNvSpPr txBox="1"/>
+          <p:nvPr/>
+        </p:nvSpPr>
+        <p:spPr>
+          <a:xfrm>
+            <a:off x="1143000" y="5458968"/>
+            <a:ext cx="1737360" cy="548640"/>
+          </a:xfrm>
+          <a:prstGeom prst="rect">
+            <a:avLst/>
+          </a:prstGeom>
+          <a:noFill/>
+          <a:ln/>
+        </p:spPr>
+        <p:txBody>
+          <a:bodyPr wrap="square" lIns="0" tIns="0" rIns="0" bIns="0" rtlCol="0" anchor="ctr"/>
+          <a:lstStyle/>
+          <a:p>
+            <a:pPr indent="0" marL="0">
+              <a:buNone/>
+            </a:pPr>
+            <a:r>
+              <a:rPr lang="en-US" sz="1700" b="1" dirty="0">
+                <a:solidFill>
+                  <a:srgbClr val="16243A"/>
+                </a:solidFill>
+              </a:rPr>
+              <a:t>보관 범위</a:t>
+            </a:r>
+            <a:endParaRPr lang="en-US" sz="1700" dirty="0"/>
+          </a:p>
+        </p:txBody>
+      </p:sp>
+      <p:sp>
+        <p:nvSpPr>
+          <p:cNvPr id="66" name="option-4-0"/>
+          <p:cNvSpPr/>
+          <p:nvPr/>
+        </p:nvSpPr>
+        <p:spPr>
+          <a:xfrm>
+            <a:off x="2971800" y="5349240"/>
+            <a:ext cx="2788920" cy="768096"/>
+          </a:xfrm>
+          <a:prstGeom prst="roundRect">
+            <a:avLst>
+              <a:gd name="adj" fmla="val 11905"/>
+            </a:avLst>
+          </a:prstGeom>
+          <a:solidFill>
+            <a:srgbClr val="FFFFFF"/>
+          </a:solidFill>
+          <a:ln w="12700">
+            <a:solidFill>
+              <a:srgbClr val="DFE6EB"/>
+            </a:solidFill>
+            <a:prstDash val="solid"/>
+          </a:ln>
+        </p:spPr>
+      </p:sp>
+      <p:sp>
+        <p:nvSpPr>
+          <p:cNvPr id="67" name="checkbox"/>
+          <p:cNvSpPr/>
+          <p:nvPr/>
+        </p:nvSpPr>
+        <p:spPr>
+          <a:xfrm>
+            <a:off x="3108960" y="5596128"/>
+            <a:ext cx="237744" cy="237744"/>
+          </a:xfrm>
+          <a:prstGeom prst="rect">
+            <a:avLst/>
+          </a:prstGeom>
+          <a:solidFill>
+            <a:srgbClr val="FFFFFF"/>
+          </a:solidFill>
+          <a:ln w="15875">
+            <a:solidFill>
+              <a:srgbClr val="617287"/>
+            </a:solidFill>
+            <a:prstDash val="solid"/>
+          </a:ln>
+        </p:spPr>
+      </p:sp>
+      <p:sp>
+        <p:nvSpPr>
+          <p:cNvPr id="68" name="Text 66"/>
+          <p:cNvSpPr txBox="1"/>
+          <p:nvPr/>
+        </p:nvSpPr>
+        <p:spPr>
+          <a:xfrm>
+            <a:off x="3447288" y="5422392"/>
+            <a:ext cx="2194560" cy="347472"/>
+          </a:xfrm>
+          <a:prstGeom prst="rect">
+            <a:avLst/>
+          </a:prstGeom>
+          <a:noFill/>
+          <a:ln/>
+        </p:spPr>
+        <p:txBody>
+          <a:bodyPr wrap="square" lIns="0" tIns="0" rIns="0" bIns="0" rtlCol="0" anchor="ctr"/>
+          <a:lstStyle/>
+          <a:p>
+            <a:pPr indent="0" marL="0">
+              <a:buNone/>
+            </a:pPr>
+            <a:r>
+              <a:rPr lang="en-US" sz="1300" b="1" dirty="0">
+                <a:solidFill>
+                  <a:srgbClr val="16243A"/>
+                </a:solidFill>
+              </a:rPr>
+              <a:t>QR 보관함</a:t>
+            </a:r>
+            <a:endParaRPr lang="en-US" sz="1300" dirty="0"/>
+          </a:p>
+        </p:txBody>
+      </p:sp>
+      <p:sp>
+        <p:nvSpPr>
+          <p:cNvPr id="69" name="Text 67"/>
+          <p:cNvSpPr txBox="1"/>
+          <p:nvPr/>
+        </p:nvSpPr>
+        <p:spPr>
+          <a:xfrm>
+            <a:off x="3447288" y="5751576"/>
+            <a:ext cx="2194560" cy="292608"/>
+          </a:xfrm>
+          <a:prstGeom prst="rect">
+            <a:avLst/>
+          </a:prstGeom>
+          <a:noFill/>
+          <a:ln/>
+        </p:spPr>
+        <p:txBody>
+          <a:bodyPr wrap="square" lIns="0" tIns="0" rIns="0" bIns="0" rtlCol="0" anchor="ctr"/>
+          <a:lstStyle/>
+          <a:p>
+            <a:pPr indent="0" marL="0">
+              <a:buNone/>
+            </a:pPr>
+            <a:r>
+              <a:rPr lang="en-US" sz="1100" dirty="0">
+                <a:solidFill>
+                  <a:srgbClr val="617287"/>
+                </a:solidFill>
+              </a:rPr>
+              <a:t>영상 · 이미지 받기</a:t>
+            </a:r>
+            <a:endParaRPr lang="en-US" sz="1100" dirty="0"/>
+          </a:p>
+        </p:txBody>
+      </p:sp>
+      <p:sp>
+        <p:nvSpPr>
+          <p:cNvPr id="70" name="option-4-1"/>
+          <p:cNvSpPr/>
+          <p:nvPr/>
+        </p:nvSpPr>
+        <p:spPr>
+          <a:xfrm>
+            <a:off x="5897880" y="5349240"/>
+            <a:ext cx="2788920" cy="768096"/>
+          </a:xfrm>
+          <a:prstGeom prst="roundRect">
+            <a:avLst>
+              <a:gd name="adj" fmla="val 11905"/>
+            </a:avLst>
+          </a:prstGeom>
+          <a:solidFill>
+            <a:srgbClr val="EAF5F1"/>
+          </a:solidFill>
+          <a:ln w="25400">
+            <a:solidFill>
+              <a:srgbClr val="2B8C83"/>
+            </a:solidFill>
+            <a:prstDash val="solid"/>
+          </a:ln>
+        </p:spPr>
+      </p:sp>
+      <p:sp>
+        <p:nvSpPr>
+          <p:cNvPr id="71" name="checkbox"/>
+          <p:cNvSpPr/>
+          <p:nvPr/>
+        </p:nvSpPr>
+        <p:spPr>
+          <a:xfrm>
+            <a:off x="6035040" y="5596128"/>
+            <a:ext cx="237744" cy="237744"/>
+          </a:xfrm>
+          <a:prstGeom prst="rect">
+            <a:avLst/>
+          </a:prstGeom>
+          <a:solidFill>
+            <a:srgbClr val="FFFFFF"/>
+          </a:solidFill>
+          <a:ln w="15875">
+            <a:solidFill>
+              <a:srgbClr val="2B8C83"/>
+            </a:solidFill>
+            <a:prstDash val="solid"/>
+          </a:ln>
+        </p:spPr>
+      </p:sp>
+      <p:sp>
+        <p:nvSpPr>
+          <p:cNvPr id="72" name="Text 70"/>
+          <p:cNvSpPr txBox="1"/>
+          <p:nvPr/>
+        </p:nvSpPr>
+        <p:spPr>
+          <a:xfrm>
+            <a:off x="6373368" y="5422392"/>
+            <a:ext cx="1600200" cy="347472"/>
+          </a:xfrm>
+          <a:prstGeom prst="rect">
+            <a:avLst/>
+          </a:prstGeom>
+          <a:noFill/>
+          <a:ln/>
+        </p:spPr>
+        <p:txBody>
+          <a:bodyPr wrap="square" lIns="0" tIns="0" rIns="0" bIns="0" rtlCol="0" anchor="ctr"/>
+          <a:lstStyle/>
+          <a:p>
+            <a:pPr indent="0" marL="0">
+              <a:buNone/>
+            </a:pPr>
+            <a:r>
+              <a:rPr lang="en-US" sz="1300" b="1" dirty="0">
+                <a:solidFill>
+                  <a:srgbClr val="16243A"/>
+                </a:solidFill>
+              </a:rPr>
+              <a:t>QR + 하루 한 장</a:t>
+            </a:r>
+            <a:endParaRPr lang="en-US" sz="1300" dirty="0"/>
+          </a:p>
+        </p:txBody>
+      </p:sp>
+      <p:sp>
+        <p:nvSpPr>
+          <p:cNvPr id="73" name="Text 71"/>
+          <p:cNvSpPr txBox="1"/>
+          <p:nvPr/>
+        </p:nvSpPr>
+        <p:spPr>
+          <a:xfrm>
+            <a:off x="6373368" y="5751576"/>
+            <a:ext cx="2194560" cy="292608"/>
+          </a:xfrm>
+          <a:prstGeom prst="rect">
+            <a:avLst/>
+          </a:prstGeom>
+          <a:noFill/>
+          <a:ln/>
+        </p:spPr>
+        <p:txBody>
+          <a:bodyPr wrap="square" lIns="0" tIns="0" rIns="0" bIns="0" rtlCol="0" anchor="ctr"/>
+          <a:lstStyle/>
+          <a:p>
+            <a:pPr indent="0" marL="0">
+              <a:buNone/>
+            </a:pPr>
+            <a:r>
+              <a:rPr lang="en-US" sz="1100" dirty="0">
+                <a:solidFill>
+                  <a:srgbClr val="617287"/>
+                </a:solidFill>
+              </a:rPr>
+              <a:t>날짜별 기록 추가</a:t>
+            </a:r>
+            <a:endParaRPr lang="en-US" sz="1100" dirty="0"/>
+          </a:p>
+        </p:txBody>
+      </p:sp>
+      <p:sp>
+        <p:nvSpPr>
+          <p:cNvPr id="74" name="chip-제안"/>
+          <p:cNvSpPr txBox="1"/>
+          <p:nvPr/>
+        </p:nvSpPr>
+        <p:spPr>
+          <a:xfrm>
+            <a:off x="8028432" y="5440680"/>
+            <a:ext cx="548640" cy="292608"/>
+          </a:xfrm>
+          <a:prstGeom prst="roundRect">
+            <a:avLst>
+              <a:gd name="adj" fmla="val 25000"/>
+            </a:avLst>
+          </a:prstGeom>
+          <a:solidFill>
+            <a:srgbClr val="5DCDC1"/>
+          </a:solidFill>
+          <a:ln/>
+        </p:spPr>
+        <p:txBody>
+          <a:bodyPr wrap="square" lIns="0" tIns="0" rIns="0" bIns="0" rtlCol="0" anchor="ctr"/>
+          <a:lstStyle/>
+          <a:p>
+            <a:pPr algn="ctr" indent="0" marL="0">
+              <a:buNone/>
+            </a:pPr>
+            <a:r>
+              <a:rPr lang="en-US" sz="1100" b="1" dirty="0">
+                <a:solidFill>
+                  <a:srgbClr val="16243A"/>
+                </a:solidFill>
+              </a:rPr>
+              <a:t>제안</a:t>
+            </a:r>
+            <a:endParaRPr lang="en-US" sz="1100" dirty="0"/>
+          </a:p>
+        </p:txBody>
+      </p:sp>
+      <p:sp>
+        <p:nvSpPr>
+          <p:cNvPr id="75" name="option-4-2"/>
+          <p:cNvSpPr/>
+          <p:nvPr/>
+        </p:nvSpPr>
+        <p:spPr>
+          <a:xfrm>
+            <a:off x="8823960" y="5349240"/>
+            <a:ext cx="2788920" cy="768096"/>
+          </a:xfrm>
+          <a:prstGeom prst="roundRect">
+            <a:avLst>
+              <a:gd name="adj" fmla="val 11905"/>
+            </a:avLst>
+          </a:prstGeom>
+          <a:solidFill>
+            <a:srgbClr val="FFFFFF"/>
+          </a:solidFill>
+          <a:ln w="12700">
+            <a:solidFill>
+              <a:srgbClr val="DFE6EB"/>
+            </a:solidFill>
+            <a:prstDash val="solid"/>
+          </a:ln>
+        </p:spPr>
+      </p:sp>
+      <p:sp>
+        <p:nvSpPr>
+          <p:cNvPr id="76" name="checkbox"/>
+          <p:cNvSpPr/>
+          <p:nvPr/>
+        </p:nvSpPr>
+        <p:spPr>
+          <a:xfrm>
+            <a:off x="8961120" y="5596128"/>
+            <a:ext cx="237744" cy="237744"/>
+          </a:xfrm>
+          <a:prstGeom prst="rect">
+            <a:avLst/>
+          </a:prstGeom>
+          <a:solidFill>
+            <a:srgbClr val="FFFFFF"/>
+          </a:solidFill>
+          <a:ln w="15875">
+            <a:solidFill>
+              <a:srgbClr val="617287"/>
+            </a:solidFill>
+            <a:prstDash val="solid"/>
+          </a:ln>
+        </p:spPr>
+      </p:sp>
+      <p:sp>
+        <p:nvSpPr>
+          <p:cNvPr id="77" name="Text 75"/>
+          <p:cNvSpPr txBox="1"/>
+          <p:nvPr/>
+        </p:nvSpPr>
+        <p:spPr>
+          <a:xfrm>
+            <a:off x="9299448" y="5422392"/>
+            <a:ext cx="2194560" cy="347472"/>
+          </a:xfrm>
+          <a:prstGeom prst="rect">
+            <a:avLst/>
+          </a:prstGeom>
+          <a:noFill/>
+          <a:ln/>
+        </p:spPr>
+        <p:txBody>
+          <a:bodyPr wrap="square" lIns="0" tIns="0" rIns="0" bIns="0" rtlCol="0" anchor="ctr"/>
+          <a:lstStyle/>
+          <a:p>
+            <a:pPr indent="0" marL="0">
+              <a:buNone/>
+            </a:pPr>
+            <a:r>
+              <a:rPr lang="en-US" sz="1300" b="1" dirty="0">
+                <a:solidFill>
+                  <a:srgbClr val="16243A"/>
+                </a:solidFill>
+              </a:rPr>
+              <a:t>QR + 하루 한 장 + 굿즈</a:t>
+            </a:r>
+            <a:endParaRPr lang="en-US" sz="1300" dirty="0"/>
+          </a:p>
+        </p:txBody>
+      </p:sp>
+      <p:sp>
+        <p:nvSpPr>
+          <p:cNvPr id="78" name="Text 76"/>
+          <p:cNvSpPr txBox="1"/>
+          <p:nvPr/>
+        </p:nvSpPr>
+        <p:spPr>
+          <a:xfrm>
+            <a:off x="9299448" y="5751576"/>
+            <a:ext cx="2194560" cy="292608"/>
+          </a:xfrm>
+          <a:prstGeom prst="rect">
+            <a:avLst/>
+          </a:prstGeom>
+          <a:noFill/>
+          <a:ln/>
+        </p:spPr>
+        <p:txBody>
+          <a:bodyPr wrap="square" lIns="0" tIns="0" rIns="0" bIns="0" rtlCol="0" anchor="ctr"/>
+          <a:lstStyle/>
+          <a:p>
+            <a:pPr indent="0" marL="0">
+              <a:buNone/>
+            </a:pPr>
+            <a:r>
+              <a:rPr lang="en-US" sz="1100" dirty="0">
+                <a:solidFill>
+                  <a:srgbClr val="617287"/>
+                </a:solidFill>
+              </a:rPr>
+              <a:t>현장 출력 포함</a:t>
+            </a:r>
+            <a:endParaRPr lang="en-US" sz="1100" dirty="0"/>
+          </a:p>
+        </p:txBody>
+      </p:sp>
+      <p:sp>
+        <p:nvSpPr>
+          <p:cNvPr id="79" name="Slide Number Placeholder 0"/>
           <p:cNvSpPr>
             <a:spLocks noGrp="1"/>
           </p:cNvSpPr>
@@ -3348,7 +4936,7 @@
                   <a:srgbClr val="617287"/>
                 </a:solidFill>
               </a:rPr>
-              <a:t>위 줄은 원안, 아래 줄은 이번에 더한 발전 방향</a:t>
+              <a:t>위 줄은 원안, 아래 줄은 발전 방향 · 빨간 표시는 결정이 필요한 단계</a:t>
             </a:r>
             <a:endParaRPr lang="en-US" sz="1500" dirty="0"/>
           </a:p>
@@ -3622,7 +5210,47 @@
       </p:sp>
       <p:sp>
         <p:nvSpPr>
-          <p:cNvPr id="12" name="arrow"/>
+          <p:cNvPr id="12" name="decision-badge"/>
+          <p:cNvSpPr txBox="1"/>
+          <p:nvPr/>
+        </p:nvSpPr>
+        <p:spPr>
+          <a:xfrm>
+            <a:off x="731520" y="5596128"/>
+            <a:ext cx="1005840" cy="292608"/>
+          </a:xfrm>
+          <a:prstGeom prst="roundRect">
+            <a:avLst>
+              <a:gd name="adj" fmla="val 25000"/>
+            </a:avLst>
+          </a:prstGeom>
+          <a:solidFill>
+            <a:srgbClr val="E8614D"/>
+          </a:solidFill>
+          <a:ln/>
+        </p:spPr>
+        <p:txBody>
+          <a:bodyPr wrap="square" lIns="0" tIns="0" rIns="0" bIns="0" rtlCol="0" anchor="ctr"/>
+          <a:lstStyle/>
+          <a:p>
+            <a:pPr algn="ctr" indent="0" marL="0">
+              <a:buNone/>
+            </a:pPr>
+            <a:r>
+              <a:rPr lang="en-US" sz="1100" b="1" dirty="0">
+                <a:solidFill>
+                  <a:srgbClr val="FFFFFF"/>
+                </a:solidFill>
+              </a:rPr>
+              <a:t>결정 ①</a:t>
+            </a:r>
+            <a:endParaRPr lang="en-US" sz="1100" dirty="0"/>
+          </a:p>
+        </p:txBody>
+      </p:sp>
+      <p:sp>
+        <p:nvSpPr>
+          <p:cNvPr id="13" name="arrow"/>
           <p:cNvSpPr/>
           <p:nvPr/>
         </p:nvSpPr>
@@ -3647,7 +5275,7 @@
       </p:sp>
       <p:sp>
         <p:nvSpPr>
-          <p:cNvPr id="13" name="step-card-02"/>
+          <p:cNvPr id="14" name="step-card-02"/>
           <p:cNvSpPr/>
           <p:nvPr/>
         </p:nvSpPr>
@@ -3674,7 +5302,7 @@
       </p:sp>
       <p:sp>
         <p:nvSpPr>
-          <p:cNvPr id="14" name="Text 12"/>
+          <p:cNvPr id="15" name="Text 13"/>
           <p:cNvSpPr txBox="1"/>
           <p:nvPr/>
         </p:nvSpPr>
@@ -3710,7 +5338,7 @@
       </p:sp>
       <p:sp>
         <p:nvSpPr>
-          <p:cNvPr id="15" name="Text 13"/>
+          <p:cNvPr id="16" name="Text 14"/>
           <p:cNvSpPr txBox="1"/>
           <p:nvPr/>
         </p:nvSpPr>
@@ -3746,7 +5374,7 @@
       </p:sp>
       <p:sp>
         <p:nvSpPr>
-          <p:cNvPr id="16" name="Text 14"/>
+          <p:cNvPr id="17" name="Text 15"/>
           <p:cNvSpPr txBox="1"/>
           <p:nvPr/>
         </p:nvSpPr>
@@ -3782,7 +5410,7 @@
       </p:sp>
       <p:sp>
         <p:nvSpPr>
-          <p:cNvPr id="17" name="Text 15"/>
+          <p:cNvPr id="18" name="Text 16"/>
           <p:cNvSpPr txBox="1"/>
           <p:nvPr/>
         </p:nvSpPr>
@@ -3818,7 +5446,7 @@
       </p:sp>
       <p:sp>
         <p:nvSpPr>
-          <p:cNvPr id="18" name="Shape 16"/>
+          <p:cNvPr id="19" name="Shape 17"/>
           <p:cNvSpPr/>
           <p:nvPr/>
         </p:nvSpPr>
@@ -3841,7 +5469,7 @@
       </p:sp>
       <p:sp>
         <p:nvSpPr>
-          <p:cNvPr id="19" name="Text 17"/>
+          <p:cNvPr id="20" name="Text 18"/>
           <p:cNvSpPr txBox="1"/>
           <p:nvPr/>
         </p:nvSpPr>
@@ -3877,7 +5505,7 @@
       </p:sp>
       <p:sp>
         <p:nvSpPr>
-          <p:cNvPr id="20" name="Text 18"/>
+          <p:cNvPr id="21" name="Text 19"/>
           <p:cNvSpPr txBox="1"/>
           <p:nvPr/>
         </p:nvSpPr>
@@ -3913,7 +5541,47 @@
       </p:sp>
       <p:sp>
         <p:nvSpPr>
-          <p:cNvPr id="21" name="arrow"/>
+          <p:cNvPr id="22" name="decision-badge"/>
+          <p:cNvSpPr txBox="1"/>
+          <p:nvPr/>
+        </p:nvSpPr>
+        <p:spPr>
+          <a:xfrm>
+            <a:off x="2990088" y="5596128"/>
+            <a:ext cx="1005840" cy="292608"/>
+          </a:xfrm>
+          <a:prstGeom prst="roundRect">
+            <a:avLst>
+              <a:gd name="adj" fmla="val 25000"/>
+            </a:avLst>
+          </a:prstGeom>
+          <a:solidFill>
+            <a:srgbClr val="E8614D"/>
+          </a:solidFill>
+          <a:ln/>
+        </p:spPr>
+        <p:txBody>
+          <a:bodyPr wrap="square" lIns="0" tIns="0" rIns="0" bIns="0" rtlCol="0" anchor="ctr"/>
+          <a:lstStyle/>
+          <a:p>
+            <a:pPr algn="ctr" indent="0" marL="0">
+              <a:buNone/>
+            </a:pPr>
+            <a:r>
+              <a:rPr lang="en-US" sz="1100" b="1" dirty="0">
+                <a:solidFill>
+                  <a:srgbClr val="FFFFFF"/>
+                </a:solidFill>
+              </a:rPr>
+              <a:t>결정 ②</a:t>
+            </a:r>
+            <a:endParaRPr lang="en-US" sz="1100" dirty="0"/>
+          </a:p>
+        </p:txBody>
+      </p:sp>
+      <p:sp>
+        <p:nvSpPr>
+          <p:cNvPr id="23" name="arrow"/>
           <p:cNvSpPr/>
           <p:nvPr/>
         </p:nvSpPr>
@@ -3938,7 +5606,7 @@
       </p:sp>
       <p:sp>
         <p:nvSpPr>
-          <p:cNvPr id="22" name="step-card-03"/>
+          <p:cNvPr id="24" name="step-card-03"/>
           <p:cNvSpPr/>
           <p:nvPr/>
         </p:nvSpPr>
@@ -3965,7 +5633,7 @@
       </p:sp>
       <p:sp>
         <p:nvSpPr>
-          <p:cNvPr id="23" name="Text 21"/>
+          <p:cNvPr id="25" name="Text 23"/>
           <p:cNvSpPr txBox="1"/>
           <p:nvPr/>
         </p:nvSpPr>
@@ -4001,7 +5669,7 @@
       </p:sp>
       <p:sp>
         <p:nvSpPr>
-          <p:cNvPr id="24" name="Text 22"/>
+          <p:cNvPr id="26" name="Text 24"/>
           <p:cNvSpPr txBox="1"/>
           <p:nvPr/>
         </p:nvSpPr>
@@ -4037,7 +5705,7 @@
       </p:sp>
       <p:sp>
         <p:nvSpPr>
-          <p:cNvPr id="25" name="Text 23"/>
+          <p:cNvPr id="27" name="Text 25"/>
           <p:cNvSpPr txBox="1"/>
           <p:nvPr/>
         </p:nvSpPr>
@@ -4073,7 +5741,7 @@
       </p:sp>
       <p:sp>
         <p:nvSpPr>
-          <p:cNvPr id="26" name="Text 24"/>
+          <p:cNvPr id="28" name="Text 26"/>
           <p:cNvSpPr txBox="1"/>
           <p:nvPr/>
         </p:nvSpPr>
@@ -4109,7 +5777,7 @@
       </p:sp>
       <p:sp>
         <p:nvSpPr>
-          <p:cNvPr id="27" name="Shape 25"/>
+          <p:cNvPr id="29" name="Shape 27"/>
           <p:cNvSpPr/>
           <p:nvPr/>
         </p:nvSpPr>
@@ -4132,7 +5800,7 @@
       </p:sp>
       <p:sp>
         <p:nvSpPr>
-          <p:cNvPr id="28" name="Text 26"/>
+          <p:cNvPr id="30" name="Text 28"/>
           <p:cNvSpPr txBox="1"/>
           <p:nvPr/>
         </p:nvSpPr>
@@ -4168,7 +5836,7 @@
       </p:sp>
       <p:sp>
         <p:nvSpPr>
-          <p:cNvPr id="29" name="Text 27"/>
+          <p:cNvPr id="31" name="Text 29"/>
           <p:cNvSpPr txBox="1"/>
           <p:nvPr/>
         </p:nvSpPr>
@@ -4204,7 +5872,47 @@
       </p:sp>
       <p:sp>
         <p:nvSpPr>
-          <p:cNvPr id="30" name="arrow"/>
+          <p:cNvPr id="32" name="decision-badge"/>
+          <p:cNvSpPr txBox="1"/>
+          <p:nvPr/>
+        </p:nvSpPr>
+        <p:spPr>
+          <a:xfrm>
+            <a:off x="5248656" y="5596128"/>
+            <a:ext cx="1005840" cy="292608"/>
+          </a:xfrm>
+          <a:prstGeom prst="roundRect">
+            <a:avLst>
+              <a:gd name="adj" fmla="val 25000"/>
+            </a:avLst>
+          </a:prstGeom>
+          <a:solidFill>
+            <a:srgbClr val="E8614D"/>
+          </a:solidFill>
+          <a:ln/>
+        </p:spPr>
+        <p:txBody>
+          <a:bodyPr wrap="square" lIns="0" tIns="0" rIns="0" bIns="0" rtlCol="0" anchor="ctr"/>
+          <a:lstStyle/>
+          <a:p>
+            <a:pPr algn="ctr" indent="0" marL="0">
+              <a:buNone/>
+            </a:pPr>
+            <a:r>
+              <a:rPr lang="en-US" sz="1100" b="1" dirty="0">
+                <a:solidFill>
+                  <a:srgbClr val="FFFFFF"/>
+                </a:solidFill>
+              </a:rPr>
+              <a:t>결정 ③</a:t>
+            </a:r>
+            <a:endParaRPr lang="en-US" sz="1100" dirty="0"/>
+          </a:p>
+        </p:txBody>
+      </p:sp>
+      <p:sp>
+        <p:nvSpPr>
+          <p:cNvPr id="33" name="arrow"/>
           <p:cNvSpPr/>
           <p:nvPr/>
         </p:nvSpPr>
@@ -4229,7 +5937,7 @@
       </p:sp>
       <p:sp>
         <p:nvSpPr>
-          <p:cNvPr id="31" name="step-card-04"/>
+          <p:cNvPr id="34" name="step-card-04"/>
           <p:cNvSpPr/>
           <p:nvPr/>
         </p:nvSpPr>
@@ -4256,7 +5964,7 @@
       </p:sp>
       <p:sp>
         <p:nvSpPr>
-          <p:cNvPr id="32" name="Text 30"/>
+          <p:cNvPr id="35" name="Text 33"/>
           <p:cNvSpPr txBox="1"/>
           <p:nvPr/>
         </p:nvSpPr>
@@ -4292,7 +6000,7 @@
       </p:sp>
       <p:sp>
         <p:nvSpPr>
-          <p:cNvPr id="33" name="Text 31"/>
+          <p:cNvPr id="36" name="Text 34"/>
           <p:cNvSpPr txBox="1"/>
           <p:nvPr/>
         </p:nvSpPr>
@@ -4328,7 +6036,7 @@
       </p:sp>
       <p:sp>
         <p:nvSpPr>
-          <p:cNvPr id="34" name="Text 32"/>
+          <p:cNvPr id="37" name="Text 35"/>
           <p:cNvSpPr txBox="1"/>
           <p:nvPr/>
         </p:nvSpPr>
@@ -4364,7 +6072,7 @@
       </p:sp>
       <p:sp>
         <p:nvSpPr>
-          <p:cNvPr id="35" name="Text 33"/>
+          <p:cNvPr id="38" name="Text 36"/>
           <p:cNvSpPr txBox="1"/>
           <p:nvPr/>
         </p:nvSpPr>
@@ -4400,7 +6108,7 @@
       </p:sp>
       <p:sp>
         <p:nvSpPr>
-          <p:cNvPr id="36" name="Shape 34"/>
+          <p:cNvPr id="39" name="Shape 37"/>
           <p:cNvSpPr/>
           <p:nvPr/>
         </p:nvSpPr>
@@ -4423,7 +6131,7 @@
       </p:sp>
       <p:sp>
         <p:nvSpPr>
-          <p:cNvPr id="37" name="Text 35"/>
+          <p:cNvPr id="40" name="Text 38"/>
           <p:cNvSpPr txBox="1"/>
           <p:nvPr/>
         </p:nvSpPr>
@@ -4459,7 +6167,7 @@
       </p:sp>
       <p:sp>
         <p:nvSpPr>
-          <p:cNvPr id="38" name="Text 36"/>
+          <p:cNvPr id="41" name="Text 39"/>
           <p:cNvSpPr txBox="1"/>
           <p:nvPr/>
         </p:nvSpPr>
@@ -4495,7 +6203,47 @@
       </p:sp>
       <p:sp>
         <p:nvSpPr>
-          <p:cNvPr id="39" name="arrow"/>
+          <p:cNvPr id="42" name="decision-badge"/>
+          <p:cNvSpPr txBox="1"/>
+          <p:nvPr/>
+        </p:nvSpPr>
+        <p:spPr>
+          <a:xfrm>
+            <a:off x="7507224" y="5596128"/>
+            <a:ext cx="1005840" cy="292608"/>
+          </a:xfrm>
+          <a:prstGeom prst="roundRect">
+            <a:avLst>
+              <a:gd name="adj" fmla="val 25000"/>
+            </a:avLst>
+          </a:prstGeom>
+          <a:solidFill>
+            <a:srgbClr val="E8614D"/>
+          </a:solidFill>
+          <a:ln/>
+        </p:spPr>
+        <p:txBody>
+          <a:bodyPr wrap="square" lIns="0" tIns="0" rIns="0" bIns="0" rtlCol="0" anchor="ctr"/>
+          <a:lstStyle/>
+          <a:p>
+            <a:pPr algn="ctr" indent="0" marL="0">
+              <a:buNone/>
+            </a:pPr>
+            <a:r>
+              <a:rPr lang="en-US" sz="1100" b="1" dirty="0">
+                <a:solidFill>
+                  <a:srgbClr val="FFFFFF"/>
+                </a:solidFill>
+              </a:rPr>
+              <a:t>결정 ④</a:t>
+            </a:r>
+            <a:endParaRPr lang="en-US" sz="1100" dirty="0"/>
+          </a:p>
+        </p:txBody>
+      </p:sp>
+      <p:sp>
+        <p:nvSpPr>
+          <p:cNvPr id="43" name="arrow"/>
           <p:cNvSpPr/>
           <p:nvPr/>
         </p:nvSpPr>
@@ -4520,7 +6268,7 @@
       </p:sp>
       <p:sp>
         <p:nvSpPr>
-          <p:cNvPr id="40" name="step-card-05"/>
+          <p:cNvPr id="44" name="step-card-05"/>
           <p:cNvSpPr/>
           <p:nvPr/>
         </p:nvSpPr>
@@ -4547,7 +6295,7 @@
       </p:sp>
       <p:sp>
         <p:nvSpPr>
-          <p:cNvPr id="41" name="Text 39"/>
+          <p:cNvPr id="45" name="Text 43"/>
           <p:cNvSpPr txBox="1"/>
           <p:nvPr/>
         </p:nvSpPr>
@@ -4583,7 +6331,7 @@
       </p:sp>
       <p:sp>
         <p:nvSpPr>
-          <p:cNvPr id="42" name="chip-NEW"/>
+          <p:cNvPr id="46" name="chip-NEW"/>
           <p:cNvSpPr txBox="1"/>
           <p:nvPr/>
         </p:nvSpPr>
@@ -4623,7 +6371,7 @@
       </p:sp>
       <p:sp>
         <p:nvSpPr>
-          <p:cNvPr id="43" name="Text 41"/>
+          <p:cNvPr id="47" name="Text 45"/>
           <p:cNvSpPr txBox="1"/>
           <p:nvPr/>
         </p:nvSpPr>
@@ -4659,7 +6407,7 @@
       </p:sp>
       <p:sp>
         <p:nvSpPr>
-          <p:cNvPr id="44" name="Text 42"/>
+          <p:cNvPr id="48" name="Text 46"/>
           <p:cNvSpPr txBox="1"/>
           <p:nvPr/>
         </p:nvSpPr>
@@ -4695,7 +6443,7 @@
       </p:sp>
       <p:sp>
         <p:nvSpPr>
-          <p:cNvPr id="45" name="Text 43"/>
+          <p:cNvPr id="49" name="Text 47"/>
           <p:cNvSpPr txBox="1"/>
           <p:nvPr/>
         </p:nvSpPr>
@@ -4731,7 +6479,7 @@
       </p:sp>
       <p:sp>
         <p:nvSpPr>
-          <p:cNvPr id="46" name="Shape 44"/>
+          <p:cNvPr id="50" name="Shape 48"/>
           <p:cNvSpPr/>
           <p:nvPr/>
         </p:nvSpPr>
@@ -4754,7 +6502,7 @@
       </p:sp>
       <p:sp>
         <p:nvSpPr>
-          <p:cNvPr id="47" name="Text 45"/>
+          <p:cNvPr id="51" name="Text 49"/>
           <p:cNvSpPr txBox="1"/>
           <p:nvPr/>
         </p:nvSpPr>
@@ -4790,7 +6538,7 @@
       </p:sp>
       <p:sp>
         <p:nvSpPr>
-          <p:cNvPr id="48" name="Text 46"/>
+          <p:cNvPr id="52" name="Text 50"/>
           <p:cNvSpPr txBox="1"/>
           <p:nvPr/>
         </p:nvSpPr>
@@ -4826,7 +6574,47 @@
       </p:sp>
       <p:sp>
         <p:nvSpPr>
-          <p:cNvPr id="25" name="Slide Number Placeholder 0"/>
+          <p:cNvPr id="53" name="decision-badge"/>
+          <p:cNvSpPr txBox="1"/>
+          <p:nvPr/>
+        </p:nvSpPr>
+        <p:spPr>
+          <a:xfrm>
+            <a:off x="9765792" y="5596128"/>
+            <a:ext cx="1005840" cy="292608"/>
+          </a:xfrm>
+          <a:prstGeom prst="roundRect">
+            <a:avLst>
+              <a:gd name="adj" fmla="val 25000"/>
+            </a:avLst>
+          </a:prstGeom>
+          <a:solidFill>
+            <a:srgbClr val="E8614D"/>
+          </a:solidFill>
+          <a:ln/>
+        </p:spPr>
+        <p:txBody>
+          <a:bodyPr wrap="square" lIns="0" tIns="0" rIns="0" bIns="0" rtlCol="0" anchor="ctr"/>
+          <a:lstStyle/>
+          <a:p>
+            <a:pPr algn="ctr" indent="0" marL="0">
+              <a:buNone/>
+            </a:pPr>
+            <a:r>
+              <a:rPr lang="en-US" sz="1100" b="1" dirty="0">
+                <a:solidFill>
+                  <a:srgbClr val="FFFFFF"/>
+                </a:solidFill>
+              </a:rPr>
+              <a:t>결정 ⑤</a:t>
+            </a:r>
+            <a:endParaRPr lang="en-US" sz="1100" dirty="0"/>
+          </a:p>
+        </p:txBody>
+      </p:sp>
+      <p:sp>
+        <p:nvSpPr>
+          <p:cNvPr id="54" name="Slide Number Placeholder 0"/>
           <p:cNvSpPr>
             <a:spLocks noGrp="1"/>
           </p:cNvSpPr>
@@ -5796,7 +7584,7 @@
       </p:sp>
       <p:sp>
         <p:nvSpPr>
-          <p:cNvPr id="25" name="Slide Number Placeholder 0"/>
+          <p:cNvPr id="27" name="Slide Number Placeholder 0"/>
           <p:cNvSpPr>
             <a:spLocks noGrp="1"/>
           </p:cNvSpPr>
@@ -6807,14 +8595,54 @@
       </p:sp>
       <p:sp>
         <p:nvSpPr>
-          <p:cNvPr id="28" name="Text 26"/>
+          <p:cNvPr id="28" name="decision-pill"/>
           <p:cNvSpPr txBox="1"/>
           <p:nvPr/>
         </p:nvSpPr>
         <p:spPr>
           <a:xfrm>
             <a:off x="548640" y="5870448"/>
-            <a:ext cx="11064240" cy="365760"/>
+            <a:ext cx="4206240" cy="384048"/>
+          </a:xfrm>
+          <a:prstGeom prst="roundRect">
+            <a:avLst>
+              <a:gd name="adj" fmla="val 23810"/>
+            </a:avLst>
+          </a:prstGeom>
+          <a:solidFill>
+            <a:srgbClr val="E8614D"/>
+          </a:solidFill>
+          <a:ln/>
+        </p:spPr>
+        <p:txBody>
+          <a:bodyPr wrap="square" lIns="0" tIns="0" rIns="0" bIns="0" rtlCol="0" anchor="ctr"/>
+          <a:lstStyle/>
+          <a:p>
+            <a:pPr algn="ctr" indent="0" marL="0">
+              <a:buNone/>
+            </a:pPr>
+            <a:r>
+              <a:rPr lang="en-US" sz="1300" b="1" dirty="0">
+                <a:solidFill>
+                  <a:srgbClr val="FFFFFF"/>
+                </a:solidFill>
+              </a:rPr>
+              <a:t>결정 ①  기본 도안 · A / B / C 중 선택</a:t>
+            </a:r>
+            <a:endParaRPr lang="en-US" sz="1300" dirty="0"/>
+          </a:p>
+        </p:txBody>
+      </p:sp>
+      <p:sp>
+        <p:nvSpPr>
+          <p:cNvPr id="29" name="Text 27"/>
+          <p:cNvSpPr txBox="1"/>
+          <p:nvPr/>
+        </p:nvSpPr>
+        <p:spPr>
+          <a:xfrm>
+            <a:off x="5029200" y="5870448"/>
+            <a:ext cx="6583680" cy="384048"/>
           </a:xfrm>
           <a:prstGeom prst="rect">
             <a:avLst/>
@@ -6830,9 +8658,9 @@
               <a:buNone/>
             </a:pPr>
             <a:r>
-              <a:rPr lang="en-US" sz="1300" b="1" dirty="0">
-                <a:solidFill>
-                  <a:srgbClr val="E8614D"/>
+              <a:rPr lang="en-US" sz="1200" b="1" dirty="0">
+                <a:solidFill>
+                  <a:srgbClr val="617287"/>
                 </a:solidFill>
               </a:rPr>
               <a:t>확인할 것  </a:t>
@@ -6841,20 +8669,20 @@
               <a:buNone/>
             </a:pPr>
             <a:r>
-              <a:rPr lang="en-US" sz="1300" dirty="0">
+              <a:rPr lang="en-US" sz="1200" dirty="0">
                 <a:solidFill>
                   <a:srgbClr val="16243A"/>
                 </a:solidFill>
               </a:rPr>
               <a:t>테이블 좌석 수 · 드로잉 시간(가정 3–5분) · A/B/C 중 기본안</a:t>
             </a:r>
-            <a:endParaRPr lang="en-US" sz="1300" dirty="0"/>
-          </a:p>
-        </p:txBody>
-      </p:sp>
-      <p:sp>
-        <p:nvSpPr>
-          <p:cNvPr id="25" name="Slide Number Placeholder 0"/>
+            <a:endParaRPr lang="en-US" sz="1200" dirty="0"/>
+          </a:p>
+        </p:txBody>
+      </p:sp>
+      <p:sp>
+        <p:nvSpPr>
+          <p:cNvPr id="30" name="Slide Number Placeholder 0"/>
           <p:cNvSpPr>
             <a:spLocks noGrp="1"/>
           </p:cNvSpPr>
@@ -6899,7 +8727,7 @@
       </p:sp>
       <p:grpSp>
         <p:nvGrpSpPr>
-          <p:cNvPr id="900" name="원안 그림"/>
+          <p:cNvPr id="31" name="원안 그림"/>
           <p:cNvGrpSpPr/>
           <p:nvPr/>
         </p:nvGrpSpPr>
@@ -6913,7 +8741,7 @@
         </p:grpSpPr>
         <p:sp>
           <p:nvSpPr>
-            <p:cNvPr id="901" name="Shape 18"/>
+            <p:cNvPr id="32" name="Shape 18"/>
             <p:cNvSpPr/>
             <p:nvPr/>
           </p:nvSpPr>
@@ -6942,7 +8770,7 @@
         </p:sp>
         <p:sp>
           <p:nvSpPr>
-            <p:cNvPr id="902" name="Shape 19"/>
+            <p:cNvPr id="33" name="Shape 19"/>
             <p:cNvSpPr/>
             <p:nvPr/>
           </p:nvSpPr>
@@ -6969,7 +8797,7 @@
         </p:sp>
         <p:sp>
           <p:nvSpPr>
-            <p:cNvPr id="903" name="Text 20"/>
+            <p:cNvPr id="34" name="Text 20"/>
             <p:cNvSpPr/>
             <p:nvPr/>
           </p:nvSpPr>
@@ -7010,7 +8838,7 @@
         </p:sp>
         <p:sp>
           <p:nvSpPr>
-            <p:cNvPr id="904" name="Shape 21"/>
+            <p:cNvPr id="35" name="Shape 21"/>
             <p:cNvSpPr/>
             <p:nvPr/>
           </p:nvSpPr>
@@ -7039,7 +8867,7 @@
         </p:sp>
         <p:sp>
           <p:nvSpPr>
-            <p:cNvPr id="905" name="Shape 22"/>
+            <p:cNvPr id="36" name="Shape 22"/>
             <p:cNvSpPr/>
             <p:nvPr/>
           </p:nvSpPr>
@@ -7066,7 +8894,7 @@
         </p:sp>
         <p:sp>
           <p:nvSpPr>
-            <p:cNvPr id="906" name="Shape 23"/>
+            <p:cNvPr id="37" name="Shape 23"/>
             <p:cNvSpPr/>
             <p:nvPr/>
           </p:nvSpPr>
@@ -7093,14 +8921,14 @@
         </p:sp>
         <p:sp>
           <p:nvSpPr>
-            <p:cNvPr id="907" name="Shape 24"/>
+            <p:cNvPr id="38" name="Shape 24"/>
             <p:cNvSpPr/>
             <p:nvPr/>
           </p:nvSpPr>
           <p:spPr>
-            <a:xfrm>
-              <a:off x="7782458" y="4676242"/>
-              <a:ext cx="-166421" cy="427939"/>
+            <a:xfrm flipH="1">
+              <a:off x="7616037" y="4676242"/>
+              <a:ext cx="166421" cy="427939"/>
             </a:xfrm>
             <a:prstGeom prst="line">
               <a:avLst>
@@ -7120,7 +8948,7 @@
         </p:sp>
         <p:sp>
           <p:nvSpPr>
-            <p:cNvPr id="908" name="Shape 25"/>
+            <p:cNvPr id="39" name="Shape 25"/>
             <p:cNvSpPr/>
             <p:nvPr/>
           </p:nvSpPr>
@@ -7147,7 +8975,7 @@
         </p:sp>
         <p:sp>
           <p:nvSpPr>
-            <p:cNvPr id="909" name="Shape 26"/>
+            <p:cNvPr id="40" name="Shape 26"/>
             <p:cNvSpPr/>
             <p:nvPr/>
           </p:nvSpPr>
@@ -7176,7 +9004,7 @@
         </p:sp>
         <p:sp>
           <p:nvSpPr>
-            <p:cNvPr id="910" name="Shape 27"/>
+            <p:cNvPr id="41" name="Shape 27"/>
             <p:cNvSpPr/>
             <p:nvPr/>
           </p:nvSpPr>
@@ -7205,7 +9033,7 @@
         </p:sp>
         <p:sp>
           <p:nvSpPr>
-            <p:cNvPr id="911" name="Shape 28"/>
+            <p:cNvPr id="42" name="Shape 28"/>
             <p:cNvSpPr/>
             <p:nvPr/>
           </p:nvSpPr>
@@ -7232,7 +9060,7 @@
         </p:sp>
         <p:sp>
           <p:nvSpPr>
-            <p:cNvPr id="912" name="Text 29"/>
+            <p:cNvPr id="43" name="Text 29"/>
             <p:cNvSpPr/>
             <p:nvPr/>
           </p:nvSpPr>
@@ -7273,7 +9101,7 @@
         </p:sp>
         <p:sp>
           <p:nvSpPr>
-            <p:cNvPr id="913" name="Shape 30"/>
+            <p:cNvPr id="44" name="Shape 30"/>
             <p:cNvSpPr/>
             <p:nvPr/>
           </p:nvSpPr>
@@ -7302,7 +9130,7 @@
         </p:sp>
         <p:sp>
           <p:nvSpPr>
-            <p:cNvPr id="914" name="Text 31"/>
+            <p:cNvPr id="45" name="Text 31"/>
             <p:cNvSpPr/>
             <p:nvPr/>
           </p:nvSpPr>
@@ -8310,14 +10138,54 @@
       </p:sp>
       <p:sp>
         <p:nvSpPr>
-          <p:cNvPr id="28" name="Text 26"/>
+          <p:cNvPr id="28" name="decision-pill"/>
           <p:cNvSpPr txBox="1"/>
           <p:nvPr/>
         </p:nvSpPr>
         <p:spPr>
           <a:xfrm>
             <a:off x="548640" y="5870448"/>
-            <a:ext cx="11064240" cy="365760"/>
+            <a:ext cx="4206240" cy="384048"/>
+          </a:xfrm>
+          <a:prstGeom prst="roundRect">
+            <a:avLst>
+              <a:gd name="adj" fmla="val 23810"/>
+            </a:avLst>
+          </a:prstGeom>
+          <a:solidFill>
+            <a:srgbClr val="E8614D"/>
+          </a:solidFill>
+          <a:ln/>
+        </p:spPr>
+        <p:txBody>
+          <a:bodyPr wrap="square" lIns="0" tIns="0" rIns="0" bIns="0" rtlCol="0" anchor="ctr"/>
+          <a:lstStyle/>
+          <a:p>
+            <a:pPr algn="ctr" indent="0" marL="0">
+              <a:buNone/>
+            </a:pPr>
+            <a:r>
+              <a:rPr lang="en-US" sz="1300" b="1" dirty="0">
+                <a:solidFill>
+                  <a:srgbClr val="FFFFFF"/>
+                </a:solidFill>
+              </a:rPr>
+              <a:t>결정 ②  캐릭터 방식 · 2D / 3D 중 선택</a:t>
+            </a:r>
+            <a:endParaRPr lang="en-US" sz="1300" dirty="0"/>
+          </a:p>
+        </p:txBody>
+      </p:sp>
+      <p:sp>
+        <p:nvSpPr>
+          <p:cNvPr id="29" name="Text 27"/>
+          <p:cNvSpPr txBox="1"/>
+          <p:nvPr/>
+        </p:nvSpPr>
+        <p:spPr>
+          <a:xfrm>
+            <a:off x="5029200" y="5870448"/>
+            <a:ext cx="6583680" cy="384048"/>
           </a:xfrm>
           <a:prstGeom prst="rect">
             <a:avLst/>
@@ -8333,9 +10201,9 @@
               <a:buNone/>
             </a:pPr>
             <a:r>
-              <a:rPr lang="en-US" sz="1300" b="1" dirty="0">
-                <a:solidFill>
-                  <a:srgbClr val="E8614D"/>
+              <a:rPr lang="en-US" sz="1200" b="1" dirty="0">
+                <a:solidFill>
+                  <a:srgbClr val="617287"/>
                 </a:solidFill>
               </a:rPr>
               <a:t>확인할 것  </a:t>
@@ -8344,20 +10212,20 @@
               <a:buNone/>
             </a:pPr>
             <a:r>
-              <a:rPr lang="en-US" sz="1300" dirty="0">
+              <a:rPr lang="en-US" sz="1200" dirty="0">
                 <a:solidFill>
                   <a:srgbClr val="16243A"/>
                 </a:solidFill>
               </a:rPr>
               <a:t>스캐너 대수 · 스캔부터 벽 등장까지 시간(가정 10초 이내) · 3D 변환 방식</a:t>
             </a:r>
-            <a:endParaRPr lang="en-US" sz="1300" dirty="0"/>
-          </a:p>
-        </p:txBody>
-      </p:sp>
-      <p:sp>
-        <p:nvSpPr>
-          <p:cNvPr id="25" name="Slide Number Placeholder 0"/>
+            <a:endParaRPr lang="en-US" sz="1200" dirty="0"/>
+          </a:p>
+        </p:txBody>
+      </p:sp>
+      <p:sp>
+        <p:nvSpPr>
+          <p:cNvPr id="30" name="Slide Number Placeholder 0"/>
           <p:cNvSpPr>
             <a:spLocks noGrp="1"/>
           </p:cNvSpPr>
@@ -8402,7 +10270,7 @@
       </p:sp>
       <p:grpSp>
         <p:nvGrpSpPr>
-          <p:cNvPr id="900" name="원안 그림"/>
+          <p:cNvPr id="31" name="원안 그림"/>
           <p:cNvGrpSpPr/>
           <p:nvPr/>
         </p:nvGrpSpPr>
@@ -8416,7 +10284,7 @@
         </p:grpSpPr>
         <p:sp>
           <p:nvSpPr>
-            <p:cNvPr id="901" name="Shape 18"/>
+            <p:cNvPr id="32" name="Shape 18"/>
             <p:cNvSpPr/>
             <p:nvPr/>
           </p:nvSpPr>
@@ -8445,7 +10313,7 @@
         </p:sp>
         <p:sp>
           <p:nvSpPr>
-            <p:cNvPr id="902" name="Shape 19"/>
+            <p:cNvPr id="33" name="Shape 19"/>
             <p:cNvSpPr/>
             <p:nvPr/>
           </p:nvSpPr>
@@ -8472,7 +10340,7 @@
         </p:sp>
         <p:sp>
           <p:nvSpPr>
-            <p:cNvPr id="903" name="Shape 20"/>
+            <p:cNvPr id="34" name="Shape 20"/>
             <p:cNvSpPr/>
             <p:nvPr/>
           </p:nvSpPr>
@@ -8501,7 +10369,7 @@
         </p:sp>
         <p:sp>
           <p:nvSpPr>
-            <p:cNvPr id="904" name="Shape 21"/>
+            <p:cNvPr id="35" name="Shape 21"/>
             <p:cNvSpPr/>
             <p:nvPr/>
           </p:nvSpPr>
@@ -8528,7 +10396,7 @@
         </p:sp>
         <p:sp>
           <p:nvSpPr>
-            <p:cNvPr id="905" name="Shape 22"/>
+            <p:cNvPr id="36" name="Shape 22"/>
             <p:cNvSpPr/>
             <p:nvPr/>
           </p:nvSpPr>
@@ -8555,14 +10423,14 @@
         </p:sp>
         <p:sp>
           <p:nvSpPr>
-            <p:cNvPr id="906" name="Shape 23"/>
+            <p:cNvPr id="37" name="Shape 23"/>
             <p:cNvSpPr/>
             <p:nvPr/>
           </p:nvSpPr>
           <p:spPr>
-            <a:xfrm>
-              <a:off x="6933255" y="4117726"/>
-              <a:ext cx="-101133" cy="260055"/>
+            <a:xfrm flipH="1">
+              <a:off x="6832122" y="4117726"/>
+              <a:ext cx="101133" cy="260055"/>
             </a:xfrm>
             <a:prstGeom prst="line">
               <a:avLst>
@@ -8582,7 +10450,7 @@
         </p:sp>
         <p:sp>
           <p:nvSpPr>
-            <p:cNvPr id="907" name="Shape 24"/>
+            <p:cNvPr id="38" name="Shape 24"/>
             <p:cNvSpPr/>
             <p:nvPr/>
           </p:nvSpPr>
@@ -8609,7 +10477,7 @@
         </p:sp>
         <p:sp>
           <p:nvSpPr>
-            <p:cNvPr id="908" name="Shape 25"/>
+            <p:cNvPr id="39" name="Shape 25"/>
             <p:cNvSpPr/>
             <p:nvPr/>
           </p:nvSpPr>
@@ -8638,7 +10506,7 @@
         </p:sp>
         <p:sp>
           <p:nvSpPr>
-            <p:cNvPr id="909" name="Shape 26"/>
+            <p:cNvPr id="40" name="Shape 26"/>
             <p:cNvSpPr/>
             <p:nvPr/>
           </p:nvSpPr>
@@ -8667,7 +10535,7 @@
         </p:sp>
         <p:sp>
           <p:nvSpPr>
-            <p:cNvPr id="910" name="Shape 27"/>
+            <p:cNvPr id="41" name="Shape 27"/>
             <p:cNvSpPr/>
             <p:nvPr/>
           </p:nvSpPr>
@@ -8696,7 +10564,7 @@
         </p:sp>
         <p:sp>
           <p:nvSpPr>
-            <p:cNvPr id="911" name="Shape 28"/>
+            <p:cNvPr id="42" name="Shape 28"/>
             <p:cNvSpPr/>
             <p:nvPr/>
           </p:nvSpPr>
@@ -8725,7 +10593,7 @@
         </p:sp>
         <p:sp>
           <p:nvSpPr>
-            <p:cNvPr id="912" name="Shape 29"/>
+            <p:cNvPr id="43" name="Shape 29"/>
             <p:cNvSpPr/>
             <p:nvPr/>
           </p:nvSpPr>
@@ -8754,7 +10622,7 @@
         </p:sp>
         <p:sp>
           <p:nvSpPr>
-            <p:cNvPr id="913" name="Shape 30"/>
+            <p:cNvPr id="44" name="Shape 30"/>
             <p:cNvSpPr/>
             <p:nvPr/>
           </p:nvSpPr>
@@ -8783,7 +10651,7 @@
         </p:sp>
         <p:sp>
           <p:nvSpPr>
-            <p:cNvPr id="914" name="Shape 31"/>
+            <p:cNvPr id="45" name="Shape 31"/>
             <p:cNvSpPr/>
             <p:nvPr/>
           </p:nvSpPr>
@@ -8810,7 +10678,7 @@
         </p:sp>
         <p:sp>
           <p:nvSpPr>
-            <p:cNvPr id="915" name="Shape 32"/>
+            <p:cNvPr id="46" name="Shape 32"/>
             <p:cNvSpPr/>
             <p:nvPr/>
           </p:nvSpPr>
@@ -8837,14 +10705,14 @@
         </p:sp>
         <p:sp>
           <p:nvSpPr>
-            <p:cNvPr id="916" name="Shape 33"/>
+            <p:cNvPr id="47" name="Shape 33"/>
             <p:cNvSpPr/>
             <p:nvPr/>
           </p:nvSpPr>
           <p:spPr>
-            <a:xfrm>
-              <a:off x="9800722" y="4031407"/>
-              <a:ext cx="-110094" cy="283098"/>
+            <a:xfrm flipH="1">
+              <a:off x="9690628" y="4031407"/>
+              <a:ext cx="110094" cy="283098"/>
             </a:xfrm>
             <a:prstGeom prst="line">
               <a:avLst>
@@ -8864,7 +10732,7 @@
         </p:sp>
         <p:sp>
           <p:nvSpPr>
-            <p:cNvPr id="917" name="Shape 34"/>
+            <p:cNvPr id="48" name="Shape 34"/>
             <p:cNvSpPr/>
             <p:nvPr/>
           </p:nvSpPr>
@@ -8891,7 +10759,7 @@
         </p:sp>
         <p:sp>
           <p:nvSpPr>
-            <p:cNvPr id="918" name="Shape 35"/>
+            <p:cNvPr id="49" name="Shape 35"/>
             <p:cNvSpPr/>
             <p:nvPr/>
           </p:nvSpPr>
@@ -8920,7 +10788,7 @@
         </p:sp>
         <p:sp>
           <p:nvSpPr>
-            <p:cNvPr id="919" name="Shape 36"/>
+            <p:cNvPr id="50" name="Shape 36"/>
             <p:cNvSpPr/>
             <p:nvPr/>
           </p:nvSpPr>
@@ -8949,7 +10817,7 @@
         </p:sp>
         <p:sp>
           <p:nvSpPr>
-            <p:cNvPr id="920" name="Text 37"/>
+            <p:cNvPr id="51" name="Text 37"/>
             <p:cNvSpPr/>
             <p:nvPr/>
           </p:nvSpPr>
@@ -8990,7 +10858,7 @@
         </p:sp>
         <p:sp>
           <p:nvSpPr>
-            <p:cNvPr id="921" name="Text 38"/>
+            <p:cNvPr id="52" name="Text 38"/>
             <p:cNvSpPr/>
             <p:nvPr/>
           </p:nvSpPr>
@@ -9998,14 +11866,54 @@
       </p:sp>
       <p:sp>
         <p:nvSpPr>
-          <p:cNvPr id="28" name="Text 26"/>
+          <p:cNvPr id="28" name="decision-pill"/>
           <p:cNvSpPr txBox="1"/>
           <p:nvPr/>
         </p:nvSpPr>
         <p:spPr>
           <a:xfrm>
             <a:off x="548640" y="5870448"/>
-            <a:ext cx="11064240" cy="365760"/>
+            <a:ext cx="4206240" cy="384048"/>
+          </a:xfrm>
+          <a:prstGeom prst="roundRect">
+            <a:avLst>
+              <a:gd name="adj" fmla="val 23810"/>
+            </a:avLst>
+          </a:prstGeom>
+          <a:solidFill>
+            <a:srgbClr val="E8614D"/>
+          </a:solidFill>
+          <a:ln/>
+        </p:spPr>
+        <p:txBody>
+          <a:bodyPr wrap="square" lIns="0" tIns="0" rIns="0" bIns="0" rtlCol="0" anchor="ctr"/>
+          <a:lstStyle/>
+          <a:p>
+            <a:pPr algn="ctr" indent="0" marL="0">
+              <a:buNone/>
+            </a:pPr>
+            <a:r>
+              <a:rPr lang="en-US" sz="1300" b="1" dirty="0">
+                <a:solidFill>
+                  <a:srgbClr val="FFFFFF"/>
+                </a:solidFill>
+              </a:rPr>
+              <a:t>결정 ③  배경 방식 · 3가지 중 선택</a:t>
+            </a:r>
+            <a:endParaRPr lang="en-US" sz="1300" dirty="0"/>
+          </a:p>
+        </p:txBody>
+      </p:sp>
+      <p:sp>
+        <p:nvSpPr>
+          <p:cNvPr id="29" name="Text 27"/>
+          <p:cNvSpPr txBox="1"/>
+          <p:nvPr/>
+        </p:nvSpPr>
+        <p:spPr>
+          <a:xfrm>
+            <a:off x="5029200" y="5870448"/>
+            <a:ext cx="6583680" cy="384048"/>
           </a:xfrm>
           <a:prstGeom prst="rect">
             <a:avLst/>
@@ -10021,9 +11929,9 @@
               <a:buNone/>
             </a:pPr>
             <a:r>
-              <a:rPr lang="en-US" sz="1300" b="1" dirty="0">
-                <a:solidFill>
-                  <a:srgbClr val="E8614D"/>
+              <a:rPr lang="en-US" sz="1200" b="1" dirty="0">
+                <a:solidFill>
+                  <a:srgbClr val="617287"/>
                 </a:solidFill>
               </a:rPr>
               <a:t>확인할 것  </a:t>
@@ -10032,20 +11940,20 @@
               <a:buNone/>
             </a:pPr>
             <a:r>
-              <a:rPr lang="en-US" sz="1300" dirty="0">
+              <a:rPr lang="en-US" sz="1200" dirty="0">
                 <a:solidFill>
                   <a:srgbClr val="16243A"/>
                 </a:solidFill>
               </a:rPr>
               <a:t>벽 크기 · 해상도 · 터치 센서 방식 · 동시 캐릭터 수(가정 30–40)</a:t>
             </a:r>
-            <a:endParaRPr lang="en-US" sz="1300" dirty="0"/>
-          </a:p>
-        </p:txBody>
-      </p:sp>
-      <p:sp>
-        <p:nvSpPr>
-          <p:cNvPr id="25" name="Slide Number Placeholder 0"/>
+            <a:endParaRPr lang="en-US" sz="1200" dirty="0"/>
+          </a:p>
+        </p:txBody>
+      </p:sp>
+      <p:sp>
+        <p:nvSpPr>
+          <p:cNvPr id="30" name="Slide Number Placeholder 0"/>
           <p:cNvSpPr>
             <a:spLocks noGrp="1"/>
           </p:cNvSpPr>
@@ -10090,7 +11998,7 @@
       </p:sp>
       <p:grpSp>
         <p:nvGrpSpPr>
-          <p:cNvPr id="900" name="원안 그림"/>
+          <p:cNvPr id="31" name="원안 그림"/>
           <p:cNvGrpSpPr/>
           <p:nvPr/>
         </p:nvGrpSpPr>
@@ -10104,7 +12012,7 @@
         </p:grpSpPr>
         <p:sp>
           <p:nvSpPr>
-            <p:cNvPr id="901" name="Shape 18"/>
+            <p:cNvPr id="32" name="Shape 18"/>
             <p:cNvSpPr/>
             <p:nvPr/>
           </p:nvSpPr>
@@ -10133,7 +12041,7 @@
         </p:sp>
         <p:sp>
           <p:nvSpPr>
-            <p:cNvPr id="902" name="Shape 19"/>
+            <p:cNvPr id="33" name="Shape 19"/>
             <p:cNvSpPr/>
             <p:nvPr/>
           </p:nvSpPr>
@@ -10162,7 +12070,7 @@
         </p:sp>
         <p:sp>
           <p:nvSpPr>
-            <p:cNvPr id="903" name="Shape 20"/>
+            <p:cNvPr id="34" name="Shape 20"/>
             <p:cNvSpPr/>
             <p:nvPr/>
           </p:nvSpPr>
@@ -10191,7 +12099,7 @@
         </p:sp>
         <p:sp>
           <p:nvSpPr>
-            <p:cNvPr id="904" name="Shape 21"/>
+            <p:cNvPr id="35" name="Shape 21"/>
             <p:cNvSpPr/>
             <p:nvPr/>
           </p:nvSpPr>
@@ -10220,7 +12128,7 @@
         </p:sp>
         <p:sp>
           <p:nvSpPr>
-            <p:cNvPr id="905" name="Shape 22"/>
+            <p:cNvPr id="36" name="Shape 22"/>
             <p:cNvSpPr/>
             <p:nvPr/>
           </p:nvSpPr>
@@ -10249,7 +12157,7 @@
         </p:sp>
         <p:sp>
           <p:nvSpPr>
-            <p:cNvPr id="906" name="Shape 23"/>
+            <p:cNvPr id="37" name="Shape 23"/>
             <p:cNvSpPr/>
             <p:nvPr/>
           </p:nvSpPr>
@@ -10276,7 +12184,7 @@
         </p:sp>
         <p:sp>
           <p:nvSpPr>
-            <p:cNvPr id="907" name="Shape 24"/>
+            <p:cNvPr id="38" name="Shape 24"/>
             <p:cNvSpPr/>
             <p:nvPr/>
           </p:nvSpPr>
@@ -10303,14 +12211,14 @@
         </p:sp>
         <p:sp>
           <p:nvSpPr>
-            <p:cNvPr id="908" name="Shape 25"/>
+            <p:cNvPr id="39" name="Shape 25"/>
             <p:cNvSpPr/>
             <p:nvPr/>
           </p:nvSpPr>
           <p:spPr>
-            <a:xfrm>
-              <a:off x="7787945" y="4058107"/>
-              <a:ext cx="-140818" cy="362102"/>
+            <a:xfrm flipH="1">
+              <a:off x="7647127" y="4058107"/>
+              <a:ext cx="140818" cy="362102"/>
             </a:xfrm>
             <a:prstGeom prst="line">
               <a:avLst>
@@ -10330,7 +12238,7 @@
         </p:sp>
         <p:sp>
           <p:nvSpPr>
-            <p:cNvPr id="909" name="Shape 26"/>
+            <p:cNvPr id="40" name="Shape 26"/>
             <p:cNvSpPr/>
             <p:nvPr/>
           </p:nvSpPr>
@@ -10357,7 +12265,7 @@
         </p:sp>
         <p:sp>
           <p:nvSpPr>
-            <p:cNvPr id="910" name="Shape 27"/>
+            <p:cNvPr id="41" name="Shape 27"/>
             <p:cNvSpPr/>
             <p:nvPr/>
           </p:nvSpPr>
@@ -10386,7 +12294,7 @@
         </p:sp>
         <p:sp>
           <p:nvSpPr>
-            <p:cNvPr id="911" name="Shape 28"/>
+            <p:cNvPr id="42" name="Shape 28"/>
             <p:cNvSpPr/>
             <p:nvPr/>
           </p:nvSpPr>
@@ -10415,7 +12323,7 @@
         </p:sp>
         <p:sp>
           <p:nvSpPr>
-            <p:cNvPr id="912" name="Shape 29"/>
+            <p:cNvPr id="43" name="Shape 29"/>
             <p:cNvSpPr/>
             <p:nvPr/>
           </p:nvSpPr>
@@ -10444,7 +12352,7 @@
         </p:sp>
         <p:sp>
           <p:nvSpPr>
-            <p:cNvPr id="913" name="Shape 30"/>
+            <p:cNvPr id="44" name="Shape 30"/>
             <p:cNvSpPr/>
             <p:nvPr/>
           </p:nvSpPr>
@@ -10471,7 +12379,7 @@
         </p:sp>
         <p:sp>
           <p:nvSpPr>
-            <p:cNvPr id="914" name="Shape 31"/>
+            <p:cNvPr id="45" name="Shape 31"/>
             <p:cNvSpPr/>
             <p:nvPr/>
           </p:nvSpPr>
@@ -10498,14 +12406,14 @@
         </p:sp>
         <p:sp>
           <p:nvSpPr>
-            <p:cNvPr id="915" name="Shape 32"/>
+            <p:cNvPr id="46" name="Shape 32"/>
             <p:cNvSpPr/>
             <p:nvPr/>
           </p:nvSpPr>
           <p:spPr>
-            <a:xfrm>
-              <a:off x="9530151" y="3962278"/>
-              <a:ext cx="-101133" cy="260055"/>
+            <a:xfrm flipH="1">
+              <a:off x="9429018" y="3962278"/>
+              <a:ext cx="101133" cy="260055"/>
             </a:xfrm>
             <a:prstGeom prst="line">
               <a:avLst>
@@ -10525,7 +12433,7 @@
         </p:sp>
         <p:sp>
           <p:nvSpPr>
-            <p:cNvPr id="916" name="Shape 33"/>
+            <p:cNvPr id="47" name="Shape 33"/>
             <p:cNvSpPr/>
             <p:nvPr/>
           </p:nvSpPr>
@@ -10552,7 +12460,7 @@
         </p:sp>
         <p:sp>
           <p:nvSpPr>
-            <p:cNvPr id="917" name="Shape 34"/>
+            <p:cNvPr id="48" name="Shape 34"/>
             <p:cNvSpPr/>
             <p:nvPr/>
           </p:nvSpPr>
@@ -10581,7 +12489,7 @@
         </p:sp>
         <p:sp>
           <p:nvSpPr>
-            <p:cNvPr id="918" name="Shape 35"/>
+            <p:cNvPr id="49" name="Shape 35"/>
             <p:cNvSpPr/>
             <p:nvPr/>
           </p:nvSpPr>
@@ -10610,7 +12518,7 @@
         </p:sp>
         <p:sp>
           <p:nvSpPr>
-            <p:cNvPr id="919" name="Shape 36"/>
+            <p:cNvPr id="50" name="Shape 36"/>
             <p:cNvSpPr/>
             <p:nvPr/>
           </p:nvSpPr>
@@ -10639,7 +12547,7 @@
         </p:sp>
         <p:sp>
           <p:nvSpPr>
-            <p:cNvPr id="920" name="Shape 37"/>
+            <p:cNvPr id="51" name="Shape 37"/>
             <p:cNvSpPr/>
             <p:nvPr/>
           </p:nvSpPr>
@@ -10668,7 +12576,7 @@
         </p:sp>
         <p:sp>
           <p:nvSpPr>
-            <p:cNvPr id="921" name="Text 38"/>
+            <p:cNvPr id="52" name="Text 38"/>
             <p:cNvSpPr/>
             <p:nvPr/>
           </p:nvSpPr>
@@ -11676,14 +13584,54 @@
       </p:sp>
       <p:sp>
         <p:nvSpPr>
-          <p:cNvPr id="28" name="Text 26"/>
+          <p:cNvPr id="28" name="decision-pill"/>
           <p:cNvSpPr txBox="1"/>
           <p:nvPr/>
         </p:nvSpPr>
         <p:spPr>
           <a:xfrm>
             <a:off x="548640" y="5870448"/>
-            <a:ext cx="11064240" cy="365760"/>
+            <a:ext cx="4206240" cy="384048"/>
+          </a:xfrm>
+          <a:prstGeom prst="roundRect">
+            <a:avLst>
+              <a:gd name="adj" fmla="val 23810"/>
+            </a:avLst>
+          </a:prstGeom>
+          <a:solidFill>
+            <a:srgbClr val="E8614D"/>
+          </a:solidFill>
+          <a:ln/>
+        </p:spPr>
+        <p:txBody>
+          <a:bodyPr wrap="square" lIns="0" tIns="0" rIns="0" bIns="0" rtlCol="0" anchor="ctr"/>
+          <a:lstStyle/>
+          <a:p>
+            <a:pPr algn="ctr" indent="0" marL="0">
+              <a:buNone/>
+            </a:pPr>
+            <a:r>
+              <a:rPr lang="en-US" sz="1300" b="1" dirty="0">
+                <a:solidFill>
+                  <a:srgbClr val="FFFFFF"/>
+                </a:solidFill>
+              </a:rPr>
+              <a:t>결정 ④  퍼레이드 운영 · 3가지 중 선택</a:t>
+            </a:r>
+            <a:endParaRPr lang="en-US" sz="1300" dirty="0"/>
+          </a:p>
+        </p:txBody>
+      </p:sp>
+      <p:sp>
+        <p:nvSpPr>
+          <p:cNvPr id="29" name="Text 27"/>
+          <p:cNvSpPr txBox="1"/>
+          <p:nvPr/>
+        </p:nvSpPr>
+        <p:spPr>
+          <a:xfrm>
+            <a:off x="5029200" y="5870448"/>
+            <a:ext cx="6583680" cy="384048"/>
           </a:xfrm>
           <a:prstGeom prst="rect">
             <a:avLst/>
@@ -11699,9 +13647,9 @@
               <a:buNone/>
             </a:pPr>
             <a:r>
-              <a:rPr lang="en-US" sz="1300" b="1" dirty="0">
-                <a:solidFill>
-                  <a:srgbClr val="E8614D"/>
+              <a:rPr lang="en-US" sz="1200" b="1" dirty="0">
+                <a:solidFill>
+                  <a:srgbClr val="617287"/>
                 </a:solidFill>
               </a:rPr>
               <a:t>확인할 것  </a:t>
@@ -11710,20 +13658,20 @@
               <a:buNone/>
             </a:pPr>
             <a:r>
-              <a:rPr lang="en-US" sz="1300" dirty="0">
+              <a:rPr lang="en-US" sz="1200" dirty="0">
                 <a:solidFill>
                   <a:srgbClr val="16243A"/>
                 </a:solidFill>
               </a:rPr>
               <a:t>파사드 해상도 · 비율 · 기존 영상 원본 형식(실시간 합성 가능 여부)</a:t>
             </a:r>
-            <a:endParaRPr lang="en-US" sz="1300" dirty="0"/>
-          </a:p>
-        </p:txBody>
-      </p:sp>
-      <p:sp>
-        <p:nvSpPr>
-          <p:cNvPr id="25" name="Slide Number Placeholder 0"/>
+            <a:endParaRPr lang="en-US" sz="1200" dirty="0"/>
+          </a:p>
+        </p:txBody>
+      </p:sp>
+      <p:sp>
+        <p:nvSpPr>
+          <p:cNvPr id="30" name="Slide Number Placeholder 0"/>
           <p:cNvSpPr>
             <a:spLocks noGrp="1"/>
           </p:cNvSpPr>
@@ -11768,7 +13716,7 @@
       </p:sp>
       <p:grpSp>
         <p:nvGrpSpPr>
-          <p:cNvPr id="900" name="원안 그림"/>
+          <p:cNvPr id="31" name="원안 그림"/>
           <p:cNvGrpSpPr/>
           <p:nvPr/>
         </p:nvGrpSpPr>
@@ -11782,7 +13730,7 @@
         </p:grpSpPr>
         <p:sp>
           <p:nvSpPr>
-            <p:cNvPr id="901" name="Shape 18"/>
+            <p:cNvPr id="32" name="Shape 18"/>
             <p:cNvSpPr/>
             <p:nvPr/>
           </p:nvSpPr>
@@ -11811,7 +13759,7 @@
         </p:sp>
         <p:sp>
           <p:nvSpPr>
-            <p:cNvPr id="902" name="Shape 19"/>
+            <p:cNvPr id="33" name="Shape 19"/>
             <p:cNvSpPr/>
             <p:nvPr/>
           </p:nvSpPr>
@@ -11840,7 +13788,7 @@
         </p:sp>
         <p:sp>
           <p:nvSpPr>
-            <p:cNvPr id="903" name="Shape 20"/>
+            <p:cNvPr id="34" name="Shape 20"/>
             <p:cNvSpPr/>
             <p:nvPr/>
           </p:nvSpPr>
@@ -11869,7 +13817,7 @@
         </p:sp>
         <p:sp>
           <p:nvSpPr>
-            <p:cNvPr id="904" name="Shape 21"/>
+            <p:cNvPr id="35" name="Shape 21"/>
             <p:cNvSpPr/>
             <p:nvPr/>
           </p:nvSpPr>
@@ -11898,7 +13846,7 @@
         </p:sp>
         <p:sp>
           <p:nvSpPr>
-            <p:cNvPr id="905" name="Shape 22"/>
+            <p:cNvPr id="36" name="Shape 22"/>
             <p:cNvSpPr/>
             <p:nvPr/>
           </p:nvSpPr>
@@ -11927,7 +13875,7 @@
         </p:sp>
         <p:sp>
           <p:nvSpPr>
-            <p:cNvPr id="906" name="Shape 23"/>
+            <p:cNvPr id="37" name="Shape 23"/>
             <p:cNvSpPr/>
             <p:nvPr/>
           </p:nvSpPr>
@@ -11956,7 +13904,7 @@
         </p:sp>
         <p:sp>
           <p:nvSpPr>
-            <p:cNvPr id="907" name="Shape 24"/>
+            <p:cNvPr id="38" name="Shape 24"/>
             <p:cNvSpPr/>
             <p:nvPr/>
           </p:nvSpPr>
@@ -11985,7 +13933,7 @@
         </p:sp>
         <p:sp>
           <p:nvSpPr>
-            <p:cNvPr id="908" name="Shape 25"/>
+            <p:cNvPr id="39" name="Shape 25"/>
             <p:cNvSpPr/>
             <p:nvPr/>
           </p:nvSpPr>
@@ -12014,7 +13962,7 @@
         </p:sp>
         <p:sp>
           <p:nvSpPr>
-            <p:cNvPr id="909" name="Shape 26"/>
+            <p:cNvPr id="40" name="Shape 26"/>
             <p:cNvSpPr/>
             <p:nvPr/>
           </p:nvSpPr>
@@ -12043,7 +13991,7 @@
         </p:sp>
         <p:sp>
           <p:nvSpPr>
-            <p:cNvPr id="910" name="Shape 27"/>
+            <p:cNvPr id="41" name="Shape 27"/>
             <p:cNvSpPr/>
             <p:nvPr/>
           </p:nvSpPr>
@@ -12070,7 +14018,7 @@
         </p:sp>
         <p:sp>
           <p:nvSpPr>
-            <p:cNvPr id="911" name="Shape 28"/>
+            <p:cNvPr id="42" name="Shape 28"/>
             <p:cNvSpPr/>
             <p:nvPr/>
           </p:nvSpPr>
@@ -12097,14 +14045,14 @@
         </p:sp>
         <p:sp>
           <p:nvSpPr>
-            <p:cNvPr id="912" name="Shape 29"/>
+            <p:cNvPr id="43" name="Shape 29"/>
             <p:cNvSpPr/>
             <p:nvPr/>
           </p:nvSpPr>
           <p:spPr>
-            <a:xfrm>
-              <a:off x="7044355" y="4589556"/>
-              <a:ext cx="-94732" cy="243596"/>
+            <a:xfrm flipH="1">
+              <a:off x="6949623" y="4589556"/>
+              <a:ext cx="94732" cy="243596"/>
             </a:xfrm>
             <a:prstGeom prst="line">
               <a:avLst>
@@ -12124,7 +14072,7 @@
         </p:sp>
         <p:sp>
           <p:nvSpPr>
-            <p:cNvPr id="913" name="Shape 30"/>
+            <p:cNvPr id="44" name="Shape 30"/>
             <p:cNvSpPr/>
             <p:nvPr/>
           </p:nvSpPr>
@@ -12151,7 +14099,7 @@
         </p:sp>
         <p:sp>
           <p:nvSpPr>
-            <p:cNvPr id="914" name="Shape 31"/>
+            <p:cNvPr id="45" name="Shape 31"/>
             <p:cNvSpPr/>
             <p:nvPr/>
           </p:nvSpPr>
@@ -12180,7 +14128,7 @@
         </p:sp>
         <p:sp>
           <p:nvSpPr>
-            <p:cNvPr id="915" name="Shape 32"/>
+            <p:cNvPr id="46" name="Shape 32"/>
             <p:cNvSpPr/>
             <p:nvPr/>
           </p:nvSpPr>
@@ -12209,7 +14157,7 @@
         </p:sp>
         <p:sp>
           <p:nvSpPr>
-            <p:cNvPr id="916" name="Shape 33"/>
+            <p:cNvPr id="47" name="Shape 33"/>
             <p:cNvSpPr/>
             <p:nvPr/>
           </p:nvSpPr>
@@ -12238,7 +14186,7 @@
         </p:sp>
         <p:sp>
           <p:nvSpPr>
-            <p:cNvPr id="917" name="Shape 34"/>
+            <p:cNvPr id="48" name="Shape 34"/>
             <p:cNvSpPr/>
             <p:nvPr/>
           </p:nvSpPr>
@@ -12265,7 +14213,7 @@
         </p:sp>
         <p:sp>
           <p:nvSpPr>
-            <p:cNvPr id="918" name="Shape 35"/>
+            <p:cNvPr id="49" name="Shape 35"/>
             <p:cNvSpPr/>
             <p:nvPr/>
           </p:nvSpPr>
@@ -12292,14 +14240,14 @@
         </p:sp>
         <p:sp>
           <p:nvSpPr>
-            <p:cNvPr id="919" name="Shape 36"/>
+            <p:cNvPr id="50" name="Shape 36"/>
             <p:cNvSpPr/>
             <p:nvPr/>
           </p:nvSpPr>
           <p:spPr>
-            <a:xfrm>
-              <a:off x="8532084" y="4514576"/>
-              <a:ext cx="-107533" cy="276515"/>
+            <a:xfrm flipH="1">
+              <a:off x="8424551" y="4514576"/>
+              <a:ext cx="107533" cy="276515"/>
             </a:xfrm>
             <a:prstGeom prst="line">
               <a:avLst>
@@ -12319,7 +14267,7 @@
         </p:sp>
         <p:sp>
           <p:nvSpPr>
-            <p:cNvPr id="920" name="Shape 37"/>
+            <p:cNvPr id="51" name="Shape 37"/>
             <p:cNvSpPr/>
             <p:nvPr/>
           </p:nvSpPr>
@@ -12346,7 +14294,7 @@
         </p:sp>
         <p:sp>
           <p:nvSpPr>
-            <p:cNvPr id="921" name="Shape 38"/>
+            <p:cNvPr id="52" name="Shape 38"/>
             <p:cNvSpPr/>
             <p:nvPr/>
           </p:nvSpPr>
@@ -12375,7 +14323,7 @@
         </p:sp>
         <p:sp>
           <p:nvSpPr>
-            <p:cNvPr id="922" name="Shape 39"/>
+            <p:cNvPr id="53" name="Shape 39"/>
             <p:cNvSpPr/>
             <p:nvPr/>
           </p:nvSpPr>
@@ -12404,7 +14352,7 @@
         </p:sp>
         <p:sp>
           <p:nvSpPr>
-            <p:cNvPr id="923" name="Shape 40"/>
+            <p:cNvPr id="54" name="Shape 40"/>
             <p:cNvSpPr/>
             <p:nvPr/>
           </p:nvSpPr>
@@ -12433,7 +14381,7 @@
         </p:sp>
         <p:sp>
           <p:nvSpPr>
-            <p:cNvPr id="924" name="Shape 41"/>
+            <p:cNvPr id="55" name="Shape 41"/>
             <p:cNvSpPr/>
             <p:nvPr/>
           </p:nvSpPr>
@@ -12460,7 +14408,7 @@
         </p:sp>
         <p:sp>
           <p:nvSpPr>
-            <p:cNvPr id="925" name="Shape 42"/>
+            <p:cNvPr id="56" name="Shape 42"/>
             <p:cNvSpPr/>
             <p:nvPr/>
           </p:nvSpPr>
@@ -12487,14 +14435,14 @@
         </p:sp>
         <p:sp>
           <p:nvSpPr>
-            <p:cNvPr id="926" name="Shape 43"/>
+            <p:cNvPr id="57" name="Shape 43"/>
             <p:cNvSpPr/>
             <p:nvPr/>
           </p:nvSpPr>
           <p:spPr>
-            <a:xfrm>
-              <a:off x="10140787" y="4561393"/>
-              <a:ext cx="-93452" cy="240304"/>
+            <a:xfrm flipH="1">
+              <a:off x="10047335" y="4561393"/>
+              <a:ext cx="93452" cy="240304"/>
             </a:xfrm>
             <a:prstGeom prst="line">
               <a:avLst>
@@ -12514,7 +14462,7 @@
         </p:sp>
         <p:sp>
           <p:nvSpPr>
-            <p:cNvPr id="927" name="Shape 44"/>
+            <p:cNvPr id="58" name="Shape 44"/>
             <p:cNvSpPr/>
             <p:nvPr/>
           </p:nvSpPr>
@@ -12541,7 +14489,7 @@
         </p:sp>
         <p:sp>
           <p:nvSpPr>
-            <p:cNvPr id="928" name="Shape 45"/>
+            <p:cNvPr id="59" name="Shape 45"/>
             <p:cNvSpPr/>
             <p:nvPr/>
           </p:nvSpPr>
@@ -12570,7 +14518,7 @@
         </p:sp>
         <p:sp>
           <p:nvSpPr>
-            <p:cNvPr id="929" name="Shape 46"/>
+            <p:cNvPr id="60" name="Shape 46"/>
             <p:cNvSpPr/>
             <p:nvPr/>
           </p:nvSpPr>
@@ -12599,7 +14547,7 @@
         </p:sp>
         <p:sp>
           <p:nvSpPr>
-            <p:cNvPr id="930" name="Text 47"/>
+            <p:cNvPr id="61" name="Text 47"/>
             <p:cNvSpPr/>
             <p:nvPr/>
           </p:nvSpPr>
@@ -12640,7 +14588,7 @@
         </p:sp>
         <p:sp>
           <p:nvSpPr>
-            <p:cNvPr id="931" name="Text 48"/>
+            <p:cNvPr id="62" name="Text 48"/>
             <p:cNvSpPr/>
             <p:nvPr/>
           </p:nvSpPr>
@@ -13550,14 +15498,54 @@
       </p:sp>
       <p:sp>
         <p:nvSpPr>
-          <p:cNvPr id="26" name="Text 24"/>
+          <p:cNvPr id="26" name="decision-pill"/>
           <p:cNvSpPr txBox="1"/>
           <p:nvPr/>
         </p:nvSpPr>
         <p:spPr>
           <a:xfrm>
             <a:off x="548640" y="5870448"/>
-            <a:ext cx="11064240" cy="365760"/>
+            <a:ext cx="4206240" cy="384048"/>
+          </a:xfrm>
+          <a:prstGeom prst="roundRect">
+            <a:avLst>
+              <a:gd name="adj" fmla="val 23810"/>
+            </a:avLst>
+          </a:prstGeom>
+          <a:solidFill>
+            <a:srgbClr val="E8614D"/>
+          </a:solidFill>
+          <a:ln/>
+        </p:spPr>
+        <p:txBody>
+          <a:bodyPr wrap="square" lIns="0" tIns="0" rIns="0" bIns="0" rtlCol="0" anchor="ctr"/>
+          <a:lstStyle/>
+          <a:p>
+            <a:pPr algn="ctr" indent="0" marL="0">
+              <a:buNone/>
+            </a:pPr>
+            <a:r>
+              <a:rPr lang="en-US" sz="1300" b="1" dirty="0">
+                <a:solidFill>
+                  <a:srgbClr val="FFFFFF"/>
+                </a:solidFill>
+              </a:rPr>
+              <a:t>결정 ⑤  보관 범위 · 3가지 중 선택</a:t>
+            </a:r>
+            <a:endParaRPr lang="en-US" sz="1300" dirty="0"/>
+          </a:p>
+        </p:txBody>
+      </p:sp>
+      <p:sp>
+        <p:nvSpPr>
+          <p:cNvPr id="27" name="Text 25"/>
+          <p:cNvSpPr txBox="1"/>
+          <p:nvPr/>
+        </p:nvSpPr>
+        <p:spPr>
+          <a:xfrm>
+            <a:off x="5029200" y="5870448"/>
+            <a:ext cx="6583680" cy="384048"/>
           </a:xfrm>
           <a:prstGeom prst="rect">
             <a:avLst/>
@@ -13573,9 +15561,9 @@
               <a:buNone/>
             </a:pPr>
             <a:r>
-              <a:rPr lang="en-US" sz="1300" b="1" dirty="0">
-                <a:solidFill>
-                  <a:srgbClr val="E8614D"/>
+              <a:rPr lang="en-US" sz="1200" b="1" dirty="0">
+                <a:solidFill>
+                  <a:srgbClr val="617287"/>
                 </a:solidFill>
               </a:rPr>
               <a:t>확인할 것  </a:t>
@@ -13584,20 +15572,20 @@
               <a:buNone/>
             </a:pPr>
             <a:r>
-              <a:rPr lang="en-US" sz="1300" dirty="0">
+              <a:rPr lang="en-US" sz="1200" dirty="0">
                 <a:solidFill>
                   <a:srgbClr val="16243A"/>
                 </a:solidFill>
               </a:rPr>
               <a:t>QR 보관함 플랫폼 · 출력 장비 · 개인정보 처리 기준</a:t>
             </a:r>
-            <a:endParaRPr lang="en-US" sz="1300" dirty="0"/>
-          </a:p>
-        </p:txBody>
-      </p:sp>
-      <p:sp>
-        <p:nvSpPr>
-          <p:cNvPr id="25" name="Slide Number Placeholder 0"/>
+            <a:endParaRPr lang="en-US" sz="1200" dirty="0"/>
+          </a:p>
+        </p:txBody>
+      </p:sp>
+      <p:sp>
+        <p:nvSpPr>
+          <p:cNvPr id="28" name="Slide Number Placeholder 0"/>
           <p:cNvSpPr>
             <a:spLocks noGrp="1"/>
           </p:cNvSpPr>
@@ -13743,7 +15731,7 @@
       </p:sp>
       <p:graphicFrame>
         <p:nvGraphicFramePr>
-          <p:cNvPr id="10" name="ops-table"/>
+          <p:cNvPr id="4" name="ops-table"/>
           <p:cNvGraphicFramePr>
             <a:graphicFrameLocks noGrp="1"/>
           </p:cNvGraphicFramePr>
@@ -14920,7 +16908,7 @@
       </p:sp>
       <p:sp>
         <p:nvSpPr>
-          <p:cNvPr id="25" name="Slide Number Placeholder 0"/>
+          <p:cNvPr id="6" name="Slide Number Placeholder 0"/>
           <p:cNvSpPr>
             <a:spLocks noGrp="1"/>
           </p:cNvSpPr>

--- a/live-sketchbook/Live_Sketchbook_Experience_Flow_v2.pptx
+++ b/live-sketchbook/Live_Sketchbook_Experience_Flow_v2.pptx
@@ -116,52 +116,52 @@
   <p:extLst>
     <p:ext uri="{521415D9-36F7-43E2-AB2F-B90AF26B5E84}">
       <p14:sectionLst xmlns:p14="http://schemas.microsoft.com/office/powerpoint/2010/main">
-        <p14:section name="표지" id="{a446278a-8485-0b06-32d7-12ce4bdce0cf}">
+        <p14:section name="표지" id="{d76c74ea-d720-7e96-0a1b-99a693da1e47}">
           <p14:sldIdLst>
             <p14:sldId id="256"/>
           </p14:sldIdLst>
         </p14:section>
-        <p14:section name="요약" id="{f1d5b4ff-21f7-fcef-ebd6-d698f4ab79fd}">
+        <p14:section name="요약" id="{400db71c-2b8d-dcf7-5cfb-4b13708f6ae5}">
           <p14:sldIdLst>
             <p14:sldId id="257"/>
           </p14:sldIdLst>
         </p14:section>
-        <p14:section name="검토" id="{dea93831-f194-9b7f-7994-2a39f242a98b}">
+        <p14:section name="검토" id="{8f865caa-9ef9-6309-a413-348247349bc8}">
           <p14:sldIdLst>
             <p14:sldId id="258"/>
           </p14:sldIdLst>
         </p14:section>
-        <p14:section name="01 Drawing" id="{510cf7c5-949b-eabe-0845-16408d3bc569}">
+        <p14:section name="01 Drawing" id="{256cfaf5-52fe-96fd-dd23-a6815a3cc326}">
           <p14:sldIdLst>
             <p14:sldId id="259"/>
           </p14:sldIdLst>
         </p14:section>
-        <p14:section name="02 Scan" id="{4b07b914-19f4-2e9e-c34f-4a62a11db927}">
+        <p14:section name="02 Scan" id="{c16c5e3c-391c-2f52-37da-77d63b64db5b}">
           <p14:sldIdLst>
             <p14:sldId id="260"/>
           </p14:sldIdLst>
         </p14:section>
-        <p14:section name="03 Wall" id="{e6b20892-cff1-c2f6-6a82-33019b78b3a7}">
+        <p14:section name="03 Wall" id="{4ecd423d-81eb-4044-bfe7-bb5432d140ef}">
           <p14:sldIdLst>
             <p14:sldId id="261"/>
           </p14:sldIdLst>
         </p14:section>
-        <p14:section name="04 Facade" id="{502f27c5-58c0-2737-201b-3941d4457fe3}">
+        <p14:section name="04 Facade" id="{933e1998-4c88-aea7-8d1e-7731aaeccd51}">
           <p14:sldIdLst>
             <p14:sldId id="262"/>
           </p14:sldIdLst>
         </p14:section>
-        <p14:section name="05 Archive" id="{7164ae49-243f-3290-4f2c-60c38b3e4556}">
+        <p14:section name="05 Archive" id="{6e44a2bd-8a70-a728-2d1e-74502afb8256}">
           <p14:sldIdLst>
             <p14:sldId id="263"/>
           </p14:sldIdLst>
         </p14:section>
-        <p14:section name="운영" id="{0a07e603-bbc1-dd85-78a9-f630f5977a34}">
+        <p14:section name="운영" id="{f43e9d50-cc34-16d5-63a4-22bbe387dd8b}">
           <p14:sldIdLst>
             <p14:sldId id="264"/>
           </p14:sldIdLst>
         </p14:section>
-        <p14:section name="다음 단계" id="{12a61eed-f4fb-76ab-c4a5-0b0f880f7878}">
+        <p14:section name="다음 단계" id="{d104a2f8-651c-c197-dc4c-7759ece4613a}">
           <p14:sldIdLst>
             <p14:sldId id="265"/>
           </p14:sldIdLst>
@@ -2139,7 +2139,7 @@
   <p:cSld name="Slide 1">
     <p:spTree>
       <p:nvGrpSpPr>
-        <p:cNvPr id="1" name=""/>
+        <p:cNvPr id="2" name=""/>
         <p:cNvGrpSpPr/>
         <p:nvPr/>
       </p:nvGrpSpPr>
@@ -2153,7 +2153,7 @@
       </p:grpSpPr>
       <p:sp>
         <p:nvSpPr>
-          <p:cNvPr id="2" name="Text 0"/>
+          <p:cNvPr id="3" name="Text 0"/>
           <p:cNvSpPr/>
           <p:nvPr>
             <p:ph idx="100" type="title" hasCustomPrompt="1"/>
@@ -2191,7 +2191,7 @@
       </p:sp>
       <p:sp>
         <p:nvSpPr>
-          <p:cNvPr id="3" name="Text 0"/>
+          <p:cNvPr id="4" name="Text 0"/>
           <p:cNvSpPr/>
           <p:nvPr>
             <p:ph idx="101" type="body" hasCustomPrompt="1"/>
@@ -2229,7 +2229,7 @@
       </p:sp>
       <p:sp>
         <p:nvSpPr>
-          <p:cNvPr id="4" name="Text 0"/>
+          <p:cNvPr id="5" name="Text 0"/>
           <p:cNvSpPr/>
           <p:nvPr>
             <p:ph idx="102" type="body" hasCustomPrompt="1"/>
@@ -2278,7 +2278,7 @@
   <p:cSld name="Slide 10">
     <p:spTree>
       <p:nvGrpSpPr>
-        <p:cNvPr id="1" name=""/>
+        <p:cNvPr id="2" name=""/>
         <p:cNvGrpSpPr/>
         <p:nvPr/>
       </p:nvGrpSpPr>
@@ -2292,7 +2292,7 @@
       </p:grpSpPr>
       <p:sp>
         <p:nvSpPr>
-          <p:cNvPr id="2" name="Text 1"/>
+          <p:cNvPr id="3" name="Text 1"/>
           <p:cNvSpPr/>
           <p:nvPr>
             <p:ph idx="101" type="title" hasCustomPrompt="1"/>
@@ -2330,7 +2330,7 @@
       </p:sp>
       <p:sp>
         <p:nvSpPr>
-          <p:cNvPr id="3" name="Text 1"/>
+          <p:cNvPr id="4" name="Text 1"/>
           <p:cNvSpPr/>
           <p:nvPr>
             <p:ph idx="102" type="body" hasCustomPrompt="1"/>
@@ -2368,7 +2368,7 @@
       </p:sp>
       <p:sp>
         <p:nvSpPr>
-          <p:cNvPr id="4" name="decision-no"/>
+          <p:cNvPr id="5" name="decision-no"/>
           <p:cNvSpPr txBox="1"/>
           <p:nvPr/>
         </p:nvSpPr>
@@ -2406,7 +2406,7 @@
       </p:sp>
       <p:sp>
         <p:nvSpPr>
-          <p:cNvPr id="5" name="Text 3"/>
+          <p:cNvPr id="6" name="Text 3"/>
           <p:cNvSpPr txBox="1"/>
           <p:nvPr/>
         </p:nvSpPr>
@@ -2442,7 +2442,7 @@
       </p:sp>
       <p:sp>
         <p:nvSpPr>
-          <p:cNvPr id="6" name="option-0-0"/>
+          <p:cNvPr id="7" name="option-0-0"/>
           <p:cNvSpPr/>
           <p:nvPr/>
         </p:nvSpPr>
@@ -2469,7 +2469,7 @@
       </p:sp>
       <p:sp>
         <p:nvSpPr>
-          <p:cNvPr id="7" name="checkbox"/>
+          <p:cNvPr id="8" name="checkbox"/>
           <p:cNvSpPr/>
           <p:nvPr/>
         </p:nvSpPr>
@@ -2494,7 +2494,7 @@
       </p:sp>
       <p:sp>
         <p:nvSpPr>
-          <p:cNvPr id="8" name="Text 6"/>
+          <p:cNvPr id="9" name="Text 6"/>
           <p:cNvSpPr txBox="1"/>
           <p:nvPr/>
         </p:nvSpPr>
@@ -2530,7 +2530,7 @@
       </p:sp>
       <p:sp>
         <p:nvSpPr>
-          <p:cNvPr id="9" name="Text 7"/>
+          <p:cNvPr id="10" name="Text 7"/>
           <p:cNvSpPr txBox="1"/>
           <p:nvPr/>
         </p:nvSpPr>
@@ -2566,7 +2566,7 @@
       </p:sp>
       <p:sp>
         <p:nvSpPr>
-          <p:cNvPr id="10" name="option-0-1"/>
+          <p:cNvPr id="11" name="option-0-1"/>
           <p:cNvSpPr/>
           <p:nvPr/>
         </p:nvSpPr>
@@ -2593,7 +2593,7 @@
       </p:sp>
       <p:sp>
         <p:nvSpPr>
-          <p:cNvPr id="11" name="checkbox"/>
+          <p:cNvPr id="12" name="checkbox"/>
           <p:cNvSpPr/>
           <p:nvPr/>
         </p:nvSpPr>
@@ -2618,7 +2618,7 @@
       </p:sp>
       <p:sp>
         <p:nvSpPr>
-          <p:cNvPr id="12" name="Text 10"/>
+          <p:cNvPr id="13" name="Text 10"/>
           <p:cNvSpPr txBox="1"/>
           <p:nvPr/>
         </p:nvSpPr>
@@ -2654,7 +2654,7 @@
       </p:sp>
       <p:sp>
         <p:nvSpPr>
-          <p:cNvPr id="13" name="Text 11"/>
+          <p:cNvPr id="14" name="Text 11"/>
           <p:cNvSpPr txBox="1"/>
           <p:nvPr/>
         </p:nvSpPr>
@@ -2690,7 +2690,7 @@
       </p:sp>
       <p:sp>
         <p:nvSpPr>
-          <p:cNvPr id="14" name="option-0-2"/>
+          <p:cNvPr id="15" name="option-0-2"/>
           <p:cNvSpPr/>
           <p:nvPr/>
         </p:nvSpPr>
@@ -2717,7 +2717,7 @@
       </p:sp>
       <p:sp>
         <p:nvSpPr>
-          <p:cNvPr id="15" name="checkbox"/>
+          <p:cNvPr id="16" name="checkbox"/>
           <p:cNvSpPr/>
           <p:nvPr/>
         </p:nvSpPr>
@@ -2742,7 +2742,7 @@
       </p:sp>
       <p:sp>
         <p:nvSpPr>
-          <p:cNvPr id="16" name="Text 14"/>
+          <p:cNvPr id="17" name="Text 14"/>
           <p:cNvSpPr txBox="1"/>
           <p:nvPr/>
         </p:nvSpPr>
@@ -2778,7 +2778,7 @@
       </p:sp>
       <p:sp>
         <p:nvSpPr>
-          <p:cNvPr id="17" name="Text 15"/>
+          <p:cNvPr id="18" name="Text 15"/>
           <p:cNvSpPr txBox="1"/>
           <p:nvPr/>
         </p:nvSpPr>
@@ -2814,7 +2814,7 @@
       </p:sp>
       <p:sp>
         <p:nvSpPr>
-          <p:cNvPr id="18" name="chip-제안"/>
+          <p:cNvPr id="19" name="chip-제안"/>
           <p:cNvSpPr txBox="1"/>
           <p:nvPr/>
         </p:nvSpPr>
@@ -2854,7 +2854,7 @@
       </p:sp>
       <p:sp>
         <p:nvSpPr>
-          <p:cNvPr id="19" name="decision-no"/>
+          <p:cNvPr id="20" name="decision-no"/>
           <p:cNvSpPr txBox="1"/>
           <p:nvPr/>
         </p:nvSpPr>
@@ -2892,7 +2892,7 @@
       </p:sp>
       <p:sp>
         <p:nvSpPr>
-          <p:cNvPr id="20" name="Text 18"/>
+          <p:cNvPr id="21" name="Text 18"/>
           <p:cNvSpPr txBox="1"/>
           <p:nvPr/>
         </p:nvSpPr>
@@ -2928,7 +2928,7 @@
       </p:sp>
       <p:sp>
         <p:nvSpPr>
-          <p:cNvPr id="21" name="option-1-0"/>
+          <p:cNvPr id="22" name="option-1-0"/>
           <p:cNvSpPr/>
           <p:nvPr/>
         </p:nvSpPr>
@@ -2955,7 +2955,7 @@
       </p:sp>
       <p:sp>
         <p:nvSpPr>
-          <p:cNvPr id="22" name="checkbox"/>
+          <p:cNvPr id="23" name="checkbox"/>
           <p:cNvSpPr/>
           <p:nvPr/>
         </p:nvSpPr>
@@ -2980,7 +2980,7 @@
       </p:sp>
       <p:sp>
         <p:nvSpPr>
-          <p:cNvPr id="23" name="Text 21"/>
+          <p:cNvPr id="24" name="Text 21"/>
           <p:cNvSpPr txBox="1"/>
           <p:nvPr/>
         </p:nvSpPr>
@@ -3016,7 +3016,7 @@
       </p:sp>
       <p:sp>
         <p:nvSpPr>
-          <p:cNvPr id="24" name="Text 22"/>
+          <p:cNvPr id="25" name="Text 22"/>
           <p:cNvSpPr txBox="1"/>
           <p:nvPr/>
         </p:nvSpPr>
@@ -3052,7 +3052,7 @@
       </p:sp>
       <p:sp>
         <p:nvSpPr>
-          <p:cNvPr id="25" name="chip-제안"/>
+          <p:cNvPr id="26" name="chip-제안"/>
           <p:cNvSpPr txBox="1"/>
           <p:nvPr/>
         </p:nvSpPr>
@@ -3092,7 +3092,7 @@
       </p:sp>
       <p:sp>
         <p:nvSpPr>
-          <p:cNvPr id="26" name="option-1-1"/>
+          <p:cNvPr id="27" name="option-1-1"/>
           <p:cNvSpPr/>
           <p:nvPr/>
         </p:nvSpPr>
@@ -3119,7 +3119,7 @@
       </p:sp>
       <p:sp>
         <p:nvSpPr>
-          <p:cNvPr id="27" name="checkbox"/>
+          <p:cNvPr id="28" name="checkbox"/>
           <p:cNvSpPr/>
           <p:nvPr/>
         </p:nvSpPr>
@@ -3144,7 +3144,7 @@
       </p:sp>
       <p:sp>
         <p:nvSpPr>
-          <p:cNvPr id="28" name="Text 26"/>
+          <p:cNvPr id="29" name="Text 26"/>
           <p:cNvSpPr txBox="1"/>
           <p:nvPr/>
         </p:nvSpPr>
@@ -3180,7 +3180,7 @@
       </p:sp>
       <p:sp>
         <p:nvSpPr>
-          <p:cNvPr id="29" name="Text 27"/>
+          <p:cNvPr id="30" name="Text 27"/>
           <p:cNvSpPr txBox="1"/>
           <p:nvPr/>
         </p:nvSpPr>
@@ -3216,7 +3216,7 @@
       </p:sp>
       <p:sp>
         <p:nvSpPr>
-          <p:cNvPr id="30" name="option-1-2"/>
+          <p:cNvPr id="31" name="option-1-2"/>
           <p:cNvSpPr/>
           <p:nvPr/>
         </p:nvSpPr>
@@ -3243,7 +3243,7 @@
       </p:sp>
       <p:sp>
         <p:nvSpPr>
-          <p:cNvPr id="31" name="checkbox"/>
+          <p:cNvPr id="32" name="checkbox"/>
           <p:cNvSpPr/>
           <p:nvPr/>
         </p:nvSpPr>
@@ -3268,7 +3268,7 @@
       </p:sp>
       <p:sp>
         <p:nvSpPr>
-          <p:cNvPr id="32" name="Text 30"/>
+          <p:cNvPr id="33" name="Text 30"/>
           <p:cNvSpPr txBox="1"/>
           <p:nvPr/>
         </p:nvSpPr>
@@ -3304,7 +3304,7 @@
       </p:sp>
       <p:sp>
         <p:nvSpPr>
-          <p:cNvPr id="33" name="Text 31"/>
+          <p:cNvPr id="34" name="Text 31"/>
           <p:cNvSpPr txBox="1"/>
           <p:nvPr/>
         </p:nvSpPr>
@@ -3340,7 +3340,7 @@
       </p:sp>
       <p:sp>
         <p:nvSpPr>
-          <p:cNvPr id="34" name="decision-no"/>
+          <p:cNvPr id="35" name="decision-no"/>
           <p:cNvSpPr txBox="1"/>
           <p:nvPr/>
         </p:nvSpPr>
@@ -3378,7 +3378,7 @@
       </p:sp>
       <p:sp>
         <p:nvSpPr>
-          <p:cNvPr id="35" name="Text 33"/>
+          <p:cNvPr id="36" name="Text 33"/>
           <p:cNvSpPr txBox="1"/>
           <p:nvPr/>
         </p:nvSpPr>
@@ -3414,7 +3414,7 @@
       </p:sp>
       <p:sp>
         <p:nvSpPr>
-          <p:cNvPr id="36" name="option-2-0"/>
+          <p:cNvPr id="37" name="option-2-0"/>
           <p:cNvSpPr/>
           <p:nvPr/>
         </p:nvSpPr>
@@ -3441,7 +3441,7 @@
       </p:sp>
       <p:sp>
         <p:nvSpPr>
-          <p:cNvPr id="37" name="checkbox"/>
+          <p:cNvPr id="38" name="checkbox"/>
           <p:cNvSpPr/>
           <p:nvPr/>
         </p:nvSpPr>
@@ -3466,7 +3466,7 @@
       </p:sp>
       <p:sp>
         <p:nvSpPr>
-          <p:cNvPr id="38" name="Text 36"/>
+          <p:cNvPr id="39" name="Text 36"/>
           <p:cNvSpPr txBox="1"/>
           <p:nvPr/>
         </p:nvSpPr>
@@ -3502,7 +3502,7 @@
       </p:sp>
       <p:sp>
         <p:nvSpPr>
-          <p:cNvPr id="39" name="Text 37"/>
+          <p:cNvPr id="40" name="Text 37"/>
           <p:cNvSpPr txBox="1"/>
           <p:nvPr/>
         </p:nvSpPr>
@@ -3538,7 +3538,7 @@
       </p:sp>
       <p:sp>
         <p:nvSpPr>
-          <p:cNvPr id="40" name="chip-제안"/>
+          <p:cNvPr id="41" name="chip-제안"/>
           <p:cNvSpPr txBox="1"/>
           <p:nvPr/>
         </p:nvSpPr>
@@ -3578,7 +3578,7 @@
       </p:sp>
       <p:sp>
         <p:nvSpPr>
-          <p:cNvPr id="41" name="option-2-1"/>
+          <p:cNvPr id="42" name="option-2-1"/>
           <p:cNvSpPr/>
           <p:nvPr/>
         </p:nvSpPr>
@@ -3605,7 +3605,7 @@
       </p:sp>
       <p:sp>
         <p:nvSpPr>
-          <p:cNvPr id="42" name="checkbox"/>
+          <p:cNvPr id="43" name="checkbox"/>
           <p:cNvSpPr/>
           <p:nvPr/>
         </p:nvSpPr>
@@ -3630,7 +3630,7 @@
       </p:sp>
       <p:sp>
         <p:nvSpPr>
-          <p:cNvPr id="43" name="Text 41"/>
+          <p:cNvPr id="44" name="Text 41"/>
           <p:cNvSpPr txBox="1"/>
           <p:nvPr/>
         </p:nvSpPr>
@@ -3666,7 +3666,7 @@
       </p:sp>
       <p:sp>
         <p:nvSpPr>
-          <p:cNvPr id="44" name="Text 42"/>
+          <p:cNvPr id="45" name="Text 42"/>
           <p:cNvSpPr txBox="1"/>
           <p:nvPr/>
         </p:nvSpPr>
@@ -3702,7 +3702,7 @@
       </p:sp>
       <p:sp>
         <p:nvSpPr>
-          <p:cNvPr id="45" name="option-2-2"/>
+          <p:cNvPr id="46" name="option-2-2"/>
           <p:cNvSpPr/>
           <p:nvPr/>
         </p:nvSpPr>
@@ -3729,7 +3729,7 @@
       </p:sp>
       <p:sp>
         <p:nvSpPr>
-          <p:cNvPr id="46" name="checkbox"/>
+          <p:cNvPr id="47" name="checkbox"/>
           <p:cNvSpPr/>
           <p:nvPr/>
         </p:nvSpPr>
@@ -3754,7 +3754,7 @@
       </p:sp>
       <p:sp>
         <p:nvSpPr>
-          <p:cNvPr id="47" name="Text 45"/>
+          <p:cNvPr id="48" name="Text 45"/>
           <p:cNvSpPr txBox="1"/>
           <p:nvPr/>
         </p:nvSpPr>
@@ -3790,7 +3790,7 @@
       </p:sp>
       <p:sp>
         <p:nvSpPr>
-          <p:cNvPr id="48" name="Text 46"/>
+          <p:cNvPr id="49" name="Text 46"/>
           <p:cNvSpPr txBox="1"/>
           <p:nvPr/>
         </p:nvSpPr>
@@ -3826,7 +3826,7 @@
       </p:sp>
       <p:sp>
         <p:nvSpPr>
-          <p:cNvPr id="49" name="decision-no"/>
+          <p:cNvPr id="50" name="decision-no"/>
           <p:cNvSpPr txBox="1"/>
           <p:nvPr/>
         </p:nvSpPr>
@@ -3864,7 +3864,7 @@
       </p:sp>
       <p:sp>
         <p:nvSpPr>
-          <p:cNvPr id="50" name="Text 48"/>
+          <p:cNvPr id="51" name="Text 48"/>
           <p:cNvSpPr txBox="1"/>
           <p:nvPr/>
         </p:nvSpPr>
@@ -3900,7 +3900,7 @@
       </p:sp>
       <p:sp>
         <p:nvSpPr>
-          <p:cNvPr id="51" name="option-3-0"/>
+          <p:cNvPr id="52" name="option-3-0"/>
           <p:cNvSpPr/>
           <p:nvPr/>
         </p:nvSpPr>
@@ -3927,7 +3927,7 @@
       </p:sp>
       <p:sp>
         <p:nvSpPr>
-          <p:cNvPr id="52" name="checkbox"/>
+          <p:cNvPr id="53" name="checkbox"/>
           <p:cNvSpPr/>
           <p:nvPr/>
         </p:nvSpPr>
@@ -3952,7 +3952,7 @@
       </p:sp>
       <p:sp>
         <p:nvSpPr>
-          <p:cNvPr id="53" name="Text 51"/>
+          <p:cNvPr id="54" name="Text 51"/>
           <p:cNvSpPr txBox="1"/>
           <p:nvPr/>
         </p:nvSpPr>
@@ -3988,7 +3988,7 @@
       </p:sp>
       <p:sp>
         <p:nvSpPr>
-          <p:cNvPr id="54" name="Text 52"/>
+          <p:cNvPr id="55" name="Text 52"/>
           <p:cNvSpPr txBox="1"/>
           <p:nvPr/>
         </p:nvSpPr>
@@ -4024,7 +4024,7 @@
       </p:sp>
       <p:sp>
         <p:nvSpPr>
-          <p:cNvPr id="55" name="option-3-1"/>
+          <p:cNvPr id="56" name="option-3-1"/>
           <p:cNvSpPr/>
           <p:nvPr/>
         </p:nvSpPr>
@@ -4051,7 +4051,7 @@
       </p:sp>
       <p:sp>
         <p:nvSpPr>
-          <p:cNvPr id="56" name="checkbox"/>
+          <p:cNvPr id="57" name="checkbox"/>
           <p:cNvSpPr/>
           <p:nvPr/>
         </p:nvSpPr>
@@ -4076,7 +4076,7 @@
       </p:sp>
       <p:sp>
         <p:nvSpPr>
-          <p:cNvPr id="57" name="Text 55"/>
+          <p:cNvPr id="58" name="Text 55"/>
           <p:cNvSpPr txBox="1"/>
           <p:nvPr/>
         </p:nvSpPr>
@@ -4112,7 +4112,7 @@
       </p:sp>
       <p:sp>
         <p:nvSpPr>
-          <p:cNvPr id="58" name="Text 56"/>
+          <p:cNvPr id="59" name="Text 56"/>
           <p:cNvSpPr txBox="1"/>
           <p:nvPr/>
         </p:nvSpPr>
@@ -4148,7 +4148,7 @@
       </p:sp>
       <p:sp>
         <p:nvSpPr>
-          <p:cNvPr id="59" name="option-3-2"/>
+          <p:cNvPr id="60" name="option-3-2"/>
           <p:cNvSpPr/>
           <p:nvPr/>
         </p:nvSpPr>
@@ -4175,7 +4175,7 @@
       </p:sp>
       <p:sp>
         <p:nvSpPr>
-          <p:cNvPr id="60" name="checkbox"/>
+          <p:cNvPr id="61" name="checkbox"/>
           <p:cNvSpPr/>
           <p:nvPr/>
         </p:nvSpPr>
@@ -4200,7 +4200,7 @@
       </p:sp>
       <p:sp>
         <p:nvSpPr>
-          <p:cNvPr id="61" name="Text 59"/>
+          <p:cNvPr id="62" name="Text 59"/>
           <p:cNvSpPr txBox="1"/>
           <p:nvPr/>
         </p:nvSpPr>
@@ -4236,7 +4236,7 @@
       </p:sp>
       <p:sp>
         <p:nvSpPr>
-          <p:cNvPr id="62" name="Text 60"/>
+          <p:cNvPr id="63" name="Text 60"/>
           <p:cNvSpPr txBox="1"/>
           <p:nvPr/>
         </p:nvSpPr>
@@ -4272,7 +4272,7 @@
       </p:sp>
       <p:sp>
         <p:nvSpPr>
-          <p:cNvPr id="63" name="chip-제안"/>
+          <p:cNvPr id="64" name="chip-제안"/>
           <p:cNvSpPr txBox="1"/>
           <p:nvPr/>
         </p:nvSpPr>
@@ -4312,7 +4312,7 @@
       </p:sp>
       <p:sp>
         <p:nvSpPr>
-          <p:cNvPr id="64" name="decision-no"/>
+          <p:cNvPr id="65" name="decision-no"/>
           <p:cNvSpPr txBox="1"/>
           <p:nvPr/>
         </p:nvSpPr>
@@ -4350,7 +4350,7 @@
       </p:sp>
       <p:sp>
         <p:nvSpPr>
-          <p:cNvPr id="65" name="Text 63"/>
+          <p:cNvPr id="66" name="Text 63"/>
           <p:cNvSpPr txBox="1"/>
           <p:nvPr/>
         </p:nvSpPr>
@@ -4386,7 +4386,7 @@
       </p:sp>
       <p:sp>
         <p:nvSpPr>
-          <p:cNvPr id="66" name="option-4-0"/>
+          <p:cNvPr id="67" name="option-4-0"/>
           <p:cNvSpPr/>
           <p:nvPr/>
         </p:nvSpPr>
@@ -4413,7 +4413,7 @@
       </p:sp>
       <p:sp>
         <p:nvSpPr>
-          <p:cNvPr id="67" name="checkbox"/>
+          <p:cNvPr id="68" name="checkbox"/>
           <p:cNvSpPr/>
           <p:nvPr/>
         </p:nvSpPr>
@@ -4438,7 +4438,7 @@
       </p:sp>
       <p:sp>
         <p:nvSpPr>
-          <p:cNvPr id="68" name="Text 66"/>
+          <p:cNvPr id="69" name="Text 66"/>
           <p:cNvSpPr txBox="1"/>
           <p:nvPr/>
         </p:nvSpPr>
@@ -4474,7 +4474,7 @@
       </p:sp>
       <p:sp>
         <p:nvSpPr>
-          <p:cNvPr id="69" name="Text 67"/>
+          <p:cNvPr id="70" name="Text 67"/>
           <p:cNvSpPr txBox="1"/>
           <p:nvPr/>
         </p:nvSpPr>
@@ -4510,7 +4510,7 @@
       </p:sp>
       <p:sp>
         <p:nvSpPr>
-          <p:cNvPr id="70" name="option-4-1"/>
+          <p:cNvPr id="71" name="option-4-1"/>
           <p:cNvSpPr/>
           <p:nvPr/>
         </p:nvSpPr>
@@ -4537,7 +4537,7 @@
       </p:sp>
       <p:sp>
         <p:nvSpPr>
-          <p:cNvPr id="71" name="checkbox"/>
+          <p:cNvPr id="72" name="checkbox"/>
           <p:cNvSpPr/>
           <p:nvPr/>
         </p:nvSpPr>
@@ -4562,7 +4562,7 @@
       </p:sp>
       <p:sp>
         <p:nvSpPr>
-          <p:cNvPr id="72" name="Text 70"/>
+          <p:cNvPr id="73" name="Text 70"/>
           <p:cNvSpPr txBox="1"/>
           <p:nvPr/>
         </p:nvSpPr>
@@ -4598,7 +4598,7 @@
       </p:sp>
       <p:sp>
         <p:nvSpPr>
-          <p:cNvPr id="73" name="Text 71"/>
+          <p:cNvPr id="74" name="Text 71"/>
           <p:cNvSpPr txBox="1"/>
           <p:nvPr/>
         </p:nvSpPr>
@@ -4634,7 +4634,7 @@
       </p:sp>
       <p:sp>
         <p:nvSpPr>
-          <p:cNvPr id="74" name="chip-제안"/>
+          <p:cNvPr id="75" name="chip-제안"/>
           <p:cNvSpPr txBox="1"/>
           <p:nvPr/>
         </p:nvSpPr>
@@ -4674,7 +4674,7 @@
       </p:sp>
       <p:sp>
         <p:nvSpPr>
-          <p:cNvPr id="75" name="option-4-2"/>
+          <p:cNvPr id="76" name="option-4-2"/>
           <p:cNvSpPr/>
           <p:nvPr/>
         </p:nvSpPr>
@@ -4701,7 +4701,7 @@
       </p:sp>
       <p:sp>
         <p:nvSpPr>
-          <p:cNvPr id="76" name="checkbox"/>
+          <p:cNvPr id="77" name="checkbox"/>
           <p:cNvSpPr/>
           <p:nvPr/>
         </p:nvSpPr>
@@ -4726,7 +4726,7 @@
       </p:sp>
       <p:sp>
         <p:nvSpPr>
-          <p:cNvPr id="77" name="Text 75"/>
+          <p:cNvPr id="78" name="Text 75"/>
           <p:cNvSpPr txBox="1"/>
           <p:nvPr/>
         </p:nvSpPr>
@@ -4762,7 +4762,7 @@
       </p:sp>
       <p:sp>
         <p:nvSpPr>
-          <p:cNvPr id="78" name="Text 76"/>
+          <p:cNvPr id="79" name="Text 76"/>
           <p:cNvSpPr txBox="1"/>
           <p:nvPr/>
         </p:nvSpPr>
@@ -4798,7 +4798,7 @@
       </p:sp>
       <p:sp>
         <p:nvSpPr>
-          <p:cNvPr id="79" name="Slide Number Placeholder 0"/>
+          <p:cNvPr id="80" name="Slide Number Placeholder 0"/>
           <p:cNvSpPr>
             <a:spLocks noGrp="1"/>
           </p:cNvSpPr>
@@ -4854,7 +4854,7 @@
   <p:cSld name="Slide 2">
     <p:spTree>
       <p:nvGrpSpPr>
-        <p:cNvPr id="1" name=""/>
+        <p:cNvPr id="2" name=""/>
         <p:cNvGrpSpPr/>
         <p:nvPr/>
       </p:nvGrpSpPr>
@@ -4868,7 +4868,7 @@
       </p:grpSpPr>
       <p:sp>
         <p:nvSpPr>
-          <p:cNvPr id="2" name="Text 1"/>
+          <p:cNvPr id="3" name="Text 1"/>
           <p:cNvSpPr/>
           <p:nvPr>
             <p:ph idx="101" type="title" hasCustomPrompt="1"/>
@@ -4906,7 +4906,7 @@
       </p:sp>
       <p:sp>
         <p:nvSpPr>
-          <p:cNvPr id="3" name="Text 1"/>
+          <p:cNvPr id="4" name="Text 1"/>
           <p:cNvSpPr/>
           <p:nvPr>
             <p:ph idx="102" type="body" hasCustomPrompt="1"/>
@@ -4944,7 +4944,7 @@
       </p:sp>
       <p:sp>
         <p:nvSpPr>
-          <p:cNvPr id="4" name="step-card-01"/>
+          <p:cNvPr id="5" name="step-card-01"/>
           <p:cNvSpPr/>
           <p:nvPr/>
         </p:nvSpPr>
@@ -4971,7 +4971,7 @@
       </p:sp>
       <p:sp>
         <p:nvSpPr>
-          <p:cNvPr id="5" name="Text 3"/>
+          <p:cNvPr id="6" name="Text 3"/>
           <p:cNvSpPr txBox="1"/>
           <p:nvPr/>
         </p:nvSpPr>
@@ -5007,7 +5007,7 @@
       </p:sp>
       <p:sp>
         <p:nvSpPr>
-          <p:cNvPr id="6" name="Text 4"/>
+          <p:cNvPr id="7" name="Text 4"/>
           <p:cNvSpPr txBox="1"/>
           <p:nvPr/>
         </p:nvSpPr>
@@ -5043,7 +5043,7 @@
       </p:sp>
       <p:sp>
         <p:nvSpPr>
-          <p:cNvPr id="7" name="Text 5"/>
+          <p:cNvPr id="8" name="Text 5"/>
           <p:cNvSpPr txBox="1"/>
           <p:nvPr/>
         </p:nvSpPr>
@@ -5079,7 +5079,7 @@
       </p:sp>
       <p:sp>
         <p:nvSpPr>
-          <p:cNvPr id="8" name="Text 6"/>
+          <p:cNvPr id="9" name="Text 6"/>
           <p:cNvSpPr txBox="1"/>
           <p:nvPr/>
         </p:nvSpPr>
@@ -5115,7 +5115,7 @@
       </p:sp>
       <p:sp>
         <p:nvSpPr>
-          <p:cNvPr id="9" name="Shape 7"/>
+          <p:cNvPr id="10" name="Shape 7"/>
           <p:cNvSpPr/>
           <p:nvPr/>
         </p:nvSpPr>
@@ -5138,7 +5138,7 @@
       </p:sp>
       <p:sp>
         <p:nvSpPr>
-          <p:cNvPr id="10" name="Text 8"/>
+          <p:cNvPr id="11" name="Text 8"/>
           <p:cNvSpPr txBox="1"/>
           <p:nvPr/>
         </p:nvSpPr>
@@ -5174,7 +5174,7 @@
       </p:sp>
       <p:sp>
         <p:nvSpPr>
-          <p:cNvPr id="11" name="Text 9"/>
+          <p:cNvPr id="12" name="Text 9"/>
           <p:cNvSpPr txBox="1"/>
           <p:nvPr/>
         </p:nvSpPr>
@@ -5210,7 +5210,7 @@
       </p:sp>
       <p:sp>
         <p:nvSpPr>
-          <p:cNvPr id="12" name="decision-badge"/>
+          <p:cNvPr id="13" name="decision-badge"/>
           <p:cNvSpPr txBox="1"/>
           <p:nvPr/>
         </p:nvSpPr>
@@ -5250,7 +5250,7 @@
       </p:sp>
       <p:sp>
         <p:nvSpPr>
-          <p:cNvPr id="13" name="arrow"/>
+          <p:cNvPr id="14" name="arrow"/>
           <p:cNvSpPr/>
           <p:nvPr/>
         </p:nvSpPr>
@@ -5275,7 +5275,7 @@
       </p:sp>
       <p:sp>
         <p:nvSpPr>
-          <p:cNvPr id="14" name="step-card-02"/>
+          <p:cNvPr id="15" name="step-card-02"/>
           <p:cNvSpPr/>
           <p:nvPr/>
         </p:nvSpPr>
@@ -5302,7 +5302,7 @@
       </p:sp>
       <p:sp>
         <p:nvSpPr>
-          <p:cNvPr id="15" name="Text 13"/>
+          <p:cNvPr id="16" name="Text 13"/>
           <p:cNvSpPr txBox="1"/>
           <p:nvPr/>
         </p:nvSpPr>
@@ -5338,7 +5338,7 @@
       </p:sp>
       <p:sp>
         <p:nvSpPr>
-          <p:cNvPr id="16" name="Text 14"/>
+          <p:cNvPr id="17" name="Text 14"/>
           <p:cNvSpPr txBox="1"/>
           <p:nvPr/>
         </p:nvSpPr>
@@ -5374,7 +5374,7 @@
       </p:sp>
       <p:sp>
         <p:nvSpPr>
-          <p:cNvPr id="17" name="Text 15"/>
+          <p:cNvPr id="18" name="Text 15"/>
           <p:cNvSpPr txBox="1"/>
           <p:nvPr/>
         </p:nvSpPr>
@@ -5410,7 +5410,7 @@
       </p:sp>
       <p:sp>
         <p:nvSpPr>
-          <p:cNvPr id="18" name="Text 16"/>
+          <p:cNvPr id="19" name="Text 16"/>
           <p:cNvSpPr txBox="1"/>
           <p:nvPr/>
         </p:nvSpPr>
@@ -5446,7 +5446,7 @@
       </p:sp>
       <p:sp>
         <p:nvSpPr>
-          <p:cNvPr id="19" name="Shape 17"/>
+          <p:cNvPr id="20" name="Shape 17"/>
           <p:cNvSpPr/>
           <p:nvPr/>
         </p:nvSpPr>
@@ -5469,7 +5469,7 @@
       </p:sp>
       <p:sp>
         <p:nvSpPr>
-          <p:cNvPr id="20" name="Text 18"/>
+          <p:cNvPr id="21" name="Text 18"/>
           <p:cNvSpPr txBox="1"/>
           <p:nvPr/>
         </p:nvSpPr>
@@ -5505,7 +5505,7 @@
       </p:sp>
       <p:sp>
         <p:nvSpPr>
-          <p:cNvPr id="21" name="Text 19"/>
+          <p:cNvPr id="22" name="Text 19"/>
           <p:cNvSpPr txBox="1"/>
           <p:nvPr/>
         </p:nvSpPr>
@@ -5541,7 +5541,7 @@
       </p:sp>
       <p:sp>
         <p:nvSpPr>
-          <p:cNvPr id="22" name="decision-badge"/>
+          <p:cNvPr id="23" name="decision-badge"/>
           <p:cNvSpPr txBox="1"/>
           <p:nvPr/>
         </p:nvSpPr>
@@ -5581,7 +5581,7 @@
       </p:sp>
       <p:sp>
         <p:nvSpPr>
-          <p:cNvPr id="23" name="arrow"/>
+          <p:cNvPr id="24" name="arrow"/>
           <p:cNvSpPr/>
           <p:nvPr/>
         </p:nvSpPr>
@@ -5606,7 +5606,7 @@
       </p:sp>
       <p:sp>
         <p:nvSpPr>
-          <p:cNvPr id="24" name="step-card-03"/>
+          <p:cNvPr id="25" name="step-card-03"/>
           <p:cNvSpPr/>
           <p:nvPr/>
         </p:nvSpPr>
@@ -5633,7 +5633,7 @@
       </p:sp>
       <p:sp>
         <p:nvSpPr>
-          <p:cNvPr id="25" name="Text 23"/>
+          <p:cNvPr id="26" name="Text 23"/>
           <p:cNvSpPr txBox="1"/>
           <p:nvPr/>
         </p:nvSpPr>
@@ -5669,7 +5669,7 @@
       </p:sp>
       <p:sp>
         <p:nvSpPr>
-          <p:cNvPr id="26" name="Text 24"/>
+          <p:cNvPr id="27" name="Text 24"/>
           <p:cNvSpPr txBox="1"/>
           <p:nvPr/>
         </p:nvSpPr>
@@ -5705,7 +5705,7 @@
       </p:sp>
       <p:sp>
         <p:nvSpPr>
-          <p:cNvPr id="27" name="Text 25"/>
+          <p:cNvPr id="28" name="Text 25"/>
           <p:cNvSpPr txBox="1"/>
           <p:nvPr/>
         </p:nvSpPr>
@@ -5741,7 +5741,7 @@
       </p:sp>
       <p:sp>
         <p:nvSpPr>
-          <p:cNvPr id="28" name="Text 26"/>
+          <p:cNvPr id="29" name="Text 26"/>
           <p:cNvSpPr txBox="1"/>
           <p:nvPr/>
         </p:nvSpPr>
@@ -5777,7 +5777,7 @@
       </p:sp>
       <p:sp>
         <p:nvSpPr>
-          <p:cNvPr id="29" name="Shape 27"/>
+          <p:cNvPr id="30" name="Shape 27"/>
           <p:cNvSpPr/>
           <p:nvPr/>
         </p:nvSpPr>
@@ -5800,7 +5800,7 @@
       </p:sp>
       <p:sp>
         <p:nvSpPr>
-          <p:cNvPr id="30" name="Text 28"/>
+          <p:cNvPr id="31" name="Text 28"/>
           <p:cNvSpPr txBox="1"/>
           <p:nvPr/>
         </p:nvSpPr>
@@ -5836,7 +5836,7 @@
       </p:sp>
       <p:sp>
         <p:nvSpPr>
-          <p:cNvPr id="31" name="Text 29"/>
+          <p:cNvPr id="32" name="Text 29"/>
           <p:cNvSpPr txBox="1"/>
           <p:nvPr/>
         </p:nvSpPr>
@@ -5872,7 +5872,7 @@
       </p:sp>
       <p:sp>
         <p:nvSpPr>
-          <p:cNvPr id="32" name="decision-badge"/>
+          <p:cNvPr id="33" name="decision-badge"/>
           <p:cNvSpPr txBox="1"/>
           <p:nvPr/>
         </p:nvSpPr>
@@ -5912,7 +5912,7 @@
       </p:sp>
       <p:sp>
         <p:nvSpPr>
-          <p:cNvPr id="33" name="arrow"/>
+          <p:cNvPr id="34" name="arrow"/>
           <p:cNvSpPr/>
           <p:nvPr/>
         </p:nvSpPr>
@@ -5937,7 +5937,7 @@
       </p:sp>
       <p:sp>
         <p:nvSpPr>
-          <p:cNvPr id="34" name="step-card-04"/>
+          <p:cNvPr id="35" name="step-card-04"/>
           <p:cNvSpPr/>
           <p:nvPr/>
         </p:nvSpPr>
@@ -5964,7 +5964,7 @@
       </p:sp>
       <p:sp>
         <p:nvSpPr>
-          <p:cNvPr id="35" name="Text 33"/>
+          <p:cNvPr id="36" name="Text 33"/>
           <p:cNvSpPr txBox="1"/>
           <p:nvPr/>
         </p:nvSpPr>
@@ -6000,7 +6000,7 @@
       </p:sp>
       <p:sp>
         <p:nvSpPr>
-          <p:cNvPr id="36" name="Text 34"/>
+          <p:cNvPr id="37" name="Text 34"/>
           <p:cNvSpPr txBox="1"/>
           <p:nvPr/>
         </p:nvSpPr>
@@ -6036,7 +6036,7 @@
       </p:sp>
       <p:sp>
         <p:nvSpPr>
-          <p:cNvPr id="37" name="Text 35"/>
+          <p:cNvPr id="38" name="Text 35"/>
           <p:cNvSpPr txBox="1"/>
           <p:nvPr/>
         </p:nvSpPr>
@@ -6072,7 +6072,7 @@
       </p:sp>
       <p:sp>
         <p:nvSpPr>
-          <p:cNvPr id="38" name="Text 36"/>
+          <p:cNvPr id="39" name="Text 36"/>
           <p:cNvSpPr txBox="1"/>
           <p:nvPr/>
         </p:nvSpPr>
@@ -6108,7 +6108,7 @@
       </p:sp>
       <p:sp>
         <p:nvSpPr>
-          <p:cNvPr id="39" name="Shape 37"/>
+          <p:cNvPr id="40" name="Shape 37"/>
           <p:cNvSpPr/>
           <p:nvPr/>
         </p:nvSpPr>
@@ -6131,7 +6131,7 @@
       </p:sp>
       <p:sp>
         <p:nvSpPr>
-          <p:cNvPr id="40" name="Text 38"/>
+          <p:cNvPr id="41" name="Text 38"/>
           <p:cNvSpPr txBox="1"/>
           <p:nvPr/>
         </p:nvSpPr>
@@ -6167,7 +6167,7 @@
       </p:sp>
       <p:sp>
         <p:nvSpPr>
-          <p:cNvPr id="41" name="Text 39"/>
+          <p:cNvPr id="42" name="Text 39"/>
           <p:cNvSpPr txBox="1"/>
           <p:nvPr/>
         </p:nvSpPr>
@@ -6203,7 +6203,7 @@
       </p:sp>
       <p:sp>
         <p:nvSpPr>
-          <p:cNvPr id="42" name="decision-badge"/>
+          <p:cNvPr id="43" name="decision-badge"/>
           <p:cNvSpPr txBox="1"/>
           <p:nvPr/>
         </p:nvSpPr>
@@ -6243,7 +6243,7 @@
       </p:sp>
       <p:sp>
         <p:nvSpPr>
-          <p:cNvPr id="43" name="arrow"/>
+          <p:cNvPr id="44" name="arrow"/>
           <p:cNvSpPr/>
           <p:nvPr/>
         </p:nvSpPr>
@@ -6268,7 +6268,7 @@
       </p:sp>
       <p:sp>
         <p:nvSpPr>
-          <p:cNvPr id="44" name="step-card-05"/>
+          <p:cNvPr id="45" name="step-card-05"/>
           <p:cNvSpPr/>
           <p:nvPr/>
         </p:nvSpPr>
@@ -6295,7 +6295,7 @@
       </p:sp>
       <p:sp>
         <p:nvSpPr>
-          <p:cNvPr id="45" name="Text 43"/>
+          <p:cNvPr id="46" name="Text 43"/>
           <p:cNvSpPr txBox="1"/>
           <p:nvPr/>
         </p:nvSpPr>
@@ -6331,7 +6331,7 @@
       </p:sp>
       <p:sp>
         <p:nvSpPr>
-          <p:cNvPr id="46" name="chip-NEW"/>
+          <p:cNvPr id="47" name="chip-NEW"/>
           <p:cNvSpPr txBox="1"/>
           <p:nvPr/>
         </p:nvSpPr>
@@ -6371,7 +6371,7 @@
       </p:sp>
       <p:sp>
         <p:nvSpPr>
-          <p:cNvPr id="47" name="Text 45"/>
+          <p:cNvPr id="48" name="Text 45"/>
           <p:cNvSpPr txBox="1"/>
           <p:nvPr/>
         </p:nvSpPr>
@@ -6407,7 +6407,7 @@
       </p:sp>
       <p:sp>
         <p:nvSpPr>
-          <p:cNvPr id="48" name="Text 46"/>
+          <p:cNvPr id="49" name="Text 46"/>
           <p:cNvSpPr txBox="1"/>
           <p:nvPr/>
         </p:nvSpPr>
@@ -6443,7 +6443,7 @@
       </p:sp>
       <p:sp>
         <p:nvSpPr>
-          <p:cNvPr id="49" name="Text 47"/>
+          <p:cNvPr id="50" name="Text 47"/>
           <p:cNvSpPr txBox="1"/>
           <p:nvPr/>
         </p:nvSpPr>
@@ -6479,7 +6479,7 @@
       </p:sp>
       <p:sp>
         <p:nvSpPr>
-          <p:cNvPr id="50" name="Shape 48"/>
+          <p:cNvPr id="51" name="Shape 48"/>
           <p:cNvSpPr/>
           <p:nvPr/>
         </p:nvSpPr>
@@ -6502,7 +6502,7 @@
       </p:sp>
       <p:sp>
         <p:nvSpPr>
-          <p:cNvPr id="51" name="Text 49"/>
+          <p:cNvPr id="52" name="Text 49"/>
           <p:cNvSpPr txBox="1"/>
           <p:nvPr/>
         </p:nvSpPr>
@@ -6538,7 +6538,7 @@
       </p:sp>
       <p:sp>
         <p:nvSpPr>
-          <p:cNvPr id="52" name="Text 50"/>
+          <p:cNvPr id="53" name="Text 50"/>
           <p:cNvSpPr txBox="1"/>
           <p:nvPr/>
         </p:nvSpPr>
@@ -6574,7 +6574,7 @@
       </p:sp>
       <p:sp>
         <p:nvSpPr>
-          <p:cNvPr id="53" name="decision-badge"/>
+          <p:cNvPr id="54" name="decision-badge"/>
           <p:cNvSpPr txBox="1"/>
           <p:nvPr/>
         </p:nvSpPr>
@@ -6614,7 +6614,7 @@
       </p:sp>
       <p:sp>
         <p:nvSpPr>
-          <p:cNvPr id="54" name="Slide Number Placeholder 0"/>
+          <p:cNvPr id="55" name="Slide Number Placeholder 0"/>
           <p:cNvSpPr>
             <a:spLocks noGrp="1"/>
           </p:cNvSpPr>
@@ -6670,7 +6670,7 @@
   <p:cSld name="Slide 3">
     <p:spTree>
       <p:nvGrpSpPr>
-        <p:cNvPr id="1" name=""/>
+        <p:cNvPr id="2" name=""/>
         <p:cNvGrpSpPr/>
         <p:nvPr/>
       </p:nvGrpSpPr>
@@ -6684,7 +6684,7 @@
       </p:grpSpPr>
       <p:sp>
         <p:nvSpPr>
-          <p:cNvPr id="2" name="Text 1"/>
+          <p:cNvPr id="3" name="Text 1"/>
           <p:cNvSpPr/>
           <p:nvPr>
             <p:ph idx="101" type="title" hasCustomPrompt="1"/>
@@ -6722,7 +6722,7 @@
       </p:sp>
       <p:sp>
         <p:nvSpPr>
-          <p:cNvPr id="3" name="Text 1"/>
+          <p:cNvPr id="4" name="Text 1"/>
           <p:cNvSpPr/>
           <p:nvPr>
             <p:ph idx="102" type="body" hasCustomPrompt="1"/>
@@ -6760,7 +6760,7 @@
       </p:sp>
       <p:sp>
         <p:nvSpPr>
-          <p:cNvPr id="4" name="good"/>
+          <p:cNvPr id="5" name="good"/>
           <p:cNvSpPr/>
           <p:nvPr/>
         </p:nvSpPr>
@@ -6787,7 +6787,7 @@
       </p:sp>
       <p:sp>
         <p:nvSpPr>
-          <p:cNvPr id="5" name="Text 3"/>
+          <p:cNvPr id="6" name="Text 3"/>
           <p:cNvSpPr txBox="1"/>
           <p:nvPr/>
         </p:nvSpPr>
@@ -6823,7 +6823,7 @@
       </p:sp>
       <p:sp>
         <p:nvSpPr>
-          <p:cNvPr id="6" name="Text 4"/>
+          <p:cNvPr id="7" name="Text 4"/>
           <p:cNvSpPr txBox="1"/>
           <p:nvPr/>
         </p:nvSpPr>
@@ -6899,7 +6899,7 @@
       </p:sp>
       <p:sp>
         <p:nvSpPr>
-          <p:cNvPr id="7" name="gap-0"/>
+          <p:cNvPr id="8" name="gap-0"/>
           <p:cNvSpPr/>
           <p:nvPr/>
         </p:nvSpPr>
@@ -6926,7 +6926,7 @@
       </p:sp>
       <p:sp>
         <p:nvSpPr>
-          <p:cNvPr id="8" name="Text 6"/>
+          <p:cNvPr id="9" name="Text 6"/>
           <p:cNvSpPr txBox="1"/>
           <p:nvPr/>
         </p:nvSpPr>
@@ -6964,7 +6964,7 @@
       </p:sp>
       <p:sp>
         <p:nvSpPr>
-          <p:cNvPr id="9" name="Text 7"/>
+          <p:cNvPr id="10" name="Text 7"/>
           <p:cNvSpPr txBox="1"/>
           <p:nvPr/>
         </p:nvSpPr>
@@ -7000,7 +7000,7 @@
       </p:sp>
       <p:sp>
         <p:nvSpPr>
-          <p:cNvPr id="10" name="Text 8"/>
+          <p:cNvPr id="11" name="Text 8"/>
           <p:cNvSpPr txBox="1"/>
           <p:nvPr/>
         </p:nvSpPr>
@@ -7036,7 +7036,7 @@
       </p:sp>
       <p:sp>
         <p:nvSpPr>
-          <p:cNvPr id="11" name="gap-1"/>
+          <p:cNvPr id="12" name="gap-1"/>
           <p:cNvSpPr/>
           <p:nvPr/>
         </p:nvSpPr>
@@ -7063,7 +7063,7 @@
       </p:sp>
       <p:sp>
         <p:nvSpPr>
-          <p:cNvPr id="12" name="Text 10"/>
+          <p:cNvPr id="13" name="Text 10"/>
           <p:cNvSpPr txBox="1"/>
           <p:nvPr/>
         </p:nvSpPr>
@@ -7101,7 +7101,7 @@
       </p:sp>
       <p:sp>
         <p:nvSpPr>
-          <p:cNvPr id="13" name="Text 11"/>
+          <p:cNvPr id="14" name="Text 11"/>
           <p:cNvSpPr txBox="1"/>
           <p:nvPr/>
         </p:nvSpPr>
@@ -7137,7 +7137,7 @@
       </p:sp>
       <p:sp>
         <p:nvSpPr>
-          <p:cNvPr id="14" name="Text 12"/>
+          <p:cNvPr id="15" name="Text 12"/>
           <p:cNvSpPr txBox="1"/>
           <p:nvPr/>
         </p:nvSpPr>
@@ -7173,7 +7173,7 @@
       </p:sp>
       <p:sp>
         <p:nvSpPr>
-          <p:cNvPr id="15" name="gap-2"/>
+          <p:cNvPr id="16" name="gap-2"/>
           <p:cNvSpPr/>
           <p:nvPr/>
         </p:nvSpPr>
@@ -7200,7 +7200,7 @@
       </p:sp>
       <p:sp>
         <p:nvSpPr>
-          <p:cNvPr id="16" name="Text 14"/>
+          <p:cNvPr id="17" name="Text 14"/>
           <p:cNvSpPr txBox="1"/>
           <p:nvPr/>
         </p:nvSpPr>
@@ -7238,7 +7238,7 @@
       </p:sp>
       <p:sp>
         <p:nvSpPr>
-          <p:cNvPr id="17" name="Text 15"/>
+          <p:cNvPr id="18" name="Text 15"/>
           <p:cNvSpPr txBox="1"/>
           <p:nvPr/>
         </p:nvSpPr>
@@ -7274,7 +7274,7 @@
       </p:sp>
       <p:sp>
         <p:nvSpPr>
-          <p:cNvPr id="18" name="Text 16"/>
+          <p:cNvPr id="19" name="Text 16"/>
           <p:cNvSpPr txBox="1"/>
           <p:nvPr/>
         </p:nvSpPr>
@@ -7310,7 +7310,7 @@
       </p:sp>
       <p:sp>
         <p:nvSpPr>
-          <p:cNvPr id="19" name="gap-3"/>
+          <p:cNvPr id="20" name="gap-3"/>
           <p:cNvSpPr/>
           <p:nvPr/>
         </p:nvSpPr>
@@ -7337,7 +7337,7 @@
       </p:sp>
       <p:sp>
         <p:nvSpPr>
-          <p:cNvPr id="20" name="Text 18"/>
+          <p:cNvPr id="21" name="Text 18"/>
           <p:cNvSpPr txBox="1"/>
           <p:nvPr/>
         </p:nvSpPr>
@@ -7375,7 +7375,7 @@
       </p:sp>
       <p:sp>
         <p:nvSpPr>
-          <p:cNvPr id="21" name="Text 19"/>
+          <p:cNvPr id="22" name="Text 19"/>
           <p:cNvSpPr txBox="1"/>
           <p:nvPr/>
         </p:nvSpPr>
@@ -7411,7 +7411,7 @@
       </p:sp>
       <p:sp>
         <p:nvSpPr>
-          <p:cNvPr id="22" name="Text 20"/>
+          <p:cNvPr id="23" name="Text 20"/>
           <p:cNvSpPr txBox="1"/>
           <p:nvPr/>
         </p:nvSpPr>
@@ -7447,7 +7447,7 @@
       </p:sp>
       <p:sp>
         <p:nvSpPr>
-          <p:cNvPr id="23" name="gap-4"/>
+          <p:cNvPr id="24" name="gap-4"/>
           <p:cNvSpPr/>
           <p:nvPr/>
         </p:nvSpPr>
@@ -7474,7 +7474,7 @@
       </p:sp>
       <p:sp>
         <p:nvSpPr>
-          <p:cNvPr id="24" name="Text 22"/>
+          <p:cNvPr id="25" name="Text 22"/>
           <p:cNvSpPr txBox="1"/>
           <p:nvPr/>
         </p:nvSpPr>
@@ -7512,7 +7512,7 @@
       </p:sp>
       <p:sp>
         <p:nvSpPr>
-          <p:cNvPr id="25" name="Text 23"/>
+          <p:cNvPr id="26" name="Text 23"/>
           <p:cNvSpPr txBox="1"/>
           <p:nvPr/>
         </p:nvSpPr>
@@ -7548,7 +7548,7 @@
       </p:sp>
       <p:sp>
         <p:nvSpPr>
-          <p:cNvPr id="26" name="Text 24"/>
+          <p:cNvPr id="27" name="Text 24"/>
           <p:cNvSpPr txBox="1"/>
           <p:nvPr/>
         </p:nvSpPr>
@@ -7584,7 +7584,7 @@
       </p:sp>
       <p:sp>
         <p:nvSpPr>
-          <p:cNvPr id="27" name="Slide Number Placeholder 0"/>
+          <p:cNvPr id="28" name="Slide Number Placeholder 0"/>
           <p:cNvSpPr>
             <a:spLocks noGrp="1"/>
           </p:cNvSpPr>
@@ -7640,7 +7640,7 @@
   <p:cSld name="Slide 4">
     <p:spTree>
       <p:nvGrpSpPr>
-        <p:cNvPr id="1" name=""/>
+        <p:cNvPr id="2" name=""/>
         <p:cNvGrpSpPr/>
         <p:nvPr/>
       </p:nvGrpSpPr>
@@ -7654,7 +7654,7 @@
       </p:grpSpPr>
       <p:sp>
         <p:nvSpPr>
-          <p:cNvPr id="2" name="Text 1"/>
+          <p:cNvPr id="3" name="Text 1"/>
           <p:cNvSpPr/>
           <p:nvPr>
             <p:ph idx="101" type="title" hasCustomPrompt="1"/>
@@ -7692,7 +7692,7 @@
       </p:sp>
       <p:sp>
         <p:nvSpPr>
-          <p:cNvPr id="3" name="Text 1"/>
+          <p:cNvPr id="4" name="Text 1"/>
           <p:cNvSpPr/>
           <p:nvPr>
             <p:ph idx="102" type="body" hasCustomPrompt="1"/>
@@ -7730,7 +7730,7 @@
       </p:sp>
       <p:sp>
         <p:nvSpPr>
-          <p:cNvPr id="4" name="step-number"/>
+          <p:cNvPr id="5" name="step-number"/>
           <p:cNvSpPr txBox="1"/>
           <p:nvPr/>
         </p:nvSpPr>
@@ -7766,7 +7766,7 @@
       </p:sp>
       <p:sp>
         <p:nvSpPr>
-          <p:cNvPr id="5" name="Text 3"/>
+          <p:cNvPr id="6" name="Text 3"/>
           <p:cNvSpPr txBox="1"/>
           <p:nvPr/>
         </p:nvSpPr>
@@ -7802,7 +7802,371 @@
       </p:sp>
       <p:sp>
         <p:nvSpPr>
-          <p:cNvPr id="6" name="original"/>
+          <p:cNvPr id="7" name="원안그림-1-0"/>
+          <p:cNvSpPr/>
+          <p:nvPr/>
+        </p:nvSpPr>
+        <p:spPr>
+          <a:xfrm>
+            <a:off x="930029" y="2331720"/>
+            <a:ext cx="3443462" cy="2212848"/>
+          </a:xfrm>
+          <a:prstGeom prst="roundRect">
+            <a:avLst>
+              <a:gd name="adj" fmla="val 2551"/>
+            </a:avLst>
+          </a:prstGeom>
+          <a:solidFill>
+            <a:srgbClr val="EAF5F1"/>
+          </a:solidFill>
+          <a:ln/>
+        </p:spPr>
+      </p:sp>
+      <p:sp>
+        <p:nvSpPr>
+          <p:cNvPr id="8" name="원안그림-1-1"/>
+          <p:cNvSpPr/>
+          <p:nvPr/>
+        </p:nvSpPr>
+        <p:spPr>
+          <a:xfrm rot="21300000">
+            <a:off x="1381630" y="2518006"/>
+            <a:ext cx="1343515" cy="1857212"/>
+          </a:xfrm>
+          <a:prstGeom prst="roundRect">
+            <a:avLst>
+              <a:gd name="adj" fmla="val 4202"/>
+            </a:avLst>
+          </a:prstGeom>
+          <a:solidFill>
+            <a:srgbClr val="FFFFFF"/>
+          </a:solidFill>
+          <a:ln w="6350">
+            <a:solidFill>
+              <a:srgbClr val="D3E1DC"/>
+            </a:solidFill>
+            <a:prstDash val="solid"/>
+          </a:ln>
+        </p:spPr>
+      </p:sp>
+      <p:sp>
+        <p:nvSpPr>
+          <p:cNvPr id="9" name="원안그림-1-2"/>
+          <p:cNvSpPr txBox="1"/>
+          <p:nvPr/>
+        </p:nvSpPr>
+        <p:spPr>
+          <a:xfrm>
+            <a:off x="1556626" y="2670421"/>
+            <a:ext cx="1016104" cy="197576"/>
+          </a:xfrm>
+          <a:prstGeom prst="rect">
+            <a:avLst/>
+          </a:prstGeom>
+          <a:noFill/>
+          <a:ln/>
+        </p:spPr>
+        <p:txBody>
+          <a:bodyPr wrap="square" lIns="0" tIns="0" rIns="0" bIns="0" rtlCol="0" anchor="ctr"/>
+          <a:lstStyle/>
+          <a:p>
+            <a:pPr algn="l" indent="0" marL="0">
+              <a:buNone/>
+            </a:pPr>
+            <a:r>
+              <a:rPr lang="en-US" sz="1150" b="1" dirty="0">
+                <a:solidFill>
+                  <a:srgbClr val="16243A"/>
+                </a:solidFill>
+              </a:rPr>
+              <a:t>Draw Me!</a:t>
+            </a:r>
+            <a:endParaRPr lang="en-US" sz="1150" dirty="0"/>
+          </a:p>
+        </p:txBody>
+      </p:sp>
+      <p:sp>
+        <p:nvSpPr>
+          <p:cNvPr id="10" name="원안그림-1-3"/>
+          <p:cNvSpPr/>
+          <p:nvPr/>
+        </p:nvSpPr>
+        <p:spPr>
+          <a:xfrm>
+            <a:off x="1956293" y="2997832"/>
+            <a:ext cx="366926" cy="366926"/>
+          </a:xfrm>
+          <a:prstGeom prst="ellipse">
+            <a:avLst/>
+          </a:prstGeom>
+          <a:solidFill>
+            <a:srgbClr val="FDE6A5"/>
+          </a:solidFill>
+          <a:ln/>
+        </p:spPr>
+      </p:sp>
+      <p:sp>
+        <p:nvSpPr>
+          <p:cNvPr id="11" name="원안그림-1-4"/>
+          <p:cNvSpPr/>
+          <p:nvPr/>
+        </p:nvSpPr>
+        <p:spPr>
+          <a:xfrm rot="10800000">
+            <a:off x="1897586" y="3320728"/>
+            <a:ext cx="499020" cy="557728"/>
+          </a:xfrm>
+          <a:prstGeom prst="ellipse">
+            <a:avLst/>
+          </a:prstGeom>
+          <a:solidFill>
+            <a:srgbClr val="F7DDE5"/>
+          </a:solidFill>
+          <a:ln w="6350">
+            <a:solidFill>
+              <a:srgbClr val="F7DDE5"/>
+            </a:solidFill>
+            <a:prstDash val="solid"/>
+          </a:ln>
+        </p:spPr>
+      </p:sp>
+      <p:sp>
+        <p:nvSpPr>
+          <p:cNvPr id="12" name="원안그림-1-5"/>
+          <p:cNvSpPr/>
+          <p:nvPr/>
+        </p:nvSpPr>
+        <p:spPr>
+          <a:xfrm>
+            <a:off x="1919601" y="3482175"/>
+            <a:ext cx="403619" cy="73385"/>
+          </a:xfrm>
+          <a:prstGeom prst="line">
+            <a:avLst/>
+          </a:prstGeom>
+          <a:solidFill>
+            <a:srgbClr val="16243A"/>
+          </a:solidFill>
+          <a:ln w="22225">
+            <a:solidFill>
+              <a:srgbClr val="16243A"/>
+            </a:solidFill>
+            <a:prstDash val="solid"/>
+          </a:ln>
+        </p:spPr>
+      </p:sp>
+      <p:sp>
+        <p:nvSpPr>
+          <p:cNvPr id="13" name="원안그림-1-6"/>
+          <p:cNvSpPr/>
+          <p:nvPr/>
+        </p:nvSpPr>
+        <p:spPr>
+          <a:xfrm flipH="1">
+            <a:off x="1860892" y="3790394"/>
+            <a:ext cx="102739" cy="264187"/>
+          </a:xfrm>
+          <a:prstGeom prst="line">
+            <a:avLst/>
+          </a:prstGeom>
+          <a:solidFill>
+            <a:srgbClr val="16243A"/>
+          </a:solidFill>
+          <a:ln w="22225">
+            <a:solidFill>
+              <a:srgbClr val="16243A"/>
+            </a:solidFill>
+            <a:prstDash val="solid"/>
+          </a:ln>
+        </p:spPr>
+      </p:sp>
+      <p:sp>
+        <p:nvSpPr>
+          <p:cNvPr id="14" name="원안그림-1-7"/>
+          <p:cNvSpPr/>
+          <p:nvPr/>
+        </p:nvSpPr>
+        <p:spPr>
+          <a:xfrm>
+            <a:off x="2242496" y="3790394"/>
+            <a:ext cx="102739" cy="264187"/>
+          </a:xfrm>
+          <a:prstGeom prst="line">
+            <a:avLst/>
+          </a:prstGeom>
+          <a:solidFill>
+            <a:srgbClr val="16243A"/>
+          </a:solidFill>
+          <a:ln w="22225">
+            <a:solidFill>
+              <a:srgbClr val="16243A"/>
+            </a:solidFill>
+            <a:prstDash val="solid"/>
+          </a:ln>
+        </p:spPr>
+      </p:sp>
+      <p:sp>
+        <p:nvSpPr>
+          <p:cNvPr id="15" name="원안그림-1-8"/>
+          <p:cNvSpPr/>
+          <p:nvPr/>
+        </p:nvSpPr>
+        <p:spPr>
+          <a:xfrm>
+            <a:off x="2051694" y="3159280"/>
+            <a:ext cx="25685" cy="25685"/>
+          </a:xfrm>
+          <a:prstGeom prst="ellipse">
+            <a:avLst/>
+          </a:prstGeom>
+          <a:solidFill>
+            <a:srgbClr val="16243A"/>
+          </a:solidFill>
+          <a:ln/>
+        </p:spPr>
+      </p:sp>
+      <p:sp>
+        <p:nvSpPr>
+          <p:cNvPr id="16" name="원안그림-1-9"/>
+          <p:cNvSpPr/>
+          <p:nvPr/>
+        </p:nvSpPr>
+        <p:spPr>
+          <a:xfrm>
+            <a:off x="2176449" y="3159280"/>
+            <a:ext cx="25685" cy="25685"/>
+          </a:xfrm>
+          <a:prstGeom prst="ellipse">
+            <a:avLst/>
+          </a:prstGeom>
+          <a:solidFill>
+            <a:srgbClr val="16243A"/>
+          </a:solidFill>
+          <a:ln/>
+        </p:spPr>
+      </p:sp>
+      <p:sp>
+        <p:nvSpPr>
+          <p:cNvPr id="17" name="원안그림-1-10"/>
+          <p:cNvSpPr/>
+          <p:nvPr/>
+        </p:nvSpPr>
+        <p:spPr>
+          <a:xfrm rot="360000">
+            <a:off x="2877561" y="2693001"/>
+            <a:ext cx="1083844" cy="1467705"/>
+          </a:xfrm>
+          <a:prstGeom prst="roundRect">
+            <a:avLst>
+              <a:gd name="adj" fmla="val 5208"/>
+            </a:avLst>
+          </a:prstGeom>
+          <a:solidFill>
+            <a:srgbClr val="FFFFFF"/>
+          </a:solidFill>
+          <a:ln w="6350">
+            <a:solidFill>
+              <a:srgbClr val="DFE6EB"/>
+            </a:solidFill>
+            <a:prstDash val="solid"/>
+          </a:ln>
+        </p:spPr>
+      </p:sp>
+      <p:sp>
+        <p:nvSpPr>
+          <p:cNvPr id="18" name="원안그림-1-11"/>
+          <p:cNvSpPr txBox="1"/>
+          <p:nvPr/>
+        </p:nvSpPr>
+        <p:spPr>
+          <a:xfrm>
+            <a:off x="3097717" y="2839772"/>
+            <a:ext cx="620952" cy="169351"/>
+          </a:xfrm>
+          <a:prstGeom prst="rect">
+            <a:avLst/>
+          </a:prstGeom>
+          <a:noFill/>
+          <a:ln/>
+        </p:spPr>
+        <p:txBody>
+          <a:bodyPr wrap="square" lIns="0" tIns="0" rIns="0" bIns="0" rtlCol="0" anchor="ctr"/>
+          <a:lstStyle/>
+          <a:p>
+            <a:pPr algn="ctr" indent="0" marL="0">
+              <a:buNone/>
+            </a:pPr>
+            <a:r>
+              <a:rPr lang="en-US" sz="950" b="1" dirty="0">
+                <a:solidFill>
+                  <a:srgbClr val="617287"/>
+                </a:solidFill>
+              </a:rPr>
+              <a:t>FACE</a:t>
+            </a:r>
+            <a:endParaRPr lang="en-US" sz="950" dirty="0"/>
+          </a:p>
+        </p:txBody>
+      </p:sp>
+      <p:sp>
+        <p:nvSpPr>
+          <p:cNvPr id="19" name="원안그림-1-12"/>
+          <p:cNvSpPr/>
+          <p:nvPr/>
+        </p:nvSpPr>
+        <p:spPr>
+          <a:xfrm>
+            <a:off x="3109007" y="3172828"/>
+            <a:ext cx="615307" cy="643532"/>
+          </a:xfrm>
+          <a:prstGeom prst="ellipse">
+            <a:avLst/>
+          </a:prstGeom>
+          <a:solidFill>
+            <a:srgbClr val="FDE6A5"/>
+          </a:solidFill>
+          <a:ln/>
+        </p:spPr>
+      </p:sp>
+      <p:sp>
+        <p:nvSpPr>
+          <p:cNvPr id="20" name="원안그림-1-13"/>
+          <p:cNvSpPr txBox="1"/>
+          <p:nvPr/>
+        </p:nvSpPr>
+        <p:spPr>
+          <a:xfrm>
+            <a:off x="1776782" y="4330057"/>
+            <a:ext cx="1772536" cy="163706"/>
+          </a:xfrm>
+          <a:prstGeom prst="rect">
+            <a:avLst/>
+          </a:prstGeom>
+          <a:noFill/>
+          <a:ln/>
+        </p:spPr>
+        <p:txBody>
+          <a:bodyPr wrap="square" lIns="0" tIns="0" rIns="0" bIns="0" rtlCol="0" anchor="ctr"/>
+          <a:lstStyle/>
+          <a:p>
+            <a:pPr algn="ctr" indent="0" marL="0">
+              <a:buNone/>
+            </a:pPr>
+            <a:r>
+              <a:rPr lang="en-US" sz="750" dirty="0">
+                <a:solidFill>
+                  <a:srgbClr val="617287"/>
+                </a:solidFill>
+              </a:rPr>
+              <a:t>A / B 도안 옵션</a:t>
+            </a:r>
+            <a:endParaRPr lang="en-US" sz="750" dirty="0"/>
+          </a:p>
+        </p:txBody>
+      </p:sp>
+      <p:sp>
+        <p:nvSpPr>
+          <p:cNvPr id="21" name="original"/>
           <p:cNvSpPr/>
           <p:nvPr/>
         </p:nvSpPr>
@@ -7829,7 +8193,7 @@
       </p:sp>
       <p:sp>
         <p:nvSpPr>
-          <p:cNvPr id="7" name="chip-1-1"/>
+          <p:cNvPr id="22" name="chip-1-1"/>
           <p:cNvSpPr txBox="1"/>
           <p:nvPr/>
         </p:nvSpPr>
@@ -7869,7 +8233,7 @@
       </p:sp>
       <p:sp>
         <p:nvSpPr>
-          <p:cNvPr id="8" name="Text 6"/>
+          <p:cNvPr id="23" name="Text 20"/>
           <p:cNvSpPr txBox="1"/>
           <p:nvPr/>
         </p:nvSpPr>
@@ -7916,7 +8280,7 @@
       </p:sp>
       <p:sp>
         <p:nvSpPr>
-          <p:cNvPr id="9" name="chip-1-2"/>
+          <p:cNvPr id="24" name="chip-1-2"/>
           <p:cNvSpPr txBox="1"/>
           <p:nvPr/>
         </p:nvSpPr>
@@ -7956,7 +8320,7 @@
       </p:sp>
       <p:sp>
         <p:nvSpPr>
-          <p:cNvPr id="10" name="Text 8"/>
+          <p:cNvPr id="25" name="Text 22"/>
           <p:cNvSpPr txBox="1"/>
           <p:nvPr/>
         </p:nvSpPr>
@@ -8003,7 +8367,7 @@
       </p:sp>
       <p:sp>
         <p:nvSpPr>
-          <p:cNvPr id="11" name="Text 9"/>
+          <p:cNvPr id="26" name="Text 23"/>
           <p:cNvSpPr txBox="1"/>
           <p:nvPr/>
         </p:nvSpPr>
@@ -8039,7 +8403,7 @@
       </p:sp>
       <p:sp>
         <p:nvSpPr>
-          <p:cNvPr id="12" name="prop-0"/>
+          <p:cNvPr id="27" name="prop-0"/>
           <p:cNvSpPr/>
           <p:nvPr/>
         </p:nvSpPr>
@@ -8066,7 +8430,7 @@
       </p:sp>
       <p:sp>
         <p:nvSpPr>
-          <p:cNvPr id="13" name="chip-체험"/>
+          <p:cNvPr id="28" name="chip-체험"/>
           <p:cNvSpPr txBox="1"/>
           <p:nvPr/>
         </p:nvSpPr>
@@ -8106,7 +8470,7 @@
       </p:sp>
       <p:sp>
         <p:nvSpPr>
-          <p:cNvPr id="14" name="Text 12"/>
+          <p:cNvPr id="29" name="Text 26"/>
           <p:cNvSpPr txBox="1"/>
           <p:nvPr/>
         </p:nvSpPr>
@@ -8142,7 +8506,7 @@
       </p:sp>
       <p:sp>
         <p:nvSpPr>
-          <p:cNvPr id="15" name="Text 13"/>
+          <p:cNvPr id="30" name="Text 27"/>
           <p:cNvSpPr txBox="1"/>
           <p:nvPr/>
         </p:nvSpPr>
@@ -8178,7 +8542,7 @@
       </p:sp>
       <p:sp>
         <p:nvSpPr>
-          <p:cNvPr id="16" name="prop-1"/>
+          <p:cNvPr id="31" name="prop-1"/>
           <p:cNvSpPr/>
           <p:nvPr/>
         </p:nvSpPr>
@@ -8205,7 +8569,7 @@
       </p:sp>
       <p:sp>
         <p:nvSpPr>
-          <p:cNvPr id="17" name="chip-체험"/>
+          <p:cNvPr id="32" name="chip-체험"/>
           <p:cNvSpPr txBox="1"/>
           <p:nvPr/>
         </p:nvSpPr>
@@ -8245,7 +8609,7 @@
       </p:sp>
       <p:sp>
         <p:nvSpPr>
-          <p:cNvPr id="18" name="Text 16"/>
+          <p:cNvPr id="33" name="Text 30"/>
           <p:cNvSpPr txBox="1"/>
           <p:nvPr/>
         </p:nvSpPr>
@@ -8281,7 +8645,7 @@
       </p:sp>
       <p:sp>
         <p:nvSpPr>
-          <p:cNvPr id="19" name="Text 17"/>
+          <p:cNvPr id="34" name="Text 31"/>
           <p:cNvSpPr txBox="1"/>
           <p:nvPr/>
         </p:nvSpPr>
@@ -8317,7 +8681,7 @@
       </p:sp>
       <p:sp>
         <p:nvSpPr>
-          <p:cNvPr id="20" name="prop-2"/>
+          <p:cNvPr id="35" name="prop-2"/>
           <p:cNvSpPr/>
           <p:nvPr/>
         </p:nvSpPr>
@@ -8344,7 +8708,7 @@
       </p:sp>
       <p:sp>
         <p:nvSpPr>
-          <p:cNvPr id="21" name="chip-운영"/>
+          <p:cNvPr id="36" name="chip-운영"/>
           <p:cNvSpPr txBox="1"/>
           <p:nvPr/>
         </p:nvSpPr>
@@ -8384,7 +8748,7 @@
       </p:sp>
       <p:sp>
         <p:nvSpPr>
-          <p:cNvPr id="22" name="Text 20"/>
+          <p:cNvPr id="37" name="Text 34"/>
           <p:cNvSpPr txBox="1"/>
           <p:nvPr/>
         </p:nvSpPr>
@@ -8420,7 +8784,7 @@
       </p:sp>
       <p:sp>
         <p:nvSpPr>
-          <p:cNvPr id="23" name="Text 21"/>
+          <p:cNvPr id="38" name="Text 35"/>
           <p:cNvSpPr txBox="1"/>
           <p:nvPr/>
         </p:nvSpPr>
@@ -8456,7 +8820,7 @@
       </p:sp>
       <p:sp>
         <p:nvSpPr>
-          <p:cNvPr id="24" name="prop-3"/>
+          <p:cNvPr id="39" name="prop-3"/>
           <p:cNvSpPr/>
           <p:nvPr/>
         </p:nvSpPr>
@@ -8483,7 +8847,7 @@
       </p:sp>
       <p:sp>
         <p:nvSpPr>
-          <p:cNvPr id="25" name="chip-운영"/>
+          <p:cNvPr id="40" name="chip-운영"/>
           <p:cNvSpPr txBox="1"/>
           <p:nvPr/>
         </p:nvSpPr>
@@ -8523,7 +8887,7 @@
       </p:sp>
       <p:sp>
         <p:nvSpPr>
-          <p:cNvPr id="26" name="Text 24"/>
+          <p:cNvPr id="41" name="Text 38"/>
           <p:cNvSpPr txBox="1"/>
           <p:nvPr/>
         </p:nvSpPr>
@@ -8559,7 +8923,7 @@
       </p:sp>
       <p:sp>
         <p:nvSpPr>
-          <p:cNvPr id="27" name="Text 25"/>
+          <p:cNvPr id="42" name="Text 39"/>
           <p:cNvSpPr txBox="1"/>
           <p:nvPr/>
         </p:nvSpPr>
@@ -8595,7 +8959,7 @@
       </p:sp>
       <p:sp>
         <p:nvSpPr>
-          <p:cNvPr id="28" name="decision-pill"/>
+          <p:cNvPr id="43" name="decision-pill"/>
           <p:cNvSpPr txBox="1"/>
           <p:nvPr/>
         </p:nvSpPr>
@@ -8635,7 +8999,7 @@
       </p:sp>
       <p:sp>
         <p:nvSpPr>
-          <p:cNvPr id="29" name="Text 27"/>
+          <p:cNvPr id="44" name="Text 41"/>
           <p:cNvSpPr txBox="1"/>
           <p:nvPr/>
         </p:nvSpPr>
@@ -8682,7 +9046,7 @@
       </p:sp>
       <p:sp>
         <p:nvSpPr>
-          <p:cNvPr id="30" name="Slide Number Placeholder 0"/>
+          <p:cNvPr id="45" name="Slide Number Placeholder 0"/>
           <p:cNvSpPr>
             <a:spLocks noGrp="1"/>
           </p:cNvSpPr>
@@ -8725,451 +9089,6 @@
           </a:p>
         </p:txBody>
       </p:sp>
-      <p:grpSp>
-        <p:nvGrpSpPr>
-          <p:cNvPr id="31" name="원안 그림"/>
-          <p:cNvGrpSpPr/>
-          <p:nvPr/>
-        </p:nvGrpSpPr>
-        <p:grpSpPr>
-          <a:xfrm>
-            <a:off x="930029" y="2331720"/>
-            <a:ext cx="3443462" cy="2212848"/>
-            <a:chOff x="6108192" y="2313432"/>
-            <a:chExt cx="5577840" cy="3584448"/>
-          </a:xfrm>
-        </p:grpSpPr>
-        <p:sp>
-          <p:nvSpPr>
-            <p:cNvPr id="32" name="Shape 18"/>
-            <p:cNvSpPr/>
-            <p:nvPr/>
-          </p:nvSpPr>
-          <p:spPr>
-            <a:xfrm>
-              <a:off x="6108192" y="2313432"/>
-              <a:ext cx="5577840" cy="3584448"/>
-            </a:xfrm>
-            <a:prstGeom prst="roundRect">
-              <a:avLst>
-                <a:gd name="adj" fmla="val 2551"/>
-              </a:avLst>
-            </a:prstGeom>
-            <a:solidFill>
-              <a:srgbClr val="EAF5F1"/>
-            </a:solidFill>
-            <a:ln w="12700">
-              <a:solidFill>
-                <a:srgbClr val="EAF5F1">
-                  <a:alpha val="0"/>
-                </a:srgbClr>
-              </a:solidFill>
-              <a:prstDash val="solid"/>
-            </a:ln>
-          </p:spPr>
-        </p:sp>
-        <p:sp>
-          <p:nvSpPr>
-            <p:cNvPr id="33" name="Shape 19"/>
-            <p:cNvSpPr/>
-            <p:nvPr/>
-          </p:nvSpPr>
-          <p:spPr>
-            <a:xfrm rot="-300000">
-              <a:off x="6839712" y="2615184"/>
-              <a:ext cx="2176272" cy="3008376"/>
-            </a:xfrm>
-            <a:prstGeom prst="roundRect">
-              <a:avLst>
-                <a:gd name="adj" fmla="val 4202"/>
-              </a:avLst>
-            </a:prstGeom>
-            <a:solidFill>
-              <a:srgbClr val="FFFFFF"/>
-            </a:solidFill>
-            <a:ln w="12700">
-              <a:solidFill>
-                <a:srgbClr val="D3E1DC"/>
-              </a:solidFill>
-              <a:prstDash val="solid"/>
-            </a:ln>
-          </p:spPr>
-        </p:sp>
-        <p:sp>
-          <p:nvSpPr>
-            <p:cNvPr id="34" name="Text 20"/>
-            <p:cNvSpPr/>
-            <p:nvPr/>
-          </p:nvSpPr>
-          <p:spPr>
-            <a:xfrm>
-              <a:off x="7123176" y="2862072"/>
-              <a:ext cx="1645920" cy="320040"/>
-            </a:xfrm>
-            <a:prstGeom prst="rect">
-              <a:avLst/>
-            </a:prstGeom>
-            <a:noFill/>
-            <a:ln/>
-          </p:spPr>
-          <p:txBody>
-            <a:bodyPr wrap="square" lIns="0" tIns="0" rIns="0" bIns="0" rtlCol="0" anchor="ctr">
-              <a:normAutofit/>
-            </a:bodyPr>
-            <a:lstStyle/>
-            <a:p>
-              <a:pPr indent="0" marL="0">
-                <a:buNone/>
-              </a:pPr>
-              <a:r>
-                <a:rPr lang="en-US" sz="1100" b="1" dirty="0">
-                  <a:solidFill>
-                    <a:srgbClr val="16243A"/>
-                  </a:solidFill>
-                  <a:latin typeface="Malgun Gothic" pitchFamily="34" charset="0"/>
-                  <a:ea typeface="Malgun Gothic" pitchFamily="34" charset="-122"/>
-                  <a:cs typeface="Malgun Gothic" pitchFamily="34" charset="-120"/>
-                </a:rPr>
-                <a:t>Draw Me!</a:t>
-              </a:r>
-              <a:endParaRPr lang="en-US" sz="1100" dirty="0"/>
-            </a:p>
-          </p:txBody>
-        </p:sp>
-        <p:sp>
-          <p:nvSpPr>
-            <p:cNvPr id="35" name="Shape 21"/>
-            <p:cNvSpPr/>
-            <p:nvPr/>
-          </p:nvSpPr>
-          <p:spPr>
-            <a:xfrm>
-              <a:off x="7770571" y="3392424"/>
-              <a:ext cx="594360" cy="594360"/>
-            </a:xfrm>
-            <a:prstGeom prst="ellipse">
-              <a:avLst>
-                <a:gd name="adj" fmla="val 15385"/>
-              </a:avLst>
-            </a:prstGeom>
-            <a:solidFill>
-              <a:srgbClr val="FDE6A5"/>
-            </a:solidFill>
-            <a:ln w="12700">
-              <a:solidFill>
-                <a:srgbClr val="FDE6A5">
-                  <a:alpha val="0"/>
-                </a:srgbClr>
-              </a:solidFill>
-              <a:prstDash val="solid"/>
-            </a:ln>
-          </p:spPr>
-        </p:sp>
-        <p:sp>
-          <p:nvSpPr>
-            <p:cNvPr id="36" name="Shape 22"/>
-            <p:cNvSpPr/>
-            <p:nvPr/>
-          </p:nvSpPr>
-          <p:spPr>
-            <a:xfrm rot="10800000">
-              <a:off x="7675474" y="3915461"/>
-              <a:ext cx="808330" cy="903427"/>
-            </a:xfrm>
-            <a:prstGeom prst="arc">
-              <a:avLst>
-                <a:gd name="adj" fmla="val 11312"/>
-              </a:avLst>
-            </a:prstGeom>
-            <a:solidFill>
-              <a:srgbClr val="F7DDE5"/>
-            </a:solidFill>
-            <a:ln w="12700">
-              <a:solidFill>
-                <a:srgbClr val="F7DDE5"/>
-              </a:solidFill>
-              <a:prstDash val="solid"/>
-            </a:ln>
-          </p:spPr>
-        </p:sp>
-        <p:sp>
-          <p:nvSpPr>
-            <p:cNvPr id="37" name="Shape 23"/>
-            <p:cNvSpPr/>
-            <p:nvPr/>
-          </p:nvSpPr>
-          <p:spPr>
-            <a:xfrm>
-              <a:off x="7711135" y="4176979"/>
-              <a:ext cx="653796" cy="118872"/>
-            </a:xfrm>
-            <a:prstGeom prst="line">
-              <a:avLst>
-                <a:gd name="adj" fmla="val 76923"/>
-              </a:avLst>
-            </a:prstGeom>
-            <a:solidFill>
-              <a:srgbClr val="16243A"/>
-            </a:solidFill>
-            <a:ln w="38100">
-              <a:solidFill>
-                <a:srgbClr val="16243A"/>
-              </a:solidFill>
-              <a:prstDash val="solid"/>
-            </a:ln>
-          </p:spPr>
-        </p:sp>
-        <p:sp>
-          <p:nvSpPr>
-            <p:cNvPr id="38" name="Shape 24"/>
-            <p:cNvSpPr/>
-            <p:nvPr/>
-          </p:nvSpPr>
-          <p:spPr>
-            <a:xfrm flipH="1">
-              <a:off x="7616037" y="4676242"/>
-              <a:ext cx="166421" cy="427939"/>
-            </a:xfrm>
-            <a:prstGeom prst="line">
-              <a:avLst>
-                <a:gd name="adj" fmla="val -54945"/>
-              </a:avLst>
-            </a:prstGeom>
-            <a:solidFill>
-              <a:srgbClr val="16243A"/>
-            </a:solidFill>
-            <a:ln w="38100">
-              <a:solidFill>
-                <a:srgbClr val="16243A"/>
-              </a:solidFill>
-              <a:prstDash val="solid"/>
-            </a:ln>
-          </p:spPr>
-        </p:sp>
-        <p:sp>
-          <p:nvSpPr>
-            <p:cNvPr id="39" name="Shape 25"/>
-            <p:cNvSpPr/>
-            <p:nvPr/>
-          </p:nvSpPr>
-          <p:spPr>
-            <a:xfrm>
-              <a:off x="8234172" y="4676242"/>
-              <a:ext cx="166421" cy="427939"/>
-            </a:xfrm>
-            <a:prstGeom prst="line">
-              <a:avLst>
-                <a:gd name="adj" fmla="val 54945"/>
-              </a:avLst>
-            </a:prstGeom>
-            <a:solidFill>
-              <a:srgbClr val="16243A"/>
-            </a:solidFill>
-            <a:ln w="38100">
-              <a:solidFill>
-                <a:srgbClr val="16243A"/>
-              </a:solidFill>
-              <a:prstDash val="solid"/>
-            </a:ln>
-          </p:spPr>
-        </p:sp>
-        <p:sp>
-          <p:nvSpPr>
-            <p:cNvPr id="40" name="Shape 26"/>
-            <p:cNvSpPr/>
-            <p:nvPr/>
-          </p:nvSpPr>
-          <p:spPr>
-            <a:xfrm>
-              <a:off x="7925105" y="3653942"/>
-              <a:ext cx="41605" cy="41605"/>
-            </a:xfrm>
-            <a:prstGeom prst="ellipse">
-              <a:avLst>
-                <a:gd name="adj" fmla="val 219781"/>
-              </a:avLst>
-            </a:prstGeom>
-            <a:solidFill>
-              <a:srgbClr val="16243A"/>
-            </a:solidFill>
-            <a:ln w="12700">
-              <a:solidFill>
-                <a:srgbClr val="16243A">
-                  <a:alpha val="0"/>
-                </a:srgbClr>
-              </a:solidFill>
-              <a:prstDash val="solid"/>
-            </a:ln>
-          </p:spPr>
-        </p:sp>
-        <p:sp>
-          <p:nvSpPr>
-            <p:cNvPr id="41" name="Shape 27"/>
-            <p:cNvSpPr/>
-            <p:nvPr/>
-          </p:nvSpPr>
-          <p:spPr>
-            <a:xfrm>
-              <a:off x="8127187" y="3653942"/>
-              <a:ext cx="41605" cy="41605"/>
-            </a:xfrm>
-            <a:prstGeom prst="ellipse">
-              <a:avLst>
-                <a:gd name="adj" fmla="val 219781"/>
-              </a:avLst>
-            </a:prstGeom>
-            <a:solidFill>
-              <a:srgbClr val="16243A"/>
-            </a:solidFill>
-            <a:ln w="12700">
-              <a:solidFill>
-                <a:srgbClr val="16243A">
-                  <a:alpha val="0"/>
-                </a:srgbClr>
-              </a:solidFill>
-              <a:prstDash val="solid"/>
-            </a:ln>
-          </p:spPr>
-        </p:sp>
-        <p:sp>
-          <p:nvSpPr>
-            <p:cNvPr id="42" name="Shape 28"/>
-            <p:cNvSpPr/>
-            <p:nvPr/>
-          </p:nvSpPr>
-          <p:spPr>
-            <a:xfrm rot="360000">
-              <a:off x="9262872" y="2898648"/>
-              <a:ext cx="1755648" cy="2377440"/>
-            </a:xfrm>
-            <a:prstGeom prst="roundRect">
-              <a:avLst>
-                <a:gd name="adj" fmla="val 5208"/>
-              </a:avLst>
-            </a:prstGeom>
-            <a:solidFill>
-              <a:srgbClr val="FFFFFF"/>
-            </a:solidFill>
-            <a:ln w="12700">
-              <a:solidFill>
-                <a:srgbClr val="DFE6EB"/>
-              </a:solidFill>
-              <a:prstDash val="solid"/>
-            </a:ln>
-          </p:spPr>
-        </p:sp>
-        <p:sp>
-          <p:nvSpPr>
-            <p:cNvPr id="43" name="Text 29"/>
-            <p:cNvSpPr/>
-            <p:nvPr/>
-          </p:nvSpPr>
-          <p:spPr>
-            <a:xfrm>
-              <a:off x="9619488" y="3136392"/>
-              <a:ext cx="1005840" cy="274320"/>
-            </a:xfrm>
-            <a:prstGeom prst="rect">
-              <a:avLst/>
-            </a:prstGeom>
-            <a:noFill/>
-            <a:ln/>
-          </p:spPr>
-          <p:txBody>
-            <a:bodyPr wrap="square" lIns="0" tIns="0" rIns="0" bIns="0" rtlCol="0" anchor="ctr">
-              <a:normAutofit/>
-            </a:bodyPr>
-            <a:lstStyle/>
-            <a:p>
-              <a:pPr algn="ctr" indent="0" marL="0">
-                <a:buNone/>
-              </a:pPr>
-              <a:r>
-                <a:rPr lang="en-US" sz="900" b="1" dirty="0">
-                  <a:solidFill>
-                    <a:srgbClr val="617287"/>
-                  </a:solidFill>
-                  <a:latin typeface="Malgun Gothic" pitchFamily="34" charset="0"/>
-                  <a:ea typeface="Malgun Gothic" pitchFamily="34" charset="-122"/>
-                  <a:cs typeface="Malgun Gothic" pitchFamily="34" charset="-120"/>
-                </a:rPr>
-                <a:t>FACE</a:t>
-              </a:r>
-              <a:endParaRPr lang="en-US" sz="900" dirty="0"/>
-            </a:p>
-          </p:txBody>
-        </p:sp>
-        <p:sp>
-          <p:nvSpPr>
-            <p:cNvPr id="44" name="Shape 30"/>
-            <p:cNvSpPr/>
-            <p:nvPr/>
-          </p:nvSpPr>
-          <p:spPr>
-            <a:xfrm>
-              <a:off x="9637776" y="3675888"/>
-              <a:ext cx="996696" cy="1042416"/>
-            </a:xfrm>
-            <a:prstGeom prst="ellipse">
-              <a:avLst>
-                <a:gd name="adj" fmla="val 9174"/>
-              </a:avLst>
-            </a:prstGeom>
-            <a:solidFill>
-              <a:srgbClr val="FDE6A5"/>
-            </a:solidFill>
-            <a:ln w="12700">
-              <a:solidFill>
-                <a:srgbClr val="FDE6A5">
-                  <a:alpha val="0"/>
-                </a:srgbClr>
-              </a:solidFill>
-              <a:prstDash val="solid"/>
-            </a:ln>
-          </p:spPr>
-        </p:sp>
-        <p:sp>
-          <p:nvSpPr>
-            <p:cNvPr id="45" name="Text 31"/>
-            <p:cNvSpPr/>
-            <p:nvPr/>
-          </p:nvSpPr>
-          <p:spPr>
-            <a:xfrm>
-              <a:off x="7479792" y="5550408"/>
-              <a:ext cx="2871216" cy="265176"/>
-            </a:xfrm>
-            <a:prstGeom prst="rect">
-              <a:avLst/>
-            </a:prstGeom>
-            <a:noFill/>
-            <a:ln/>
-          </p:spPr>
-          <p:txBody>
-            <a:bodyPr wrap="square" lIns="0" tIns="0" rIns="0" bIns="0" rtlCol="0" anchor="ctr">
-              <a:normAutofit/>
-            </a:bodyPr>
-            <a:lstStyle/>
-            <a:p>
-              <a:pPr algn="ctr" indent="0" marL="0">
-                <a:buNone/>
-              </a:pPr>
-              <a:r>
-                <a:rPr lang="en-US" sz="700" dirty="0">
-                  <a:solidFill>
-                    <a:srgbClr val="617287"/>
-                  </a:solidFill>
-                  <a:latin typeface="Malgun Gothic" pitchFamily="34" charset="0"/>
-                  <a:ea typeface="Malgun Gothic" pitchFamily="34" charset="-122"/>
-                  <a:cs typeface="Malgun Gothic" pitchFamily="34" charset="-120"/>
-                </a:rPr>
-                <a:t>A / B 도안 옵션</a:t>
-              </a:r>
-              <a:endParaRPr lang="en-US" sz="700" dirty="0"/>
-            </a:p>
-          </p:txBody>
-        </p:sp>
-      </p:grpSp>
     </p:spTree>
   </p:cSld>
   <p:clrMapOvr>
@@ -9183,7 +9102,7 @@
   <p:cSld name="Slide 5">
     <p:spTree>
       <p:nvGrpSpPr>
-        <p:cNvPr id="1" name=""/>
+        <p:cNvPr id="2" name=""/>
         <p:cNvGrpSpPr/>
         <p:nvPr/>
       </p:nvGrpSpPr>
@@ -9197,7 +9116,7 @@
       </p:grpSpPr>
       <p:sp>
         <p:nvSpPr>
-          <p:cNvPr id="2" name="Text 1"/>
+          <p:cNvPr id="3" name="Text 1"/>
           <p:cNvSpPr/>
           <p:nvPr>
             <p:ph idx="101" type="title" hasCustomPrompt="1"/>
@@ -9235,7 +9154,7 @@
       </p:sp>
       <p:sp>
         <p:nvSpPr>
-          <p:cNvPr id="3" name="Text 1"/>
+          <p:cNvPr id="4" name="Text 1"/>
           <p:cNvSpPr/>
           <p:nvPr>
             <p:ph idx="102" type="body" hasCustomPrompt="1"/>
@@ -9273,7 +9192,7 @@
       </p:sp>
       <p:sp>
         <p:nvSpPr>
-          <p:cNvPr id="4" name="step-number"/>
+          <p:cNvPr id="5" name="step-number"/>
           <p:cNvSpPr txBox="1"/>
           <p:nvPr/>
         </p:nvSpPr>
@@ -9309,7 +9228,7 @@
       </p:sp>
       <p:sp>
         <p:nvSpPr>
-          <p:cNvPr id="5" name="Text 3"/>
+          <p:cNvPr id="6" name="Text 3"/>
           <p:cNvSpPr txBox="1"/>
           <p:nvPr/>
         </p:nvSpPr>
@@ -9345,7 +9264,512 @@
       </p:sp>
       <p:sp>
         <p:nvSpPr>
-          <p:cNvPr id="6" name="original"/>
+          <p:cNvPr id="7" name="원안그림-2-0"/>
+          <p:cNvSpPr/>
+          <p:nvPr/>
+        </p:nvSpPr>
+        <p:spPr>
+          <a:xfrm>
+            <a:off x="876199" y="2331720"/>
+            <a:ext cx="3551122" cy="2212848"/>
+          </a:xfrm>
+          <a:prstGeom prst="roundRect">
+            <a:avLst>
+              <a:gd name="adj" fmla="val 2653"/>
+            </a:avLst>
+          </a:prstGeom>
+          <a:solidFill>
+            <a:srgbClr val="EAF1F8"/>
+          </a:solidFill>
+          <a:ln/>
+        </p:spPr>
+      </p:sp>
+      <p:sp>
+        <p:nvSpPr>
+          <p:cNvPr id="8" name="원안그림-2-1"/>
+          <p:cNvSpPr/>
+          <p:nvPr/>
+        </p:nvSpPr>
+        <p:spPr>
+          <a:xfrm>
+            <a:off x="1075766" y="2713246"/>
+            <a:ext cx="997836" cy="1373492"/>
+          </a:xfrm>
+          <a:prstGeom prst="roundRect">
+            <a:avLst>
+              <a:gd name="adj" fmla="val 5882"/>
+            </a:avLst>
+          </a:prstGeom>
+          <a:solidFill>
+            <a:srgbClr val="FFFFFF"/>
+          </a:solidFill>
+          <a:ln w="9525">
+            <a:solidFill>
+              <a:srgbClr val="DFE6EB"/>
+            </a:solidFill>
+            <a:prstDash val="solid"/>
+          </a:ln>
+        </p:spPr>
+      </p:sp>
+      <p:sp>
+        <p:nvSpPr>
+          <p:cNvPr id="9" name="원안그림-2-2"/>
+          <p:cNvSpPr/>
+          <p:nvPr/>
+        </p:nvSpPr>
+        <p:spPr>
+          <a:xfrm>
+            <a:off x="1377699" y="2977379"/>
+            <a:ext cx="231850" cy="231850"/>
+          </a:xfrm>
+          <a:prstGeom prst="ellipse">
+            <a:avLst/>
+          </a:prstGeom>
+          <a:solidFill>
+            <a:srgbClr val="FDE6A5"/>
+          </a:solidFill>
+          <a:ln/>
+        </p:spPr>
+      </p:sp>
+      <p:sp>
+        <p:nvSpPr>
+          <p:cNvPr id="10" name="원안그림-2-3"/>
+          <p:cNvSpPr/>
+          <p:nvPr/>
+        </p:nvSpPr>
+        <p:spPr>
+          <a:xfrm rot="10800000">
+            <a:off x="1340603" y="3181406"/>
+            <a:ext cx="315316" cy="352412"/>
+          </a:xfrm>
+          <a:prstGeom prst="ellipse">
+            <a:avLst/>
+          </a:prstGeom>
+          <a:solidFill>
+            <a:srgbClr val="F7DDE5"/>
+          </a:solidFill>
+          <a:ln w="9525">
+            <a:solidFill>
+              <a:srgbClr val="F7DDE5"/>
+            </a:solidFill>
+            <a:prstDash val="solid"/>
+          </a:ln>
+        </p:spPr>
+      </p:sp>
+      <p:sp>
+        <p:nvSpPr>
+          <p:cNvPr id="11" name="원안그림-2-4"/>
+          <p:cNvSpPr/>
+          <p:nvPr/>
+        </p:nvSpPr>
+        <p:spPr>
+          <a:xfrm>
+            <a:off x="1354515" y="3283421"/>
+            <a:ext cx="255035" cy="46370"/>
+          </a:xfrm>
+          <a:prstGeom prst="line">
+            <a:avLst/>
+          </a:prstGeom>
+          <a:solidFill>
+            <a:srgbClr val="16243A"/>
+          </a:solidFill>
+          <a:ln w="25400">
+            <a:solidFill>
+              <a:srgbClr val="16243A"/>
+            </a:solidFill>
+            <a:prstDash val="solid"/>
+          </a:ln>
+        </p:spPr>
+      </p:sp>
+      <p:sp>
+        <p:nvSpPr>
+          <p:cNvPr id="12" name="원안그림-2-5"/>
+          <p:cNvSpPr/>
+          <p:nvPr/>
+        </p:nvSpPr>
+        <p:spPr>
+          <a:xfrm flipH="1">
+            <a:off x="1317418" y="3478175"/>
+            <a:ext cx="64918" cy="166932"/>
+          </a:xfrm>
+          <a:prstGeom prst="line">
+            <a:avLst/>
+          </a:prstGeom>
+          <a:solidFill>
+            <a:srgbClr val="16243A"/>
+          </a:solidFill>
+          <a:ln w="25400">
+            <a:solidFill>
+              <a:srgbClr val="16243A"/>
+            </a:solidFill>
+            <a:prstDash val="solid"/>
+          </a:ln>
+        </p:spPr>
+      </p:sp>
+      <p:sp>
+        <p:nvSpPr>
+          <p:cNvPr id="13" name="원안그림-2-6"/>
+          <p:cNvSpPr/>
+          <p:nvPr/>
+        </p:nvSpPr>
+        <p:spPr>
+          <a:xfrm>
+            <a:off x="1558543" y="3478175"/>
+            <a:ext cx="64918" cy="166932"/>
+          </a:xfrm>
+          <a:prstGeom prst="line">
+            <a:avLst/>
+          </a:prstGeom>
+          <a:solidFill>
+            <a:srgbClr val="16243A"/>
+          </a:solidFill>
+          <a:ln w="25400">
+            <a:solidFill>
+              <a:srgbClr val="16243A"/>
+            </a:solidFill>
+            <a:prstDash val="solid"/>
+          </a:ln>
+        </p:spPr>
+      </p:sp>
+      <p:sp>
+        <p:nvSpPr>
+          <p:cNvPr id="14" name="원안그림-2-7"/>
+          <p:cNvSpPr/>
+          <p:nvPr/>
+        </p:nvSpPr>
+        <p:spPr>
+          <a:xfrm>
+            <a:off x="1437980" y="3079393"/>
+            <a:ext cx="16229" cy="16229"/>
+          </a:xfrm>
+          <a:prstGeom prst="ellipse">
+            <a:avLst/>
+          </a:prstGeom>
+          <a:solidFill>
+            <a:srgbClr val="16243A"/>
+          </a:solidFill>
+          <a:ln/>
+        </p:spPr>
+      </p:sp>
+      <p:sp>
+        <p:nvSpPr>
+          <p:cNvPr id="15" name="원안그림-2-8"/>
+          <p:cNvSpPr/>
+          <p:nvPr/>
+        </p:nvSpPr>
+        <p:spPr>
+          <a:xfrm>
+            <a:off x="1516810" y="3079393"/>
+            <a:ext cx="16229" cy="16229"/>
+          </a:xfrm>
+          <a:prstGeom prst="ellipse">
+            <a:avLst/>
+          </a:prstGeom>
+          <a:solidFill>
+            <a:srgbClr val="16243A"/>
+          </a:solidFill>
+          <a:ln/>
+        </p:spPr>
+      </p:sp>
+      <p:sp>
+        <p:nvSpPr>
+          <p:cNvPr id="16" name="원안그림-2-9"/>
+          <p:cNvSpPr/>
+          <p:nvPr/>
+        </p:nvSpPr>
+        <p:spPr>
+          <a:xfrm>
+            <a:off x="2185125" y="3282599"/>
+            <a:ext cx="352177" cy="440222"/>
+          </a:xfrm>
+          <a:prstGeom prst="chevron">
+            <a:avLst/>
+          </a:prstGeom>
+          <a:solidFill>
+            <a:srgbClr val="5DCDC1"/>
+          </a:solidFill>
+          <a:ln/>
+        </p:spPr>
+      </p:sp>
+      <p:sp>
+        <p:nvSpPr>
+          <p:cNvPr id="17" name="원안그림-2-10"/>
+          <p:cNvSpPr/>
+          <p:nvPr/>
+        </p:nvSpPr>
+        <p:spPr>
+          <a:xfrm>
+            <a:off x="2672304" y="2660419"/>
+            <a:ext cx="1443927" cy="1502624"/>
+          </a:xfrm>
+          <a:prstGeom prst="roundRect">
+            <a:avLst>
+              <a:gd name="adj" fmla="val 4065"/>
+            </a:avLst>
+          </a:prstGeom>
+          <a:solidFill>
+            <a:srgbClr val="16243A"/>
+          </a:solidFill>
+          <a:ln/>
+        </p:spPr>
+      </p:sp>
+      <p:sp>
+        <p:nvSpPr>
+          <p:cNvPr id="18" name="원안그림-2-11"/>
+          <p:cNvSpPr/>
+          <p:nvPr/>
+        </p:nvSpPr>
+        <p:spPr>
+          <a:xfrm>
+            <a:off x="2766218" y="2760203"/>
+            <a:ext cx="1250230" cy="1203273"/>
+          </a:xfrm>
+          <a:prstGeom prst="roundRect">
+            <a:avLst>
+              <a:gd name="adj" fmla="val 4878"/>
+            </a:avLst>
+          </a:prstGeom>
+          <a:solidFill>
+            <a:srgbClr val="D8EFF0"/>
+          </a:solidFill>
+          <a:ln/>
+        </p:spPr>
+      </p:sp>
+      <p:sp>
+        <p:nvSpPr>
+          <p:cNvPr id="19" name="원안그림-2-12"/>
+          <p:cNvSpPr/>
+          <p:nvPr/>
+        </p:nvSpPr>
+        <p:spPr>
+          <a:xfrm>
+            <a:off x="3217944" y="2877595"/>
+            <a:ext cx="252394" cy="252394"/>
+          </a:xfrm>
+          <a:prstGeom prst="ellipse">
+            <a:avLst/>
+          </a:prstGeom>
+          <a:solidFill>
+            <a:srgbClr val="FDE6A5"/>
+          </a:solidFill>
+          <a:ln/>
+        </p:spPr>
+      </p:sp>
+      <p:sp>
+        <p:nvSpPr>
+          <p:cNvPr id="20" name="원안그림-2-13"/>
+          <p:cNvSpPr/>
+          <p:nvPr/>
+        </p:nvSpPr>
+        <p:spPr>
+          <a:xfrm rot="10800000">
+            <a:off x="3177561" y="3099702"/>
+            <a:ext cx="343255" cy="383639"/>
+          </a:xfrm>
+          <a:prstGeom prst="ellipse">
+            <a:avLst/>
+          </a:prstGeom>
+          <a:solidFill>
+            <a:srgbClr val="F7DDE5"/>
+          </a:solidFill>
+          <a:ln w="9525">
+            <a:solidFill>
+              <a:srgbClr val="F7DDE5"/>
+            </a:solidFill>
+            <a:prstDash val="solid"/>
+          </a:ln>
+        </p:spPr>
+      </p:sp>
+      <p:sp>
+        <p:nvSpPr>
+          <p:cNvPr id="21" name="원안그림-2-14"/>
+          <p:cNvSpPr/>
+          <p:nvPr/>
+        </p:nvSpPr>
+        <p:spPr>
+          <a:xfrm>
+            <a:off x="3192704" y="3210755"/>
+            <a:ext cx="277633" cy="50479"/>
+          </a:xfrm>
+          <a:prstGeom prst="line">
+            <a:avLst/>
+          </a:prstGeom>
+          <a:solidFill>
+            <a:srgbClr val="16243A"/>
+          </a:solidFill>
+          <a:ln w="25400">
+            <a:solidFill>
+              <a:srgbClr val="16243A"/>
+            </a:solidFill>
+            <a:prstDash val="solid"/>
+          </a:ln>
+        </p:spPr>
+      </p:sp>
+      <p:sp>
+        <p:nvSpPr>
+          <p:cNvPr id="22" name="원안그림-2-15"/>
+          <p:cNvSpPr/>
+          <p:nvPr/>
+        </p:nvSpPr>
+        <p:spPr>
+          <a:xfrm flipH="1">
+            <a:off x="3152321" y="3422766"/>
+            <a:ext cx="70670" cy="181723"/>
+          </a:xfrm>
+          <a:prstGeom prst="line">
+            <a:avLst/>
+          </a:prstGeom>
+          <a:solidFill>
+            <a:srgbClr val="16243A"/>
+          </a:solidFill>
+          <a:ln w="25400">
+            <a:solidFill>
+              <a:srgbClr val="16243A"/>
+            </a:solidFill>
+            <a:prstDash val="solid"/>
+          </a:ln>
+        </p:spPr>
+      </p:sp>
+      <p:sp>
+        <p:nvSpPr>
+          <p:cNvPr id="23" name="원안그림-2-16"/>
+          <p:cNvSpPr/>
+          <p:nvPr/>
+        </p:nvSpPr>
+        <p:spPr>
+          <a:xfrm>
+            <a:off x="3414811" y="3422766"/>
+            <a:ext cx="70670" cy="181723"/>
+          </a:xfrm>
+          <a:prstGeom prst="line">
+            <a:avLst/>
+          </a:prstGeom>
+          <a:solidFill>
+            <a:srgbClr val="16243A"/>
+          </a:solidFill>
+          <a:ln w="25400">
+            <a:solidFill>
+              <a:srgbClr val="16243A"/>
+            </a:solidFill>
+            <a:prstDash val="solid"/>
+          </a:ln>
+        </p:spPr>
+      </p:sp>
+      <p:sp>
+        <p:nvSpPr>
+          <p:cNvPr id="24" name="원안그림-2-17"/>
+          <p:cNvSpPr/>
+          <p:nvPr/>
+        </p:nvSpPr>
+        <p:spPr>
+          <a:xfrm>
+            <a:off x="3283566" y="2988648"/>
+            <a:ext cx="17667" cy="17667"/>
+          </a:xfrm>
+          <a:prstGeom prst="ellipse">
+            <a:avLst/>
+          </a:prstGeom>
+          <a:solidFill>
+            <a:srgbClr val="16243A"/>
+          </a:solidFill>
+          <a:ln/>
+        </p:spPr>
+      </p:sp>
+      <p:sp>
+        <p:nvSpPr>
+          <p:cNvPr id="25" name="원안그림-2-18"/>
+          <p:cNvSpPr/>
+          <p:nvPr/>
+        </p:nvSpPr>
+        <p:spPr>
+          <a:xfrm>
+            <a:off x="3369380" y="2988648"/>
+            <a:ext cx="17667" cy="17667"/>
+          </a:xfrm>
+          <a:prstGeom prst="ellipse">
+            <a:avLst/>
+          </a:prstGeom>
+          <a:solidFill>
+            <a:srgbClr val="16243A"/>
+          </a:solidFill>
+          <a:ln/>
+        </p:spPr>
+      </p:sp>
+      <p:sp>
+        <p:nvSpPr>
+          <p:cNvPr id="26" name="원안그림-2-19"/>
+          <p:cNvSpPr txBox="1"/>
+          <p:nvPr/>
+        </p:nvSpPr>
+        <p:spPr>
+          <a:xfrm>
+            <a:off x="1287073" y="4221739"/>
+            <a:ext cx="704355" cy="176089"/>
+          </a:xfrm>
+          <a:prstGeom prst="rect">
+            <a:avLst/>
+          </a:prstGeom>
+          <a:noFill/>
+          <a:ln/>
+        </p:spPr>
+        <p:txBody>
+          <a:bodyPr wrap="square" lIns="0" tIns="0" rIns="0" bIns="0" rtlCol="0" anchor="ctr"/>
+          <a:lstStyle/>
+          <a:p>
+            <a:pPr algn="ctr" indent="0" marL="0">
+              <a:buNone/>
+            </a:pPr>
+            <a:r>
+              <a:rPr lang="en-US" sz="700" b="1" dirty="0">
+                <a:solidFill>
+                  <a:srgbClr val="617287"/>
+                </a:solidFill>
+              </a:rPr>
+              <a:t>SCAN</a:t>
+            </a:r>
+            <a:endParaRPr lang="en-US" sz="700" dirty="0"/>
+          </a:p>
+        </p:txBody>
+      </p:sp>
+      <p:sp>
+        <p:nvSpPr>
+          <p:cNvPr id="27" name="원안그림-2-20"/>
+          <p:cNvSpPr txBox="1"/>
+          <p:nvPr/>
+        </p:nvSpPr>
+        <p:spPr>
+          <a:xfrm>
+            <a:off x="2707521" y="4221739"/>
+            <a:ext cx="1350013" cy="176089"/>
+          </a:xfrm>
+          <a:prstGeom prst="rect">
+            <a:avLst/>
+          </a:prstGeom>
+          <a:noFill/>
+          <a:ln/>
+        </p:spPr>
+        <p:txBody>
+          <a:bodyPr wrap="square" lIns="0" tIns="0" rIns="0" bIns="0" rtlCol="0" anchor="ctr"/>
+          <a:lstStyle/>
+          <a:p>
+            <a:pPr algn="ctr" indent="0" marL="0">
+              <a:buNone/>
+            </a:pPr>
+            <a:r>
+              <a:rPr lang="en-US" sz="700" b="1" dirty="0">
+                <a:solidFill>
+                  <a:srgbClr val="617287"/>
+                </a:solidFill>
+              </a:rPr>
+              <a:t>2D / 3D + α</a:t>
+            </a:r>
+            <a:endParaRPr lang="en-US" sz="700" dirty="0"/>
+          </a:p>
+        </p:txBody>
+      </p:sp>
+      <p:sp>
+        <p:nvSpPr>
+          <p:cNvPr id="28" name="original"/>
           <p:cNvSpPr/>
           <p:nvPr/>
         </p:nvSpPr>
@@ -9372,7 +9796,7 @@
       </p:sp>
       <p:sp>
         <p:nvSpPr>
-          <p:cNvPr id="7" name="chip-2-1"/>
+          <p:cNvPr id="29" name="chip-2-1"/>
           <p:cNvSpPr txBox="1"/>
           <p:nvPr/>
         </p:nvSpPr>
@@ -9412,7 +9836,7 @@
       </p:sp>
       <p:sp>
         <p:nvSpPr>
-          <p:cNvPr id="8" name="Text 6"/>
+          <p:cNvPr id="30" name="Text 27"/>
           <p:cNvSpPr txBox="1"/>
           <p:nvPr/>
         </p:nvSpPr>
@@ -9459,7 +9883,7 @@
       </p:sp>
       <p:sp>
         <p:nvSpPr>
-          <p:cNvPr id="9" name="chip-2-2"/>
+          <p:cNvPr id="31" name="chip-2-2"/>
           <p:cNvSpPr txBox="1"/>
           <p:nvPr/>
         </p:nvSpPr>
@@ -9499,7 +9923,7 @@
       </p:sp>
       <p:sp>
         <p:nvSpPr>
-          <p:cNvPr id="10" name="Text 8"/>
+          <p:cNvPr id="32" name="Text 29"/>
           <p:cNvSpPr txBox="1"/>
           <p:nvPr/>
         </p:nvSpPr>
@@ -9546,7 +9970,7 @@
       </p:sp>
       <p:sp>
         <p:nvSpPr>
-          <p:cNvPr id="11" name="Text 9"/>
+          <p:cNvPr id="33" name="Text 30"/>
           <p:cNvSpPr txBox="1"/>
           <p:nvPr/>
         </p:nvSpPr>
@@ -9582,7 +10006,7 @@
       </p:sp>
       <p:sp>
         <p:nvSpPr>
-          <p:cNvPr id="12" name="prop-0"/>
+          <p:cNvPr id="34" name="prop-0"/>
           <p:cNvSpPr/>
           <p:nvPr/>
         </p:nvSpPr>
@@ -9609,7 +10033,7 @@
       </p:sp>
       <p:sp>
         <p:nvSpPr>
-          <p:cNvPr id="13" name="chip-연출"/>
+          <p:cNvPr id="35" name="chip-연출"/>
           <p:cNvSpPr txBox="1"/>
           <p:nvPr/>
         </p:nvSpPr>
@@ -9649,7 +10073,7 @@
       </p:sp>
       <p:sp>
         <p:nvSpPr>
-          <p:cNvPr id="14" name="Text 12"/>
+          <p:cNvPr id="36" name="Text 33"/>
           <p:cNvSpPr txBox="1"/>
           <p:nvPr/>
         </p:nvSpPr>
@@ -9685,7 +10109,7 @@
       </p:sp>
       <p:sp>
         <p:nvSpPr>
-          <p:cNvPr id="15" name="Text 13"/>
+          <p:cNvPr id="37" name="Text 34"/>
           <p:cNvSpPr txBox="1"/>
           <p:nvPr/>
         </p:nvSpPr>
@@ -9721,7 +10145,7 @@
       </p:sp>
       <p:sp>
         <p:nvSpPr>
-          <p:cNvPr id="16" name="prop-1"/>
+          <p:cNvPr id="38" name="prop-1"/>
           <p:cNvSpPr/>
           <p:nvPr/>
         </p:nvSpPr>
@@ -9748,7 +10172,7 @@
       </p:sp>
       <p:sp>
         <p:nvSpPr>
-          <p:cNvPr id="17" name="chip-체험"/>
+          <p:cNvPr id="39" name="chip-체험"/>
           <p:cNvSpPr txBox="1"/>
           <p:nvPr/>
         </p:nvSpPr>
@@ -9788,7 +10212,7 @@
       </p:sp>
       <p:sp>
         <p:nvSpPr>
-          <p:cNvPr id="18" name="Text 16"/>
+          <p:cNvPr id="40" name="Text 37"/>
           <p:cNvSpPr txBox="1"/>
           <p:nvPr/>
         </p:nvSpPr>
@@ -9824,7 +10248,7 @@
       </p:sp>
       <p:sp>
         <p:nvSpPr>
-          <p:cNvPr id="19" name="Text 17"/>
+          <p:cNvPr id="41" name="Text 38"/>
           <p:cNvSpPr txBox="1"/>
           <p:nvPr/>
         </p:nvSpPr>
@@ -9860,7 +10284,7 @@
       </p:sp>
       <p:sp>
         <p:nvSpPr>
-          <p:cNvPr id="20" name="prop-2"/>
+          <p:cNvPr id="42" name="prop-2"/>
           <p:cNvSpPr/>
           <p:nvPr/>
         </p:nvSpPr>
@@ -9887,7 +10311,7 @@
       </p:sp>
       <p:sp>
         <p:nvSpPr>
-          <p:cNvPr id="21" name="chip-운영"/>
+          <p:cNvPr id="43" name="chip-운영"/>
           <p:cNvSpPr txBox="1"/>
           <p:nvPr/>
         </p:nvSpPr>
@@ -9927,7 +10351,7 @@
       </p:sp>
       <p:sp>
         <p:nvSpPr>
-          <p:cNvPr id="22" name="Text 20"/>
+          <p:cNvPr id="44" name="Text 41"/>
           <p:cNvSpPr txBox="1"/>
           <p:nvPr/>
         </p:nvSpPr>
@@ -9963,7 +10387,7 @@
       </p:sp>
       <p:sp>
         <p:nvSpPr>
-          <p:cNvPr id="23" name="Text 21"/>
+          <p:cNvPr id="45" name="Text 42"/>
           <p:cNvSpPr txBox="1"/>
           <p:nvPr/>
         </p:nvSpPr>
@@ -9999,7 +10423,7 @@
       </p:sp>
       <p:sp>
         <p:nvSpPr>
-          <p:cNvPr id="24" name="prop-3"/>
+          <p:cNvPr id="46" name="prop-3"/>
           <p:cNvSpPr/>
           <p:nvPr/>
         </p:nvSpPr>
@@ -10026,7 +10450,7 @@
       </p:sp>
       <p:sp>
         <p:nvSpPr>
-          <p:cNvPr id="25" name="chip-연출"/>
+          <p:cNvPr id="47" name="chip-연출"/>
           <p:cNvSpPr txBox="1"/>
           <p:nvPr/>
         </p:nvSpPr>
@@ -10066,7 +10490,7 @@
       </p:sp>
       <p:sp>
         <p:nvSpPr>
-          <p:cNvPr id="26" name="Text 24"/>
+          <p:cNvPr id="48" name="Text 45"/>
           <p:cNvSpPr txBox="1"/>
           <p:nvPr/>
         </p:nvSpPr>
@@ -10102,7 +10526,7 @@
       </p:sp>
       <p:sp>
         <p:nvSpPr>
-          <p:cNvPr id="27" name="Text 25"/>
+          <p:cNvPr id="49" name="Text 46"/>
           <p:cNvSpPr txBox="1"/>
           <p:nvPr/>
         </p:nvSpPr>
@@ -10138,7 +10562,7 @@
       </p:sp>
       <p:sp>
         <p:nvSpPr>
-          <p:cNvPr id="28" name="decision-pill"/>
+          <p:cNvPr id="50" name="decision-pill"/>
           <p:cNvSpPr txBox="1"/>
           <p:nvPr/>
         </p:nvSpPr>
@@ -10178,7 +10602,7 @@
       </p:sp>
       <p:sp>
         <p:nvSpPr>
-          <p:cNvPr id="29" name="Text 27"/>
+          <p:cNvPr id="51" name="Text 48"/>
           <p:cNvSpPr txBox="1"/>
           <p:nvPr/>
         </p:nvSpPr>
@@ -10225,7 +10649,7 @@
       </p:sp>
       <p:sp>
         <p:nvSpPr>
-          <p:cNvPr id="30" name="Slide Number Placeholder 0"/>
+          <p:cNvPr id="52" name="Slide Number Placeholder 0"/>
           <p:cNvSpPr>
             <a:spLocks noGrp="1"/>
           </p:cNvSpPr>
@@ -10268,636 +10692,6 @@
           </a:p>
         </p:txBody>
       </p:sp>
-      <p:grpSp>
-        <p:nvGrpSpPr>
-          <p:cNvPr id="31" name="원안 그림"/>
-          <p:cNvGrpSpPr/>
-          <p:nvPr/>
-        </p:nvGrpSpPr>
-        <p:grpSpPr>
-          <a:xfrm>
-            <a:off x="876199" y="2331720"/>
-            <a:ext cx="3551122" cy="2212848"/>
-            <a:chOff x="6144768" y="2331720"/>
-            <a:chExt cx="5532120" cy="3447288"/>
-          </a:xfrm>
-        </p:grpSpPr>
-        <p:sp>
-          <p:nvSpPr>
-            <p:cNvPr id="32" name="Shape 18"/>
-            <p:cNvSpPr/>
-            <p:nvPr/>
-          </p:nvSpPr>
-          <p:spPr>
-            <a:xfrm>
-              <a:off x="6144768" y="2331720"/>
-              <a:ext cx="5532120" cy="3447288"/>
-            </a:xfrm>
-            <a:prstGeom prst="roundRect">
-              <a:avLst>
-                <a:gd name="adj" fmla="val 2653"/>
-              </a:avLst>
-            </a:prstGeom>
-            <a:solidFill>
-              <a:srgbClr val="EAF1F8"/>
-            </a:solidFill>
-            <a:ln w="12700">
-              <a:solidFill>
-                <a:srgbClr val="EAF1F8">
-                  <a:alpha val="0"/>
-                </a:srgbClr>
-              </a:solidFill>
-              <a:prstDash val="solid"/>
-            </a:ln>
-          </p:spPr>
-        </p:sp>
-        <p:sp>
-          <p:nvSpPr>
-            <p:cNvPr id="33" name="Shape 19"/>
-            <p:cNvSpPr/>
-            <p:nvPr/>
-          </p:nvSpPr>
-          <p:spPr>
-            <a:xfrm>
-              <a:off x="6455664" y="2926080"/>
-              <a:ext cx="1554480" cy="2139696"/>
-            </a:xfrm>
-            <a:prstGeom prst="roundRect">
-              <a:avLst>
-                <a:gd name="adj" fmla="val 5882"/>
-              </a:avLst>
-            </a:prstGeom>
-            <a:solidFill>
-              <a:srgbClr val="FFFFFF"/>
-            </a:solidFill>
-            <a:ln w="12700">
-              <a:solidFill>
-                <a:srgbClr val="DFE6EB"/>
-              </a:solidFill>
-              <a:prstDash val="solid"/>
-            </a:ln>
-          </p:spPr>
-        </p:sp>
-        <p:sp>
-          <p:nvSpPr>
-            <p:cNvPr id="34" name="Shape 20"/>
-            <p:cNvSpPr/>
-            <p:nvPr/>
-          </p:nvSpPr>
-          <p:spPr>
-            <a:xfrm>
-              <a:off x="6926031" y="3337560"/>
-              <a:ext cx="361188" cy="361188"/>
-            </a:xfrm>
-            <a:prstGeom prst="ellipse">
-              <a:avLst>
-                <a:gd name="adj" fmla="val 25316"/>
-              </a:avLst>
-            </a:prstGeom>
-            <a:solidFill>
-              <a:srgbClr val="FDE6A5"/>
-            </a:solidFill>
-            <a:ln w="12700">
-              <a:solidFill>
-                <a:srgbClr val="FDE6A5">
-                  <a:alpha val="0"/>
-                </a:srgbClr>
-              </a:solidFill>
-              <a:prstDash val="solid"/>
-            </a:ln>
-          </p:spPr>
-        </p:sp>
-        <p:sp>
-          <p:nvSpPr>
-            <p:cNvPr id="35" name="Shape 21"/>
-            <p:cNvSpPr/>
-            <p:nvPr/>
-          </p:nvSpPr>
-          <p:spPr>
-            <a:xfrm rot="10800000">
-              <a:off x="6868241" y="3655405"/>
-              <a:ext cx="491216" cy="549006"/>
-            </a:xfrm>
-            <a:prstGeom prst="arc">
-              <a:avLst>
-                <a:gd name="adj" fmla="val 18615"/>
-              </a:avLst>
-            </a:prstGeom>
-            <a:solidFill>
-              <a:srgbClr val="F7DDE5"/>
-            </a:solidFill>
-            <a:ln w="12700">
-              <a:solidFill>
-                <a:srgbClr val="F7DDE5"/>
-              </a:solidFill>
-              <a:prstDash val="solid"/>
-            </a:ln>
-          </p:spPr>
-        </p:sp>
-        <p:sp>
-          <p:nvSpPr>
-            <p:cNvPr id="36" name="Shape 22"/>
-            <p:cNvSpPr/>
-            <p:nvPr/>
-          </p:nvSpPr>
-          <p:spPr>
-            <a:xfrm>
-              <a:off x="6889913" y="3814328"/>
-              <a:ext cx="397307" cy="72238"/>
-            </a:xfrm>
-            <a:prstGeom prst="line">
-              <a:avLst>
-                <a:gd name="adj" fmla="val 126582"/>
-              </a:avLst>
-            </a:prstGeom>
-            <a:solidFill>
-              <a:srgbClr val="16243A"/>
-            </a:solidFill>
-            <a:ln w="38100">
-              <a:solidFill>
-                <a:srgbClr val="16243A"/>
-              </a:solidFill>
-              <a:prstDash val="solid"/>
-            </a:ln>
-          </p:spPr>
-        </p:sp>
-        <p:sp>
-          <p:nvSpPr>
-            <p:cNvPr id="37" name="Shape 23"/>
-            <p:cNvSpPr/>
-            <p:nvPr/>
-          </p:nvSpPr>
-          <p:spPr>
-            <a:xfrm flipH="1">
-              <a:off x="6832122" y="4117726"/>
-              <a:ext cx="101133" cy="260055"/>
-            </a:xfrm>
-            <a:prstGeom prst="line">
-              <a:avLst>
-                <a:gd name="adj" fmla="val -90416"/>
-              </a:avLst>
-            </a:prstGeom>
-            <a:solidFill>
-              <a:srgbClr val="16243A"/>
-            </a:solidFill>
-            <a:ln w="38100">
-              <a:solidFill>
-                <a:srgbClr val="16243A"/>
-              </a:solidFill>
-              <a:prstDash val="solid"/>
-            </a:ln>
-          </p:spPr>
-        </p:sp>
-        <p:sp>
-          <p:nvSpPr>
-            <p:cNvPr id="38" name="Shape 24"/>
-            <p:cNvSpPr/>
-            <p:nvPr/>
-          </p:nvSpPr>
-          <p:spPr>
-            <a:xfrm>
-              <a:off x="7207758" y="4117726"/>
-              <a:ext cx="101133" cy="260055"/>
-            </a:xfrm>
-            <a:prstGeom prst="line">
-              <a:avLst>
-                <a:gd name="adj" fmla="val 90416"/>
-              </a:avLst>
-            </a:prstGeom>
-            <a:solidFill>
-              <a:srgbClr val="16243A"/>
-            </a:solidFill>
-            <a:ln w="38100">
-              <a:solidFill>
-                <a:srgbClr val="16243A"/>
-              </a:solidFill>
-              <a:prstDash val="solid"/>
-            </a:ln>
-          </p:spPr>
-        </p:sp>
-        <p:sp>
-          <p:nvSpPr>
-            <p:cNvPr id="39" name="Shape 25"/>
-            <p:cNvSpPr/>
-            <p:nvPr/>
-          </p:nvSpPr>
-          <p:spPr>
-            <a:xfrm>
-              <a:off x="7019940" y="3496483"/>
-              <a:ext cx="25283" cy="25283"/>
-            </a:xfrm>
-            <a:prstGeom prst="ellipse">
-              <a:avLst>
-                <a:gd name="adj" fmla="val 361666"/>
-              </a:avLst>
-            </a:prstGeom>
-            <a:solidFill>
-              <a:srgbClr val="16243A"/>
-            </a:solidFill>
-            <a:ln w="12700">
-              <a:solidFill>
-                <a:srgbClr val="16243A">
-                  <a:alpha val="0"/>
-                </a:srgbClr>
-              </a:solidFill>
-              <a:prstDash val="solid"/>
-            </a:ln>
-          </p:spPr>
-        </p:sp>
-        <p:sp>
-          <p:nvSpPr>
-            <p:cNvPr id="40" name="Shape 26"/>
-            <p:cNvSpPr/>
-            <p:nvPr/>
-          </p:nvSpPr>
-          <p:spPr>
-            <a:xfrm>
-              <a:off x="7142744" y="3496483"/>
-              <a:ext cx="25283" cy="25283"/>
-            </a:xfrm>
-            <a:prstGeom prst="ellipse">
-              <a:avLst>
-                <a:gd name="adj" fmla="val 361666"/>
-              </a:avLst>
-            </a:prstGeom>
-            <a:solidFill>
-              <a:srgbClr val="16243A"/>
-            </a:solidFill>
-            <a:ln w="12700">
-              <a:solidFill>
-                <a:srgbClr val="16243A">
-                  <a:alpha val="0"/>
-                </a:srgbClr>
-              </a:solidFill>
-              <a:prstDash val="solid"/>
-            </a:ln>
-          </p:spPr>
-        </p:sp>
-        <p:sp>
-          <p:nvSpPr>
-            <p:cNvPr id="41" name="Shape 27"/>
-            <p:cNvSpPr/>
-            <p:nvPr/>
-          </p:nvSpPr>
-          <p:spPr>
-            <a:xfrm>
-              <a:off x="8183880" y="3813048"/>
-              <a:ext cx="548640" cy="685800"/>
-            </a:xfrm>
-            <a:prstGeom prst="chevron">
-              <a:avLst>
-                <a:gd name="adj" fmla="val 16667"/>
-              </a:avLst>
-            </a:prstGeom>
-            <a:solidFill>
-              <a:srgbClr val="5DCDC1"/>
-            </a:solidFill>
-            <a:ln w="12700">
-              <a:solidFill>
-                <a:srgbClr val="5DCDC1">
-                  <a:alpha val="0"/>
-                </a:srgbClr>
-              </a:solidFill>
-              <a:prstDash val="solid"/>
-            </a:ln>
-          </p:spPr>
-        </p:sp>
-        <p:sp>
-          <p:nvSpPr>
-            <p:cNvPr id="42" name="Shape 28"/>
-            <p:cNvSpPr/>
-            <p:nvPr/>
-          </p:nvSpPr>
-          <p:spPr>
-            <a:xfrm>
-              <a:off x="8942832" y="2843784"/>
-              <a:ext cx="2249424" cy="2340864"/>
-            </a:xfrm>
-            <a:prstGeom prst="roundRect">
-              <a:avLst>
-                <a:gd name="adj" fmla="val 4065"/>
-              </a:avLst>
-            </a:prstGeom>
-            <a:solidFill>
-              <a:srgbClr val="16243A"/>
-            </a:solidFill>
-            <a:ln w="12700">
-              <a:solidFill>
-                <a:srgbClr val="16243A">
-                  <a:alpha val="0"/>
-                </a:srgbClr>
-              </a:solidFill>
-              <a:prstDash val="solid"/>
-            </a:ln>
-          </p:spPr>
-        </p:sp>
-        <p:sp>
-          <p:nvSpPr>
-            <p:cNvPr id="43" name="Shape 29"/>
-            <p:cNvSpPr/>
-            <p:nvPr/>
-          </p:nvSpPr>
-          <p:spPr>
-            <a:xfrm>
-              <a:off x="9089136" y="2999232"/>
-              <a:ext cx="1947672" cy="1874520"/>
-            </a:xfrm>
-            <a:prstGeom prst="roundRect">
-              <a:avLst>
-                <a:gd name="adj" fmla="val 4878"/>
-              </a:avLst>
-            </a:prstGeom>
-            <a:solidFill>
-              <a:srgbClr val="D8EFF0"/>
-            </a:solidFill>
-            <a:ln w="12700">
-              <a:solidFill>
-                <a:srgbClr val="D8EFF0">
-                  <a:alpha val="0"/>
-                </a:srgbClr>
-              </a:solidFill>
-              <a:prstDash val="solid"/>
-            </a:ln>
-          </p:spPr>
-        </p:sp>
-        <p:sp>
-          <p:nvSpPr>
-            <p:cNvPr id="44" name="Shape 30"/>
-            <p:cNvSpPr/>
-            <p:nvPr/>
-          </p:nvSpPr>
-          <p:spPr>
-            <a:xfrm>
-              <a:off x="9792858" y="3182112"/>
-              <a:ext cx="393192" cy="393192"/>
-            </a:xfrm>
-            <a:prstGeom prst="ellipse">
-              <a:avLst>
-                <a:gd name="adj" fmla="val 23256"/>
-              </a:avLst>
-            </a:prstGeom>
-            <a:solidFill>
-              <a:srgbClr val="FDE6A5"/>
-            </a:solidFill>
-            <a:ln w="12700">
-              <a:solidFill>
-                <a:srgbClr val="FDE6A5">
-                  <a:alpha val="0"/>
-                </a:srgbClr>
-              </a:solidFill>
-              <a:prstDash val="solid"/>
-            </a:ln>
-          </p:spPr>
-        </p:sp>
-        <p:sp>
-          <p:nvSpPr>
-            <p:cNvPr id="45" name="Shape 31"/>
-            <p:cNvSpPr/>
-            <p:nvPr/>
-          </p:nvSpPr>
-          <p:spPr>
-            <a:xfrm rot="10800000">
-              <a:off x="9729948" y="3528121"/>
-              <a:ext cx="534741" cy="597652"/>
-            </a:xfrm>
-            <a:prstGeom prst="arc">
-              <a:avLst>
-                <a:gd name="adj" fmla="val 17100"/>
-              </a:avLst>
-            </a:prstGeom>
-            <a:solidFill>
-              <a:srgbClr val="F7DDE5"/>
-            </a:solidFill>
-            <a:ln w="12700">
-              <a:solidFill>
-                <a:srgbClr val="F7DDE5"/>
-              </a:solidFill>
-              <a:prstDash val="solid"/>
-            </a:ln>
-          </p:spPr>
-        </p:sp>
-        <p:sp>
-          <p:nvSpPr>
-            <p:cNvPr id="46" name="Shape 32"/>
-            <p:cNvSpPr/>
-            <p:nvPr/>
-          </p:nvSpPr>
-          <p:spPr>
-            <a:xfrm>
-              <a:off x="9753539" y="3701125"/>
-              <a:ext cx="432511" cy="78638"/>
-            </a:xfrm>
-            <a:prstGeom prst="line">
-              <a:avLst>
-                <a:gd name="adj" fmla="val 116280"/>
-              </a:avLst>
-            </a:prstGeom>
-            <a:solidFill>
-              <a:srgbClr val="16243A"/>
-            </a:solidFill>
-            <a:ln w="38100">
-              <a:solidFill>
-                <a:srgbClr val="16243A"/>
-              </a:solidFill>
-              <a:prstDash val="solid"/>
-            </a:ln>
-          </p:spPr>
-        </p:sp>
-        <p:sp>
-          <p:nvSpPr>
-            <p:cNvPr id="47" name="Shape 33"/>
-            <p:cNvSpPr/>
-            <p:nvPr/>
-          </p:nvSpPr>
-          <p:spPr>
-            <a:xfrm flipH="1">
-              <a:off x="9690628" y="4031407"/>
-              <a:ext cx="110094" cy="283098"/>
-            </a:xfrm>
-            <a:prstGeom prst="line">
-              <a:avLst>
-                <a:gd name="adj" fmla="val -83056"/>
-              </a:avLst>
-            </a:prstGeom>
-            <a:solidFill>
-              <a:srgbClr val="16243A"/>
-            </a:solidFill>
-            <a:ln w="38100">
-              <a:solidFill>
-                <a:srgbClr val="16243A"/>
-              </a:solidFill>
-              <a:prstDash val="solid"/>
-            </a:ln>
-          </p:spPr>
-        </p:sp>
-        <p:sp>
-          <p:nvSpPr>
-            <p:cNvPr id="48" name="Shape 34"/>
-            <p:cNvSpPr/>
-            <p:nvPr/>
-          </p:nvSpPr>
-          <p:spPr>
-            <a:xfrm>
-              <a:off x="10099548" y="4031407"/>
-              <a:ext cx="110094" cy="283098"/>
-            </a:xfrm>
-            <a:prstGeom prst="line">
-              <a:avLst>
-                <a:gd name="adj" fmla="val 83056"/>
-              </a:avLst>
-            </a:prstGeom>
-            <a:solidFill>
-              <a:srgbClr val="16243A"/>
-            </a:solidFill>
-            <a:ln w="38100">
-              <a:solidFill>
-                <a:srgbClr val="16243A"/>
-              </a:solidFill>
-              <a:prstDash val="solid"/>
-            </a:ln>
-          </p:spPr>
-        </p:sp>
-        <p:sp>
-          <p:nvSpPr>
-            <p:cNvPr id="49" name="Shape 35"/>
-            <p:cNvSpPr/>
-            <p:nvPr/>
-          </p:nvSpPr>
-          <p:spPr>
-            <a:xfrm>
-              <a:off x="9895088" y="3355116"/>
-              <a:ext cx="27523" cy="27523"/>
-            </a:xfrm>
-            <a:prstGeom prst="ellipse">
-              <a:avLst>
-                <a:gd name="adj" fmla="val 332231"/>
-              </a:avLst>
-            </a:prstGeom>
-            <a:solidFill>
-              <a:srgbClr val="16243A"/>
-            </a:solidFill>
-            <a:ln w="12700">
-              <a:solidFill>
-                <a:srgbClr val="16243A">
-                  <a:alpha val="0"/>
-                </a:srgbClr>
-              </a:solidFill>
-              <a:prstDash val="solid"/>
-            </a:ln>
-          </p:spPr>
-        </p:sp>
-        <p:sp>
-          <p:nvSpPr>
-            <p:cNvPr id="50" name="Shape 36"/>
-            <p:cNvSpPr/>
-            <p:nvPr/>
-          </p:nvSpPr>
-          <p:spPr>
-            <a:xfrm>
-              <a:off x="10028773" y="3355116"/>
-              <a:ext cx="27523" cy="27523"/>
-            </a:xfrm>
-            <a:prstGeom prst="ellipse">
-              <a:avLst>
-                <a:gd name="adj" fmla="val 332231"/>
-              </a:avLst>
-            </a:prstGeom>
-            <a:solidFill>
-              <a:srgbClr val="16243A"/>
-            </a:solidFill>
-            <a:ln w="12700">
-              <a:solidFill>
-                <a:srgbClr val="16243A">
-                  <a:alpha val="0"/>
-                </a:srgbClr>
-              </a:solidFill>
-              <a:prstDash val="solid"/>
-            </a:ln>
-          </p:spPr>
-        </p:sp>
-        <p:sp>
-          <p:nvSpPr>
-            <p:cNvPr id="51" name="Text 37"/>
-            <p:cNvSpPr/>
-            <p:nvPr/>
-          </p:nvSpPr>
-          <p:spPr>
-            <a:xfrm>
-              <a:off x="6784848" y="5276088"/>
-              <a:ext cx="1097280" cy="274320"/>
-            </a:xfrm>
-            <a:prstGeom prst="rect">
-              <a:avLst/>
-            </a:prstGeom>
-            <a:noFill/>
-            <a:ln/>
-          </p:spPr>
-          <p:txBody>
-            <a:bodyPr wrap="square" lIns="0" tIns="0" rIns="0" bIns="0" rtlCol="0" anchor="ctr">
-              <a:normAutofit/>
-            </a:bodyPr>
-            <a:lstStyle/>
-            <a:p>
-              <a:pPr algn="ctr" indent="0" marL="0">
-                <a:buNone/>
-              </a:pPr>
-              <a:r>
-                <a:rPr lang="en-US" sz="700" b="1" dirty="0">
-                  <a:solidFill>
-                    <a:srgbClr val="617287"/>
-                  </a:solidFill>
-                  <a:latin typeface="Malgun Gothic" pitchFamily="34" charset="0"/>
-                  <a:ea typeface="Malgun Gothic" pitchFamily="34" charset="-122"/>
-                  <a:cs typeface="Malgun Gothic" pitchFamily="34" charset="-120"/>
-                </a:rPr>
-                <a:t>SCAN</a:t>
-              </a:r>
-              <a:endParaRPr lang="en-US" sz="700" dirty="0"/>
-            </a:p>
-          </p:txBody>
-        </p:sp>
-        <p:sp>
-          <p:nvSpPr>
-            <p:cNvPr id="52" name="Text 38"/>
-            <p:cNvSpPr/>
-            <p:nvPr/>
-          </p:nvSpPr>
-          <p:spPr>
-            <a:xfrm>
-              <a:off x="8997696" y="5276088"/>
-              <a:ext cx="2103120" cy="274320"/>
-            </a:xfrm>
-            <a:prstGeom prst="rect">
-              <a:avLst/>
-            </a:prstGeom>
-            <a:noFill/>
-            <a:ln/>
-          </p:spPr>
-          <p:txBody>
-            <a:bodyPr wrap="square" lIns="0" tIns="0" rIns="0" bIns="0" rtlCol="0" anchor="ctr">
-              <a:normAutofit/>
-            </a:bodyPr>
-            <a:lstStyle/>
-            <a:p>
-              <a:pPr algn="ctr" indent="0" marL="0">
-                <a:buNone/>
-              </a:pPr>
-              <a:r>
-                <a:rPr lang="en-US" sz="700" b="1" dirty="0">
-                  <a:solidFill>
-                    <a:srgbClr val="617287"/>
-                  </a:solidFill>
-                  <a:latin typeface="Malgun Gothic" pitchFamily="34" charset="0"/>
-                  <a:ea typeface="Malgun Gothic" pitchFamily="34" charset="-122"/>
-                  <a:cs typeface="Malgun Gothic" pitchFamily="34" charset="-120"/>
-                </a:rPr>
-                <a:t>2D / 3D + α</a:t>
-              </a:r>
-              <a:endParaRPr lang="en-US" sz="700" dirty="0"/>
-            </a:p>
-          </p:txBody>
-        </p:sp>
-      </p:grpSp>
     </p:spTree>
   </p:cSld>
   <p:clrMapOvr>
@@ -10911,7 +10705,7 @@
   <p:cSld name="Slide 6">
     <p:spTree>
       <p:nvGrpSpPr>
-        <p:cNvPr id="1" name=""/>
+        <p:cNvPr id="2" name=""/>
         <p:cNvGrpSpPr/>
         <p:nvPr/>
       </p:nvGrpSpPr>
@@ -10925,7 +10719,7 @@
       </p:grpSpPr>
       <p:sp>
         <p:nvSpPr>
-          <p:cNvPr id="2" name="Text 1"/>
+          <p:cNvPr id="3" name="Text 1"/>
           <p:cNvSpPr/>
           <p:nvPr>
             <p:ph idx="101" type="title" hasCustomPrompt="1"/>
@@ -10963,7 +10757,7 @@
       </p:sp>
       <p:sp>
         <p:nvSpPr>
-          <p:cNvPr id="3" name="Text 1"/>
+          <p:cNvPr id="4" name="Text 1"/>
           <p:cNvSpPr/>
           <p:nvPr>
             <p:ph idx="102" type="body" hasCustomPrompt="1"/>
@@ -11001,7 +10795,7 @@
       </p:sp>
       <p:sp>
         <p:nvSpPr>
-          <p:cNvPr id="4" name="step-number"/>
+          <p:cNvPr id="5" name="step-number"/>
           <p:cNvSpPr txBox="1"/>
           <p:nvPr/>
         </p:nvSpPr>
@@ -11037,7 +10831,7 @@
       </p:sp>
       <p:sp>
         <p:nvSpPr>
-          <p:cNvPr id="5" name="Text 3"/>
+          <p:cNvPr id="6" name="Text 3"/>
           <p:cNvSpPr txBox="1"/>
           <p:nvPr/>
         </p:nvSpPr>
@@ -11073,7 +10867,485 @@
       </p:sp>
       <p:sp>
         <p:nvSpPr>
-          <p:cNvPr id="6" name="original"/>
+          <p:cNvPr id="7" name="원안그림-3-0"/>
+          <p:cNvSpPr/>
+          <p:nvPr/>
+        </p:nvSpPr>
+        <p:spPr>
+          <a:xfrm>
+            <a:off x="856040" y="2331720"/>
+            <a:ext cx="3591440" cy="2212848"/>
+          </a:xfrm>
+          <a:prstGeom prst="roundRect">
+            <a:avLst>
+              <a:gd name="adj" fmla="val 2674"/>
+            </a:avLst>
+          </a:prstGeom>
+          <a:solidFill>
+            <a:srgbClr val="DBEEF0"/>
+          </a:solidFill>
+          <a:ln/>
+        </p:spPr>
+      </p:sp>
+      <p:sp>
+        <p:nvSpPr>
+          <p:cNvPr id="8" name="원안그림-3-1"/>
+          <p:cNvSpPr/>
+          <p:nvPr/>
+        </p:nvSpPr>
+        <p:spPr>
+          <a:xfrm>
+            <a:off x="1080875" y="3396727"/>
+            <a:ext cx="3135854" cy="875672"/>
+          </a:xfrm>
+          <a:prstGeom prst="ellipse">
+            <a:avLst/>
+          </a:prstGeom>
+          <a:solidFill>
+            <a:srgbClr val="9BCFDA"/>
+          </a:solidFill>
+          <a:ln/>
+        </p:spPr>
+      </p:sp>
+      <p:sp>
+        <p:nvSpPr>
+          <p:cNvPr id="9" name="원안그림-3-2"/>
+          <p:cNvSpPr/>
+          <p:nvPr/>
+        </p:nvSpPr>
+        <p:spPr>
+          <a:xfrm>
+            <a:off x="1796796" y="3526895"/>
+            <a:ext cx="692255" cy="284002"/>
+          </a:xfrm>
+          <a:prstGeom prst="ellipse">
+            <a:avLst/>
+          </a:prstGeom>
+          <a:solidFill>
+            <a:srgbClr val="7ABBA0"/>
+          </a:solidFill>
+          <a:ln/>
+        </p:spPr>
+      </p:sp>
+      <p:sp>
+        <p:nvSpPr>
+          <p:cNvPr id="10" name="원안그림-3-3"/>
+          <p:cNvSpPr/>
+          <p:nvPr/>
+        </p:nvSpPr>
+        <p:spPr>
+          <a:xfrm>
+            <a:off x="3181305" y="3710312"/>
+            <a:ext cx="680421" cy="242585"/>
+          </a:xfrm>
+          <a:prstGeom prst="ellipse">
+            <a:avLst/>
+          </a:prstGeom>
+          <a:solidFill>
+            <a:srgbClr val="7ABBA0"/>
+          </a:solidFill>
+          <a:ln/>
+        </p:spPr>
+      </p:sp>
+      <p:sp>
+        <p:nvSpPr>
+          <p:cNvPr id="11" name="원안그림-3-4"/>
+          <p:cNvSpPr/>
+          <p:nvPr/>
+        </p:nvSpPr>
+        <p:spPr>
+          <a:xfrm>
+            <a:off x="1918680" y="2745889"/>
+            <a:ext cx="325419" cy="325419"/>
+          </a:xfrm>
+          <a:prstGeom prst="ellipse">
+            <a:avLst/>
+          </a:prstGeom>
+          <a:solidFill>
+            <a:srgbClr val="FDE6A5"/>
+          </a:solidFill>
+          <a:ln/>
+        </p:spPr>
+      </p:sp>
+      <p:sp>
+        <p:nvSpPr>
+          <p:cNvPr id="12" name="원안그림-3-5"/>
+          <p:cNvSpPr/>
+          <p:nvPr/>
+        </p:nvSpPr>
+        <p:spPr>
+          <a:xfrm rot="10800000">
+            <a:off x="1866613" y="3032258"/>
+            <a:ext cx="442569" cy="494636"/>
+          </a:xfrm>
+          <a:prstGeom prst="ellipse">
+            <a:avLst/>
+          </a:prstGeom>
+          <a:solidFill>
+            <a:srgbClr val="F7DDE5"/>
+          </a:solidFill>
+          <a:ln w="9525">
+            <a:solidFill>
+              <a:srgbClr val="F7DDE5"/>
+            </a:solidFill>
+            <a:prstDash val="solid"/>
+          </a:ln>
+        </p:spPr>
+      </p:sp>
+      <p:sp>
+        <p:nvSpPr>
+          <p:cNvPr id="13" name="원안그림-3-6"/>
+          <p:cNvSpPr/>
+          <p:nvPr/>
+        </p:nvSpPr>
+        <p:spPr>
+          <a:xfrm>
+            <a:off x="1886138" y="3175442"/>
+            <a:ext cx="357961" cy="65084"/>
+          </a:xfrm>
+          <a:prstGeom prst="line">
+            <a:avLst/>
+          </a:prstGeom>
+          <a:solidFill>
+            <a:srgbClr val="16243A"/>
+          </a:solidFill>
+          <a:ln w="25400">
+            <a:solidFill>
+              <a:srgbClr val="16243A"/>
+            </a:solidFill>
+            <a:prstDash val="solid"/>
+          </a:ln>
+        </p:spPr>
+      </p:sp>
+      <p:sp>
+        <p:nvSpPr>
+          <p:cNvPr id="14" name="원안그림-3-7"/>
+          <p:cNvSpPr/>
+          <p:nvPr/>
+        </p:nvSpPr>
+        <p:spPr>
+          <a:xfrm flipH="1">
+            <a:off x="1834071" y="3448794"/>
+            <a:ext cx="91118" cy="234301"/>
+          </a:xfrm>
+          <a:prstGeom prst="line">
+            <a:avLst/>
+          </a:prstGeom>
+          <a:solidFill>
+            <a:srgbClr val="16243A"/>
+          </a:solidFill>
+          <a:ln w="25400">
+            <a:solidFill>
+              <a:srgbClr val="16243A"/>
+            </a:solidFill>
+            <a:prstDash val="solid"/>
+          </a:ln>
+        </p:spPr>
+      </p:sp>
+      <p:sp>
+        <p:nvSpPr>
+          <p:cNvPr id="15" name="원안그림-3-8"/>
+          <p:cNvSpPr/>
+          <p:nvPr/>
+        </p:nvSpPr>
+        <p:spPr>
+          <a:xfrm>
+            <a:off x="2172507" y="3448794"/>
+            <a:ext cx="91118" cy="234301"/>
+          </a:xfrm>
+          <a:prstGeom prst="line">
+            <a:avLst/>
+          </a:prstGeom>
+          <a:solidFill>
+            <a:srgbClr val="16243A"/>
+          </a:solidFill>
+          <a:ln w="25400">
+            <a:solidFill>
+              <a:srgbClr val="16243A"/>
+            </a:solidFill>
+            <a:prstDash val="solid"/>
+          </a:ln>
+        </p:spPr>
+      </p:sp>
+      <p:sp>
+        <p:nvSpPr>
+          <p:cNvPr id="16" name="원안그림-3-9"/>
+          <p:cNvSpPr/>
+          <p:nvPr/>
+        </p:nvSpPr>
+        <p:spPr>
+          <a:xfrm>
+            <a:off x="2003289" y="2889074"/>
+            <a:ext cx="22779" cy="22779"/>
+          </a:xfrm>
+          <a:prstGeom prst="ellipse">
+            <a:avLst/>
+          </a:prstGeom>
+          <a:solidFill>
+            <a:srgbClr val="16243A"/>
+          </a:solidFill>
+          <a:ln/>
+        </p:spPr>
+      </p:sp>
+      <p:sp>
+        <p:nvSpPr>
+          <p:cNvPr id="17" name="원안그림-3-10"/>
+          <p:cNvSpPr/>
+          <p:nvPr/>
+        </p:nvSpPr>
+        <p:spPr>
+          <a:xfrm>
+            <a:off x="2113931" y="2889074"/>
+            <a:ext cx="22779" cy="22779"/>
+          </a:xfrm>
+          <a:prstGeom prst="ellipse">
+            <a:avLst/>
+          </a:prstGeom>
+          <a:solidFill>
+            <a:srgbClr val="16243A"/>
+          </a:solidFill>
+          <a:ln/>
+        </p:spPr>
+      </p:sp>
+      <p:sp>
+        <p:nvSpPr>
+          <p:cNvPr id="18" name="원안그림-3-11"/>
+          <p:cNvSpPr/>
+          <p:nvPr/>
+        </p:nvSpPr>
+        <p:spPr>
+          <a:xfrm>
+            <a:off x="3047824" y="2881974"/>
+            <a:ext cx="233710" cy="233710"/>
+          </a:xfrm>
+          <a:prstGeom prst="ellipse">
+            <a:avLst/>
+          </a:prstGeom>
+          <a:solidFill>
+            <a:srgbClr val="FDE6A5"/>
+          </a:solidFill>
+          <a:ln/>
+        </p:spPr>
+      </p:sp>
+      <p:sp>
+        <p:nvSpPr>
+          <p:cNvPr id="19" name="원안그림-3-12"/>
+          <p:cNvSpPr/>
+          <p:nvPr/>
+        </p:nvSpPr>
+        <p:spPr>
+          <a:xfrm rot="10800000">
+            <a:off x="3010431" y="3087638"/>
+            <a:ext cx="317846" cy="355239"/>
+          </a:xfrm>
+          <a:prstGeom prst="ellipse">
+            <a:avLst/>
+          </a:prstGeom>
+          <a:solidFill>
+            <a:srgbClr val="F7DDE5"/>
+          </a:solidFill>
+          <a:ln w="9525">
+            <a:solidFill>
+              <a:srgbClr val="F7DDE5"/>
+            </a:solidFill>
+            <a:prstDash val="solid"/>
+          </a:ln>
+        </p:spPr>
+      </p:sp>
+      <p:sp>
+        <p:nvSpPr>
+          <p:cNvPr id="20" name="원안그림-3-13"/>
+          <p:cNvSpPr/>
+          <p:nvPr/>
+        </p:nvSpPr>
+        <p:spPr>
+          <a:xfrm>
+            <a:off x="3024454" y="3190471"/>
+            <a:ext cx="257081" cy="46742"/>
+          </a:xfrm>
+          <a:prstGeom prst="line">
+            <a:avLst/>
+          </a:prstGeom>
+          <a:solidFill>
+            <a:srgbClr val="16243A"/>
+          </a:solidFill>
+          <a:ln w="25400">
+            <a:solidFill>
+              <a:srgbClr val="16243A"/>
+            </a:solidFill>
+            <a:prstDash val="solid"/>
+          </a:ln>
+        </p:spPr>
+      </p:sp>
+      <p:sp>
+        <p:nvSpPr>
+          <p:cNvPr id="21" name="원안그림-3-14"/>
+          <p:cNvSpPr/>
+          <p:nvPr/>
+        </p:nvSpPr>
+        <p:spPr>
+          <a:xfrm flipH="1">
+            <a:off x="2987059" y="3386787"/>
+            <a:ext cx="65439" cy="168271"/>
+          </a:xfrm>
+          <a:prstGeom prst="line">
+            <a:avLst/>
+          </a:prstGeom>
+          <a:solidFill>
+            <a:srgbClr val="16243A"/>
+          </a:solidFill>
+          <a:ln w="25400">
+            <a:solidFill>
+              <a:srgbClr val="16243A"/>
+            </a:solidFill>
+            <a:prstDash val="solid"/>
+          </a:ln>
+        </p:spPr>
+      </p:sp>
+      <p:sp>
+        <p:nvSpPr>
+          <p:cNvPr id="22" name="원안그림-3-15"/>
+          <p:cNvSpPr/>
+          <p:nvPr/>
+        </p:nvSpPr>
+        <p:spPr>
+          <a:xfrm>
+            <a:off x="3230118" y="3386787"/>
+            <a:ext cx="65439" cy="168271"/>
+          </a:xfrm>
+          <a:prstGeom prst="line">
+            <a:avLst/>
+          </a:prstGeom>
+          <a:solidFill>
+            <a:srgbClr val="16243A"/>
+          </a:solidFill>
+          <a:ln w="25400">
+            <a:solidFill>
+              <a:srgbClr val="16243A"/>
+            </a:solidFill>
+            <a:prstDash val="solid"/>
+          </a:ln>
+        </p:spPr>
+      </p:sp>
+      <p:sp>
+        <p:nvSpPr>
+          <p:cNvPr id="23" name="원안그림-3-16"/>
+          <p:cNvSpPr/>
+          <p:nvPr/>
+        </p:nvSpPr>
+        <p:spPr>
+          <a:xfrm>
+            <a:off x="3108589" y="2984806"/>
+            <a:ext cx="16360" cy="16360"/>
+          </a:xfrm>
+          <a:prstGeom prst="ellipse">
+            <a:avLst/>
+          </a:prstGeom>
+          <a:solidFill>
+            <a:srgbClr val="16243A"/>
+          </a:solidFill>
+          <a:ln/>
+        </p:spPr>
+      </p:sp>
+      <p:sp>
+        <p:nvSpPr>
+          <p:cNvPr id="24" name="원안그림-3-17"/>
+          <p:cNvSpPr/>
+          <p:nvPr/>
+        </p:nvSpPr>
+        <p:spPr>
+          <a:xfrm>
+            <a:off x="3188050" y="2984806"/>
+            <a:ext cx="16360" cy="16360"/>
+          </a:xfrm>
+          <a:prstGeom prst="ellipse">
+            <a:avLst/>
+          </a:prstGeom>
+          <a:solidFill>
+            <a:srgbClr val="16243A"/>
+          </a:solidFill>
+          <a:ln/>
+        </p:spPr>
+      </p:sp>
+      <p:sp>
+        <p:nvSpPr>
+          <p:cNvPr id="25" name="원안그림-3-18"/>
+          <p:cNvSpPr/>
+          <p:nvPr/>
+        </p:nvSpPr>
+        <p:spPr>
+          <a:xfrm>
+            <a:off x="1234709" y="2852390"/>
+            <a:ext cx="266252" cy="272168"/>
+          </a:xfrm>
+          <a:prstGeom prst="ellipse">
+            <a:avLst/>
+          </a:prstGeom>
+          <a:solidFill>
+            <a:srgbClr val="F3C9D8"/>
+          </a:solidFill>
+          <a:ln/>
+        </p:spPr>
+      </p:sp>
+      <p:sp>
+        <p:nvSpPr>
+          <p:cNvPr id="26" name="원안그림-3-19"/>
+          <p:cNvSpPr/>
+          <p:nvPr/>
+        </p:nvSpPr>
+        <p:spPr>
+          <a:xfrm>
+            <a:off x="3719725" y="2710389"/>
+            <a:ext cx="272168" cy="266252"/>
+          </a:xfrm>
+          <a:prstGeom prst="ellipse">
+            <a:avLst/>
+          </a:prstGeom>
+          <a:solidFill>
+            <a:srgbClr val="F2DF9A"/>
+          </a:solidFill>
+          <a:ln/>
+        </p:spPr>
+      </p:sp>
+      <p:sp>
+        <p:nvSpPr>
+          <p:cNvPr id="27" name="원안그림-3-20"/>
+          <p:cNvSpPr txBox="1"/>
+          <p:nvPr/>
+        </p:nvSpPr>
+        <p:spPr>
+          <a:xfrm>
+            <a:off x="2293799" y="2544721"/>
+            <a:ext cx="1449593" cy="189335"/>
+          </a:xfrm>
+          <a:prstGeom prst="rect">
+            <a:avLst/>
+          </a:prstGeom>
+          <a:noFill/>
+          <a:ln/>
+        </p:spPr>
+        <p:txBody>
+          <a:bodyPr wrap="square" lIns="0" tIns="0" rIns="0" bIns="0" rtlCol="0" anchor="ctr"/>
+          <a:lstStyle/>
+          <a:p>
+            <a:pPr algn="ctr" indent="0" marL="0">
+              <a:buNone/>
+            </a:pPr>
+            <a:r>
+              <a:rPr lang="en-US" sz="950" b="1" dirty="0">
+                <a:solidFill>
+                  <a:srgbClr val="16243A"/>
+                </a:solidFill>
+              </a:rPr>
+              <a:t>WELCOME!</a:t>
+            </a:r>
+            <a:endParaRPr lang="en-US" sz="950" dirty="0"/>
+          </a:p>
+        </p:txBody>
+      </p:sp>
+      <p:sp>
+        <p:nvSpPr>
+          <p:cNvPr id="28" name="original"/>
           <p:cNvSpPr/>
           <p:nvPr/>
         </p:nvSpPr>
@@ -11100,7 +11372,7 @@
       </p:sp>
       <p:sp>
         <p:nvSpPr>
-          <p:cNvPr id="7" name="chip-3-1"/>
+          <p:cNvPr id="29" name="chip-3-1"/>
           <p:cNvSpPr txBox="1"/>
           <p:nvPr/>
         </p:nvSpPr>
@@ -11140,7 +11412,7 @@
       </p:sp>
       <p:sp>
         <p:nvSpPr>
-          <p:cNvPr id="8" name="Text 6"/>
+          <p:cNvPr id="30" name="Text 27"/>
           <p:cNvSpPr txBox="1"/>
           <p:nvPr/>
         </p:nvSpPr>
@@ -11187,7 +11459,7 @@
       </p:sp>
       <p:sp>
         <p:nvSpPr>
-          <p:cNvPr id="9" name="chip-3-2"/>
+          <p:cNvPr id="31" name="chip-3-2"/>
           <p:cNvSpPr txBox="1"/>
           <p:nvPr/>
         </p:nvSpPr>
@@ -11227,7 +11499,7 @@
       </p:sp>
       <p:sp>
         <p:nvSpPr>
-          <p:cNvPr id="10" name="Text 8"/>
+          <p:cNvPr id="32" name="Text 29"/>
           <p:cNvSpPr txBox="1"/>
           <p:nvPr/>
         </p:nvSpPr>
@@ -11274,7 +11546,7 @@
       </p:sp>
       <p:sp>
         <p:nvSpPr>
-          <p:cNvPr id="11" name="Text 9"/>
+          <p:cNvPr id="33" name="Text 30"/>
           <p:cNvSpPr txBox="1"/>
           <p:nvPr/>
         </p:nvSpPr>
@@ -11310,7 +11582,7 @@
       </p:sp>
       <p:sp>
         <p:nvSpPr>
-          <p:cNvPr id="12" name="prop-0"/>
+          <p:cNvPr id="34" name="prop-0"/>
           <p:cNvSpPr/>
           <p:nvPr/>
         </p:nvSpPr>
@@ -11337,7 +11609,7 @@
       </p:sp>
       <p:sp>
         <p:nvSpPr>
-          <p:cNvPr id="13" name="chip-연출"/>
+          <p:cNvPr id="35" name="chip-연출"/>
           <p:cNvSpPr txBox="1"/>
           <p:nvPr/>
         </p:nvSpPr>
@@ -11377,7 +11649,7 @@
       </p:sp>
       <p:sp>
         <p:nvSpPr>
-          <p:cNvPr id="14" name="Text 12"/>
+          <p:cNvPr id="36" name="Text 33"/>
           <p:cNvSpPr txBox="1"/>
           <p:nvPr/>
         </p:nvSpPr>
@@ -11413,7 +11685,7 @@
       </p:sp>
       <p:sp>
         <p:nvSpPr>
-          <p:cNvPr id="15" name="Text 13"/>
+          <p:cNvPr id="37" name="Text 34"/>
           <p:cNvSpPr txBox="1"/>
           <p:nvPr/>
         </p:nvSpPr>
@@ -11449,7 +11721,7 @@
       </p:sp>
       <p:sp>
         <p:nvSpPr>
-          <p:cNvPr id="16" name="prop-1"/>
+          <p:cNvPr id="38" name="prop-1"/>
           <p:cNvSpPr/>
           <p:nvPr/>
         </p:nvSpPr>
@@ -11476,7 +11748,7 @@
       </p:sp>
       <p:sp>
         <p:nvSpPr>
-          <p:cNvPr id="17" name="chip-체험"/>
+          <p:cNvPr id="39" name="chip-체험"/>
           <p:cNvSpPr txBox="1"/>
           <p:nvPr/>
         </p:nvSpPr>
@@ -11516,7 +11788,7 @@
       </p:sp>
       <p:sp>
         <p:nvSpPr>
-          <p:cNvPr id="18" name="Text 16"/>
+          <p:cNvPr id="40" name="Text 37"/>
           <p:cNvSpPr txBox="1"/>
           <p:nvPr/>
         </p:nvSpPr>
@@ -11552,7 +11824,7 @@
       </p:sp>
       <p:sp>
         <p:nvSpPr>
-          <p:cNvPr id="19" name="Text 17"/>
+          <p:cNvPr id="41" name="Text 38"/>
           <p:cNvSpPr txBox="1"/>
           <p:nvPr/>
         </p:nvSpPr>
@@ -11588,7 +11860,7 @@
       </p:sp>
       <p:sp>
         <p:nvSpPr>
-          <p:cNvPr id="20" name="prop-2"/>
+          <p:cNvPr id="42" name="prop-2"/>
           <p:cNvSpPr/>
           <p:nvPr/>
         </p:nvSpPr>
@@ -11615,7 +11887,7 @@
       </p:sp>
       <p:sp>
         <p:nvSpPr>
-          <p:cNvPr id="21" name="chip-체험"/>
+          <p:cNvPr id="43" name="chip-체험"/>
           <p:cNvSpPr txBox="1"/>
           <p:nvPr/>
         </p:nvSpPr>
@@ -11655,7 +11927,7 @@
       </p:sp>
       <p:sp>
         <p:nvSpPr>
-          <p:cNvPr id="22" name="Text 20"/>
+          <p:cNvPr id="44" name="Text 41"/>
           <p:cNvSpPr txBox="1"/>
           <p:nvPr/>
         </p:nvSpPr>
@@ -11691,7 +11963,7 @@
       </p:sp>
       <p:sp>
         <p:nvSpPr>
-          <p:cNvPr id="23" name="Text 21"/>
+          <p:cNvPr id="45" name="Text 42"/>
           <p:cNvSpPr txBox="1"/>
           <p:nvPr/>
         </p:nvSpPr>
@@ -11727,7 +11999,7 @@
       </p:sp>
       <p:sp>
         <p:nvSpPr>
-          <p:cNvPr id="24" name="prop-3"/>
+          <p:cNvPr id="46" name="prop-3"/>
           <p:cNvSpPr/>
           <p:nvPr/>
         </p:nvSpPr>
@@ -11754,7 +12026,7 @@
       </p:sp>
       <p:sp>
         <p:nvSpPr>
-          <p:cNvPr id="25" name="chip-운영"/>
+          <p:cNvPr id="47" name="chip-운영"/>
           <p:cNvSpPr txBox="1"/>
           <p:nvPr/>
         </p:nvSpPr>
@@ -11794,7 +12066,7 @@
       </p:sp>
       <p:sp>
         <p:nvSpPr>
-          <p:cNvPr id="26" name="Text 24"/>
+          <p:cNvPr id="48" name="Text 45"/>
           <p:cNvSpPr txBox="1"/>
           <p:nvPr/>
         </p:nvSpPr>
@@ -11830,7 +12102,7 @@
       </p:sp>
       <p:sp>
         <p:nvSpPr>
-          <p:cNvPr id="27" name="Text 25"/>
+          <p:cNvPr id="49" name="Text 46"/>
           <p:cNvSpPr txBox="1"/>
           <p:nvPr/>
         </p:nvSpPr>
@@ -11866,7 +12138,7 @@
       </p:sp>
       <p:sp>
         <p:nvSpPr>
-          <p:cNvPr id="28" name="decision-pill"/>
+          <p:cNvPr id="50" name="decision-pill"/>
           <p:cNvSpPr txBox="1"/>
           <p:nvPr/>
         </p:nvSpPr>
@@ -11906,7 +12178,7 @@
       </p:sp>
       <p:sp>
         <p:nvSpPr>
-          <p:cNvPr id="29" name="Text 27"/>
+          <p:cNvPr id="51" name="Text 48"/>
           <p:cNvSpPr txBox="1"/>
           <p:nvPr/>
         </p:nvSpPr>
@@ -11953,7 +12225,7 @@
       </p:sp>
       <p:sp>
         <p:nvSpPr>
-          <p:cNvPr id="30" name="Slide Number Placeholder 0"/>
+          <p:cNvPr id="52" name="Slide Number Placeholder 0"/>
           <p:cNvSpPr>
             <a:spLocks noGrp="1"/>
           </p:cNvSpPr>
@@ -11996,626 +12268,6 @@
           </a:p>
         </p:txBody>
       </p:sp>
-      <p:grpSp>
-        <p:nvGrpSpPr>
-          <p:cNvPr id="31" name="원안 그림"/>
-          <p:cNvGrpSpPr/>
-          <p:nvPr/>
-        </p:nvGrpSpPr>
-        <p:grpSpPr>
-          <a:xfrm>
-            <a:off x="856040" y="2331720"/>
-            <a:ext cx="3591440" cy="2212848"/>
-            <a:chOff x="6135624" y="2331720"/>
-            <a:chExt cx="5550408" cy="3419856"/>
-          </a:xfrm>
-        </p:grpSpPr>
-        <p:sp>
-          <p:nvSpPr>
-            <p:cNvPr id="32" name="Shape 18"/>
-            <p:cNvSpPr/>
-            <p:nvPr/>
-          </p:nvSpPr>
-          <p:spPr>
-            <a:xfrm>
-              <a:off x="6135624" y="2331720"/>
-              <a:ext cx="5550408" cy="3419856"/>
-            </a:xfrm>
-            <a:prstGeom prst="roundRect">
-              <a:avLst>
-                <a:gd name="adj" fmla="val 2674"/>
-              </a:avLst>
-            </a:prstGeom>
-            <a:solidFill>
-              <a:srgbClr val="DBEEF0"/>
-            </a:solidFill>
-            <a:ln w="12700">
-              <a:solidFill>
-                <a:srgbClr val="DBEEF0">
-                  <a:alpha val="0"/>
-                </a:srgbClr>
-              </a:solidFill>
-              <a:prstDash val="solid"/>
-            </a:ln>
-          </p:spPr>
-        </p:sp>
-        <p:sp>
-          <p:nvSpPr>
-            <p:cNvPr id="33" name="Shape 19"/>
-            <p:cNvSpPr/>
-            <p:nvPr/>
-          </p:nvSpPr>
-          <p:spPr>
-            <a:xfrm>
-              <a:off x="6483096" y="3977640"/>
-              <a:ext cx="4846320" cy="1353312"/>
-            </a:xfrm>
-            <a:prstGeom prst="ellipse">
-              <a:avLst>
-                <a:gd name="adj" fmla="val 6757"/>
-              </a:avLst>
-            </a:prstGeom>
-            <a:solidFill>
-              <a:srgbClr val="9BCFDA"/>
-            </a:solidFill>
-            <a:ln w="12700">
-              <a:solidFill>
-                <a:srgbClr val="9BCFDA">
-                  <a:alpha val="0"/>
-                </a:srgbClr>
-              </a:solidFill>
-              <a:prstDash val="solid"/>
-            </a:ln>
-          </p:spPr>
-        </p:sp>
-        <p:sp>
-          <p:nvSpPr>
-            <p:cNvPr id="34" name="Shape 20"/>
-            <p:cNvSpPr/>
-            <p:nvPr/>
-          </p:nvSpPr>
-          <p:spPr>
-            <a:xfrm>
-              <a:off x="7589520" y="4178808"/>
-              <a:ext cx="1069848" cy="438912"/>
-            </a:xfrm>
-            <a:prstGeom prst="ellipse">
-              <a:avLst>
-                <a:gd name="adj" fmla="val 20833"/>
-              </a:avLst>
-            </a:prstGeom>
-            <a:solidFill>
-              <a:srgbClr val="7ABBA0"/>
-            </a:solidFill>
-            <a:ln w="12700">
-              <a:solidFill>
-                <a:srgbClr val="7ABBA0">
-                  <a:alpha val="0"/>
-                </a:srgbClr>
-              </a:solidFill>
-              <a:prstDash val="solid"/>
-            </a:ln>
-          </p:spPr>
-        </p:sp>
-        <p:sp>
-          <p:nvSpPr>
-            <p:cNvPr id="35" name="Shape 21"/>
-            <p:cNvSpPr/>
-            <p:nvPr/>
-          </p:nvSpPr>
-          <p:spPr>
-            <a:xfrm>
-              <a:off x="9729216" y="4462272"/>
-              <a:ext cx="1051560" cy="374904"/>
-            </a:xfrm>
-            <a:prstGeom prst="ellipse">
-              <a:avLst>
-                <a:gd name="adj" fmla="val 24390"/>
-              </a:avLst>
-            </a:prstGeom>
-            <a:solidFill>
-              <a:srgbClr val="7ABBA0"/>
-            </a:solidFill>
-            <a:ln w="12700">
-              <a:solidFill>
-                <a:srgbClr val="7ABBA0">
-                  <a:alpha val="0"/>
-                </a:srgbClr>
-              </a:solidFill>
-              <a:prstDash val="solid"/>
-            </a:ln>
-          </p:spPr>
-        </p:sp>
-        <p:sp>
-          <p:nvSpPr>
-            <p:cNvPr id="36" name="Shape 22"/>
-            <p:cNvSpPr/>
-            <p:nvPr/>
-          </p:nvSpPr>
-          <p:spPr>
-            <a:xfrm>
-              <a:off x="7777886" y="2971800"/>
-              <a:ext cx="502920" cy="502920"/>
-            </a:xfrm>
-            <a:prstGeom prst="ellipse">
-              <a:avLst>
-                <a:gd name="adj" fmla="val 18182"/>
-              </a:avLst>
-            </a:prstGeom>
-            <a:solidFill>
-              <a:srgbClr val="FDE6A5"/>
-            </a:solidFill>
-            <a:ln w="12700">
-              <a:solidFill>
-                <a:srgbClr val="FDE6A5">
-                  <a:alpha val="0"/>
-                </a:srgbClr>
-              </a:solidFill>
-              <a:prstDash val="solid"/>
-            </a:ln>
-          </p:spPr>
-        </p:sp>
-        <p:sp>
-          <p:nvSpPr>
-            <p:cNvPr id="37" name="Shape 23"/>
-            <p:cNvSpPr/>
-            <p:nvPr/>
-          </p:nvSpPr>
-          <p:spPr>
-            <a:xfrm rot="10800000">
-              <a:off x="7697419" y="3414370"/>
-              <a:ext cx="683971" cy="764438"/>
-            </a:xfrm>
-            <a:prstGeom prst="arc">
-              <a:avLst>
-                <a:gd name="adj" fmla="val 13369"/>
-              </a:avLst>
-            </a:prstGeom>
-            <a:solidFill>
-              <a:srgbClr val="F7DDE5"/>
-            </a:solidFill>
-            <a:ln w="12700">
-              <a:solidFill>
-                <a:srgbClr val="F7DDE5"/>
-              </a:solidFill>
-              <a:prstDash val="solid"/>
-            </a:ln>
-          </p:spPr>
-        </p:sp>
-        <p:sp>
-          <p:nvSpPr>
-            <p:cNvPr id="38" name="Shape 24"/>
-            <p:cNvSpPr/>
-            <p:nvPr/>
-          </p:nvSpPr>
-          <p:spPr>
-            <a:xfrm>
-              <a:off x="7727594" y="3635654"/>
-              <a:ext cx="553212" cy="100584"/>
-            </a:xfrm>
-            <a:prstGeom prst="line">
-              <a:avLst>
-                <a:gd name="adj" fmla="val 90909"/>
-              </a:avLst>
-            </a:prstGeom>
-            <a:solidFill>
-              <a:srgbClr val="16243A"/>
-            </a:solidFill>
-            <a:ln w="38100">
-              <a:solidFill>
-                <a:srgbClr val="16243A"/>
-              </a:solidFill>
-              <a:prstDash val="solid"/>
-            </a:ln>
-          </p:spPr>
-        </p:sp>
-        <p:sp>
-          <p:nvSpPr>
-            <p:cNvPr id="39" name="Shape 25"/>
-            <p:cNvSpPr/>
-            <p:nvPr/>
-          </p:nvSpPr>
-          <p:spPr>
-            <a:xfrm flipH="1">
-              <a:off x="7647127" y="4058107"/>
-              <a:ext cx="140818" cy="362102"/>
-            </a:xfrm>
-            <a:prstGeom prst="line">
-              <a:avLst>
-                <a:gd name="adj" fmla="val -64935"/>
-              </a:avLst>
-            </a:prstGeom>
-            <a:solidFill>
-              <a:srgbClr val="16243A"/>
-            </a:solidFill>
-            <a:ln w="38100">
-              <a:solidFill>
-                <a:srgbClr val="16243A"/>
-              </a:solidFill>
-              <a:prstDash val="solid"/>
-            </a:ln>
-          </p:spPr>
-        </p:sp>
-        <p:sp>
-          <p:nvSpPr>
-            <p:cNvPr id="40" name="Shape 26"/>
-            <p:cNvSpPr/>
-            <p:nvPr/>
-          </p:nvSpPr>
-          <p:spPr>
-            <a:xfrm>
-              <a:off x="8170164" y="4058107"/>
-              <a:ext cx="140818" cy="362102"/>
-            </a:xfrm>
-            <a:prstGeom prst="line">
-              <a:avLst>
-                <a:gd name="adj" fmla="val 64935"/>
-              </a:avLst>
-            </a:prstGeom>
-            <a:solidFill>
-              <a:srgbClr val="16243A"/>
-            </a:solidFill>
-            <a:ln w="38100">
-              <a:solidFill>
-                <a:srgbClr val="16243A"/>
-              </a:solidFill>
-              <a:prstDash val="solid"/>
-            </a:ln>
-          </p:spPr>
-        </p:sp>
-        <p:sp>
-          <p:nvSpPr>
-            <p:cNvPr id="41" name="Shape 27"/>
-            <p:cNvSpPr/>
-            <p:nvPr/>
-          </p:nvSpPr>
-          <p:spPr>
-            <a:xfrm>
-              <a:off x="7908646" y="3193085"/>
-              <a:ext cx="35204" cy="35204"/>
-            </a:xfrm>
-            <a:prstGeom prst="ellipse">
-              <a:avLst>
-                <a:gd name="adj" fmla="val 259743"/>
-              </a:avLst>
-            </a:prstGeom>
-            <a:solidFill>
-              <a:srgbClr val="16243A"/>
-            </a:solidFill>
-            <a:ln w="12700">
-              <a:solidFill>
-                <a:srgbClr val="16243A">
-                  <a:alpha val="0"/>
-                </a:srgbClr>
-              </a:solidFill>
-              <a:prstDash val="solid"/>
-            </a:ln>
-          </p:spPr>
-        </p:sp>
-        <p:sp>
-          <p:nvSpPr>
-            <p:cNvPr id="42" name="Shape 28"/>
-            <p:cNvSpPr/>
-            <p:nvPr/>
-          </p:nvSpPr>
-          <p:spPr>
-            <a:xfrm>
-              <a:off x="8079638" y="3193085"/>
-              <a:ext cx="35204" cy="35204"/>
-            </a:xfrm>
-            <a:prstGeom prst="ellipse">
-              <a:avLst>
-                <a:gd name="adj" fmla="val 259743"/>
-              </a:avLst>
-            </a:prstGeom>
-            <a:solidFill>
-              <a:srgbClr val="16243A"/>
-            </a:solidFill>
-            <a:ln w="12700">
-              <a:solidFill>
-                <a:srgbClr val="16243A">
-                  <a:alpha val="0"/>
-                </a:srgbClr>
-              </a:solidFill>
-              <a:prstDash val="solid"/>
-            </a:ln>
-          </p:spPr>
-        </p:sp>
-        <p:sp>
-          <p:nvSpPr>
-            <p:cNvPr id="43" name="Shape 29"/>
-            <p:cNvSpPr/>
-            <p:nvPr/>
-          </p:nvSpPr>
-          <p:spPr>
-            <a:xfrm>
-              <a:off x="9522927" y="3182112"/>
-              <a:ext cx="361188" cy="361188"/>
-            </a:xfrm>
-            <a:prstGeom prst="ellipse">
-              <a:avLst>
-                <a:gd name="adj" fmla="val 25316"/>
-              </a:avLst>
-            </a:prstGeom>
-            <a:solidFill>
-              <a:srgbClr val="FDE6A5"/>
-            </a:solidFill>
-            <a:ln w="12700">
-              <a:solidFill>
-                <a:srgbClr val="FDE6A5">
-                  <a:alpha val="0"/>
-                </a:srgbClr>
-              </a:solidFill>
-              <a:prstDash val="solid"/>
-            </a:ln>
-          </p:spPr>
-        </p:sp>
-        <p:sp>
-          <p:nvSpPr>
-            <p:cNvPr id="44" name="Shape 30"/>
-            <p:cNvSpPr/>
-            <p:nvPr/>
-          </p:nvSpPr>
-          <p:spPr>
-            <a:xfrm rot="10800000">
-              <a:off x="9465137" y="3499957"/>
-              <a:ext cx="491216" cy="549006"/>
-            </a:xfrm>
-            <a:prstGeom prst="arc">
-              <a:avLst>
-                <a:gd name="adj" fmla="val 18615"/>
-              </a:avLst>
-            </a:prstGeom>
-            <a:solidFill>
-              <a:srgbClr val="F7DDE5"/>
-            </a:solidFill>
-            <a:ln w="12700">
-              <a:solidFill>
-                <a:srgbClr val="F7DDE5"/>
-              </a:solidFill>
-              <a:prstDash val="solid"/>
-            </a:ln>
-          </p:spPr>
-        </p:sp>
-        <p:sp>
-          <p:nvSpPr>
-            <p:cNvPr id="45" name="Shape 31"/>
-            <p:cNvSpPr/>
-            <p:nvPr/>
-          </p:nvSpPr>
-          <p:spPr>
-            <a:xfrm>
-              <a:off x="9486809" y="3658880"/>
-              <a:ext cx="397307" cy="72238"/>
-            </a:xfrm>
-            <a:prstGeom prst="line">
-              <a:avLst>
-                <a:gd name="adj" fmla="val 126582"/>
-              </a:avLst>
-            </a:prstGeom>
-            <a:solidFill>
-              <a:srgbClr val="16243A"/>
-            </a:solidFill>
-            <a:ln w="38100">
-              <a:solidFill>
-                <a:srgbClr val="16243A"/>
-              </a:solidFill>
-              <a:prstDash val="solid"/>
-            </a:ln>
-          </p:spPr>
-        </p:sp>
-        <p:sp>
-          <p:nvSpPr>
-            <p:cNvPr id="46" name="Shape 32"/>
-            <p:cNvSpPr/>
-            <p:nvPr/>
-          </p:nvSpPr>
-          <p:spPr>
-            <a:xfrm flipH="1">
-              <a:off x="9429018" y="3962278"/>
-              <a:ext cx="101133" cy="260055"/>
-            </a:xfrm>
-            <a:prstGeom prst="line">
-              <a:avLst>
-                <a:gd name="adj" fmla="val -90416"/>
-              </a:avLst>
-            </a:prstGeom>
-            <a:solidFill>
-              <a:srgbClr val="16243A"/>
-            </a:solidFill>
-            <a:ln w="38100">
-              <a:solidFill>
-                <a:srgbClr val="16243A"/>
-              </a:solidFill>
-              <a:prstDash val="solid"/>
-            </a:ln>
-          </p:spPr>
-        </p:sp>
-        <p:sp>
-          <p:nvSpPr>
-            <p:cNvPr id="47" name="Shape 33"/>
-            <p:cNvSpPr/>
-            <p:nvPr/>
-          </p:nvSpPr>
-          <p:spPr>
-            <a:xfrm>
-              <a:off x="9804654" y="3962278"/>
-              <a:ext cx="101133" cy="260055"/>
-            </a:xfrm>
-            <a:prstGeom prst="line">
-              <a:avLst>
-                <a:gd name="adj" fmla="val 90416"/>
-              </a:avLst>
-            </a:prstGeom>
-            <a:solidFill>
-              <a:srgbClr val="16243A"/>
-            </a:solidFill>
-            <a:ln w="38100">
-              <a:solidFill>
-                <a:srgbClr val="16243A"/>
-              </a:solidFill>
-              <a:prstDash val="solid"/>
-            </a:ln>
-          </p:spPr>
-        </p:sp>
-        <p:sp>
-          <p:nvSpPr>
-            <p:cNvPr id="48" name="Shape 34"/>
-            <p:cNvSpPr/>
-            <p:nvPr/>
-          </p:nvSpPr>
-          <p:spPr>
-            <a:xfrm>
-              <a:off x="9616836" y="3341035"/>
-              <a:ext cx="25283" cy="25283"/>
-            </a:xfrm>
-            <a:prstGeom prst="ellipse">
-              <a:avLst>
-                <a:gd name="adj" fmla="val 361666"/>
-              </a:avLst>
-            </a:prstGeom>
-            <a:solidFill>
-              <a:srgbClr val="16243A"/>
-            </a:solidFill>
-            <a:ln w="12700">
-              <a:solidFill>
-                <a:srgbClr val="16243A">
-                  <a:alpha val="0"/>
-                </a:srgbClr>
-              </a:solidFill>
-              <a:prstDash val="solid"/>
-            </a:ln>
-          </p:spPr>
-        </p:sp>
-        <p:sp>
-          <p:nvSpPr>
-            <p:cNvPr id="49" name="Shape 35"/>
-            <p:cNvSpPr/>
-            <p:nvPr/>
-          </p:nvSpPr>
-          <p:spPr>
-            <a:xfrm>
-              <a:off x="9739640" y="3341035"/>
-              <a:ext cx="25283" cy="25283"/>
-            </a:xfrm>
-            <a:prstGeom prst="ellipse">
-              <a:avLst>
-                <a:gd name="adj" fmla="val 361666"/>
-              </a:avLst>
-            </a:prstGeom>
-            <a:solidFill>
-              <a:srgbClr val="16243A"/>
-            </a:solidFill>
-            <a:ln w="12700">
-              <a:solidFill>
-                <a:srgbClr val="16243A">
-                  <a:alpha val="0"/>
-                </a:srgbClr>
-              </a:solidFill>
-              <a:prstDash val="solid"/>
-            </a:ln>
-          </p:spPr>
-        </p:sp>
-        <p:sp>
-          <p:nvSpPr>
-            <p:cNvPr id="50" name="Shape 36"/>
-            <p:cNvSpPr/>
-            <p:nvPr/>
-          </p:nvSpPr>
-          <p:spPr>
-            <a:xfrm>
-              <a:off x="6720840" y="3136392"/>
-              <a:ext cx="411480" cy="420624"/>
-            </a:xfrm>
-            <a:prstGeom prst="ellipse">
-              <a:avLst>
-                <a:gd name="adj" fmla="val 22222"/>
-              </a:avLst>
-            </a:prstGeom>
-            <a:solidFill>
-              <a:srgbClr val="F3C9D8"/>
-            </a:solidFill>
-            <a:ln w="12700">
-              <a:solidFill>
-                <a:srgbClr val="F3C9D8">
-                  <a:alpha val="0"/>
-                </a:srgbClr>
-              </a:solidFill>
-              <a:prstDash val="solid"/>
-            </a:ln>
-          </p:spPr>
-        </p:sp>
-        <p:sp>
-          <p:nvSpPr>
-            <p:cNvPr id="51" name="Shape 37"/>
-            <p:cNvSpPr/>
-            <p:nvPr/>
-          </p:nvSpPr>
-          <p:spPr>
-            <a:xfrm>
-              <a:off x="10561320" y="2916936"/>
-              <a:ext cx="420624" cy="411480"/>
-            </a:xfrm>
-            <a:prstGeom prst="ellipse">
-              <a:avLst>
-                <a:gd name="adj" fmla="val 22222"/>
-              </a:avLst>
-            </a:prstGeom>
-            <a:solidFill>
-              <a:srgbClr val="F2DF9A"/>
-            </a:solidFill>
-            <a:ln w="12700">
-              <a:solidFill>
-                <a:srgbClr val="F2DF9A">
-                  <a:alpha val="0"/>
-                </a:srgbClr>
-              </a:solidFill>
-              <a:prstDash val="solid"/>
-            </a:ln>
-          </p:spPr>
-        </p:sp>
-        <p:sp>
-          <p:nvSpPr>
-            <p:cNvPr id="52" name="Text 38"/>
-            <p:cNvSpPr/>
-            <p:nvPr/>
-          </p:nvSpPr>
-          <p:spPr>
-            <a:xfrm>
-              <a:off x="8357616" y="2660904"/>
-              <a:ext cx="2240280" cy="292608"/>
-            </a:xfrm>
-            <a:prstGeom prst="rect">
-              <a:avLst/>
-            </a:prstGeom>
-            <a:noFill/>
-            <a:ln/>
-          </p:spPr>
-          <p:txBody>
-            <a:bodyPr wrap="square" lIns="0" tIns="0" rIns="0" bIns="0" rtlCol="0" anchor="ctr">
-              <a:normAutofit/>
-            </a:bodyPr>
-            <a:lstStyle/>
-            <a:p>
-              <a:pPr algn="ctr" indent="0" marL="0">
-                <a:buNone/>
-              </a:pPr>
-              <a:r>
-                <a:rPr lang="en-US" sz="900" b="1" dirty="0">
-                  <a:solidFill>
-                    <a:srgbClr val="16243A"/>
-                  </a:solidFill>
-                  <a:latin typeface="Malgun Gothic" pitchFamily="34" charset="0"/>
-                  <a:ea typeface="Malgun Gothic" pitchFamily="34" charset="-122"/>
-                  <a:cs typeface="Malgun Gothic" pitchFamily="34" charset="-120"/>
-                </a:rPr>
-                <a:t>WELCOME!</a:t>
-              </a:r>
-              <a:endParaRPr lang="en-US" sz="900" dirty="0"/>
-            </a:p>
-          </p:txBody>
-        </p:sp>
-      </p:grpSp>
     </p:spTree>
   </p:cSld>
   <p:clrMapOvr>
@@ -12629,7 +12281,7 @@
   <p:cSld name="Slide 7">
     <p:spTree>
       <p:nvGrpSpPr>
-        <p:cNvPr id="1" name=""/>
+        <p:cNvPr id="2" name=""/>
         <p:cNvGrpSpPr/>
         <p:nvPr/>
       </p:nvGrpSpPr>
@@ -12643,7 +12295,7 @@
       </p:grpSpPr>
       <p:sp>
         <p:nvSpPr>
-          <p:cNvPr id="2" name="Text 1"/>
+          <p:cNvPr id="3" name="Text 1"/>
           <p:cNvSpPr/>
           <p:nvPr>
             <p:ph idx="101" type="title" hasCustomPrompt="1"/>
@@ -12681,7 +12333,7 @@
       </p:sp>
       <p:sp>
         <p:nvSpPr>
-          <p:cNvPr id="3" name="Text 1"/>
+          <p:cNvPr id="4" name="Text 1"/>
           <p:cNvSpPr/>
           <p:nvPr>
             <p:ph idx="102" type="body" hasCustomPrompt="1"/>
@@ -12719,7 +12371,7 @@
       </p:sp>
       <p:sp>
         <p:nvSpPr>
-          <p:cNvPr id="4" name="step-number"/>
+          <p:cNvPr id="5" name="step-number"/>
           <p:cNvSpPr txBox="1"/>
           <p:nvPr/>
         </p:nvSpPr>
@@ -12755,7 +12407,7 @@
       </p:sp>
       <p:sp>
         <p:nvSpPr>
-          <p:cNvPr id="5" name="Text 3"/>
+          <p:cNvPr id="6" name="Text 3"/>
           <p:cNvSpPr txBox="1"/>
           <p:nvPr/>
         </p:nvSpPr>
@@ -12791,7 +12443,721 @@
       </p:sp>
       <p:sp>
         <p:nvSpPr>
-          <p:cNvPr id="6" name="original"/>
+          <p:cNvPr id="7" name="원안그림-4-0"/>
+          <p:cNvSpPr/>
+          <p:nvPr/>
+        </p:nvSpPr>
+        <p:spPr>
+          <a:xfrm>
+            <a:off x="867395" y="2331720"/>
+            <a:ext cx="3568731" cy="2212848"/>
+          </a:xfrm>
+          <a:prstGeom prst="roundRect">
+            <a:avLst>
+              <a:gd name="adj" fmla="val 2653"/>
+            </a:avLst>
+          </a:prstGeom>
+          <a:solidFill>
+            <a:srgbClr val="16243A"/>
+          </a:solidFill>
+          <a:ln/>
+        </p:spPr>
+      </p:sp>
+      <p:sp>
+        <p:nvSpPr>
+          <p:cNvPr id="8" name="원안그림-4-1"/>
+          <p:cNvSpPr/>
+          <p:nvPr/>
+        </p:nvSpPr>
+        <p:spPr>
+          <a:xfrm>
+            <a:off x="1008265" y="2537157"/>
+            <a:ext cx="399134" cy="1449797"/>
+          </a:xfrm>
+          <a:prstGeom prst="rect">
+            <a:avLst/>
+          </a:prstGeom>
+          <a:solidFill>
+            <a:srgbClr val="2A455B"/>
+          </a:solidFill>
+          <a:ln/>
+        </p:spPr>
+      </p:sp>
+      <p:sp>
+        <p:nvSpPr>
+          <p:cNvPr id="9" name="원안그림-4-2"/>
+          <p:cNvSpPr/>
+          <p:nvPr/>
+        </p:nvSpPr>
+        <p:spPr>
+          <a:xfrm>
+            <a:off x="1548271" y="2537157"/>
+            <a:ext cx="399134" cy="1449797"/>
+          </a:xfrm>
+          <a:prstGeom prst="rect">
+            <a:avLst/>
+          </a:prstGeom>
+          <a:solidFill>
+            <a:srgbClr val="38526B"/>
+          </a:solidFill>
+          <a:ln/>
+        </p:spPr>
+      </p:sp>
+      <p:sp>
+        <p:nvSpPr>
+          <p:cNvPr id="10" name="원안그림-4-3"/>
+          <p:cNvSpPr/>
+          <p:nvPr/>
+        </p:nvSpPr>
+        <p:spPr>
+          <a:xfrm>
+            <a:off x="2088276" y="2537157"/>
+            <a:ext cx="399134" cy="1449797"/>
+          </a:xfrm>
+          <a:prstGeom prst="rect">
+            <a:avLst/>
+          </a:prstGeom>
+          <a:solidFill>
+            <a:srgbClr val="2A455B"/>
+          </a:solidFill>
+          <a:ln/>
+        </p:spPr>
+      </p:sp>
+      <p:sp>
+        <p:nvSpPr>
+          <p:cNvPr id="11" name="원안그림-4-4"/>
+          <p:cNvSpPr/>
+          <p:nvPr/>
+        </p:nvSpPr>
+        <p:spPr>
+          <a:xfrm>
+            <a:off x="2628282" y="2537157"/>
+            <a:ext cx="399134" cy="1449797"/>
+          </a:xfrm>
+          <a:prstGeom prst="rect">
+            <a:avLst/>
+          </a:prstGeom>
+          <a:solidFill>
+            <a:srgbClr val="38526B"/>
+          </a:solidFill>
+          <a:ln/>
+        </p:spPr>
+      </p:sp>
+      <p:sp>
+        <p:nvSpPr>
+          <p:cNvPr id="12" name="원안그림-4-5"/>
+          <p:cNvSpPr/>
+          <p:nvPr/>
+        </p:nvSpPr>
+        <p:spPr>
+          <a:xfrm>
+            <a:off x="3168287" y="2537157"/>
+            <a:ext cx="399134" cy="1449797"/>
+          </a:xfrm>
+          <a:prstGeom prst="rect">
+            <a:avLst/>
+          </a:prstGeom>
+          <a:solidFill>
+            <a:srgbClr val="2A455B"/>
+          </a:solidFill>
+          <a:ln/>
+        </p:spPr>
+      </p:sp>
+      <p:sp>
+        <p:nvSpPr>
+          <p:cNvPr id="13" name="원안그림-4-6"/>
+          <p:cNvSpPr/>
+          <p:nvPr/>
+        </p:nvSpPr>
+        <p:spPr>
+          <a:xfrm>
+            <a:off x="3708292" y="2537157"/>
+            <a:ext cx="399134" cy="1449797"/>
+          </a:xfrm>
+          <a:prstGeom prst="rect">
+            <a:avLst/>
+          </a:prstGeom>
+          <a:solidFill>
+            <a:srgbClr val="38526B"/>
+          </a:solidFill>
+          <a:ln/>
+        </p:spPr>
+      </p:sp>
+      <p:sp>
+        <p:nvSpPr>
+          <p:cNvPr id="14" name="원안그림-4-7"/>
+          <p:cNvSpPr/>
+          <p:nvPr/>
+        </p:nvSpPr>
+        <p:spPr>
+          <a:xfrm>
+            <a:off x="1143267" y="3863692"/>
+            <a:ext cx="3022856" cy="328699"/>
+          </a:xfrm>
+          <a:prstGeom prst="ellipse">
+            <a:avLst/>
+          </a:prstGeom>
+          <a:solidFill>
+            <a:srgbClr val="60778A"/>
+          </a:solidFill>
+          <a:ln/>
+        </p:spPr>
+      </p:sp>
+      <p:sp>
+        <p:nvSpPr>
+          <p:cNvPr id="15" name="원안그림-4-8"/>
+          <p:cNvSpPr/>
+          <p:nvPr/>
+        </p:nvSpPr>
+        <p:spPr>
+          <a:xfrm>
+            <a:off x="1446374" y="3329556"/>
+            <a:ext cx="217176" cy="217176"/>
+          </a:xfrm>
+          <a:prstGeom prst="ellipse">
+            <a:avLst/>
+          </a:prstGeom>
+          <a:solidFill>
+            <a:srgbClr val="FDE6A5"/>
+          </a:solidFill>
+          <a:ln/>
+        </p:spPr>
+      </p:sp>
+      <p:sp>
+        <p:nvSpPr>
+          <p:cNvPr id="16" name="원안그림-4-9"/>
+          <p:cNvSpPr/>
+          <p:nvPr/>
+        </p:nvSpPr>
+        <p:spPr>
+          <a:xfrm rot="10800000">
+            <a:off x="1411626" y="3520671"/>
+            <a:ext cx="295359" cy="330108"/>
+          </a:xfrm>
+          <a:prstGeom prst="ellipse">
+            <a:avLst/>
+          </a:prstGeom>
+          <a:solidFill>
+            <a:srgbClr val="F7DDE5"/>
+          </a:solidFill>
+          <a:ln w="9525">
+            <a:solidFill>
+              <a:srgbClr val="F7DDE5"/>
+            </a:solidFill>
+            <a:prstDash val="solid"/>
+          </a:ln>
+        </p:spPr>
+      </p:sp>
+      <p:sp>
+        <p:nvSpPr>
+          <p:cNvPr id="17" name="원안그림-4-10"/>
+          <p:cNvSpPr/>
+          <p:nvPr/>
+        </p:nvSpPr>
+        <p:spPr>
+          <a:xfrm>
+            <a:off x="1424656" y="3616228"/>
+            <a:ext cx="238894" cy="43435"/>
+          </a:xfrm>
+          <a:prstGeom prst="line">
+            <a:avLst/>
+          </a:prstGeom>
+          <a:solidFill>
+            <a:srgbClr val="16243A"/>
+          </a:solidFill>
+          <a:ln w="25400">
+            <a:solidFill>
+              <a:srgbClr val="16243A"/>
+            </a:solidFill>
+            <a:prstDash val="solid"/>
+          </a:ln>
+        </p:spPr>
+      </p:sp>
+      <p:sp>
+        <p:nvSpPr>
+          <p:cNvPr id="18" name="원안그림-4-11"/>
+          <p:cNvSpPr/>
+          <p:nvPr/>
+        </p:nvSpPr>
+        <p:spPr>
+          <a:xfrm flipH="1">
+            <a:off x="1389908" y="3798656"/>
+            <a:ext cx="60809" cy="156367"/>
+          </a:xfrm>
+          <a:prstGeom prst="line">
+            <a:avLst/>
+          </a:prstGeom>
+          <a:solidFill>
+            <a:srgbClr val="16243A"/>
+          </a:solidFill>
+          <a:ln w="25400">
+            <a:solidFill>
+              <a:srgbClr val="16243A"/>
+            </a:solidFill>
+            <a:prstDash val="solid"/>
+          </a:ln>
+        </p:spPr>
+      </p:sp>
+      <p:sp>
+        <p:nvSpPr>
+          <p:cNvPr id="19" name="원안그림-4-12"/>
+          <p:cNvSpPr/>
+          <p:nvPr/>
+        </p:nvSpPr>
+        <p:spPr>
+          <a:xfrm>
+            <a:off x="1615771" y="3798656"/>
+            <a:ext cx="60809" cy="156367"/>
+          </a:xfrm>
+          <a:prstGeom prst="line">
+            <a:avLst/>
+          </a:prstGeom>
+          <a:solidFill>
+            <a:srgbClr val="16243A"/>
+          </a:solidFill>
+          <a:ln w="25400">
+            <a:solidFill>
+              <a:srgbClr val="16243A"/>
+            </a:solidFill>
+            <a:prstDash val="solid"/>
+          </a:ln>
+        </p:spPr>
+      </p:sp>
+      <p:sp>
+        <p:nvSpPr>
+          <p:cNvPr id="20" name="원안그림-4-13"/>
+          <p:cNvSpPr/>
+          <p:nvPr/>
+        </p:nvSpPr>
+        <p:spPr>
+          <a:xfrm>
+            <a:off x="1502840" y="3425113"/>
+            <a:ext cx="15202" cy="15202"/>
+          </a:xfrm>
+          <a:prstGeom prst="ellipse">
+            <a:avLst/>
+          </a:prstGeom>
+          <a:solidFill>
+            <a:srgbClr val="16243A"/>
+          </a:solidFill>
+          <a:ln/>
+        </p:spPr>
+      </p:sp>
+      <p:sp>
+        <p:nvSpPr>
+          <p:cNvPr id="21" name="원안그림-4-14"/>
+          <p:cNvSpPr/>
+          <p:nvPr/>
+        </p:nvSpPr>
+        <p:spPr>
+          <a:xfrm>
+            <a:off x="1576680" y="3425113"/>
+            <a:ext cx="15202" cy="15202"/>
+          </a:xfrm>
+          <a:prstGeom prst="ellipse">
+            <a:avLst/>
+          </a:prstGeom>
+          <a:solidFill>
+            <a:srgbClr val="16243A"/>
+          </a:solidFill>
+          <a:ln/>
+        </p:spPr>
+      </p:sp>
+      <p:sp>
+        <p:nvSpPr>
+          <p:cNvPr id="22" name="원안그림-4-15"/>
+          <p:cNvSpPr/>
+          <p:nvPr/>
+        </p:nvSpPr>
+        <p:spPr>
+          <a:xfrm>
+            <a:off x="2400775" y="3218033"/>
+            <a:ext cx="246524" cy="246524"/>
+          </a:xfrm>
+          <a:prstGeom prst="ellipse">
+            <a:avLst/>
+          </a:prstGeom>
+          <a:solidFill>
+            <a:srgbClr val="FDE6A5"/>
+          </a:solidFill>
+          <a:ln/>
+        </p:spPr>
+      </p:sp>
+      <p:sp>
+        <p:nvSpPr>
+          <p:cNvPr id="23" name="원안그림-4-16"/>
+          <p:cNvSpPr/>
+          <p:nvPr/>
+        </p:nvSpPr>
+        <p:spPr>
+          <a:xfrm rot="10800000">
+            <a:off x="2361331" y="3434974"/>
+            <a:ext cx="335273" cy="374717"/>
+          </a:xfrm>
+          <a:prstGeom prst="ellipse">
+            <a:avLst/>
+          </a:prstGeom>
+          <a:solidFill>
+            <a:srgbClr val="F7DDE5"/>
+          </a:solidFill>
+          <a:ln w="9525">
+            <a:solidFill>
+              <a:srgbClr val="F7DDE5"/>
+            </a:solidFill>
+            <a:prstDash val="solid"/>
+          </a:ln>
+        </p:spPr>
+      </p:sp>
+      <p:sp>
+        <p:nvSpPr>
+          <p:cNvPr id="24" name="원안그림-4-17"/>
+          <p:cNvSpPr/>
+          <p:nvPr/>
+        </p:nvSpPr>
+        <p:spPr>
+          <a:xfrm>
+            <a:off x="2376123" y="3543445"/>
+            <a:ext cx="271177" cy="49305"/>
+          </a:xfrm>
+          <a:prstGeom prst="line">
+            <a:avLst/>
+          </a:prstGeom>
+          <a:solidFill>
+            <a:srgbClr val="16243A"/>
+          </a:solidFill>
+          <a:ln w="25400">
+            <a:solidFill>
+              <a:srgbClr val="16243A"/>
+            </a:solidFill>
+            <a:prstDash val="solid"/>
+          </a:ln>
+        </p:spPr>
+      </p:sp>
+      <p:sp>
+        <p:nvSpPr>
+          <p:cNvPr id="25" name="원안그림-4-18"/>
+          <p:cNvSpPr/>
+          <p:nvPr/>
+        </p:nvSpPr>
+        <p:spPr>
+          <a:xfrm flipH="1">
+            <a:off x="2336679" y="3750526"/>
+            <a:ext cx="69026" cy="177498"/>
+          </a:xfrm>
+          <a:prstGeom prst="line">
+            <a:avLst/>
+          </a:prstGeom>
+          <a:solidFill>
+            <a:srgbClr val="16243A"/>
+          </a:solidFill>
+          <a:ln w="25400">
+            <a:solidFill>
+              <a:srgbClr val="16243A"/>
+            </a:solidFill>
+            <a:prstDash val="solid"/>
+          </a:ln>
+        </p:spPr>
+      </p:sp>
+      <p:sp>
+        <p:nvSpPr>
+          <p:cNvPr id="26" name="원안그림-4-19"/>
+          <p:cNvSpPr/>
+          <p:nvPr/>
+        </p:nvSpPr>
+        <p:spPr>
+          <a:xfrm>
+            <a:off x="2593064" y="3750526"/>
+            <a:ext cx="69026" cy="177498"/>
+          </a:xfrm>
+          <a:prstGeom prst="line">
+            <a:avLst/>
+          </a:prstGeom>
+          <a:solidFill>
+            <a:srgbClr val="16243A"/>
+          </a:solidFill>
+          <a:ln w="25400">
+            <a:solidFill>
+              <a:srgbClr val="16243A"/>
+            </a:solidFill>
+            <a:prstDash val="solid"/>
+          </a:ln>
+        </p:spPr>
+      </p:sp>
+      <p:sp>
+        <p:nvSpPr>
+          <p:cNvPr id="27" name="원안그림-4-20"/>
+          <p:cNvSpPr/>
+          <p:nvPr/>
+        </p:nvSpPr>
+        <p:spPr>
+          <a:xfrm>
+            <a:off x="2464871" y="3326504"/>
+            <a:ext cx="17256" cy="17256"/>
+          </a:xfrm>
+          <a:prstGeom prst="ellipse">
+            <a:avLst/>
+          </a:prstGeom>
+          <a:solidFill>
+            <a:srgbClr val="16243A"/>
+          </a:solidFill>
+          <a:ln/>
+        </p:spPr>
+      </p:sp>
+      <p:sp>
+        <p:nvSpPr>
+          <p:cNvPr id="28" name="원안그림-4-21"/>
+          <p:cNvSpPr/>
+          <p:nvPr/>
+        </p:nvSpPr>
+        <p:spPr>
+          <a:xfrm>
+            <a:off x="2548689" y="3326504"/>
+            <a:ext cx="17256" cy="17256"/>
+          </a:xfrm>
+          <a:prstGeom prst="ellipse">
+            <a:avLst/>
+          </a:prstGeom>
+          <a:solidFill>
+            <a:srgbClr val="16243A"/>
+          </a:solidFill>
+          <a:ln/>
+        </p:spPr>
+      </p:sp>
+      <p:sp>
+        <p:nvSpPr>
+          <p:cNvPr id="29" name="원안그림-4-22"/>
+          <p:cNvSpPr/>
+          <p:nvPr/>
+        </p:nvSpPr>
+        <p:spPr>
+          <a:xfrm>
+            <a:off x="3434063" y="3317817"/>
+            <a:ext cx="214241" cy="214241"/>
+          </a:xfrm>
+          <a:prstGeom prst="ellipse">
+            <a:avLst/>
+          </a:prstGeom>
+          <a:solidFill>
+            <a:srgbClr val="FDE6A5"/>
+          </a:solidFill>
+          <a:ln/>
+        </p:spPr>
+      </p:sp>
+      <p:sp>
+        <p:nvSpPr>
+          <p:cNvPr id="30" name="원안그림-4-23"/>
+          <p:cNvSpPr/>
+          <p:nvPr/>
+        </p:nvSpPr>
+        <p:spPr>
+          <a:xfrm rot="10800000">
+            <a:off x="3399785" y="3506349"/>
+            <a:ext cx="291368" cy="325647"/>
+          </a:xfrm>
+          <a:prstGeom prst="ellipse">
+            <a:avLst/>
+          </a:prstGeom>
+          <a:solidFill>
+            <a:srgbClr val="F7DDE5"/>
+          </a:solidFill>
+          <a:ln w="9525">
+            <a:solidFill>
+              <a:srgbClr val="F7DDE5"/>
+            </a:solidFill>
+            <a:prstDash val="solid"/>
+          </a:ln>
+        </p:spPr>
+      </p:sp>
+      <p:sp>
+        <p:nvSpPr>
+          <p:cNvPr id="31" name="원안그림-4-24"/>
+          <p:cNvSpPr/>
+          <p:nvPr/>
+        </p:nvSpPr>
+        <p:spPr>
+          <a:xfrm>
+            <a:off x="3412639" y="3600615"/>
+            <a:ext cx="235666" cy="42848"/>
+          </a:xfrm>
+          <a:prstGeom prst="line">
+            <a:avLst/>
+          </a:prstGeom>
+          <a:solidFill>
+            <a:srgbClr val="16243A"/>
+          </a:solidFill>
+          <a:ln w="25400">
+            <a:solidFill>
+              <a:srgbClr val="16243A"/>
+            </a:solidFill>
+            <a:prstDash val="solid"/>
+          </a:ln>
+        </p:spPr>
+      </p:sp>
+      <p:sp>
+        <p:nvSpPr>
+          <p:cNvPr id="32" name="원안그림-4-25"/>
+          <p:cNvSpPr/>
+          <p:nvPr/>
+        </p:nvSpPr>
+        <p:spPr>
+          <a:xfrm flipH="1">
+            <a:off x="3378360" y="3780578"/>
+            <a:ext cx="59988" cy="154253"/>
+          </a:xfrm>
+          <a:prstGeom prst="line">
+            <a:avLst/>
+          </a:prstGeom>
+          <a:solidFill>
+            <a:srgbClr val="16243A"/>
+          </a:solidFill>
+          <a:ln w="25400">
+            <a:solidFill>
+              <a:srgbClr val="16243A"/>
+            </a:solidFill>
+            <a:prstDash val="solid"/>
+          </a:ln>
+        </p:spPr>
+      </p:sp>
+      <p:sp>
+        <p:nvSpPr>
+          <p:cNvPr id="33" name="원안그림-4-26"/>
+          <p:cNvSpPr/>
+          <p:nvPr/>
+        </p:nvSpPr>
+        <p:spPr>
+          <a:xfrm>
+            <a:off x="3601172" y="3780578"/>
+            <a:ext cx="59988" cy="154253"/>
+          </a:xfrm>
+          <a:prstGeom prst="line">
+            <a:avLst/>
+          </a:prstGeom>
+          <a:solidFill>
+            <a:srgbClr val="16243A"/>
+          </a:solidFill>
+          <a:ln w="25400">
+            <a:solidFill>
+              <a:srgbClr val="16243A"/>
+            </a:solidFill>
+            <a:prstDash val="solid"/>
+          </a:ln>
+        </p:spPr>
+      </p:sp>
+      <p:sp>
+        <p:nvSpPr>
+          <p:cNvPr id="34" name="원안그림-4-27"/>
+          <p:cNvSpPr/>
+          <p:nvPr/>
+        </p:nvSpPr>
+        <p:spPr>
+          <a:xfrm>
+            <a:off x="3489766" y="3412083"/>
+            <a:ext cx="14997" cy="14997"/>
+          </a:xfrm>
+          <a:prstGeom prst="ellipse">
+            <a:avLst/>
+          </a:prstGeom>
+          <a:solidFill>
+            <a:srgbClr val="16243A"/>
+          </a:solidFill>
+          <a:ln/>
+        </p:spPr>
+      </p:sp>
+      <p:sp>
+        <p:nvSpPr>
+          <p:cNvPr id="35" name="원안그림-4-28"/>
+          <p:cNvSpPr/>
+          <p:nvPr/>
+        </p:nvSpPr>
+        <p:spPr>
+          <a:xfrm>
+            <a:off x="3562608" y="3412083"/>
+            <a:ext cx="14997" cy="14997"/>
+          </a:xfrm>
+          <a:prstGeom prst="ellipse">
+            <a:avLst/>
+          </a:prstGeom>
+          <a:solidFill>
+            <a:srgbClr val="16243A"/>
+          </a:solidFill>
+          <a:ln/>
+        </p:spPr>
+      </p:sp>
+      <p:sp>
+        <p:nvSpPr>
+          <p:cNvPr id="36" name="원안그림-4-29"/>
+          <p:cNvSpPr txBox="1"/>
+          <p:nvPr/>
+        </p:nvSpPr>
+        <p:spPr>
+          <a:xfrm>
+            <a:off x="1348704" y="2636940"/>
+            <a:ext cx="2617852" cy="199567"/>
+          </a:xfrm>
+          <a:prstGeom prst="rect">
+            <a:avLst/>
+          </a:prstGeom>
+          <a:noFill/>
+          <a:ln/>
+        </p:spPr>
+        <p:txBody>
+          <a:bodyPr wrap="square" lIns="0" tIns="0" rIns="0" bIns="0" rtlCol="0" anchor="ctr"/>
+          <a:lstStyle/>
+          <a:p>
+            <a:pPr algn="ctr" indent="0" marL="0">
+              <a:buNone/>
+            </a:pPr>
+            <a:r>
+              <a:rPr lang="en-US" sz="850" b="1" dirty="0">
+                <a:solidFill>
+                  <a:srgbClr val="FFFFFF"/>
+                </a:solidFill>
+              </a:rPr>
+              <a:t>ART MODE  /  LOGO MODE</a:t>
+            </a:r>
+            <a:endParaRPr lang="en-US" sz="850" dirty="0"/>
+          </a:p>
+        </p:txBody>
+      </p:sp>
+      <p:sp>
+        <p:nvSpPr>
+          <p:cNvPr id="37" name="원안그림-4-30"/>
+          <p:cNvSpPr txBox="1"/>
+          <p:nvPr/>
+        </p:nvSpPr>
+        <p:spPr>
+          <a:xfrm>
+            <a:off x="1636315" y="4315653"/>
+            <a:ext cx="1995672" cy="146741"/>
+          </a:xfrm>
+          <a:prstGeom prst="rect">
+            <a:avLst/>
+          </a:prstGeom>
+          <a:noFill/>
+          <a:ln/>
+        </p:spPr>
+        <p:txBody>
+          <a:bodyPr wrap="square" lIns="0" tIns="0" rIns="0" bIns="0" rtlCol="0" anchor="ctr"/>
+          <a:lstStyle/>
+          <a:p>
+            <a:pPr algn="ctr" indent="0" marL="0">
+              <a:buNone/>
+            </a:pPr>
+            <a:r>
+              <a:rPr lang="en-US" sz="700" dirty="0">
+                <a:solidFill>
+                  <a:srgbClr val="617287"/>
+                </a:solidFill>
+              </a:rPr>
+              <a:t>CHARACTER PARADE</a:t>
+            </a:r>
+            <a:endParaRPr lang="en-US" sz="700" dirty="0"/>
+          </a:p>
+        </p:txBody>
+      </p:sp>
+      <p:sp>
+        <p:nvSpPr>
+          <p:cNvPr id="38" name="original"/>
           <p:cNvSpPr/>
           <p:nvPr/>
         </p:nvSpPr>
@@ -12818,7 +13184,7 @@
       </p:sp>
       <p:sp>
         <p:nvSpPr>
-          <p:cNvPr id="7" name="chip-4-1"/>
+          <p:cNvPr id="39" name="chip-4-1"/>
           <p:cNvSpPr txBox="1"/>
           <p:nvPr/>
         </p:nvSpPr>
@@ -12858,7 +13224,7 @@
       </p:sp>
       <p:sp>
         <p:nvSpPr>
-          <p:cNvPr id="8" name="Text 6"/>
+          <p:cNvPr id="40" name="Text 37"/>
           <p:cNvSpPr txBox="1"/>
           <p:nvPr/>
         </p:nvSpPr>
@@ -12905,7 +13271,7 @@
       </p:sp>
       <p:sp>
         <p:nvSpPr>
-          <p:cNvPr id="9" name="chip-4-2"/>
+          <p:cNvPr id="41" name="chip-4-2"/>
           <p:cNvSpPr txBox="1"/>
           <p:nvPr/>
         </p:nvSpPr>
@@ -12945,7 +13311,7 @@
       </p:sp>
       <p:sp>
         <p:nvSpPr>
-          <p:cNvPr id="10" name="Text 8"/>
+          <p:cNvPr id="42" name="Text 39"/>
           <p:cNvSpPr txBox="1"/>
           <p:nvPr/>
         </p:nvSpPr>
@@ -12992,7 +13358,7 @@
       </p:sp>
       <p:sp>
         <p:nvSpPr>
-          <p:cNvPr id="11" name="Text 9"/>
+          <p:cNvPr id="43" name="Text 40"/>
           <p:cNvSpPr txBox="1"/>
           <p:nvPr/>
         </p:nvSpPr>
@@ -13028,7 +13394,7 @@
       </p:sp>
       <p:sp>
         <p:nvSpPr>
-          <p:cNvPr id="12" name="prop-0"/>
+          <p:cNvPr id="44" name="prop-0"/>
           <p:cNvSpPr/>
           <p:nvPr/>
         </p:nvSpPr>
@@ -13055,7 +13421,7 @@
       </p:sp>
       <p:sp>
         <p:nvSpPr>
-          <p:cNvPr id="13" name="chip-연출"/>
+          <p:cNvPr id="45" name="chip-연출"/>
           <p:cNvSpPr txBox="1"/>
           <p:nvPr/>
         </p:nvSpPr>
@@ -13095,7 +13461,7 @@
       </p:sp>
       <p:sp>
         <p:nvSpPr>
-          <p:cNvPr id="14" name="Text 12"/>
+          <p:cNvPr id="46" name="Text 43"/>
           <p:cNvSpPr txBox="1"/>
           <p:nvPr/>
         </p:nvSpPr>
@@ -13131,7 +13497,7 @@
       </p:sp>
       <p:sp>
         <p:nvSpPr>
-          <p:cNvPr id="15" name="Text 13"/>
+          <p:cNvPr id="47" name="Text 44"/>
           <p:cNvSpPr txBox="1"/>
           <p:nvPr/>
         </p:nvSpPr>
@@ -13167,7 +13533,7 @@
       </p:sp>
       <p:sp>
         <p:nvSpPr>
-          <p:cNvPr id="16" name="prop-1"/>
+          <p:cNvPr id="48" name="prop-1"/>
           <p:cNvSpPr/>
           <p:nvPr/>
         </p:nvSpPr>
@@ -13194,7 +13560,7 @@
       </p:sp>
       <p:sp>
         <p:nvSpPr>
-          <p:cNvPr id="17" name="chip-연출"/>
+          <p:cNvPr id="49" name="chip-연출"/>
           <p:cNvSpPr txBox="1"/>
           <p:nvPr/>
         </p:nvSpPr>
@@ -13234,7 +13600,7 @@
       </p:sp>
       <p:sp>
         <p:nvSpPr>
-          <p:cNvPr id="18" name="Text 16"/>
+          <p:cNvPr id="50" name="Text 47"/>
           <p:cNvSpPr txBox="1"/>
           <p:nvPr/>
         </p:nvSpPr>
@@ -13270,7 +13636,7 @@
       </p:sp>
       <p:sp>
         <p:nvSpPr>
-          <p:cNvPr id="19" name="Text 17"/>
+          <p:cNvPr id="51" name="Text 48"/>
           <p:cNvSpPr txBox="1"/>
           <p:nvPr/>
         </p:nvSpPr>
@@ -13306,7 +13672,7 @@
       </p:sp>
       <p:sp>
         <p:nvSpPr>
-          <p:cNvPr id="20" name="prop-2"/>
+          <p:cNvPr id="52" name="prop-2"/>
           <p:cNvSpPr/>
           <p:nvPr/>
         </p:nvSpPr>
@@ -13333,7 +13699,7 @@
       </p:sp>
       <p:sp>
         <p:nvSpPr>
-          <p:cNvPr id="21" name="chip-연출"/>
+          <p:cNvPr id="53" name="chip-연출"/>
           <p:cNvSpPr txBox="1"/>
           <p:nvPr/>
         </p:nvSpPr>
@@ -13373,7 +13739,7 @@
       </p:sp>
       <p:sp>
         <p:nvSpPr>
-          <p:cNvPr id="22" name="Text 20"/>
+          <p:cNvPr id="54" name="Text 51"/>
           <p:cNvSpPr txBox="1"/>
           <p:nvPr/>
         </p:nvSpPr>
@@ -13409,7 +13775,7 @@
       </p:sp>
       <p:sp>
         <p:nvSpPr>
-          <p:cNvPr id="23" name="Text 21"/>
+          <p:cNvPr id="55" name="Text 52"/>
           <p:cNvSpPr txBox="1"/>
           <p:nvPr/>
         </p:nvSpPr>
@@ -13445,7 +13811,7 @@
       </p:sp>
       <p:sp>
         <p:nvSpPr>
-          <p:cNvPr id="24" name="prop-3"/>
+          <p:cNvPr id="56" name="prop-3"/>
           <p:cNvSpPr/>
           <p:nvPr/>
         </p:nvSpPr>
@@ -13472,7 +13838,7 @@
       </p:sp>
       <p:sp>
         <p:nvSpPr>
-          <p:cNvPr id="25" name="chip-운영"/>
+          <p:cNvPr id="57" name="chip-운영"/>
           <p:cNvSpPr txBox="1"/>
           <p:nvPr/>
         </p:nvSpPr>
@@ -13512,7 +13878,7 @@
       </p:sp>
       <p:sp>
         <p:nvSpPr>
-          <p:cNvPr id="26" name="Text 24"/>
+          <p:cNvPr id="58" name="Text 55"/>
           <p:cNvSpPr txBox="1"/>
           <p:nvPr/>
         </p:nvSpPr>
@@ -13548,7 +13914,7 @@
       </p:sp>
       <p:sp>
         <p:nvSpPr>
-          <p:cNvPr id="27" name="Text 25"/>
+          <p:cNvPr id="59" name="Text 56"/>
           <p:cNvSpPr txBox="1"/>
           <p:nvPr/>
         </p:nvSpPr>
@@ -13584,7 +13950,7 @@
       </p:sp>
       <p:sp>
         <p:nvSpPr>
-          <p:cNvPr id="28" name="decision-pill"/>
+          <p:cNvPr id="60" name="decision-pill"/>
           <p:cNvSpPr txBox="1"/>
           <p:nvPr/>
         </p:nvSpPr>
@@ -13624,7 +13990,7 @@
       </p:sp>
       <p:sp>
         <p:nvSpPr>
-          <p:cNvPr id="29" name="Text 27"/>
+          <p:cNvPr id="61" name="Text 58"/>
           <p:cNvSpPr txBox="1"/>
           <p:nvPr/>
         </p:nvSpPr>
@@ -13671,7 +14037,7 @@
       </p:sp>
       <p:sp>
         <p:nvSpPr>
-          <p:cNvPr id="30" name="Slide Number Placeholder 0"/>
+          <p:cNvPr id="62" name="Slide Number Placeholder 0"/>
           <p:cNvSpPr>
             <a:spLocks noGrp="1"/>
           </p:cNvSpPr>
@@ -13714,920 +14080,6 @@
           </a:p>
         </p:txBody>
       </p:sp>
-      <p:grpSp>
-        <p:nvGrpSpPr>
-          <p:cNvPr id="31" name="원안 그림"/>
-          <p:cNvGrpSpPr/>
-          <p:nvPr/>
-        </p:nvGrpSpPr>
-        <p:grpSpPr>
-          <a:xfrm>
-            <a:off x="867395" y="2331720"/>
-            <a:ext cx="3568730" cy="2212848"/>
-            <a:chOff x="6135624" y="2304288"/>
-            <a:chExt cx="5559552" cy="3447288"/>
-          </a:xfrm>
-        </p:grpSpPr>
-        <p:sp>
-          <p:nvSpPr>
-            <p:cNvPr id="32" name="Shape 18"/>
-            <p:cNvSpPr/>
-            <p:nvPr/>
-          </p:nvSpPr>
-          <p:spPr>
-            <a:xfrm>
-              <a:off x="6135624" y="2304288"/>
-              <a:ext cx="5559552" cy="3447288"/>
-            </a:xfrm>
-            <a:prstGeom prst="roundRect">
-              <a:avLst>
-                <a:gd name="adj" fmla="val 2653"/>
-              </a:avLst>
-            </a:prstGeom>
-            <a:solidFill>
-              <a:srgbClr val="16243A"/>
-            </a:solidFill>
-            <a:ln w="12700">
-              <a:solidFill>
-                <a:srgbClr val="16243A">
-                  <a:alpha val="0"/>
-                </a:srgbClr>
-              </a:solidFill>
-              <a:prstDash val="solid"/>
-            </a:ln>
-          </p:spPr>
-        </p:sp>
-        <p:sp>
-          <p:nvSpPr>
-            <p:cNvPr id="33" name="Shape 19"/>
-            <p:cNvSpPr/>
-            <p:nvPr/>
-          </p:nvSpPr>
-          <p:spPr>
-            <a:xfrm>
-              <a:off x="6355080" y="2624328"/>
-              <a:ext cx="621792" cy="2258568"/>
-            </a:xfrm>
-            <a:prstGeom prst="rect">
-              <a:avLst>
-                <a:gd name="adj" fmla="val 14706"/>
-              </a:avLst>
-            </a:prstGeom>
-            <a:solidFill>
-              <a:srgbClr val="2A455B"/>
-            </a:solidFill>
-            <a:ln w="12700">
-              <a:solidFill>
-                <a:srgbClr val="2A455B">
-                  <a:alpha val="0"/>
-                </a:srgbClr>
-              </a:solidFill>
-              <a:prstDash val="solid"/>
-            </a:ln>
-          </p:spPr>
-        </p:sp>
-        <p:sp>
-          <p:nvSpPr>
-            <p:cNvPr id="34" name="Shape 20"/>
-            <p:cNvSpPr/>
-            <p:nvPr/>
-          </p:nvSpPr>
-          <p:spPr>
-            <a:xfrm>
-              <a:off x="7196328" y="2624328"/>
-              <a:ext cx="621792" cy="2258568"/>
-            </a:xfrm>
-            <a:prstGeom prst="rect">
-              <a:avLst>
-                <a:gd name="adj" fmla="val 14706"/>
-              </a:avLst>
-            </a:prstGeom>
-            <a:solidFill>
-              <a:srgbClr val="38526B"/>
-            </a:solidFill>
-            <a:ln w="12700">
-              <a:solidFill>
-                <a:srgbClr val="38526B">
-                  <a:alpha val="0"/>
-                </a:srgbClr>
-              </a:solidFill>
-              <a:prstDash val="solid"/>
-            </a:ln>
-          </p:spPr>
-        </p:sp>
-        <p:sp>
-          <p:nvSpPr>
-            <p:cNvPr id="35" name="Shape 21"/>
-            <p:cNvSpPr/>
-            <p:nvPr/>
-          </p:nvSpPr>
-          <p:spPr>
-            <a:xfrm>
-              <a:off x="8037576" y="2624328"/>
-              <a:ext cx="621792" cy="2258568"/>
-            </a:xfrm>
-            <a:prstGeom prst="rect">
-              <a:avLst>
-                <a:gd name="adj" fmla="val 14706"/>
-              </a:avLst>
-            </a:prstGeom>
-            <a:solidFill>
-              <a:srgbClr val="2A455B"/>
-            </a:solidFill>
-            <a:ln w="12700">
-              <a:solidFill>
-                <a:srgbClr val="2A455B">
-                  <a:alpha val="0"/>
-                </a:srgbClr>
-              </a:solidFill>
-              <a:prstDash val="solid"/>
-            </a:ln>
-          </p:spPr>
-        </p:sp>
-        <p:sp>
-          <p:nvSpPr>
-            <p:cNvPr id="36" name="Shape 22"/>
-            <p:cNvSpPr/>
-            <p:nvPr/>
-          </p:nvSpPr>
-          <p:spPr>
-            <a:xfrm>
-              <a:off x="8878824" y="2624328"/>
-              <a:ext cx="621792" cy="2258568"/>
-            </a:xfrm>
-            <a:prstGeom prst="rect">
-              <a:avLst>
-                <a:gd name="adj" fmla="val 14706"/>
-              </a:avLst>
-            </a:prstGeom>
-            <a:solidFill>
-              <a:srgbClr val="38526B"/>
-            </a:solidFill>
-            <a:ln w="12700">
-              <a:solidFill>
-                <a:srgbClr val="38526B">
-                  <a:alpha val="0"/>
-                </a:srgbClr>
-              </a:solidFill>
-              <a:prstDash val="solid"/>
-            </a:ln>
-          </p:spPr>
-        </p:sp>
-        <p:sp>
-          <p:nvSpPr>
-            <p:cNvPr id="37" name="Shape 23"/>
-            <p:cNvSpPr/>
-            <p:nvPr/>
-          </p:nvSpPr>
-          <p:spPr>
-            <a:xfrm>
-              <a:off x="9720072" y="2624328"/>
-              <a:ext cx="621792" cy="2258568"/>
-            </a:xfrm>
-            <a:prstGeom prst="rect">
-              <a:avLst>
-                <a:gd name="adj" fmla="val 14706"/>
-              </a:avLst>
-            </a:prstGeom>
-            <a:solidFill>
-              <a:srgbClr val="2A455B"/>
-            </a:solidFill>
-            <a:ln w="12700">
-              <a:solidFill>
-                <a:srgbClr val="2A455B">
-                  <a:alpha val="0"/>
-                </a:srgbClr>
-              </a:solidFill>
-              <a:prstDash val="solid"/>
-            </a:ln>
-          </p:spPr>
-        </p:sp>
-        <p:sp>
-          <p:nvSpPr>
-            <p:cNvPr id="38" name="Shape 24"/>
-            <p:cNvSpPr/>
-            <p:nvPr/>
-          </p:nvSpPr>
-          <p:spPr>
-            <a:xfrm>
-              <a:off x="10561320" y="2624328"/>
-              <a:ext cx="621792" cy="2258568"/>
-            </a:xfrm>
-            <a:prstGeom prst="rect">
-              <a:avLst>
-                <a:gd name="adj" fmla="val 14706"/>
-              </a:avLst>
-            </a:prstGeom>
-            <a:solidFill>
-              <a:srgbClr val="38526B"/>
-            </a:solidFill>
-            <a:ln w="12700">
-              <a:solidFill>
-                <a:srgbClr val="38526B">
-                  <a:alpha val="0"/>
-                </a:srgbClr>
-              </a:solidFill>
-              <a:prstDash val="solid"/>
-            </a:ln>
-          </p:spPr>
-        </p:sp>
-        <p:sp>
-          <p:nvSpPr>
-            <p:cNvPr id="39" name="Shape 25"/>
-            <p:cNvSpPr/>
-            <p:nvPr/>
-          </p:nvSpPr>
-          <p:spPr>
-            <a:xfrm>
-              <a:off x="6565392" y="4690872"/>
-              <a:ext cx="4709160" cy="512064"/>
-            </a:xfrm>
-            <a:prstGeom prst="ellipse">
-              <a:avLst>
-                <a:gd name="adj" fmla="val 17857"/>
-              </a:avLst>
-            </a:prstGeom>
-            <a:solidFill>
-              <a:srgbClr val="60778A"/>
-            </a:solidFill>
-            <a:ln w="12700">
-              <a:solidFill>
-                <a:srgbClr val="60778A">
-                  <a:alpha val="0"/>
-                </a:srgbClr>
-              </a:solidFill>
-              <a:prstDash val="solid"/>
-            </a:ln>
-          </p:spPr>
-        </p:sp>
-        <p:sp>
-          <p:nvSpPr>
-            <p:cNvPr id="40" name="Shape 26"/>
-            <p:cNvSpPr/>
-            <p:nvPr/>
-          </p:nvSpPr>
-          <p:spPr>
-            <a:xfrm>
-              <a:off x="7037588" y="3858768"/>
-              <a:ext cx="338328" cy="338328"/>
-            </a:xfrm>
-            <a:prstGeom prst="ellipse">
-              <a:avLst>
-                <a:gd name="adj" fmla="val 27027"/>
-              </a:avLst>
-            </a:prstGeom>
-            <a:solidFill>
-              <a:srgbClr val="FDE6A5"/>
-            </a:solidFill>
-            <a:ln w="12700">
-              <a:solidFill>
-                <a:srgbClr val="FDE6A5">
-                  <a:alpha val="0"/>
-                </a:srgbClr>
-              </a:solidFill>
-              <a:prstDash val="solid"/>
-            </a:ln>
-          </p:spPr>
-        </p:sp>
-        <p:sp>
-          <p:nvSpPr>
-            <p:cNvPr id="41" name="Shape 27"/>
-            <p:cNvSpPr/>
-            <p:nvPr/>
-          </p:nvSpPr>
-          <p:spPr>
-            <a:xfrm rot="10800000">
-              <a:off x="6983456" y="4156497"/>
-              <a:ext cx="460126" cy="514259"/>
-            </a:xfrm>
-            <a:prstGeom prst="arc">
-              <a:avLst>
-                <a:gd name="adj" fmla="val 19873"/>
-              </a:avLst>
-            </a:prstGeom>
-            <a:solidFill>
-              <a:srgbClr val="F7DDE5"/>
-            </a:solidFill>
-            <a:ln w="12700">
-              <a:solidFill>
-                <a:srgbClr val="F7DDE5"/>
-              </a:solidFill>
-              <a:prstDash val="solid"/>
-            </a:ln>
-          </p:spPr>
-        </p:sp>
-        <p:sp>
-          <p:nvSpPr>
-            <p:cNvPr id="42" name="Shape 28"/>
-            <p:cNvSpPr/>
-            <p:nvPr/>
-          </p:nvSpPr>
-          <p:spPr>
-            <a:xfrm>
-              <a:off x="7003755" y="4305361"/>
-              <a:ext cx="372161" cy="67666"/>
-            </a:xfrm>
-            <a:prstGeom prst="line">
-              <a:avLst>
-                <a:gd name="adj" fmla="val 135134"/>
-              </a:avLst>
-            </a:prstGeom>
-            <a:solidFill>
-              <a:srgbClr val="16243A"/>
-            </a:solidFill>
-            <a:ln w="38100">
-              <a:solidFill>
-                <a:srgbClr val="16243A"/>
-              </a:solidFill>
-              <a:prstDash val="solid"/>
-            </a:ln>
-          </p:spPr>
-        </p:sp>
-        <p:sp>
-          <p:nvSpPr>
-            <p:cNvPr id="43" name="Shape 29"/>
-            <p:cNvSpPr/>
-            <p:nvPr/>
-          </p:nvSpPr>
-          <p:spPr>
-            <a:xfrm flipH="1">
-              <a:off x="6949623" y="4589556"/>
-              <a:ext cx="94732" cy="243596"/>
-            </a:xfrm>
-            <a:prstGeom prst="line">
-              <a:avLst>
-                <a:gd name="adj" fmla="val -96525"/>
-              </a:avLst>
-            </a:prstGeom>
-            <a:solidFill>
-              <a:srgbClr val="16243A"/>
-            </a:solidFill>
-            <a:ln w="38100">
-              <a:solidFill>
-                <a:srgbClr val="16243A"/>
-              </a:solidFill>
-              <a:prstDash val="solid"/>
-            </a:ln>
-          </p:spPr>
-        </p:sp>
-        <p:sp>
-          <p:nvSpPr>
-            <p:cNvPr id="44" name="Shape 30"/>
-            <p:cNvSpPr/>
-            <p:nvPr/>
-          </p:nvSpPr>
-          <p:spPr>
-            <a:xfrm>
-              <a:off x="7301484" y="4589556"/>
-              <a:ext cx="94732" cy="243596"/>
-            </a:xfrm>
-            <a:prstGeom prst="line">
-              <a:avLst>
-                <a:gd name="adj" fmla="val 96525"/>
-              </a:avLst>
-            </a:prstGeom>
-            <a:solidFill>
-              <a:srgbClr val="16243A"/>
-            </a:solidFill>
-            <a:ln w="38100">
-              <a:solidFill>
-                <a:srgbClr val="16243A"/>
-              </a:solidFill>
-              <a:prstDash val="solid"/>
-            </a:ln>
-          </p:spPr>
-        </p:sp>
-        <p:sp>
-          <p:nvSpPr>
-            <p:cNvPr id="45" name="Shape 31"/>
-            <p:cNvSpPr/>
-            <p:nvPr/>
-          </p:nvSpPr>
-          <p:spPr>
-            <a:xfrm>
-              <a:off x="7125553" y="4007632"/>
-              <a:ext cx="23683" cy="23683"/>
-            </a:xfrm>
-            <a:prstGeom prst="ellipse">
-              <a:avLst>
-                <a:gd name="adj" fmla="val 386100"/>
-              </a:avLst>
-            </a:prstGeom>
-            <a:solidFill>
-              <a:srgbClr val="16243A"/>
-            </a:solidFill>
-            <a:ln w="12700">
-              <a:solidFill>
-                <a:srgbClr val="16243A">
-                  <a:alpha val="0"/>
-                </a:srgbClr>
-              </a:solidFill>
-              <a:prstDash val="solid"/>
-            </a:ln>
-          </p:spPr>
-        </p:sp>
-        <p:sp>
-          <p:nvSpPr>
-            <p:cNvPr id="46" name="Shape 32"/>
-            <p:cNvSpPr/>
-            <p:nvPr/>
-          </p:nvSpPr>
-          <p:spPr>
-            <a:xfrm>
-              <a:off x="7240585" y="4007632"/>
-              <a:ext cx="23683" cy="23683"/>
-            </a:xfrm>
-            <a:prstGeom prst="ellipse">
-              <a:avLst>
-                <a:gd name="adj" fmla="val 386100"/>
-              </a:avLst>
-            </a:prstGeom>
-            <a:solidFill>
-              <a:srgbClr val="16243A"/>
-            </a:solidFill>
-            <a:ln w="12700">
-              <a:solidFill>
-                <a:srgbClr val="16243A">
-                  <a:alpha val="0"/>
-                </a:srgbClr>
-              </a:solidFill>
-              <a:prstDash val="solid"/>
-            </a:ln>
-          </p:spPr>
-        </p:sp>
-        <p:sp>
-          <p:nvSpPr>
-            <p:cNvPr id="47" name="Shape 33"/>
-            <p:cNvSpPr/>
-            <p:nvPr/>
-          </p:nvSpPr>
-          <p:spPr>
-            <a:xfrm>
-              <a:off x="8524403" y="3685032"/>
-              <a:ext cx="384048" cy="384048"/>
-            </a:xfrm>
-            <a:prstGeom prst="ellipse">
-              <a:avLst>
-                <a:gd name="adj" fmla="val 23810"/>
-              </a:avLst>
-            </a:prstGeom>
-            <a:solidFill>
-              <a:srgbClr val="FDE6A5"/>
-            </a:solidFill>
-            <a:ln w="12700">
-              <a:solidFill>
-                <a:srgbClr val="FDE6A5">
-                  <a:alpha val="0"/>
-                </a:srgbClr>
-              </a:solidFill>
-              <a:prstDash val="solid"/>
-            </a:ln>
-          </p:spPr>
-        </p:sp>
-        <p:sp>
-          <p:nvSpPr>
-            <p:cNvPr id="48" name="Shape 34"/>
-            <p:cNvSpPr/>
-            <p:nvPr/>
-          </p:nvSpPr>
-          <p:spPr>
-            <a:xfrm rot="10800000">
-              <a:off x="8462955" y="4022994"/>
-              <a:ext cx="522305" cy="583753"/>
-            </a:xfrm>
-            <a:prstGeom prst="arc">
-              <a:avLst>
-                <a:gd name="adj" fmla="val 17507"/>
-              </a:avLst>
-            </a:prstGeom>
-            <a:solidFill>
-              <a:srgbClr val="F7DDE5"/>
-            </a:solidFill>
-            <a:ln w="12700">
-              <a:solidFill>
-                <a:srgbClr val="F7DDE5"/>
-              </a:solidFill>
-              <a:prstDash val="solid"/>
-            </a:ln>
-          </p:spPr>
-        </p:sp>
-        <p:sp>
-          <p:nvSpPr>
-            <p:cNvPr id="49" name="Shape 35"/>
-            <p:cNvSpPr/>
-            <p:nvPr/>
-          </p:nvSpPr>
-          <p:spPr>
-            <a:xfrm>
-              <a:off x="8485998" y="4191975"/>
-              <a:ext cx="422453" cy="76810"/>
-            </a:xfrm>
-            <a:prstGeom prst="line">
-              <a:avLst>
-                <a:gd name="adj" fmla="val 119047"/>
-              </a:avLst>
-            </a:prstGeom>
-            <a:solidFill>
-              <a:srgbClr val="16243A"/>
-            </a:solidFill>
-            <a:ln w="38100">
-              <a:solidFill>
-                <a:srgbClr val="16243A"/>
-              </a:solidFill>
-              <a:prstDash val="solid"/>
-            </a:ln>
-          </p:spPr>
-        </p:sp>
-        <p:sp>
-          <p:nvSpPr>
-            <p:cNvPr id="50" name="Shape 36"/>
-            <p:cNvSpPr/>
-            <p:nvPr/>
-          </p:nvSpPr>
-          <p:spPr>
-            <a:xfrm flipH="1">
-              <a:off x="8424551" y="4514576"/>
-              <a:ext cx="107533" cy="276515"/>
-            </a:xfrm>
-            <a:prstGeom prst="line">
-              <a:avLst>
-                <a:gd name="adj" fmla="val -85034"/>
-              </a:avLst>
-            </a:prstGeom>
-            <a:solidFill>
-              <a:srgbClr val="16243A"/>
-            </a:solidFill>
-            <a:ln w="38100">
-              <a:solidFill>
-                <a:srgbClr val="16243A"/>
-              </a:solidFill>
-              <a:prstDash val="solid"/>
-            </a:ln>
-          </p:spPr>
-        </p:sp>
-        <p:sp>
-          <p:nvSpPr>
-            <p:cNvPr id="51" name="Shape 37"/>
-            <p:cNvSpPr/>
-            <p:nvPr/>
-          </p:nvSpPr>
-          <p:spPr>
-            <a:xfrm>
-              <a:off x="8823960" y="4514576"/>
-              <a:ext cx="107533" cy="276515"/>
-            </a:xfrm>
-            <a:prstGeom prst="line">
-              <a:avLst>
-                <a:gd name="adj" fmla="val 85034"/>
-              </a:avLst>
-            </a:prstGeom>
-            <a:solidFill>
-              <a:srgbClr val="16243A"/>
-            </a:solidFill>
-            <a:ln w="38100">
-              <a:solidFill>
-                <a:srgbClr val="16243A"/>
-              </a:solidFill>
-              <a:prstDash val="solid"/>
-            </a:ln>
-          </p:spPr>
-        </p:sp>
-        <p:sp>
-          <p:nvSpPr>
-            <p:cNvPr id="52" name="Shape 38"/>
-            <p:cNvSpPr/>
-            <p:nvPr/>
-          </p:nvSpPr>
-          <p:spPr>
-            <a:xfrm>
-              <a:off x="8624255" y="3854013"/>
-              <a:ext cx="26883" cy="26883"/>
-            </a:xfrm>
-            <a:prstGeom prst="ellipse">
-              <a:avLst>
-                <a:gd name="adj" fmla="val 340141"/>
-              </a:avLst>
-            </a:prstGeom>
-            <a:solidFill>
-              <a:srgbClr val="16243A"/>
-            </a:solidFill>
-            <a:ln w="12700">
-              <a:solidFill>
-                <a:srgbClr val="16243A">
-                  <a:alpha val="0"/>
-                </a:srgbClr>
-              </a:solidFill>
-              <a:prstDash val="solid"/>
-            </a:ln>
-          </p:spPr>
-        </p:sp>
-        <p:sp>
-          <p:nvSpPr>
-            <p:cNvPr id="53" name="Shape 39"/>
-            <p:cNvSpPr/>
-            <p:nvPr/>
-          </p:nvSpPr>
-          <p:spPr>
-            <a:xfrm>
-              <a:off x="8754831" y="3854013"/>
-              <a:ext cx="26883" cy="26883"/>
-            </a:xfrm>
-            <a:prstGeom prst="ellipse">
-              <a:avLst>
-                <a:gd name="adj" fmla="val 340141"/>
-              </a:avLst>
-            </a:prstGeom>
-            <a:solidFill>
-              <a:srgbClr val="16243A"/>
-            </a:solidFill>
-            <a:ln w="12700">
-              <a:solidFill>
-                <a:srgbClr val="16243A">
-                  <a:alpha val="0"/>
-                </a:srgbClr>
-              </a:solidFill>
-              <a:prstDash val="solid"/>
-            </a:ln>
-          </p:spPr>
-        </p:sp>
-        <p:sp>
-          <p:nvSpPr>
-            <p:cNvPr id="54" name="Shape 40"/>
-            <p:cNvSpPr/>
-            <p:nvPr/>
-          </p:nvSpPr>
-          <p:spPr>
-            <a:xfrm>
-              <a:off x="10134112" y="3840480"/>
-              <a:ext cx="333756" cy="333756"/>
-            </a:xfrm>
-            <a:prstGeom prst="ellipse">
-              <a:avLst>
-                <a:gd name="adj" fmla="val 27397"/>
-              </a:avLst>
-            </a:prstGeom>
-            <a:solidFill>
-              <a:srgbClr val="FDE6A5"/>
-            </a:solidFill>
-            <a:ln w="12700">
-              <a:solidFill>
-                <a:srgbClr val="FDE6A5">
-                  <a:alpha val="0"/>
-                </a:srgbClr>
-              </a:solidFill>
-              <a:prstDash val="solid"/>
-            </a:ln>
-          </p:spPr>
-        </p:sp>
-        <p:sp>
-          <p:nvSpPr>
-            <p:cNvPr id="55" name="Shape 41"/>
-            <p:cNvSpPr/>
-            <p:nvPr/>
-          </p:nvSpPr>
-          <p:spPr>
-            <a:xfrm rot="10800000">
-              <a:off x="10080711" y="4134185"/>
-              <a:ext cx="453908" cy="507309"/>
-            </a:xfrm>
-            <a:prstGeom prst="arc">
-              <a:avLst>
-                <a:gd name="adj" fmla="val 20145"/>
-              </a:avLst>
-            </a:prstGeom>
-            <a:solidFill>
-              <a:srgbClr val="F7DDE5"/>
-            </a:solidFill>
-            <a:ln w="12700">
-              <a:solidFill>
-                <a:srgbClr val="F7DDE5"/>
-              </a:solidFill>
-              <a:prstDash val="solid"/>
-            </a:ln>
-          </p:spPr>
-        </p:sp>
-        <p:sp>
-          <p:nvSpPr>
-            <p:cNvPr id="56" name="Shape 42"/>
-            <p:cNvSpPr/>
-            <p:nvPr/>
-          </p:nvSpPr>
-          <p:spPr>
-            <a:xfrm>
-              <a:off x="10100737" y="4281038"/>
-              <a:ext cx="367132" cy="66751"/>
-            </a:xfrm>
-            <a:prstGeom prst="line">
-              <a:avLst>
-                <a:gd name="adj" fmla="val 136987"/>
-              </a:avLst>
-            </a:prstGeom>
-            <a:solidFill>
-              <a:srgbClr val="16243A"/>
-            </a:solidFill>
-            <a:ln w="38100">
-              <a:solidFill>
-                <a:srgbClr val="16243A"/>
-              </a:solidFill>
-              <a:prstDash val="solid"/>
-            </a:ln>
-          </p:spPr>
-        </p:sp>
-        <p:sp>
-          <p:nvSpPr>
-            <p:cNvPr id="57" name="Shape 43"/>
-            <p:cNvSpPr/>
-            <p:nvPr/>
-          </p:nvSpPr>
-          <p:spPr>
-            <a:xfrm flipH="1">
-              <a:off x="10047335" y="4561393"/>
-              <a:ext cx="93452" cy="240304"/>
-            </a:xfrm>
-            <a:prstGeom prst="line">
-              <a:avLst>
-                <a:gd name="adj" fmla="val -97847"/>
-              </a:avLst>
-            </a:prstGeom>
-            <a:solidFill>
-              <a:srgbClr val="16243A"/>
-            </a:solidFill>
-            <a:ln w="38100">
-              <a:solidFill>
-                <a:srgbClr val="16243A"/>
-              </a:solidFill>
-              <a:prstDash val="solid"/>
-            </a:ln>
-          </p:spPr>
-        </p:sp>
-        <p:sp>
-          <p:nvSpPr>
-            <p:cNvPr id="58" name="Shape 44"/>
-            <p:cNvSpPr/>
-            <p:nvPr/>
-          </p:nvSpPr>
-          <p:spPr>
-            <a:xfrm>
-              <a:off x="10394442" y="4561393"/>
-              <a:ext cx="93452" cy="240304"/>
-            </a:xfrm>
-            <a:prstGeom prst="line">
-              <a:avLst>
-                <a:gd name="adj" fmla="val 97847"/>
-              </a:avLst>
-            </a:prstGeom>
-            <a:solidFill>
-              <a:srgbClr val="16243A"/>
-            </a:solidFill>
-            <a:ln w="38100">
-              <a:solidFill>
-                <a:srgbClr val="16243A"/>
-              </a:solidFill>
-              <a:prstDash val="solid"/>
-            </a:ln>
-          </p:spPr>
-        </p:sp>
-        <p:sp>
-          <p:nvSpPr>
-            <p:cNvPr id="59" name="Shape 45"/>
-            <p:cNvSpPr/>
-            <p:nvPr/>
-          </p:nvSpPr>
-          <p:spPr>
-            <a:xfrm>
-              <a:off x="10220889" y="3987333"/>
-              <a:ext cx="23363" cy="23363"/>
-            </a:xfrm>
-            <a:prstGeom prst="ellipse">
-              <a:avLst>
-                <a:gd name="adj" fmla="val 391388"/>
-              </a:avLst>
-            </a:prstGeom>
-            <a:solidFill>
-              <a:srgbClr val="16243A"/>
-            </a:solidFill>
-            <a:ln w="12700">
-              <a:solidFill>
-                <a:srgbClr val="16243A">
-                  <a:alpha val="0"/>
-                </a:srgbClr>
-              </a:solidFill>
-              <a:prstDash val="solid"/>
-            </a:ln>
-          </p:spPr>
-        </p:sp>
-        <p:sp>
-          <p:nvSpPr>
-            <p:cNvPr id="60" name="Shape 46"/>
-            <p:cNvSpPr/>
-            <p:nvPr/>
-          </p:nvSpPr>
-          <p:spPr>
-            <a:xfrm>
-              <a:off x="10334366" y="3987333"/>
-              <a:ext cx="23363" cy="23363"/>
-            </a:xfrm>
-            <a:prstGeom prst="ellipse">
-              <a:avLst>
-                <a:gd name="adj" fmla="val 391388"/>
-              </a:avLst>
-            </a:prstGeom>
-            <a:solidFill>
-              <a:srgbClr val="16243A"/>
-            </a:solidFill>
-            <a:ln w="12700">
-              <a:solidFill>
-                <a:srgbClr val="16243A">
-                  <a:alpha val="0"/>
-                </a:srgbClr>
-              </a:solidFill>
-              <a:prstDash val="solid"/>
-            </a:ln>
-          </p:spPr>
-        </p:sp>
-        <p:sp>
-          <p:nvSpPr>
-            <p:cNvPr id="61" name="Text 47"/>
-            <p:cNvSpPr/>
-            <p:nvPr/>
-          </p:nvSpPr>
-          <p:spPr>
-            <a:xfrm>
-              <a:off x="6885432" y="2779776"/>
-              <a:ext cx="4078224" cy="310896"/>
-            </a:xfrm>
-            <a:prstGeom prst="rect">
-              <a:avLst/>
-            </a:prstGeom>
-            <a:noFill/>
-            <a:ln/>
-          </p:spPr>
-          <p:txBody>
-            <a:bodyPr wrap="square" lIns="0" tIns="0" rIns="0" bIns="0" rtlCol="0" anchor="ctr">
-              <a:normAutofit/>
-            </a:bodyPr>
-            <a:lstStyle/>
-            <a:p>
-              <a:pPr algn="ctr" indent="0" marL="0">
-                <a:buNone/>
-              </a:pPr>
-              <a:r>
-                <a:rPr lang="en-US" sz="800" b="1" dirty="0">
-                  <a:solidFill>
-                    <a:srgbClr val="FFFFFF"/>
-                  </a:solidFill>
-                  <a:latin typeface="Malgun Gothic" pitchFamily="34" charset="0"/>
-                  <a:ea typeface="Malgun Gothic" pitchFamily="34" charset="-122"/>
-                  <a:cs typeface="Malgun Gothic" pitchFamily="34" charset="-120"/>
-                </a:rPr>
-                <a:t>ART MODE  /  LOGO MODE</a:t>
-              </a:r>
-              <a:endParaRPr lang="en-US" sz="800" dirty="0"/>
-            </a:p>
-          </p:txBody>
-        </p:sp>
-        <p:sp>
-          <p:nvSpPr>
-            <p:cNvPr id="62" name="Text 48"/>
-            <p:cNvSpPr/>
-            <p:nvPr/>
-          </p:nvSpPr>
-          <p:spPr>
-            <a:xfrm>
-              <a:off x="7333488" y="5394960"/>
-              <a:ext cx="3108960" cy="228600"/>
-            </a:xfrm>
-            <a:prstGeom prst="rect">
-              <a:avLst/>
-            </a:prstGeom>
-            <a:noFill/>
-            <a:ln/>
-          </p:spPr>
-          <p:txBody>
-            <a:bodyPr wrap="square" lIns="0" tIns="0" rIns="0" bIns="0" rtlCol="0" anchor="ctr">
-              <a:normAutofit/>
-            </a:bodyPr>
-            <a:lstStyle/>
-            <a:p>
-              <a:pPr algn="ctr" indent="0" marL="0">
-                <a:buNone/>
-              </a:pPr>
-              <a:r>
-                <a:rPr lang="en-US" sz="700" dirty="0">
-                  <a:solidFill>
-                    <a:srgbClr val="617287"/>
-                  </a:solidFill>
-                  <a:latin typeface="Malgun Gothic" pitchFamily="34" charset="0"/>
-                  <a:ea typeface="Malgun Gothic" pitchFamily="34" charset="-122"/>
-                  <a:cs typeface="Malgun Gothic" pitchFamily="34" charset="-120"/>
-                </a:rPr>
-                <a:t>CHARACTER PARADE</a:t>
-              </a:r>
-              <a:endParaRPr lang="en-US" sz="700" dirty="0"/>
-            </a:p>
-          </p:txBody>
-        </p:sp>
-      </p:grpSp>
     </p:spTree>
   </p:cSld>
   <p:clrMapOvr>
@@ -14641,7 +14093,7 @@
   <p:cSld name="Slide 8">
     <p:spTree>
       <p:nvGrpSpPr>
-        <p:cNvPr id="1" name=""/>
+        <p:cNvPr id="2" name=""/>
         <p:cNvGrpSpPr/>
         <p:nvPr/>
       </p:nvGrpSpPr>
@@ -14655,7 +14107,7 @@
       </p:grpSpPr>
       <p:sp>
         <p:nvSpPr>
-          <p:cNvPr id="2" name="Text 1"/>
+          <p:cNvPr id="3" name="Text 1"/>
           <p:cNvSpPr/>
           <p:nvPr>
             <p:ph idx="101" type="title" hasCustomPrompt="1"/>
@@ -14693,7 +14145,7 @@
       </p:sp>
       <p:sp>
         <p:nvSpPr>
-          <p:cNvPr id="3" name="Text 1"/>
+          <p:cNvPr id="4" name="Text 1"/>
           <p:cNvSpPr/>
           <p:nvPr>
             <p:ph idx="102" type="body" hasCustomPrompt="1"/>
@@ -14731,7 +14183,7 @@
       </p:sp>
       <p:sp>
         <p:nvSpPr>
-          <p:cNvPr id="4" name="step-number"/>
+          <p:cNvPr id="5" name="step-number"/>
           <p:cNvSpPr txBox="1"/>
           <p:nvPr/>
         </p:nvSpPr>
@@ -14767,7 +14219,7 @@
       </p:sp>
       <p:sp>
         <p:nvSpPr>
-          <p:cNvPr id="5" name="original"/>
+          <p:cNvPr id="6" name="original"/>
           <p:cNvSpPr/>
           <p:nvPr/>
         </p:nvSpPr>
@@ -14794,7 +14246,7 @@
       </p:sp>
       <p:sp>
         <p:nvSpPr>
-          <p:cNvPr id="6" name="Text 4"/>
+          <p:cNvPr id="7" name="Text 4"/>
           <p:cNvSpPr txBox="1"/>
           <p:nvPr/>
         </p:nvSpPr>
@@ -14830,7 +14282,7 @@
       </p:sp>
       <p:sp>
         <p:nvSpPr>
-          <p:cNvPr id="7" name="Text 5"/>
+          <p:cNvPr id="8" name="Text 5"/>
           <p:cNvSpPr txBox="1"/>
           <p:nvPr/>
         </p:nvSpPr>
@@ -14866,7 +14318,7 @@
       </p:sp>
       <p:sp>
         <p:nvSpPr>
-          <p:cNvPr id="8" name="chip-NEW"/>
+          <p:cNvPr id="9" name="chip-NEW"/>
           <p:cNvSpPr txBox="1"/>
           <p:nvPr/>
         </p:nvSpPr>
@@ -14906,7 +14358,7 @@
       </p:sp>
       <p:sp>
         <p:nvSpPr>
-          <p:cNvPr id="9" name="Text 7"/>
+          <p:cNvPr id="10" name="Text 7"/>
           <p:cNvSpPr txBox="1"/>
           <p:nvPr/>
         </p:nvSpPr>
@@ -14942,7 +14394,7 @@
       </p:sp>
       <p:sp>
         <p:nvSpPr>
-          <p:cNvPr id="10" name="prop-0"/>
+          <p:cNvPr id="11" name="prop-0"/>
           <p:cNvSpPr/>
           <p:nvPr/>
         </p:nvSpPr>
@@ -14969,7 +14421,7 @@
       </p:sp>
       <p:sp>
         <p:nvSpPr>
-          <p:cNvPr id="11" name="chip-체험"/>
+          <p:cNvPr id="12" name="chip-체험"/>
           <p:cNvSpPr txBox="1"/>
           <p:nvPr/>
         </p:nvSpPr>
@@ -15009,7 +14461,7 @@
       </p:sp>
       <p:sp>
         <p:nvSpPr>
-          <p:cNvPr id="12" name="Text 10"/>
+          <p:cNvPr id="13" name="Text 10"/>
           <p:cNvSpPr txBox="1"/>
           <p:nvPr/>
         </p:nvSpPr>
@@ -15045,7 +14497,7 @@
       </p:sp>
       <p:sp>
         <p:nvSpPr>
-          <p:cNvPr id="13" name="Text 11"/>
+          <p:cNvPr id="14" name="Text 11"/>
           <p:cNvSpPr txBox="1"/>
           <p:nvPr/>
         </p:nvSpPr>
@@ -15081,7 +14533,7 @@
       </p:sp>
       <p:sp>
         <p:nvSpPr>
-          <p:cNvPr id="14" name="prop-1"/>
+          <p:cNvPr id="15" name="prop-1"/>
           <p:cNvSpPr/>
           <p:nvPr/>
         </p:nvSpPr>
@@ -15108,7 +14560,7 @@
       </p:sp>
       <p:sp>
         <p:nvSpPr>
-          <p:cNvPr id="15" name="chip-연출"/>
+          <p:cNvPr id="16" name="chip-연출"/>
           <p:cNvSpPr txBox="1"/>
           <p:nvPr/>
         </p:nvSpPr>
@@ -15148,7 +14600,7 @@
       </p:sp>
       <p:sp>
         <p:nvSpPr>
-          <p:cNvPr id="16" name="Text 14"/>
+          <p:cNvPr id="17" name="Text 14"/>
           <p:cNvSpPr txBox="1"/>
           <p:nvPr/>
         </p:nvSpPr>
@@ -15184,7 +14636,7 @@
       </p:sp>
       <p:sp>
         <p:nvSpPr>
-          <p:cNvPr id="17" name="Text 15"/>
+          <p:cNvPr id="18" name="Text 15"/>
           <p:cNvSpPr txBox="1"/>
           <p:nvPr/>
         </p:nvSpPr>
@@ -15220,7 +14672,7 @@
       </p:sp>
       <p:sp>
         <p:nvSpPr>
-          <p:cNvPr id="18" name="prop-2"/>
+          <p:cNvPr id="19" name="prop-2"/>
           <p:cNvSpPr/>
           <p:nvPr/>
         </p:nvSpPr>
@@ -15247,7 +14699,7 @@
       </p:sp>
       <p:sp>
         <p:nvSpPr>
-          <p:cNvPr id="19" name="chip-체험"/>
+          <p:cNvPr id="20" name="chip-체험"/>
           <p:cNvSpPr txBox="1"/>
           <p:nvPr/>
         </p:nvSpPr>
@@ -15287,7 +14739,7 @@
       </p:sp>
       <p:sp>
         <p:nvSpPr>
-          <p:cNvPr id="20" name="Text 18"/>
+          <p:cNvPr id="21" name="Text 18"/>
           <p:cNvSpPr txBox="1"/>
           <p:nvPr/>
         </p:nvSpPr>
@@ -15323,7 +14775,7 @@
       </p:sp>
       <p:sp>
         <p:nvSpPr>
-          <p:cNvPr id="21" name="Text 19"/>
+          <p:cNvPr id="22" name="Text 19"/>
           <p:cNvSpPr txBox="1"/>
           <p:nvPr/>
         </p:nvSpPr>
@@ -15359,7 +14811,7 @@
       </p:sp>
       <p:sp>
         <p:nvSpPr>
-          <p:cNvPr id="22" name="prop-3"/>
+          <p:cNvPr id="23" name="prop-3"/>
           <p:cNvSpPr/>
           <p:nvPr/>
         </p:nvSpPr>
@@ -15386,7 +14838,7 @@
       </p:sp>
       <p:sp>
         <p:nvSpPr>
-          <p:cNvPr id="23" name="chip-운영"/>
+          <p:cNvPr id="24" name="chip-운영"/>
           <p:cNvSpPr txBox="1"/>
           <p:nvPr/>
         </p:nvSpPr>
@@ -15426,7 +14878,7 @@
       </p:sp>
       <p:sp>
         <p:nvSpPr>
-          <p:cNvPr id="24" name="Text 22"/>
+          <p:cNvPr id="25" name="Text 22"/>
           <p:cNvSpPr txBox="1"/>
           <p:nvPr/>
         </p:nvSpPr>
@@ -15462,7 +14914,7 @@
       </p:sp>
       <p:sp>
         <p:nvSpPr>
-          <p:cNvPr id="25" name="Text 23"/>
+          <p:cNvPr id="26" name="Text 23"/>
           <p:cNvSpPr txBox="1"/>
           <p:nvPr/>
         </p:nvSpPr>
@@ -15498,7 +14950,7 @@
       </p:sp>
       <p:sp>
         <p:nvSpPr>
-          <p:cNvPr id="26" name="decision-pill"/>
+          <p:cNvPr id="27" name="decision-pill"/>
           <p:cNvSpPr txBox="1"/>
           <p:nvPr/>
         </p:nvSpPr>
@@ -15538,7 +14990,7 @@
       </p:sp>
       <p:sp>
         <p:nvSpPr>
-          <p:cNvPr id="27" name="Text 25"/>
+          <p:cNvPr id="28" name="Text 25"/>
           <p:cNvSpPr txBox="1"/>
           <p:nvPr/>
         </p:nvSpPr>
@@ -15585,7 +15037,7 @@
       </p:sp>
       <p:sp>
         <p:nvSpPr>
-          <p:cNvPr id="28" name="Slide Number Placeholder 0"/>
+          <p:cNvPr id="29" name="Slide Number Placeholder 0"/>
           <p:cNvSpPr>
             <a:spLocks noGrp="1"/>
           </p:cNvSpPr>
@@ -15641,7 +15093,7 @@
   <p:cSld name="Slide 9">
     <p:spTree>
       <p:nvGrpSpPr>
-        <p:cNvPr id="1" name=""/>
+        <p:cNvPr id="2" name=""/>
         <p:cNvGrpSpPr/>
         <p:nvPr/>
       </p:nvGrpSpPr>
@@ -15655,7 +15107,7 @@
       </p:grpSpPr>
       <p:sp>
         <p:nvSpPr>
-          <p:cNvPr id="2" name="Text 1"/>
+          <p:cNvPr id="3" name="Text 1"/>
           <p:cNvSpPr/>
           <p:nvPr>
             <p:ph idx="101" type="title" hasCustomPrompt="1"/>
@@ -15693,7 +15145,7 @@
       </p:sp>
       <p:sp>
         <p:nvSpPr>
-          <p:cNvPr id="3" name="Text 1"/>
+          <p:cNvPr id="4" name="Text 1"/>
           <p:cNvSpPr/>
           <p:nvPr>
             <p:ph idx="102" type="body" hasCustomPrompt="1"/>
@@ -15731,7 +15183,7 @@
       </p:sp>
       <p:graphicFrame>
         <p:nvGraphicFramePr>
-          <p:cNvPr id="4" name="ops-table"/>
+          <p:cNvPr id="5" name="ops-table"/>
           <p:cNvGraphicFramePr>
             <a:graphicFrameLocks noGrp="1"/>
           </p:cNvGraphicFramePr>
@@ -16872,7 +16324,7 @@
       </p:graphicFrame>
       <p:sp>
         <p:nvSpPr>
-          <p:cNvPr id="5" name="ops-example"/>
+          <p:cNvPr id="6" name="ops-example"/>
           <p:cNvSpPr txBox="1"/>
           <p:nvPr/>
         </p:nvSpPr>
@@ -16908,7 +16360,7 @@
       </p:sp>
       <p:sp>
         <p:nvSpPr>
-          <p:cNvPr id="6" name="Slide Number Placeholder 0"/>
+          <p:cNvPr id="7" name="Slide Number Placeholder 0"/>
           <p:cNvSpPr>
             <a:spLocks noGrp="1"/>
           </p:cNvSpPr>
